--- a/docs/SubTrack_GioiThieuDeTai.pptx
+++ b/docs/SubTrack_GioiThieuDeTai.pptx
@@ -118,7 +118,7 @@
   <p:extLst>
     <p:ext uri="{521415D9-36F7-43E2-AB2F-B90AF26B5E84}">
       <p14:sectionLst xmlns:p14="http://schemas.microsoft.com/office/powerpoint/2010/main">
-        <p14:section name="Giới thiệu" id="{c1a69626-42a8-3f9d-f1a4-0e0690685eb4}">
+        <p14:section name="Giới thiệu" id="{2f4c87c8-1067-23da-57b1-4d7103a885b8}">
           <p14:sldIdLst>
             <p14:sldId id="256"/>
             <p14:sldId id="257"/>
@@ -126,19 +126,19 @@
             <p14:sldId id="259"/>
           </p14:sldIdLst>
         </p14:section>
-        <p14:section name="Khảo sát" id="{8f74127b-796d-e174-2ec2-2dd5dbf66d5e}">
+        <p14:section name="Khảo sát" id="{8174516b-7483-99aa-0d8e-374c601d8942}">
           <p14:sldIdLst>
             <p14:sldId id="260"/>
           </p14:sldIdLst>
         </p14:section>
-        <p14:section name="Chức năng" id="{08dd189e-6156-4791-3a5a-fd110981c561}">
+        <p14:section name="Chức năng" id="{1a296dec-8bf7-2d14-c63a-3c113c0e46f5}">
           <p14:sldIdLst>
             <p14:sldId id="261"/>
             <p14:sldId id="262"/>
             <p14:sldId id="263"/>
           </p14:sldIdLst>
         </p14:section>
-        <p14:section name="Triển khai" id="{47a44a73-6862-cb9c-b19a-ed13f86cae0d}">
+        <p14:section name="Triển khai" id="{ffd2f57a-9816-f4fa-ecd0-453bcbbd7555}">
           <p14:sldIdLst>
             <p14:sldId id="264"/>
             <p14:sldId id="265"/>
@@ -2966,7 +2966,7 @@
                   <a:srgbClr val="4A4560"/>
                 </a:solidFill>
               </a:rPr>
-              <a:t>Form thêm/sửa, màn hình chi tiết</a:t>
+              <a:t>Form thêm/sửa gói, xác nhận xóa</a:t>
             </a:r>
             <a:endParaRPr lang="en-US" sz="1400" dirty="0"/>
           </a:p>
@@ -3183,7 +3183,7 @@
                   <a:schemeClr val="tx2"/>
                 </a:solidFill>
               </a:rPr>
-              <a:t>Database &amp; bảo mật</a:t>
+              <a:t>Database &amp; dữ liệu</a:t>
             </a:r>
             <a:endParaRPr lang="en-US" sz="1900" dirty="0"/>
           </a:p>
@@ -3223,7 +3223,7 @@
                   <a:srgbClr val="4A4560"/>
                 </a:solidFill>
               </a:rPr>
-              <a:t>Schema, cấu hình Firebase</a:t>
+              <a:t>Schema SQLite, ERD</a:t>
             </a:r>
             <a:endParaRPr lang="en-US" sz="1400" dirty="0"/>
           </a:p>
@@ -3259,7 +3259,7 @@
                   <a:srgbClr val="4A4560"/>
                 </a:solidFill>
               </a:rPr>
-              <a:t>Xác thực, quy tắc truy cập, ERD</a:t>
+              <a:t>Cài đặt, xuất CSV, dữ liệu mẫu</a:t>
             </a:r>
             <a:endParaRPr lang="en-US" sz="1400" dirty="0"/>
           </a:p>
@@ -4079,7 +4079,7 @@
                   <a:srgbClr val="4A4560"/>
                 </a:solidFill>
               </a:rPr>
-              <a:t>Dựng giao diện chính, thiết lập Firebase, CRUD, dữ liệu mẫu</a:t>
+              <a:t>Dựng giao diện Compose, database SQLite, CRUD, dữ liệu mẫu</a:t>
             </a:r>
             <a:endParaRPr lang="en-US" sz="1500" dirty="0"/>
           </a:p>
@@ -7641,7 +7641,7 @@
                   <a:srgbClr val="6E6888"/>
                 </a:solidFill>
               </a:rPr>
-              <a:t>subradar.app · Web/Mobile</a:t>
+              <a:t>iPhone · iPad · Mac</a:t>
             </a:r>
             <a:endParaRPr lang="en-US" sz="1200" dirty="0"/>
           </a:p>
@@ -7680,7 +7680,7 @@
                   <a:srgbClr val="0E6E64"/>
                 </a:solidFill>
               </a:rPr>
-              <a:t>+  Giao diện tối giản, dễ dùng</a:t>
+              <a:t>+  Báo cáo tuần/tháng/quý/năm, tag, nền tảng</a:t>
             </a:r>
             <a:endParaRPr lang="en-US" sz="1600" dirty="0"/>
           </a:p>
@@ -7697,7 +7697,7 @@
                   <a:srgbClr val="0E6E64"/>
                 </a:solidFill>
               </a:rPr>
-              <a:t>+  Theo dõi gói và ngày gia hạn rõ ràng</a:t>
+              <a:t>+  Nhắc trước hạn, thêm vào lịch, đồng bộ iCloud</a:t>
             </a:r>
             <a:endParaRPr lang="en-US" sz="1600" dirty="0"/>
           </a:p>
@@ -7714,7 +7714,7 @@
                   <a:srgbClr val="A23B22"/>
                 </a:solidFill>
               </a:rPr>
-              <a:t>−  Giao diện tiếng Anh</a:t>
+              <a:t>−  Không có Android, chỉ có tiếng Anh</a:t>
             </a:r>
             <a:endParaRPr lang="en-US" sz="1600" dirty="0"/>
           </a:p>
@@ -7731,7 +7731,7 @@
                   <a:srgbClr val="A23B22"/>
                 </a:solidFill>
               </a:rPr>
-              <a:t>−  Chưa sát thói quen dùng VND và dịch vụ trong nước</a:t>
+              <a:t>−  Một số tính năng cần gói Pro</a:t>
             </a:r>
             <a:endParaRPr lang="en-US" sz="1600" dirty="0"/>
           </a:p>
@@ -7888,7 +7888,7 @@
                   <a:srgbClr val="6E6888"/>
                 </a:solidFill>
               </a:rPr>
-              <a:t>iOS</a:t>
+              <a:t>iPhone</a:t>
             </a:r>
             <a:endParaRPr lang="en-US" sz="1200" dirty="0"/>
           </a:p>
@@ -7961,7 +7961,7 @@
                   <a:srgbClr val="A23B22"/>
                 </a:solidFill>
               </a:rPr>
-              <a:t>−  Chỉ có trên iOS</a:t>
+              <a:t>−  Chỉ có trên iPhone</a:t>
             </a:r>
             <a:endParaRPr lang="en-US" sz="1600" dirty="0"/>
           </a:p>
@@ -8135,7 +8135,7 @@
                   <a:srgbClr val="6E6888"/>
                 </a:solidFill>
               </a:rPr>
-              <a:t>iOS · Android · Web</a:t>
+              <a:t>Ứng dụng tài chính cá nhân</a:t>
             </a:r>
             <a:endParaRPr lang="en-US" sz="1200" dirty="0"/>
           </a:p>
@@ -8191,7 +8191,7 @@
                   <a:srgbClr val="0E6E64"/>
                 </a:solidFill>
               </a:rPr>
-              <a:t>+  Hỗ trợ hủy gói, quản lý ngân sách</a:t>
+              <a:t>+  Hủy gói hộ, quản lý ngân sách</a:t>
             </a:r>
             <a:endParaRPr lang="en-US" sz="1600" dirty="0"/>
           </a:p>
@@ -8225,7 +8225,7 @@
                   <a:srgbClr val="A23B22"/>
                 </a:solidFill>
               </a:rPr>
-              <a:t>−  Chủ yếu cho thị trường Mỹ; nhiều tính năng trả phí</a:t>
+              <a:t>−  Hủy gói hộ cần bản Premium trả phí; hướng tới thị trường Mỹ</a:t>
             </a:r>
             <a:endParaRPr lang="en-US" sz="1600" dirty="0"/>
           </a:p>
@@ -8345,7 +8345,7 @@
                   <a:schemeClr val="bg1"/>
                 </a:solidFill>
               </a:rPr>
-              <a:t>giao diện tiếng Việt, VND mặc định, nhập tay không cần liên kết ngân hàng, miễn phí, tập trung đúng nhu cầu nhắc hạn và thống kê.</a:t>
+              <a:t>app Android, giao diện tiếng Việt, VND mặc định, nhập tay không cần liên kết ngân hàng, dữ liệu lưu trên máy, miễn phí.</a:t>
             </a:r>
             <a:endParaRPr lang="en-US" sz="1600" dirty="0"/>
           </a:p>
@@ -8598,7 +8598,7 @@
                   <a:srgbClr val="4A4560"/>
                 </a:solidFill>
               </a:rPr>
-              <a:t>Tổng số gói, chi phí tháng ước tính, khoản sắp đến hạn, gói gần nhất.</a:t>
+              <a:t>Chi phí tháng ước tính, số gói đang hoạt động, số gói đến hạn ≤ 7 ngày.</a:t>
             </a:r>
             <a:endParaRPr lang="en-US" sz="1500" dirty="0"/>
           </a:p>
@@ -8743,7 +8743,7 @@
                   <a:srgbClr val="4A4560"/>
                 </a:solidFill>
               </a:rPr>
-              <a:t>Thêm, xem chi tiết, sửa, xóa gói; kiểm tra dữ liệu hợp lệ.</a:t>
+              <a:t>Thêm, xem, sửa, xóa gói; kiểm tra dữ liệu hợp lệ.</a:t>
             </a:r>
             <a:endParaRPr lang="en-US" sz="1500" dirty="0"/>
           </a:p>
@@ -8888,7 +8888,7 @@
                   <a:srgbClr val="4A4560"/>
                 </a:solidFill>
               </a:rPr>
-              <a:t>Tìm theo tên; lọc danh mục, trạng thái; sắp theo ngày hoặc chi phí.</a:t>
+              <a:t>Tìm theo tên, tag, nền tảng; lọc danh mục, trạng thái; sắp xếp 3 kiểu.</a:t>
             </a:r>
             <a:endParaRPr lang="en-US" sz="1500" dirty="0"/>
           </a:p>
@@ -9033,7 +9033,7 @@
                   <a:srgbClr val="4A4560"/>
                 </a:solidFill>
               </a:rPr>
-              <a:t>Danh sách khoản sắp đến hạn; thông báo cục bộ nếu đủ thời gian.</a:t>
+              <a:t>Vạch màu báo sắp gia hạn; thông báo cục bộ trước hạn.</a:t>
             </a:r>
             <a:endParaRPr lang="en-US" sz="1500" dirty="0"/>
           </a:p>
@@ -9178,7 +9178,7 @@
                   <a:srgbClr val="4A4560"/>
                 </a:solidFill>
               </a:rPr>
-              <a:t>Tổng chi theo tháng, phân bổ theo danh mục, gói chi phí cao.</a:t>
+              <a:t>Chi phí tuần/tháng/quý/năm, theo danh mục, gói tốn nhất.</a:t>
             </a:r>
             <a:endParaRPr lang="en-US" sz="1500" dirty="0"/>
           </a:p>
@@ -9323,7 +9323,7 @@
                   <a:srgbClr val="4A4560"/>
                 </a:solidFill>
               </a:rPr>
-              <a:t>Dữ liệu lưu trên database, mở lại app vẫn còn.</a:t>
+              <a:t>Dữ liệu lưu bằng SQLite trên máy, mở lại app vẫn còn.</a:t>
             </a:r>
             <a:endParaRPr lang="en-US" sz="1500" dirty="0"/>
           </a:p>
@@ -9467,7 +9467,7 @@
                   <a:schemeClr val="accent6"/>
                 </a:solidFill>
               </a:rPr>
-              <a:t>Làm sau khi MVP đã ổn định</a:t>
+              <a:t>4/5 chức năng mở rộng đã có trong app</a:t>
             </a:r>
             <a:endParaRPr lang="en-US" sz="1600" dirty="0"/>
           </a:p>
@@ -9475,7 +9475,7 @@
       </p:sp>
       <p:sp>
         <p:nvSpPr>
-          <p:cNvPr id="4" name="Đăng ký / đăng nhập circle"/>
+          <p:cNvPr id="4" name="Trạng thái gói  ✓ Đã làm circle"/>
           <p:cNvSpPr/>
           <p:nvPr/>
         </p:nvSpPr>
@@ -9488,14 +9488,14 @@
             <a:avLst/>
           </a:prstGeom>
           <a:solidFill>
-            <a:schemeClr val="accent1"/>
+            <a:schemeClr val="accent2"/>
           </a:solidFill>
           <a:ln/>
         </p:spPr>
       </p:sp>
       <p:pic>
         <p:nvPicPr>
-          <p:cNvPr id="5" name="Đăng ký / đăng nhập icon" descr="Đăng ký / đăng nhập">    </p:cNvPr>
+          <p:cNvPr id="5" name="Trạng thái gói  ✓ Đã làm icon" descr="Trạng thái gói  ✓ Đã làm">    </p:cNvPr>
           <p:cNvPicPr>
             <a:picLocks noChangeAspect="1"/>
           </p:cNvPicPr>
@@ -9547,7 +9547,7 @@
                   <a:schemeClr val="tx2"/>
                 </a:solidFill>
               </a:rPr>
-              <a:t>Đăng ký / đăng nhập</a:t>
+              <a:t>Trạng thái gói  ✓ Đã làm</a:t>
             </a:r>
             <a:endParaRPr lang="en-US" sz="1800" dirty="0"/>
           </a:p>
@@ -9583,7 +9583,7 @@
                   <a:srgbClr val="4A4560"/>
                 </a:solidFill>
               </a:rPr>
-              <a:t>Mỗi tài khoản chỉ xem dữ liệu của mình</a:t>
+              <a:t>Đang hoạt động, tạm dừng, đã hủy</a:t>
             </a:r>
             <a:endParaRPr lang="en-US" sz="1500" dirty="0"/>
           </a:p>
@@ -9591,7 +9591,7 @@
       </p:sp>
       <p:sp>
         <p:nvSpPr>
-          <p:cNvPr id="8" name="Trạng thái gói circle"/>
+          <p:cNvPr id="8" name="Biểu đồ chi phí  ✓ Đã làm circle"/>
           <p:cNvSpPr/>
           <p:nvPr/>
         </p:nvSpPr>
@@ -9604,14 +9604,14 @@
             <a:avLst/>
           </a:prstGeom>
           <a:solidFill>
-            <a:schemeClr val="accent2"/>
+            <a:schemeClr val="accent3"/>
           </a:solidFill>
           <a:ln/>
         </p:spPr>
       </p:sp>
       <p:pic>
         <p:nvPicPr>
-          <p:cNvPr id="9" name="Trạng thái gói icon" descr="Trạng thái gói">    </p:cNvPr>
+          <p:cNvPr id="9" name="Biểu đồ chi phí  ✓ Đã làm icon" descr="Biểu đồ chi phí  ✓ Đã làm">    </p:cNvPr>
           <p:cNvPicPr>
             <a:picLocks noChangeAspect="1"/>
           </p:cNvPicPr>
@@ -9663,7 +9663,7 @@
                   <a:schemeClr val="tx2"/>
                 </a:solidFill>
               </a:rPr>
-              <a:t>Trạng thái gói</a:t>
+              <a:t>Biểu đồ chi phí  ✓ Đã làm</a:t>
             </a:r>
             <a:endParaRPr lang="en-US" sz="1800" dirty="0"/>
           </a:p>
@@ -9699,7 +9699,7 @@
                   <a:srgbClr val="4A4560"/>
                 </a:solidFill>
               </a:rPr>
-              <a:t>Đang hoạt động, tạm ngưng, đã hủy</a:t>
+              <a:t>Biểu đồ tròn theo gói, thanh theo danh mục</a:t>
             </a:r>
             <a:endParaRPr lang="en-US" sz="1500" dirty="0"/>
           </a:p>
@@ -9707,7 +9707,7 @@
       </p:sp>
       <p:sp>
         <p:nvSpPr>
-          <p:cNvPr id="12" name="Biểu đồ chi phí circle"/>
+          <p:cNvPr id="12" name="Tùy chọn thời gian nhắc  ✓ Đã làm circle"/>
           <p:cNvSpPr/>
           <p:nvPr/>
         </p:nvSpPr>
@@ -9720,14 +9720,14 @@
             <a:avLst/>
           </a:prstGeom>
           <a:solidFill>
-            <a:schemeClr val="accent3"/>
+            <a:schemeClr val="accent4"/>
           </a:solidFill>
           <a:ln/>
         </p:spPr>
       </p:sp>
       <p:pic>
         <p:nvPicPr>
-          <p:cNvPr id="13" name="Biểu đồ chi phí icon" descr="Biểu đồ chi phí">    </p:cNvPr>
+          <p:cNvPr id="13" name="Tùy chọn thời gian nhắc  ✓ Đã làm icon" descr="Tùy chọn thời gian nhắc  ✓ Đã làm">    </p:cNvPr>
           <p:cNvPicPr>
             <a:picLocks noChangeAspect="1"/>
           </p:cNvPicPr>
@@ -9779,7 +9779,7 @@
                   <a:schemeClr val="tx2"/>
                 </a:solidFill>
               </a:rPr>
-              <a:t>Biểu đồ chi phí</a:t>
+              <a:t>Tùy chọn thời gian nhắc  ✓ Đã làm</a:t>
             </a:r>
             <a:endParaRPr lang="en-US" sz="1800" dirty="0"/>
           </a:p>
@@ -9815,7 +9815,7 @@
                   <a:srgbClr val="4A4560"/>
                 </a:solidFill>
               </a:rPr>
-              <a:t>Theo tháng và theo danh mục</a:t>
+              <a:t>Đúng ngày hoặc trước 1, 3, 7, 30 ngày</a:t>
             </a:r>
             <a:endParaRPr lang="en-US" sz="1500" dirty="0"/>
           </a:p>
@@ -9823,7 +9823,7 @@
       </p:sp>
       <p:sp>
         <p:nvSpPr>
-          <p:cNvPr id="16" name="Tùy chọn thời gian nhắc circle"/>
+          <p:cNvPr id="16" name="Xuất CSV, chia sẻ báo cáo  ✓ Đã làm circle"/>
           <p:cNvSpPr/>
           <p:nvPr/>
         </p:nvSpPr>
@@ -9836,14 +9836,14 @@
             <a:avLst/>
           </a:prstGeom>
           <a:solidFill>
-            <a:schemeClr val="accent4"/>
+            <a:schemeClr val="accent5"/>
           </a:solidFill>
           <a:ln/>
         </p:spPr>
       </p:sp>
       <p:pic>
         <p:nvPicPr>
-          <p:cNvPr id="17" name="Tùy chọn thời gian nhắc icon" descr="Tùy chọn thời gian nhắc">    </p:cNvPr>
+          <p:cNvPr id="17" name="Xuất CSV, chia sẻ báo cáo  ✓ Đã làm icon" descr="Xuất CSV, chia sẻ báo cáo  ✓ Đã làm">    </p:cNvPr>
           <p:cNvPicPr>
             <a:picLocks noChangeAspect="1"/>
           </p:cNvPicPr>
@@ -9895,7 +9895,7 @@
                   <a:schemeClr val="tx2"/>
                 </a:solidFill>
               </a:rPr>
-              <a:t>Tùy chọn thời gian nhắc</a:t>
+              <a:t>Xuất CSV, chia sẻ báo cáo  ✓ Đã làm</a:t>
             </a:r>
             <a:endParaRPr lang="en-US" sz="1800" dirty="0"/>
           </a:p>
@@ -9931,7 +9931,7 @@
                   <a:srgbClr val="4A4560"/>
                 </a:solidFill>
               </a:rPr>
-              <a:t>Nhắc trước 1, 3 hoặc 7 ngày</a:t>
+              <a:t>Sao lưu danh sách, gửi báo cáo chi phí</a:t>
             </a:r>
             <a:endParaRPr lang="en-US" sz="1500" dirty="0"/>
           </a:p>
@@ -9939,7 +9939,7 @@
       </p:sp>
       <p:sp>
         <p:nvSpPr>
-          <p:cNvPr id="20" name="Xuất CSV, chia sẻ báo cáo circle"/>
+          <p:cNvPr id="20" name="Đăng nhập, đồng bộ đám mây circle"/>
           <p:cNvSpPr/>
           <p:nvPr/>
         </p:nvSpPr>
@@ -9952,14 +9952,14 @@
             <a:avLst/>
           </a:prstGeom>
           <a:solidFill>
-            <a:schemeClr val="accent5"/>
+            <a:schemeClr val="accent1"/>
           </a:solidFill>
           <a:ln/>
         </p:spPr>
       </p:sp>
       <p:pic>
         <p:nvPicPr>
-          <p:cNvPr id="21" name="Xuất CSV, chia sẻ báo cáo icon" descr="Xuất CSV, chia sẻ báo cáo">    </p:cNvPr>
+          <p:cNvPr id="21" name="Đăng nhập, đồng bộ đám mây icon" descr="Đăng nhập, đồng bộ đám mây">    </p:cNvPr>
           <p:cNvPicPr>
             <a:picLocks noChangeAspect="1"/>
           </p:cNvPicPr>
@@ -10011,7 +10011,7 @@
                   <a:schemeClr val="tx2"/>
                 </a:solidFill>
               </a:rPr>
-              <a:t>Xuất CSV, chia sẻ báo cáo</a:t>
+              <a:t>Đăng nhập, đồng bộ đám mây</a:t>
             </a:r>
             <a:endParaRPr lang="en-US" sz="1800" dirty="0"/>
           </a:p>
@@ -10047,7 +10047,7 @@
                   <a:srgbClr val="4A4560"/>
                 </a:solidFill>
               </a:rPr>
-              <a:t>Sao lưu danh sách, gửi báo cáo chi phí</a:t>
+              <a:t>Chưa làm – cần Firebase</a:t>
             </a:r>
             <a:endParaRPr lang="en-US" sz="1500" dirty="0"/>
           </a:p>
@@ -10519,7 +10519,7 @@
                   <a:srgbClr val="4A4560"/>
                 </a:solidFill>
               </a:rPr>
-              <a:t>Người dùng, Firebase Auth, Hệ thống thông báo</a:t>
+              <a:t>Người dùng, Hệ thống thông báo, Ứng dụng Lịch</a:t>
             </a:r>
             <a:endParaRPr lang="en-US" sz="1400" dirty="0"/>
           </a:p>
@@ -10527,7 +10527,7 @@
       </p:sp>
       <p:sp>
         <p:nvSpPr>
-          <p:cNvPr id="8" name="Số liệu use case chính"/>
+          <p:cNvPr id="8" name="Số liệu use case đã làm"/>
           <p:cNvSpPr/>
           <p:nvPr/>
         </p:nvSpPr>
@@ -10587,7 +10587,7 @@
                 <a:ea typeface="Cambria" pitchFamily="34" charset="-122"/>
                 <a:cs typeface="Cambria" pitchFamily="34" charset="-120"/>
               </a:rPr>
-              <a:t>10</a:t>
+              <a:t>14</a:t>
             </a:r>
             <a:endParaRPr lang="en-US" sz="4400" dirty="0"/>
           </a:p>
@@ -10623,7 +10623,7 @@
                   <a:schemeClr val="tx2"/>
                 </a:solidFill>
               </a:rPr>
-              <a:t>use case chính</a:t>
+              <a:t>use case đã làm</a:t>
             </a:r>
             <a:endParaRPr lang="en-US" sz="1800" dirty="0"/>
           </a:p>
@@ -10659,7 +10659,7 @@
                   <a:srgbClr val="4A4560"/>
                 </a:solidFill>
               </a:rPr>
-              <a:t>CRUD, Dashboard, tìm kiếm, thống kê, nhắc hạn</a:t>
+              <a:t>CRUD, tổng quan, tìm kiếm, báo cáo, tag, nhắc hạn, CSV</a:t>
             </a:r>
             <a:endParaRPr lang="en-US" sz="1400" dirty="0"/>
           </a:p>
@@ -10667,7 +10667,7 @@
       </p:sp>
       <p:sp>
         <p:nvSpPr>
-          <p:cNvPr id="12" name="Số liệu use case mở rộng"/>
+          <p:cNvPr id="12" name="Số liệu hướng phát triển"/>
           <p:cNvSpPr/>
           <p:nvPr/>
         </p:nvSpPr>
@@ -10727,7 +10727,7 @@
                 <a:ea typeface="Cambria" pitchFamily="34" charset="-122"/>
                 <a:cs typeface="Cambria" pitchFamily="34" charset="-120"/>
               </a:rPr>
-              <a:t>5</a:t>
+              <a:t>1</a:t>
             </a:r>
             <a:endParaRPr lang="en-US" sz="4400" dirty="0"/>
           </a:p>
@@ -10763,7 +10763,7 @@
                   <a:schemeClr val="tx2"/>
                 </a:solidFill>
               </a:rPr>
-              <a:t>use case mở rộng</a:t>
+              <a:t>hướng phát triển</a:t>
             </a:r>
             <a:endParaRPr lang="en-US" sz="1800" dirty="0"/>
           </a:p>
@@ -10799,7 +10799,7 @@
                   <a:srgbClr val="4A4560"/>
                 </a:solidFill>
               </a:rPr>
-              <a:t>Đăng nhập, trạng thái, thời gian nhắc, biểu đồ, xuất CSV</a:t>
+              <a:t>Đăng nhập, đồng bộ đám mây</a:t>
             </a:r>
             <a:endParaRPr lang="en-US" sz="1400" dirty="0"/>
           </a:p>
@@ -10987,7 +10987,7 @@
       </p:sp>
       <p:sp>
         <p:nvSpPr>
-          <p:cNvPr id="4" name="Tầng Giao diện (Screens, Widgets)"/>
+          <p:cNvPr id="4" name="Tầng Giao diện (Compose)"/>
           <p:cNvSpPr/>
           <p:nvPr/>
         </p:nvSpPr>
@@ -11037,7 +11037,7 @@
                   <a:schemeClr val="bg1"/>
                 </a:solidFill>
               </a:rPr>
-              <a:t>Giao diện (Screens, Widgets)</a:t>
+              <a:t>Giao diện (Compose)</a:t>
             </a:r>
             <a:endParaRPr lang="en-US" sz="1500" dirty="0"/>
           </a:p>
@@ -11051,7 +11051,7 @@
                   <a:schemeClr val="bg1"/>
                 </a:solidFill>
               </a:rPr>
-              <a:t>Flutter · Dart</a:t>
+              <a:t>Màn hình, Navigation Compose</a:t>
             </a:r>
             <a:endParaRPr lang="en-US" sz="1500" dirty="0"/>
           </a:p>
@@ -11083,7 +11083,7 @@
       </p:pic>
       <p:sp>
         <p:nvSpPr>
-          <p:cNvPr id="7" name="Tầng Repository / Service"/>
+          <p:cNvPr id="7" name="Tầng ViewModel · Repository"/>
           <p:cNvSpPr/>
           <p:nvPr/>
         </p:nvSpPr>
@@ -11133,7 +11133,7 @@
                   <a:schemeClr val="bg1"/>
                 </a:solidFill>
               </a:rPr>
-              <a:t>Repository / Service</a:t>
+              <a:t>ViewModel · Repository</a:t>
             </a:r>
             <a:endParaRPr lang="en-US" sz="1500" dirty="0"/>
           </a:p>
@@ -11147,7 +11147,7 @@
                   <a:schemeClr val="bg1"/>
                 </a:solidFill>
               </a:rPr>
-              <a:t>Tách UI khỏi truy cập dữ liệu</a:t>
+              <a:t>StateFlow, tách UI khỏi dữ liệu</a:t>
             </a:r>
             <a:endParaRPr lang="en-US" sz="1500" dirty="0"/>
           </a:p>
@@ -11179,7 +11179,7 @@
       </p:pic>
       <p:sp>
         <p:nvSpPr>
-          <p:cNvPr id="10" name="Tầng Firebase"/>
+          <p:cNvPr id="10" name="Tầng SQLite trên máy"/>
           <p:cNvSpPr/>
           <p:nvPr/>
         </p:nvSpPr>
@@ -11229,7 +11229,7 @@
                   <a:schemeClr val="bg1"/>
                 </a:solidFill>
               </a:rPr>
-              <a:t>Firebase</a:t>
+              <a:t>SQLite trên máy</a:t>
             </a:r>
             <a:endParaRPr lang="en-US" sz="1500" dirty="0"/>
           </a:p>
@@ -11243,7 +11243,7 @@
                   <a:schemeClr val="bg1"/>
                 </a:solidFill>
               </a:rPr>
-              <a:t>Firestore · Authentication</a:t>
+              <a:t>SQLiteOpenHelper · SharedPreferences</a:t>
             </a:r>
             <a:endParaRPr lang="en-US" sz="1500" dirty="0"/>
           </a:p>
@@ -11251,7 +11251,7 @@
       </p:sp>
       <p:sp>
         <p:nvSpPr>
-          <p:cNvPr id="12" name="Thẻ Flutter 3 (Dart)"/>
+          <p:cNvPr id="12" name="Thẻ Kotlin, Jetpack Compose"/>
           <p:cNvSpPr/>
           <p:nvPr/>
         </p:nvSpPr>
@@ -11280,7 +11280,7 @@
       </p:sp>
       <p:sp>
         <p:nvSpPr>
-          <p:cNvPr id="13" name="Flutter 3 (Dart) circle"/>
+          <p:cNvPr id="13" name="Kotlin, Jetpack Compose circle"/>
           <p:cNvSpPr/>
           <p:nvPr/>
         </p:nvSpPr>
@@ -11300,7 +11300,7 @@
       </p:sp>
       <p:pic>
         <p:nvPicPr>
-          <p:cNvPr id="14" name="Flutter 3 (Dart) icon" descr="Flutter 3 (Dart)">    </p:cNvPr>
+          <p:cNvPr id="14" name="Kotlin, Jetpack Compose icon" descr="Kotlin, Jetpack Compose">    </p:cNvPr>
           <p:cNvPicPr>
             <a:picLocks noChangeAspect="1"/>
           </p:cNvPicPr>
@@ -11352,7 +11352,7 @@
                   <a:schemeClr val="tx2"/>
                 </a:solidFill>
               </a:rPr>
-              <a:t>Flutter 3 (Dart)</a:t>
+              <a:t>Kotlin, Jetpack Compose</a:t>
             </a:r>
             <a:endParaRPr lang="en-US" sz="1500" dirty="0"/>
           </a:p>
@@ -11388,7 +11388,7 @@
                   <a:srgbClr val="4A4560"/>
                 </a:solidFill>
               </a:rPr>
-              <a:t>Một mã nguồn chạy Android và iOS, hot reload</a:t>
+              <a:t>Android native, Material 3, sáng/tối</a:t>
             </a:r>
             <a:endParaRPr lang="en-US" sz="1400" dirty="0"/>
           </a:p>
@@ -11396,7 +11396,7 @@
       </p:sp>
       <p:sp>
         <p:nvSpPr>
-          <p:cNvPr id="17" name="Thẻ Cloud Firestore"/>
+          <p:cNvPr id="17" name="Thẻ SQLite"/>
           <p:cNvSpPr/>
           <p:nvPr/>
         </p:nvSpPr>
@@ -11425,7 +11425,7 @@
       </p:sp>
       <p:sp>
         <p:nvSpPr>
-          <p:cNvPr id="18" name="Cloud Firestore circle"/>
+          <p:cNvPr id="18" name="SQLite circle"/>
           <p:cNvSpPr/>
           <p:nvPr/>
         </p:nvSpPr>
@@ -11445,7 +11445,7 @@
       </p:sp>
       <p:pic>
         <p:nvPicPr>
-          <p:cNvPr id="19" name="Cloud Firestore icon" descr="Cloud Firestore">    </p:cNvPr>
+          <p:cNvPr id="19" name="SQLite icon" descr="SQLite">    </p:cNvPr>
           <p:cNvPicPr>
             <a:picLocks noChangeAspect="1"/>
           </p:cNvPicPr>
@@ -11497,7 +11497,7 @@
                   <a:schemeClr val="tx2"/>
                 </a:solidFill>
               </a:rPr>
-              <a:t>Cloud Firestore</a:t>
+              <a:t>SQLite</a:t>
             </a:r>
             <a:endParaRPr lang="en-US" sz="1500" dirty="0"/>
           </a:p>
@@ -11533,7 +11533,7 @@
                   <a:srgbClr val="4A4560"/>
                 </a:solidFill>
               </a:rPr>
-              <a:t>Database online, realtime, không cần tự viết server</a:t>
+              <a:t>Lưu offline trên máy, không cần server</a:t>
             </a:r>
             <a:endParaRPr lang="en-US" sz="1400" dirty="0"/>
           </a:p>
@@ -11541,7 +11541,7 @@
       </p:sp>
       <p:sp>
         <p:nvSpPr>
-          <p:cNvPr id="22" name="Thẻ Firebase Authentication"/>
+          <p:cNvPr id="22" name="Thẻ ViewModel, StateFlow"/>
           <p:cNvSpPr/>
           <p:nvPr/>
         </p:nvSpPr>
@@ -11570,7 +11570,7 @@
       </p:sp>
       <p:sp>
         <p:nvSpPr>
-          <p:cNvPr id="23" name="Firebase Authentication circle"/>
+          <p:cNvPr id="23" name="ViewModel, StateFlow circle"/>
           <p:cNvSpPr/>
           <p:nvPr/>
         </p:nvSpPr>
@@ -11590,7 +11590,7 @@
       </p:sp>
       <p:pic>
         <p:nvPicPr>
-          <p:cNvPr id="24" name="Firebase Authentication icon" descr="Firebase Authentication">    </p:cNvPr>
+          <p:cNvPr id="24" name="ViewModel, StateFlow icon" descr="ViewModel, StateFlow">    </p:cNvPr>
           <p:cNvPicPr>
             <a:picLocks noChangeAspect="1"/>
           </p:cNvPicPr>
@@ -11642,7 +11642,7 @@
                   <a:schemeClr val="tx2"/>
                 </a:solidFill>
               </a:rPr>
-              <a:t>Firebase Authentication</a:t>
+              <a:t>ViewModel, StateFlow</a:t>
             </a:r>
             <a:endParaRPr lang="en-US" sz="1500" dirty="0"/>
           </a:p>
@@ -11678,7 +11678,7 @@
                   <a:srgbClr val="4A4560"/>
                 </a:solidFill>
               </a:rPr>
-              <a:t>Đăng ký, đăng nhập bằng email (mở rộng)</a:t>
+              <a:t>Quản lý trạng thái, Repository pattern</a:t>
             </a:r>
             <a:endParaRPr lang="en-US" sz="1400" dirty="0"/>
           </a:p>
@@ -11686,7 +11686,7 @@
       </p:sp>
       <p:sp>
         <p:nvSpPr>
-          <p:cNvPr id="27" name="Thẻ flutter_local_notifications"/>
+          <p:cNvPr id="27" name="Thẻ WorkManager"/>
           <p:cNvSpPr/>
           <p:nvPr/>
         </p:nvSpPr>
@@ -11715,7 +11715,7 @@
       </p:sp>
       <p:sp>
         <p:nvSpPr>
-          <p:cNvPr id="28" name="flutter_local_notifications circle"/>
+          <p:cNvPr id="28" name="WorkManager circle"/>
           <p:cNvSpPr/>
           <p:nvPr/>
         </p:nvSpPr>
@@ -11735,7 +11735,7 @@
       </p:sp>
       <p:pic>
         <p:nvPicPr>
-          <p:cNvPr id="29" name="flutter_local_notifications icon" descr="flutter_local_notifications">    </p:cNvPr>
+          <p:cNvPr id="29" name="WorkManager icon" descr="WorkManager">    </p:cNvPr>
           <p:cNvPicPr>
             <a:picLocks noChangeAspect="1"/>
           </p:cNvPicPr>
@@ -11787,7 +11787,7 @@
                   <a:schemeClr val="tx2"/>
                 </a:solidFill>
               </a:rPr>
-              <a:t>flutter_local_notifications</a:t>
+              <a:t>WorkManager</a:t>
             </a:r>
             <a:endParaRPr lang="en-US" sz="1500" dirty="0"/>
           </a:p>
@@ -11823,7 +11823,7 @@
                   <a:srgbClr val="4A4560"/>
                 </a:solidFill>
               </a:rPr>
-              <a:t>Thông báo nhắc hạn thanh toán</a:t>
+              <a:t>Kiểm tra hằng ngày, thông báo nhắc hạn</a:t>
             </a:r>
             <a:endParaRPr lang="en-US" sz="1400" dirty="0"/>
           </a:p>
@@ -11831,7 +11831,7 @@
       </p:sp>
       <p:sp>
         <p:nvSpPr>
-          <p:cNvPr id="32" name="Thẻ fl_chart"/>
+          <p:cNvPr id="32" name="Thẻ Compose Canvas"/>
           <p:cNvSpPr/>
           <p:nvPr/>
         </p:nvSpPr>
@@ -11860,7 +11860,7 @@
       </p:sp>
       <p:sp>
         <p:nvSpPr>
-          <p:cNvPr id="33" name="fl_chart circle"/>
+          <p:cNvPr id="33" name="Compose Canvas circle"/>
           <p:cNvSpPr/>
           <p:nvPr/>
         </p:nvSpPr>
@@ -11880,7 +11880,7 @@
       </p:sp>
       <p:pic>
         <p:nvPicPr>
-          <p:cNvPr id="34" name="fl_chart icon" descr="fl_chart">    </p:cNvPr>
+          <p:cNvPr id="34" name="Compose Canvas icon" descr="Compose Canvas">    </p:cNvPr>
           <p:cNvPicPr>
             <a:picLocks noChangeAspect="1"/>
           </p:cNvPicPr>
@@ -11932,7 +11932,7 @@
                   <a:schemeClr val="tx2"/>
                 </a:solidFill>
               </a:rPr>
-              <a:t>fl_chart</a:t>
+              <a:t>Compose Canvas</a:t>
             </a:r>
             <a:endParaRPr lang="en-US" sz="1500" dirty="0"/>
           </a:p>
@@ -11968,7 +11968,7 @@
                   <a:srgbClr val="4A4560"/>
                 </a:solidFill>
               </a:rPr>
-              <a:t>Vẽ biểu đồ chi phí</a:t>
+              <a:t>Tự vẽ biểu đồ tròn, không cần thư viện</a:t>
             </a:r>
             <a:endParaRPr lang="en-US" sz="1400" dirty="0"/>
           </a:p>
@@ -11976,7 +11976,7 @@
       </p:sp>
       <p:sp>
         <p:nvSpPr>
-          <p:cNvPr id="37" name="Thẻ Git, GitHub, Figma"/>
+          <p:cNvPr id="37" name="Thẻ Gradle, JUnit, GitHub"/>
           <p:cNvSpPr/>
           <p:nvPr/>
         </p:nvSpPr>
@@ -12005,7 +12005,7 @@
       </p:sp>
       <p:sp>
         <p:nvSpPr>
-          <p:cNvPr id="38" name="Git, GitHub, Figma circle"/>
+          <p:cNvPr id="38" name="Gradle, JUnit, GitHub circle"/>
           <p:cNvSpPr/>
           <p:nvPr/>
         </p:nvSpPr>
@@ -12025,7 +12025,7 @@
       </p:sp>
       <p:pic>
         <p:nvPicPr>
-          <p:cNvPr id="39" name="Git, GitHub, Figma icon" descr="Git, GitHub, Figma">    </p:cNvPr>
+          <p:cNvPr id="39" name="Gradle, JUnit, GitHub icon" descr="Gradle, JUnit, GitHub">    </p:cNvPr>
           <p:cNvPicPr>
             <a:picLocks noChangeAspect="1"/>
           </p:cNvPicPr>
@@ -12077,7 +12077,7 @@
                   <a:schemeClr val="tx2"/>
                 </a:solidFill>
               </a:rPr>
-              <a:t>Git, GitHub, Figma</a:t>
+              <a:t>Gradle, JUnit, GitHub</a:t>
             </a:r>
             <a:endParaRPr lang="en-US" sz="1500" dirty="0"/>
           </a:p>
@@ -12113,7 +12113,7 @@
                   <a:srgbClr val="4A4560"/>
                 </a:solidFill>
               </a:rPr>
-              <a:t>Quản lý mã nguồn, review; thiết kế wireframe</a:t>
+              <a:t>AGP 9.3, unit test, quản lý mã nguồn</a:t>
             </a:r>
             <a:endParaRPr lang="en-US" sz="1400" dirty="0"/>
           </a:p>

--- a/docs/SubTrack_GioiThieuDeTai.pptx
+++ b/docs/SubTrack_GioiThieuDeTai.pptx
@@ -17,9 +17,11 @@
     <p:sldId id="265" r:id="rId11"/>
     <p:sldId id="266" r:id="rId12"/>
     <p:sldId id="267" r:id="rId13"/>
+    <p:sldId id="268" r:id="rId14"/>
+    <p:sldId id="269" r:id="rId15"/>
   </p:sldIdLst>
   <p:notesMasterIdLst>
-    <p:notesMasterId r:id="rId14"/>
+    <p:notesMasterId r:id="rId16"/>
   </p:notesMasterIdLst>
   <p:sldSz cx="12192000" cy="6858000"/>
   <p:notesSz cx="6858000" cy="12192000"/>
@@ -118,7 +120,7 @@
   <p:extLst>
     <p:ext uri="{521415D9-36F7-43E2-AB2F-B90AF26B5E84}">
       <p14:sectionLst xmlns:p14="http://schemas.microsoft.com/office/powerpoint/2010/main">
-        <p14:section name="Giới thiệu" id="{2f4c87c8-1067-23da-57b1-4d7103a885b8}">
+        <p14:section name="Giới thiệu" id="{4a7de15f-d51a-4186-995b-f2299a037b79}">
           <p14:sldIdLst>
             <p14:sldId id="256"/>
             <p14:sldId id="257"/>
@@ -126,24 +128,26 @@
             <p14:sldId id="259"/>
           </p14:sldIdLst>
         </p14:section>
-        <p14:section name="Khảo sát" id="{8174516b-7483-99aa-0d8e-374c601d8942}">
+        <p14:section name="Khảo sát" id="{ae12344f-491a-4659-84ca-43156c901b71}">
           <p14:sldIdLst>
             <p14:sldId id="260"/>
           </p14:sldIdLst>
         </p14:section>
-        <p14:section name="Chức năng" id="{1a296dec-8bf7-2d14-c63a-3c113c0e46f5}">
+        <p14:section name="Chức năng" id="{b7d78a9f-6b72-c2d9-7395-275f29fd07a7}">
           <p14:sldIdLst>
             <p14:sldId id="261"/>
             <p14:sldId id="262"/>
             <p14:sldId id="263"/>
+            <p14:sldId id="264"/>
           </p14:sldIdLst>
         </p14:section>
-        <p14:section name="Triển khai" id="{ffd2f57a-9816-f4fa-ecd0-453bcbbd7555}">
+        <p14:section name="Triển khai" id="{538ba6c9-5340-08fb-dfc4-a6a7705e2d78}">
           <p14:sldIdLst>
-            <p14:sldId id="264"/>
             <p14:sldId id="265"/>
             <p14:sldId id="266"/>
             <p14:sldId id="267"/>
+            <p14:sldId id="268"/>
+            <p14:sldId id="269"/>
           </p14:sldIdLst>
         </p14:section>
       </p14:sectionLst>
@@ -638,7 +642,10 @@
           <a:p>
             <a:r>
               <a:rPr lang="en-US" dirty="0"/>
-              <a:t/>
+              <a:t>Cấu hình dự án: Android tối thiểu API 26, compileSdk/targetSdk 37, Java 17.
+libs.versions.toml khai báo AGP 9.3.3, Kotlin Compose plugin 2.2.10, JUnit 4.13.2 (phiên bản trong dự án, không phải khẳng định mới nhất).
+WorkManager kiểm tra theo chu kỳ một ngày; không cam kết nhắc đúng một giờ cố định.
+Chức năng cốt lõi không cần API key. Mở website và các ứng dụng ngoài phụ thuộc môi trường thiết bị.</a:t>
             </a:r>
             <a:endParaRPr lang="en-US" dirty="0"/>
           </a:p>
@@ -856,6 +863,182 @@
 </p:notes>
 </file>
 
+<file path=ppt/notesSlides/notesSlide13.xml><?xml version="1.0" encoding="utf-8"?>
+<p:notes xmlns:a="http://schemas.openxmlformats.org/drawingml/2006/main" xmlns:r="http://schemas.openxmlformats.org/officeDocument/2006/relationships" xmlns:p="http://schemas.openxmlformats.org/presentationml/2006/main">
+  <p:cSld>
+    <p:spTree>
+      <p:nvGrpSpPr>
+        <p:cNvPr id="1" name=""/>
+        <p:cNvGrpSpPr/>
+        <p:nvPr/>
+      </p:nvGrpSpPr>
+      <p:grpSpPr>
+        <a:xfrm>
+          <a:off x="0" y="0"/>
+          <a:ext cx="0" cy="0"/>
+          <a:chOff x="0" y="0"/>
+          <a:chExt cx="0" cy="0"/>
+        </a:xfrm>
+      </p:grpSpPr>
+      <p:sp>
+        <p:nvSpPr>
+          <p:cNvPr id="2" name="Slide Image Placeholder 1"/>
+          <p:cNvSpPr>
+            <a:spLocks noGrp="1" noRot="1" noChangeAspect="1"/>
+          </p:cNvSpPr>
+          <p:nvPr>
+            <p:ph type="sldImg"/>
+          </p:nvPr>
+        </p:nvSpPr>
+        <p:spPr/>
+      </p:sp>
+      <p:sp>
+        <p:nvSpPr>
+          <p:cNvPr id="3" name="Notes Placeholder 2"/>
+          <p:cNvSpPr>
+            <a:spLocks noGrp="1"/>
+          </p:cNvSpPr>
+          <p:nvPr>
+            <p:ph type="body" idx="1"/>
+          </p:nvPr>
+        </p:nvSpPr>
+        <p:spPr/>
+        <p:txBody>
+          <a:bodyPr/>
+          <a:lstStyle/>
+          <a:p>
+            <a:r>
+              <a:rPr lang="en-US" dirty="0"/>
+              <a:t>Build, unit test và lint đã qua trong lần kiểm tra trước; ứng dụng chưa chạy thử trên máy ảo/điện thoại. Không coi đó là kết quả kiểm thử giao diện. Đã sửa: tác vụ nhắc hạn chỉ đánh dấu “đã nhắc” khi gửi thông báo thành công.</a:t>
+            </a:r>
+            <a:endParaRPr lang="en-US" dirty="0"/>
+          </a:p>
+        </p:txBody>
+      </p:sp>
+      <p:sp>
+        <p:nvSpPr>
+          <p:cNvPr id="4" name="Slide Number Placeholder 3"/>
+          <p:cNvSpPr>
+            <a:spLocks noGrp="1"/>
+          </p:cNvSpPr>
+          <p:nvPr>
+            <p:ph type="sldNum" sz="quarter" idx="10"/>
+          </p:nvPr>
+        </p:nvSpPr>
+        <p:spPr/>
+        <p:txBody>
+          <a:bodyPr/>
+          <a:lstStyle/>
+          <a:p>
+            <a:fld id="{F7021451-1387-4CA6-816F-3879F97B5CBC}" type="slidenum">
+              <a:rPr lang="en-US"/>
+              <a:t>13</a:t>
+            </a:fld>
+            <a:endParaRPr lang="en-US"/>
+          </a:p>
+        </p:txBody>
+      </p:sp>
+    </p:spTree>
+    <p:extLst>
+      <p:ext uri="{BB962C8B-B14F-4D97-AF65-F5344CB8AC3E}">
+        <p14:creationId xmlns:p14="http://schemas.microsoft.com/office/powerpoint/2010/main" val="1024086991"/>
+      </p:ext>
+    </p:extLst>
+  </p:cSld>
+  <p:clrMapOvr>
+    <a:masterClrMapping/>
+  </p:clrMapOvr>
+</p:notes>
+</file>
+
+<file path=ppt/notesSlides/notesSlide14.xml><?xml version="1.0" encoding="utf-8"?>
+<p:notes xmlns:a="http://schemas.openxmlformats.org/drawingml/2006/main" xmlns:r="http://schemas.openxmlformats.org/officeDocument/2006/relationships" xmlns:p="http://schemas.openxmlformats.org/presentationml/2006/main">
+  <p:cSld>
+    <p:spTree>
+      <p:nvGrpSpPr>
+        <p:cNvPr id="1" name=""/>
+        <p:cNvGrpSpPr/>
+        <p:nvPr/>
+      </p:nvGrpSpPr>
+      <p:grpSpPr>
+        <a:xfrm>
+          <a:off x="0" y="0"/>
+          <a:ext cx="0" cy="0"/>
+          <a:chOff x="0" y="0"/>
+          <a:chExt cx="0" cy="0"/>
+        </a:xfrm>
+      </p:grpSpPr>
+      <p:sp>
+        <p:nvSpPr>
+          <p:cNvPr id="2" name="Slide Image Placeholder 1"/>
+          <p:cNvSpPr>
+            <a:spLocks noGrp="1" noRot="1" noChangeAspect="1"/>
+          </p:cNvSpPr>
+          <p:nvPr>
+            <p:ph type="sldImg"/>
+          </p:nvPr>
+        </p:nvSpPr>
+        <p:spPr/>
+      </p:sp>
+      <p:sp>
+        <p:nvSpPr>
+          <p:cNvPr id="3" name="Notes Placeholder 2"/>
+          <p:cNvSpPr>
+            <a:spLocks noGrp="1"/>
+          </p:cNvSpPr>
+          <p:nvPr>
+            <p:ph type="body" idx="1"/>
+          </p:nvPr>
+        </p:nvSpPr>
+        <p:spPr/>
+        <p:txBody>
+          <a:bodyPr/>
+          <a:lstStyle/>
+          <a:p>
+            <a:r>
+              <a:rPr lang="en-US" dirty="0"/>
+              <a:t/>
+            </a:r>
+            <a:endParaRPr lang="en-US" dirty="0"/>
+          </a:p>
+        </p:txBody>
+      </p:sp>
+      <p:sp>
+        <p:nvSpPr>
+          <p:cNvPr id="4" name="Slide Number Placeholder 3"/>
+          <p:cNvSpPr>
+            <a:spLocks noGrp="1"/>
+          </p:cNvSpPr>
+          <p:nvPr>
+            <p:ph type="sldNum" sz="quarter" idx="10"/>
+          </p:nvPr>
+        </p:nvSpPr>
+        <p:spPr/>
+        <p:txBody>
+          <a:bodyPr/>
+          <a:lstStyle/>
+          <a:p>
+            <a:fld id="{F7021451-1387-4CA6-816F-3879F97B5CBC}" type="slidenum">
+              <a:rPr lang="en-US"/>
+              <a:t>14</a:t>
+            </a:fld>
+            <a:endParaRPr lang="en-US"/>
+          </a:p>
+        </p:txBody>
+      </p:sp>
+    </p:spTree>
+    <p:extLst>
+      <p:ext uri="{BB962C8B-B14F-4D97-AF65-F5344CB8AC3E}">
+        <p14:creationId xmlns:p14="http://schemas.microsoft.com/office/powerpoint/2010/main" val="1024086991"/>
+      </p:ext>
+    </p:extLst>
+  </p:cSld>
+  <p:clrMapOvr>
+    <a:masterClrMapping/>
+  </p:clrMapOvr>
+</p:notes>
+</file>
+
 <file path=ppt/notesSlides/notesSlide2.xml><?xml version="1.0" encoding="utf-8"?>
 <p:notes xmlns:a="http://schemas.openxmlformats.org/drawingml/2006/main" xmlns:r="http://schemas.openxmlformats.org/officeDocument/2006/relationships" xmlns:p="http://schemas.openxmlformats.org/presentationml/2006/main">
   <p:cSld>
@@ -990,7 +1173,7 @@
           <a:p>
             <a:r>
               <a:rPr lang="en-US" dirty="0"/>
-              <a:t/>
+              <a:t>SubTrack giúp người dùng biết mình đang đăng ký dịch vụ nào và ước tính chi phí bao nhiêu. Ứng dụng chưa thu thập tần suất sử dụng nên người dùng tự đánh giá gói nào còn cần thiết. Chuyển trạng thái thành “Đã hủy” trong SubTrack chỉ cập nhật dữ liệu theo dõi, không dừng việc thu phí của nhà cung cấp.</a:t>
             </a:r>
             <a:endParaRPr lang="en-US" dirty="0"/>
           </a:p>
@@ -1078,7 +1261,7 @@
           <a:p>
             <a:r>
               <a:rPr lang="en-US" dirty="0"/>
-              <a:t/>
+              <a:t>Căn cứ: Models.kt và schema SQLite không có thực thể người dùng, thành viên, nhóm hoặc phần tiền phải trả của mỗi người.</a:t>
             </a:r>
             <a:endParaRPr lang="en-US" dirty="0"/>
           </a:p>
@@ -1166,7 +1349,10 @@
           <a:p>
             <a:r>
               <a:rPr lang="en-US" dirty="0"/>
-              <a:t/>
+              <a:t>Nguồn:
+Sub Radar: https://subradar.app/ và https://subradar.app/help (không nhầm với sản phẩm trùng tên ở tên miền khác).
+Bobby: https://apps.apple.com/vn/app/bobby-track-subscriptions/id1059152023 (App Store còn liệt kê tương thích một số thiết bị Apple khác).
+Rocket Money: https://help.rocketmoney.com/en/articles/2677184-premium-membership-features ; https://help.rocketmoney.com/en/articles/79778-does-rocket-money-support-international-banks ; https://help.rocketmoney.com/en/articles/934402-how-do-i-cancel-a-subscription-on-rocket-money</a:t>
             </a:r>
             <a:endParaRPr lang="en-US" dirty="0"/>
           </a:p>
@@ -1254,7 +1440,8 @@
           <a:p>
             <a:r>
               <a:rPr lang="en-US" dirty="0"/>
-              <a:t/>
+              <a:t>Đây là chi phí ước tính từ mức phí và chu kỳ người dùng nhập. SubTrack chưa lưu lịch sử giao dịch hoặc xác nhận khoản tiền đã thanh toán, nên con số theo tháng không phải số tiền thực tế đã bị trừ trong tháng đó. Gói khác tiền tệ báo cáo được loại khỏi phép cộng và có ghi chú riêng.
+Ví dụ giả lập: A 120.000 VND/tháng → 120.000; B 1.200.000 VND/năm → 100.000; C 10 USD/tháng → không cộng vào báo cáo VND. Tổng VND: 220.000 VND/tháng.</a:t>
             </a:r>
             <a:endParaRPr lang="en-US" dirty="0"/>
           </a:p>
@@ -1518,7 +1705,7 @@
           <a:p>
             <a:r>
               <a:rPr lang="en-US" dirty="0"/>
-              <a:t/>
+              <a:t>Người dùng là tác nhân chính. Ứng dụng Lịch và dịch vụ thông báo Android hỗ trợ các thao tác tích hợp. WorkManager là thành phần triển khai bên trong SubTrack. Thêm và lưu chỉnh sửa gói đều kiểm tra dữ liệu. Việc đặt nhắc hạn chỉ lưu cấu hình; thông báo xuất hiện khi gói thỏa điều kiện nhắc và hệ thống cho phép hiển thị. 14 mục UC có mã xử lý tương ứng, không phải 14 chức năng độc lập cùng cấp.</a:t>
             </a:r>
             <a:endParaRPr lang="en-US" dirty="0"/>
           </a:p>
@@ -2524,7 +2711,7 @@
                   <a:schemeClr val="tx2"/>
                 </a:solidFill>
               </a:rPr>
-              <a:t>Phân công công việc</a:t>
+              <a:t>Công nghệ và lý do lựa chọn</a:t>
             </a:r>
             <a:endParaRPr lang="en-US" sz="3600" dirty="0"/>
           </a:p>
@@ -2532,46 +2719,55 @@
       </p:sp>
       <p:sp>
         <p:nvSpPr>
-          <p:cNvPr id="3" name="Thẻ Thành viên 1"/>
+          <p:cNvPr id="3" name="Text 1"/>
+          <p:cNvSpPr txBox="1"/>
+          <p:nvPr/>
+        </p:nvSpPr>
+        <p:spPr>
+          <a:xfrm>
+            <a:off x="548640" y="1371600"/>
+            <a:ext cx="3291840" cy="365760"/>
+          </a:xfrm>
+          <a:prstGeom prst="rect">
+            <a:avLst/>
+          </a:prstGeom>
+          <a:noFill/>
+          <a:ln/>
+        </p:spPr>
+        <p:txBody>
+          <a:bodyPr wrap="square" lIns="0" tIns="0" rIns="0" bIns="0" rtlCol="0" anchor="t"/>
+          <a:lstStyle/>
+          <a:p>
+            <a:pPr indent="0" marL="0">
+              <a:buNone/>
+            </a:pPr>
+            <a:r>
+              <a:rPr lang="en-US" sz="1400" b="1" spc="200" kern="0" dirty="0">
+                <a:solidFill>
+                  <a:schemeClr val="accent1"/>
+                </a:solidFill>
+              </a:rPr>
+              <a:t>KIẾN TRÚC</a:t>
+            </a:r>
+            <a:endParaRPr lang="en-US" sz="1400" dirty="0"/>
+          </a:p>
+        </p:txBody>
+      </p:sp>
+      <p:sp>
+        <p:nvSpPr>
+          <p:cNvPr id="4" name="Tầng Giao diện (Compose)"/>
           <p:cNvSpPr/>
           <p:nvPr/>
         </p:nvSpPr>
         <p:spPr>
           <a:xfrm>
-            <a:off x="548640" y="1371600"/>
-            <a:ext cx="2606040" cy="4800600"/>
+            <a:off x="548640" y="1828800"/>
+            <a:ext cx="3383280" cy="1005840"/>
           </a:xfrm>
           <a:prstGeom prst="roundRect">
             <a:avLst>
-              <a:gd name="adj" fmla="val 4211"/>
+              <a:gd name="adj" fmla="val 10909"/>
             </a:avLst>
-          </a:prstGeom>
-          <a:solidFill>
-            <a:schemeClr val="bg2"/>
-          </a:solidFill>
-          <a:ln/>
-          <a:effectLst>
-            <a:outerShdw sx="100000" sy="100000" kx="0" ky="0" algn="bl" rotWithShape="0" blurRad="101600" dist="25400" dir="5400000">
-              <a:srgbClr val="2B1B5A">
-                <a:alpha val="12000"/>
-              </a:srgbClr>
-            </a:outerShdw>
-          </a:effectLst>
-        </p:spPr>
-      </p:sp>
-      <p:sp>
-        <p:nvSpPr>
-          <p:cNvPr id="4" name="Thành viên 1 circle"/>
-          <p:cNvSpPr/>
-          <p:nvPr/>
-        </p:nvSpPr>
-        <p:spPr>
-          <a:xfrm>
-            <a:off x="822960" y="1645920"/>
-            <a:ext cx="731520" cy="731520"/>
-          </a:xfrm>
-          <a:prstGeom prst="ellipse">
-            <a:avLst/>
           </a:prstGeom>
           <a:solidFill>
             <a:schemeClr val="accent1"/>
@@ -2579,9 +2775,59 @@
           <a:ln/>
         </p:spPr>
       </p:sp>
+      <p:sp>
+        <p:nvSpPr>
+          <p:cNvPr id="5" name="Text 3"/>
+          <p:cNvSpPr txBox="1"/>
+          <p:nvPr/>
+        </p:nvSpPr>
+        <p:spPr>
+          <a:xfrm>
+            <a:off x="731520" y="1828800"/>
+            <a:ext cx="3017520" cy="1005840"/>
+          </a:xfrm>
+          <a:prstGeom prst="rect">
+            <a:avLst/>
+          </a:prstGeom>
+          <a:noFill/>
+          <a:ln/>
+        </p:spPr>
+        <p:txBody>
+          <a:bodyPr wrap="square" lIns="0" tIns="0" rIns="0" bIns="0" rtlCol="0" anchor="ctr"/>
+          <a:lstStyle/>
+          <a:p>
+            <a:pPr indent="0" marL="0">
+              <a:buNone/>
+            </a:pPr>
+            <a:r>
+              <a:rPr lang="en-US" sz="1700" b="1" dirty="0">
+                <a:solidFill>
+                  <a:schemeClr val="bg1"/>
+                </a:solidFill>
+              </a:rPr>
+              <a:t>Giao diện (Compose)</a:t>
+            </a:r>
+            <a:endParaRPr lang="en-US" sz="1500" dirty="0"/>
+          </a:p>
+          <a:p>
+            <a:pPr indent="0" marL="0">
+              <a:buNone/>
+            </a:pPr>
+            <a:r>
+              <a:rPr lang="en-US" sz="1300" dirty="0">
+                <a:solidFill>
+                  <a:schemeClr val="bg1"/>
+                </a:solidFill>
+              </a:rPr>
+              <a:t>Màn hình, Navigation Compose</a:t>
+            </a:r>
+            <a:endParaRPr lang="en-US" sz="1500" dirty="0"/>
+          </a:p>
+        </p:txBody>
+      </p:sp>
       <p:pic>
         <p:nvPicPr>
-          <p:cNvPr id="5" name="Thành viên 1 icon" descr="Thành viên 1">    </p:cNvPr>
+          <p:cNvPr id="6" name="Mũi tên tầng 0" descr="gọi xuống">    </p:cNvPr>
           <p:cNvPicPr>
             <a:picLocks noChangeAspect="1"/>
           </p:cNvPicPr>
@@ -2595,8 +2841,8 @@
         </p:blipFill>
         <p:spPr>
           <a:xfrm>
-            <a:off x="1013155" y="1836115"/>
-            <a:ext cx="351130" cy="351130"/>
+            <a:off x="2057400" y="2880360"/>
+            <a:ext cx="365760" cy="365760"/>
           </a:xfrm>
           <a:prstGeom prst="rect">
             <a:avLst/>
@@ -2605,75 +2851,25 @@
       </p:pic>
       <p:sp>
         <p:nvSpPr>
-          <p:cNvPr id="6" name="Text 3"/>
-          <p:cNvSpPr txBox="1"/>
-          <p:nvPr/>
-        </p:nvSpPr>
-        <p:spPr>
-          <a:xfrm>
-            <a:off x="822960" y="2514600"/>
-            <a:ext cx="2103120" cy="320040"/>
-          </a:xfrm>
-          <a:prstGeom prst="rect">
-            <a:avLst/>
-          </a:prstGeom>
-          <a:noFill/>
-          <a:ln/>
-        </p:spPr>
-        <p:txBody>
-          <a:bodyPr wrap="square" lIns="0" tIns="0" rIns="0" bIns="0" rtlCol="0" anchor="t"/>
-          <a:lstStyle/>
-          <a:p>
-            <a:pPr indent="0" marL="0">
-              <a:buNone/>
-            </a:pPr>
-            <a:r>
-              <a:rPr lang="en-US" sz="1400" b="1" dirty="0">
-                <a:solidFill>
-                  <a:srgbClr val="6E6888"/>
-                </a:solidFill>
-              </a:rPr>
-              <a:t>Thành viên 1</a:t>
-            </a:r>
-            <a:endParaRPr lang="en-US" sz="1400" dirty="0"/>
-          </a:p>
-        </p:txBody>
-      </p:sp>
-      <p:sp>
-        <p:nvSpPr>
-          <p:cNvPr id="7" name="Text 4"/>
-          <p:cNvSpPr txBox="1"/>
-          <p:nvPr/>
-        </p:nvSpPr>
-        <p:spPr>
-          <a:xfrm>
-            <a:off x="822960" y="2834640"/>
-            <a:ext cx="2103120" cy="777240"/>
-          </a:xfrm>
-          <a:prstGeom prst="rect">
-            <a:avLst/>
-          </a:prstGeom>
-          <a:noFill/>
-          <a:ln/>
-        </p:spPr>
-        <p:txBody>
-          <a:bodyPr wrap="square" lIns="0" tIns="0" rIns="0" bIns="0" rtlCol="0" anchor="t"/>
-          <a:lstStyle/>
-          <a:p>
-            <a:pPr indent="0" marL="0">
-              <a:buNone/>
-            </a:pPr>
-            <a:r>
-              <a:rPr lang="en-US" sz="1900" b="1" dirty="0">
-                <a:solidFill>
-                  <a:schemeClr val="tx2"/>
-                </a:solidFill>
-              </a:rPr>
-              <a:t>Giao diện &amp; Dashboard</a:t>
-            </a:r>
-            <a:endParaRPr lang="en-US" sz="1900" dirty="0"/>
-          </a:p>
-        </p:txBody>
+          <p:cNvPr id="7" name="Tầng ViewModel · Repository"/>
+          <p:cNvSpPr/>
+          <p:nvPr/>
+        </p:nvSpPr>
+        <p:spPr>
+          <a:xfrm>
+            <a:off x="548640" y="3291840"/>
+            <a:ext cx="3383280" cy="1005840"/>
+          </a:xfrm>
+          <a:prstGeom prst="roundRect">
+            <a:avLst>
+              <a:gd name="adj" fmla="val 10909"/>
+            </a:avLst>
+          </a:prstGeom>
+          <a:solidFill>
+            <a:schemeClr val="accent6"/>
+          </a:solidFill>
+          <a:ln/>
+        </p:spPr>
       </p:sp>
       <p:sp>
         <p:nvSpPr>
@@ -2683,8 +2879,8 @@
         </p:nvSpPr>
         <p:spPr>
           <a:xfrm>
-            <a:off x="822960" y="3657600"/>
-            <a:ext cx="2194560" cy="1828800"/>
+            <a:off x="731520" y="3291840"/>
+            <a:ext cx="3017520" cy="1005840"/>
           </a:xfrm>
           <a:prstGeom prst="rect">
             <a:avLst/>
@@ -2693,152 +2889,41 @@
           <a:ln/>
         </p:spPr>
         <p:txBody>
-          <a:bodyPr wrap="square" lIns="0" tIns="0" rIns="0" bIns="0" rtlCol="0" anchor="t"/>
-          <a:lstStyle/>
-          <a:p>
-            <a:pPr marL="342900" indent="-342900">
-              <a:spcAft>
-                <a:spcPts val="600"/>
-              </a:spcAft>
-              <a:buSzPct val="100000"/>
-              <a:buChar char="•"/>
-            </a:pPr>
-            <a:r>
-              <a:rPr lang="en-US" sz="1400" dirty="0">
-                <a:solidFill>
-                  <a:srgbClr val="4A4560"/>
-                </a:solidFill>
-              </a:rPr>
-              <a:t>Bộ màu, component chung, điều hướng</a:t>
-            </a:r>
-            <a:endParaRPr lang="en-US" sz="1400" dirty="0"/>
-          </a:p>
-          <a:p>
-            <a:pPr marL="342900" indent="-342900">
-              <a:spcAft>
-                <a:spcPts val="600"/>
-              </a:spcAft>
-              <a:buSzPct val="100000"/>
-              <a:buChar char="•"/>
-            </a:pPr>
-            <a:r>
-              <a:rPr lang="en-US" sz="1400" dirty="0">
-                <a:solidFill>
-                  <a:srgbClr val="4A4560"/>
-                </a:solidFill>
-              </a:rPr>
-              <a:t>Màn hình Dashboard</a:t>
-            </a:r>
-            <a:endParaRPr lang="en-US" sz="1400" dirty="0"/>
-          </a:p>
-          <a:p>
-            <a:pPr marL="342900" indent="-342900">
-              <a:spcAft>
-                <a:spcPts val="600"/>
-              </a:spcAft>
-              <a:buSzPct val="100000"/>
-              <a:buChar char="•"/>
-            </a:pPr>
-            <a:r>
-              <a:rPr lang="en-US" sz="1400" dirty="0">
-                <a:solidFill>
-                  <a:srgbClr val="4A4560"/>
-                </a:solidFill>
-              </a:rPr>
-              <a:t>Danh sách gói, trạng thái rỗng/loading/lỗi</a:t>
-            </a:r>
-            <a:endParaRPr lang="en-US" sz="1400" dirty="0"/>
-          </a:p>
-        </p:txBody>
-      </p:sp>
-      <p:sp>
-        <p:nvSpPr>
-          <p:cNvPr id="9" name="Text 6"/>
-          <p:cNvSpPr txBox="1"/>
-          <p:nvPr/>
-        </p:nvSpPr>
-        <p:spPr>
-          <a:xfrm>
-            <a:off x="822960" y="5669280"/>
-            <a:ext cx="2103120" cy="320040"/>
-          </a:xfrm>
-          <a:prstGeom prst="rect">
-            <a:avLst/>
-          </a:prstGeom>
-          <a:noFill/>
-          <a:ln/>
-        </p:spPr>
-        <p:txBody>
-          <a:bodyPr wrap="square" lIns="0" tIns="0" rIns="0" bIns="0" rtlCol="0" anchor="t"/>
+          <a:bodyPr wrap="square" lIns="0" tIns="0" rIns="0" bIns="0" rtlCol="0" anchor="ctr"/>
           <a:lstStyle/>
           <a:p>
             <a:pPr indent="0" marL="0">
               <a:buNone/>
             </a:pPr>
             <a:r>
-              <a:rPr lang="en-US" sz="1400" i="1" dirty="0">
-                <a:solidFill>
-                  <a:srgbClr val="6E6888"/>
-                </a:solidFill>
-              </a:rPr>
-              <a:t>Họ tên: ………………</a:t>
-            </a:r>
-            <a:endParaRPr lang="en-US" sz="1400" dirty="0"/>
-          </a:p>
-        </p:txBody>
-      </p:sp>
-      <p:sp>
-        <p:nvSpPr>
-          <p:cNvPr id="10" name="Thẻ Thành viên 2"/>
-          <p:cNvSpPr/>
-          <p:nvPr/>
-        </p:nvSpPr>
-        <p:spPr>
-          <a:xfrm>
-            <a:off x="3383280" y="1371600"/>
-            <a:ext cx="2606040" cy="4800600"/>
-          </a:xfrm>
-          <a:prstGeom prst="roundRect">
-            <a:avLst>
-              <a:gd name="adj" fmla="val 4211"/>
-            </a:avLst>
-          </a:prstGeom>
-          <a:solidFill>
-            <a:schemeClr val="bg2"/>
-          </a:solidFill>
-          <a:ln/>
-          <a:effectLst>
-            <a:outerShdw sx="100000" sy="100000" kx="0" ky="0" algn="bl" rotWithShape="0" blurRad="101600" dist="25400" dir="5400000">
-              <a:srgbClr val="2B1B5A">
-                <a:alpha val="12000"/>
-              </a:srgbClr>
-            </a:outerShdw>
-          </a:effectLst>
-        </p:spPr>
-      </p:sp>
-      <p:sp>
-        <p:nvSpPr>
-          <p:cNvPr id="11" name="Thành viên 2 circle"/>
-          <p:cNvSpPr/>
-          <p:nvPr/>
-        </p:nvSpPr>
-        <p:spPr>
-          <a:xfrm>
-            <a:off x="3657600" y="1645920"/>
-            <a:ext cx="731520" cy="731520"/>
-          </a:xfrm>
-          <a:prstGeom prst="ellipse">
-            <a:avLst/>
-          </a:prstGeom>
-          <a:solidFill>
-            <a:schemeClr val="accent2"/>
-          </a:solidFill>
-          <a:ln/>
-        </p:spPr>
+              <a:rPr lang="en-US" sz="1700" b="1" dirty="0">
+                <a:solidFill>
+                  <a:schemeClr val="bg1"/>
+                </a:solidFill>
+              </a:rPr>
+              <a:t>ViewModel · Repository</a:t>
+            </a:r>
+            <a:endParaRPr lang="en-US" sz="1500" dirty="0"/>
+          </a:p>
+          <a:p>
+            <a:pPr indent="0" marL="0">
+              <a:buNone/>
+            </a:pPr>
+            <a:r>
+              <a:rPr lang="en-US" sz="1300" dirty="0">
+                <a:solidFill>
+                  <a:schemeClr val="bg1"/>
+                </a:solidFill>
+              </a:rPr>
+              <a:t>StateFlow, tách UI khỏi dữ liệu</a:t>
+            </a:r>
+            <a:endParaRPr lang="en-US" sz="1500" dirty="0"/>
+          </a:p>
+        </p:txBody>
       </p:sp>
       <p:pic>
         <p:nvPicPr>
-          <p:cNvPr id="12" name="Thành viên 2 icon" descr="Thành viên 2">    </p:cNvPr>
+          <p:cNvPr id="9" name="Mũi tên tầng 1" descr="gọi xuống">    </p:cNvPr>
           <p:cNvPicPr>
             <a:picLocks noChangeAspect="1"/>
           </p:cNvPicPr>
@@ -2852,8 +2937,8 @@
         </p:blipFill>
         <p:spPr>
           <a:xfrm>
-            <a:off x="3847795" y="1836115"/>
-            <a:ext cx="351130" cy="351130"/>
+            <a:off x="2057400" y="4343400"/>
+            <a:ext cx="365760" cy="365760"/>
           </a:xfrm>
           <a:prstGeom prst="rect">
             <a:avLst/>
@@ -2862,271 +2947,36 @@
       </p:pic>
       <p:sp>
         <p:nvSpPr>
-          <p:cNvPr id="13" name="Text 9"/>
-          <p:cNvSpPr txBox="1"/>
-          <p:nvPr/>
-        </p:nvSpPr>
-        <p:spPr>
-          <a:xfrm>
-            <a:off x="3657600" y="2514600"/>
-            <a:ext cx="2103120" cy="320040"/>
-          </a:xfrm>
-          <a:prstGeom prst="rect">
-            <a:avLst/>
-          </a:prstGeom>
-          <a:noFill/>
-          <a:ln/>
-        </p:spPr>
-        <p:txBody>
-          <a:bodyPr wrap="square" lIns="0" tIns="0" rIns="0" bIns="0" rtlCol="0" anchor="t"/>
-          <a:lstStyle/>
-          <a:p>
-            <a:pPr indent="0" marL="0">
-              <a:buNone/>
-            </a:pPr>
-            <a:r>
-              <a:rPr lang="en-US" sz="1400" b="1" dirty="0">
-                <a:solidFill>
-                  <a:srgbClr val="6E6888"/>
-                </a:solidFill>
-              </a:rPr>
-              <a:t>Thành viên 2</a:t>
-            </a:r>
-            <a:endParaRPr lang="en-US" sz="1400" dirty="0"/>
-          </a:p>
-        </p:txBody>
-      </p:sp>
-      <p:sp>
-        <p:nvSpPr>
-          <p:cNvPr id="14" name="Text 10"/>
-          <p:cNvSpPr txBox="1"/>
-          <p:nvPr/>
-        </p:nvSpPr>
-        <p:spPr>
-          <a:xfrm>
-            <a:off x="3657600" y="2834640"/>
-            <a:ext cx="2103120" cy="777240"/>
-          </a:xfrm>
-          <a:prstGeom prst="rect">
-            <a:avLst/>
-          </a:prstGeom>
-          <a:noFill/>
-          <a:ln/>
-        </p:spPr>
-        <p:txBody>
-          <a:bodyPr wrap="square" lIns="0" tIns="0" rIns="0" bIns="0" rtlCol="0" anchor="t"/>
-          <a:lstStyle/>
-          <a:p>
-            <a:pPr indent="0" marL="0">
-              <a:buNone/>
-            </a:pPr>
-            <a:r>
-              <a:rPr lang="en-US" sz="1900" b="1" dirty="0">
-                <a:solidFill>
-                  <a:schemeClr val="tx2"/>
-                </a:solidFill>
-              </a:rPr>
-              <a:t>CRUD gói đăng ký</a:t>
-            </a:r>
-            <a:endParaRPr lang="en-US" sz="1900" dirty="0"/>
-          </a:p>
-        </p:txBody>
-      </p:sp>
-      <p:sp>
-        <p:nvSpPr>
-          <p:cNvPr id="15" name="Text 11"/>
-          <p:cNvSpPr txBox="1"/>
-          <p:nvPr/>
-        </p:nvSpPr>
-        <p:spPr>
-          <a:xfrm>
-            <a:off x="3657600" y="3657600"/>
-            <a:ext cx="2194560" cy="1828800"/>
-          </a:xfrm>
-          <a:prstGeom prst="rect">
-            <a:avLst/>
-          </a:prstGeom>
-          <a:noFill/>
-          <a:ln/>
-        </p:spPr>
-        <p:txBody>
-          <a:bodyPr wrap="square" lIns="0" tIns="0" rIns="0" bIns="0" rtlCol="0" anchor="t"/>
-          <a:lstStyle/>
-          <a:p>
-            <a:pPr marL="342900" indent="-342900">
-              <a:spcAft>
-                <a:spcPts val="600"/>
-              </a:spcAft>
-              <a:buSzPct val="100000"/>
-              <a:buChar char="•"/>
-            </a:pPr>
-            <a:r>
-              <a:rPr lang="en-US" sz="1400" dirty="0">
-                <a:solidFill>
-                  <a:srgbClr val="4A4560"/>
-                </a:solidFill>
-              </a:rPr>
-              <a:t>Form thêm/sửa gói, xác nhận xóa</a:t>
-            </a:r>
-            <a:endParaRPr lang="en-US" sz="1400" dirty="0"/>
-          </a:p>
-          <a:p>
-            <a:pPr marL="342900" indent="-342900">
-              <a:spcAft>
-                <a:spcPts val="600"/>
-              </a:spcAft>
-              <a:buSzPct val="100000"/>
-              <a:buChar char="•"/>
-            </a:pPr>
-            <a:r>
-              <a:rPr lang="en-US" sz="1400" dirty="0">
-                <a:solidFill>
-                  <a:srgbClr val="4A4560"/>
-                </a:solidFill>
-              </a:rPr>
-              <a:t>Kiểm tra dữ liệu nhập</a:t>
-            </a:r>
-            <a:endParaRPr lang="en-US" sz="1400" dirty="0"/>
-          </a:p>
-          <a:p>
-            <a:pPr marL="342900" indent="-342900">
-              <a:spcAft>
-                <a:spcPts val="600"/>
-              </a:spcAft>
-              <a:buSzPct val="100000"/>
-              <a:buChar char="•"/>
-            </a:pPr>
-            <a:r>
-              <a:rPr lang="en-US" sz="1400" dirty="0">
-                <a:solidFill>
-                  <a:srgbClr val="4A4560"/>
-                </a:solidFill>
-              </a:rPr>
-              <a:t>Tìm kiếm, lọc, sắp xếp</a:t>
-            </a:r>
-            <a:endParaRPr lang="en-US" sz="1400" dirty="0"/>
-          </a:p>
-        </p:txBody>
-      </p:sp>
-      <p:sp>
-        <p:nvSpPr>
-          <p:cNvPr id="16" name="Text 12"/>
-          <p:cNvSpPr txBox="1"/>
-          <p:nvPr/>
-        </p:nvSpPr>
-        <p:spPr>
-          <a:xfrm>
-            <a:off x="3657600" y="5669280"/>
-            <a:ext cx="2103120" cy="320040"/>
-          </a:xfrm>
-          <a:prstGeom prst="rect">
-            <a:avLst/>
-          </a:prstGeom>
-          <a:noFill/>
-          <a:ln/>
-        </p:spPr>
-        <p:txBody>
-          <a:bodyPr wrap="square" lIns="0" tIns="0" rIns="0" bIns="0" rtlCol="0" anchor="t"/>
-          <a:lstStyle/>
-          <a:p>
-            <a:pPr indent="0" marL="0">
-              <a:buNone/>
-            </a:pPr>
-            <a:r>
-              <a:rPr lang="en-US" sz="1400" i="1" dirty="0">
-                <a:solidFill>
-                  <a:srgbClr val="6E6888"/>
-                </a:solidFill>
-              </a:rPr>
-              <a:t>Họ tên: ………………</a:t>
-            </a:r>
-            <a:endParaRPr lang="en-US" sz="1400" dirty="0"/>
-          </a:p>
-        </p:txBody>
-      </p:sp>
-      <p:sp>
-        <p:nvSpPr>
-          <p:cNvPr id="17" name="Thẻ Thành viên 3"/>
+          <p:cNvPr id="10" name="Tầng SQLite trên máy"/>
           <p:cNvSpPr/>
           <p:nvPr/>
         </p:nvSpPr>
         <p:spPr>
           <a:xfrm>
-            <a:off x="6217920" y="1371600"/>
-            <a:ext cx="2606040" cy="4800600"/>
+            <a:off x="548640" y="4754880"/>
+            <a:ext cx="3383280" cy="1005840"/>
           </a:xfrm>
           <a:prstGeom prst="roundRect">
             <a:avLst>
-              <a:gd name="adj" fmla="val 4211"/>
+              <a:gd name="adj" fmla="val 10909"/>
             </a:avLst>
           </a:prstGeom>
           <a:solidFill>
-            <a:schemeClr val="bg2"/>
+            <a:schemeClr val="accent2"/>
           </a:solidFill>
           <a:ln/>
-          <a:effectLst>
-            <a:outerShdw sx="100000" sy="100000" kx="0" ky="0" algn="bl" rotWithShape="0" blurRad="101600" dist="25400" dir="5400000">
-              <a:srgbClr val="2B1B5A">
-                <a:alpha val="12000"/>
-              </a:srgbClr>
-            </a:outerShdw>
-          </a:effectLst>
-        </p:spPr>
-      </p:sp>
-      <p:sp>
-        <p:nvSpPr>
-          <p:cNvPr id="18" name="Thành viên 3 circle"/>
-          <p:cNvSpPr/>
-          <p:nvPr/>
-        </p:nvSpPr>
-        <p:spPr>
-          <a:xfrm>
-            <a:off x="6492240" y="1645920"/>
-            <a:ext cx="731520" cy="731520"/>
-          </a:xfrm>
-          <a:prstGeom prst="ellipse">
-            <a:avLst/>
-          </a:prstGeom>
-          <a:solidFill>
-            <a:schemeClr val="accent3"/>
-          </a:solidFill>
-          <a:ln/>
-        </p:spPr>
-      </p:sp>
-      <p:pic>
-        <p:nvPicPr>
-          <p:cNvPr id="19" name="Thành viên 3 icon" descr="Thành viên 3">    </p:cNvPr>
-          <p:cNvPicPr>
-            <a:picLocks noChangeAspect="1"/>
-          </p:cNvPicPr>
-          <p:nvPr/>
-        </p:nvPicPr>
-        <p:blipFill>
-          <a:blip r:embed="rId3"/>
-          <a:stretch>
-            <a:fillRect/>
-          </a:stretch>
-        </p:blipFill>
-        <p:spPr>
-          <a:xfrm>
-            <a:off x="6682435" y="1836115"/>
-            <a:ext cx="351130" cy="351130"/>
-          </a:xfrm>
-          <a:prstGeom prst="rect">
-            <a:avLst/>
-          </a:prstGeom>
-        </p:spPr>
-      </p:pic>
-      <p:sp>
-        <p:nvSpPr>
-          <p:cNvPr id="20" name="Text 15"/>
+        </p:spPr>
+      </p:sp>
+      <p:sp>
+        <p:nvSpPr>
+          <p:cNvPr id="11" name="Text 7"/>
           <p:cNvSpPr txBox="1"/>
           <p:nvPr/>
         </p:nvSpPr>
         <p:spPr>
           <a:xfrm>
-            <a:off x="6492240" y="2514600"/>
-            <a:ext cx="2103120" cy="320040"/>
+            <a:off x="731520" y="4754880"/>
+            <a:ext cx="3017520" cy="1005840"/>
           </a:xfrm>
           <a:prstGeom prst="rect">
             <a:avLst/>
@@ -3135,429 +2985,1310 @@
           <a:ln/>
         </p:spPr>
         <p:txBody>
-          <a:bodyPr wrap="square" lIns="0" tIns="0" rIns="0" bIns="0" rtlCol="0" anchor="t"/>
+          <a:bodyPr wrap="square" lIns="0" tIns="0" rIns="0" bIns="0" rtlCol="0" anchor="ctr"/>
           <a:lstStyle/>
           <a:p>
             <a:pPr indent="0" marL="0">
               <a:buNone/>
             </a:pPr>
             <a:r>
-              <a:rPr lang="en-US" sz="1400" b="1" dirty="0">
-                <a:solidFill>
-                  <a:srgbClr val="6E6888"/>
-                </a:solidFill>
-              </a:rPr>
-              <a:t>Thành viên 3</a:t>
-            </a:r>
-            <a:endParaRPr lang="en-US" sz="1400" dirty="0"/>
-          </a:p>
-        </p:txBody>
-      </p:sp>
-      <p:sp>
-        <p:nvSpPr>
-          <p:cNvPr id="21" name="Text 16"/>
-          <p:cNvSpPr txBox="1"/>
-          <p:nvPr/>
-        </p:nvSpPr>
-        <p:spPr>
-          <a:xfrm>
-            <a:off x="6492240" y="2834640"/>
-            <a:ext cx="2103120" cy="777240"/>
-          </a:xfrm>
-          <a:prstGeom prst="rect">
-            <a:avLst/>
-          </a:prstGeom>
-          <a:noFill/>
-          <a:ln/>
-        </p:spPr>
-        <p:txBody>
-          <a:bodyPr wrap="square" lIns="0" tIns="0" rIns="0" bIns="0" rtlCol="0" anchor="t"/>
-          <a:lstStyle/>
+              <a:rPr lang="en-US" sz="1700" b="1" dirty="0">
+                <a:solidFill>
+                  <a:schemeClr val="bg1"/>
+                </a:solidFill>
+              </a:rPr>
+              <a:t>SQLite trên máy</a:t>
+            </a:r>
+            <a:endParaRPr lang="en-US" sz="1500" dirty="0"/>
+          </a:p>
           <a:p>
             <a:pPr indent="0" marL="0">
               <a:buNone/>
             </a:pPr>
             <a:r>
-              <a:rPr lang="en-US" sz="1900" b="1" dirty="0">
-                <a:solidFill>
-                  <a:schemeClr val="tx2"/>
-                </a:solidFill>
-              </a:rPr>
-              <a:t>Database &amp; dữ liệu</a:t>
-            </a:r>
-            <a:endParaRPr lang="en-US" sz="1900" dirty="0"/>
-          </a:p>
-        </p:txBody>
-      </p:sp>
-      <p:sp>
-        <p:nvSpPr>
-          <p:cNvPr id="22" name="Text 17"/>
-          <p:cNvSpPr txBox="1"/>
-          <p:nvPr/>
-        </p:nvSpPr>
-        <p:spPr>
-          <a:xfrm>
-            <a:off x="6492240" y="3657600"/>
-            <a:ext cx="2194560" cy="1828800"/>
-          </a:xfrm>
-          <a:prstGeom prst="rect">
-            <a:avLst/>
-          </a:prstGeom>
-          <a:noFill/>
-          <a:ln/>
-        </p:spPr>
-        <p:txBody>
-          <a:bodyPr wrap="square" lIns="0" tIns="0" rIns="0" bIns="0" rtlCol="0" anchor="t"/>
-          <a:lstStyle/>
-          <a:p>
-            <a:pPr marL="342900" indent="-342900">
-              <a:spcAft>
-                <a:spcPts val="600"/>
-              </a:spcAft>
-              <a:buSzPct val="100000"/>
-              <a:buChar char="•"/>
-            </a:pPr>
-            <a:r>
-              <a:rPr lang="en-US" sz="1400" dirty="0">
-                <a:solidFill>
-                  <a:srgbClr val="4A4560"/>
-                </a:solidFill>
-              </a:rPr>
-              <a:t>Schema SQLite, ERD</a:t>
-            </a:r>
-            <a:endParaRPr lang="en-US" sz="1400" dirty="0"/>
-          </a:p>
-          <a:p>
-            <a:pPr marL="342900" indent="-342900">
-              <a:spcAft>
-                <a:spcPts val="600"/>
-              </a:spcAft>
-              <a:buSzPct val="100000"/>
-              <a:buChar char="•"/>
-            </a:pPr>
-            <a:r>
-              <a:rPr lang="en-US" sz="1400" dirty="0">
-                <a:solidFill>
-                  <a:srgbClr val="4A4560"/>
-                </a:solidFill>
-              </a:rPr>
-              <a:t>Lớp repository dùng chung</a:t>
-            </a:r>
-            <a:endParaRPr lang="en-US" sz="1400" dirty="0"/>
-          </a:p>
-          <a:p>
-            <a:pPr marL="342900" indent="-342900">
-              <a:spcAft>
-                <a:spcPts val="600"/>
-              </a:spcAft>
-              <a:buSzPct val="100000"/>
-              <a:buChar char="•"/>
-            </a:pPr>
-            <a:r>
-              <a:rPr lang="en-US" sz="1400" dirty="0">
-                <a:solidFill>
-                  <a:srgbClr val="4A4560"/>
-                </a:solidFill>
-              </a:rPr>
-              <a:t>Cài đặt, xuất CSV, dữ liệu mẫu</a:t>
-            </a:r>
-            <a:endParaRPr lang="en-US" sz="1400" dirty="0"/>
-          </a:p>
-        </p:txBody>
-      </p:sp>
-      <p:sp>
-        <p:nvSpPr>
-          <p:cNvPr id="23" name="Text 18"/>
-          <p:cNvSpPr txBox="1"/>
-          <p:nvPr/>
-        </p:nvSpPr>
-        <p:spPr>
-          <a:xfrm>
-            <a:off x="6492240" y="5669280"/>
-            <a:ext cx="2103120" cy="320040"/>
-          </a:xfrm>
-          <a:prstGeom prst="rect">
-            <a:avLst/>
-          </a:prstGeom>
-          <a:noFill/>
-          <a:ln/>
-        </p:spPr>
-        <p:txBody>
-          <a:bodyPr wrap="square" lIns="0" tIns="0" rIns="0" bIns="0" rtlCol="0" anchor="t"/>
-          <a:lstStyle/>
-          <a:p>
-            <a:pPr indent="0" marL="0">
-              <a:buNone/>
-            </a:pPr>
-            <a:r>
-              <a:rPr lang="en-US" sz="1400" i="1" dirty="0">
-                <a:solidFill>
-                  <a:srgbClr val="6E6888"/>
-                </a:solidFill>
-              </a:rPr>
-              <a:t>Họ tên: ………………</a:t>
-            </a:r>
-            <a:endParaRPr lang="en-US" sz="1400" dirty="0"/>
-          </a:p>
-        </p:txBody>
-      </p:sp>
-      <p:sp>
-        <p:nvSpPr>
-          <p:cNvPr id="24" name="Thẻ Thành viên 4"/>
-          <p:cNvSpPr/>
-          <p:nvPr/>
-        </p:nvSpPr>
-        <p:spPr>
-          <a:xfrm>
-            <a:off x="9052560" y="1371600"/>
-            <a:ext cx="2606040" cy="4800600"/>
-          </a:xfrm>
-          <a:prstGeom prst="roundRect">
-            <a:avLst>
-              <a:gd name="adj" fmla="val 4211"/>
-            </a:avLst>
-          </a:prstGeom>
-          <a:solidFill>
-            <a:schemeClr val="bg2"/>
-          </a:solidFill>
-          <a:ln/>
-          <a:effectLst>
-            <a:outerShdw sx="100000" sy="100000" kx="0" ky="0" algn="bl" rotWithShape="0" blurRad="101600" dist="25400" dir="5400000">
-              <a:srgbClr val="2B1B5A">
-                <a:alpha val="12000"/>
-              </a:srgbClr>
-            </a:outerShdw>
-          </a:effectLst>
-        </p:spPr>
-      </p:sp>
-      <p:sp>
-        <p:nvSpPr>
-          <p:cNvPr id="25" name="Thành viên 4 circle"/>
-          <p:cNvSpPr/>
-          <p:nvPr/>
-        </p:nvSpPr>
-        <p:spPr>
-          <a:xfrm>
-            <a:off x="9326880" y="1645920"/>
-            <a:ext cx="731520" cy="731520"/>
-          </a:xfrm>
-          <a:prstGeom prst="ellipse">
-            <a:avLst/>
-          </a:prstGeom>
-          <a:solidFill>
-            <a:schemeClr val="accent4"/>
-          </a:solidFill>
-          <a:ln/>
-        </p:spPr>
-      </p:sp>
-      <p:pic>
-        <p:nvPicPr>
-          <p:cNvPr id="26" name="Thành viên 4 icon" descr="Thành viên 4">    </p:cNvPr>
-          <p:cNvPicPr>
-            <a:picLocks noChangeAspect="1"/>
-          </p:cNvPicPr>
-          <p:nvPr/>
-        </p:nvPicPr>
-        <p:blipFill>
-          <a:blip r:embed="rId4"/>
-          <a:stretch>
-            <a:fillRect/>
-          </a:stretch>
-        </p:blipFill>
-        <p:spPr>
-          <a:xfrm>
-            <a:off x="9517075" y="1836115"/>
-            <a:ext cx="351130" cy="351130"/>
-          </a:xfrm>
-          <a:prstGeom prst="rect">
-            <a:avLst/>
-          </a:prstGeom>
-        </p:spPr>
-      </p:pic>
-      <p:sp>
-        <p:nvSpPr>
-          <p:cNvPr id="27" name="Text 21"/>
-          <p:cNvSpPr txBox="1"/>
-          <p:nvPr/>
-        </p:nvSpPr>
-        <p:spPr>
-          <a:xfrm>
-            <a:off x="9326880" y="2514600"/>
-            <a:ext cx="2103120" cy="320040"/>
-          </a:xfrm>
-          <a:prstGeom prst="rect">
-            <a:avLst/>
-          </a:prstGeom>
-          <a:noFill/>
-          <a:ln/>
-        </p:spPr>
-        <p:txBody>
-          <a:bodyPr wrap="square" lIns="0" tIns="0" rIns="0" bIns="0" rtlCol="0" anchor="t"/>
-          <a:lstStyle/>
-          <a:p>
-            <a:pPr indent="0" marL="0">
-              <a:buNone/>
-            </a:pPr>
-            <a:r>
-              <a:rPr lang="en-US" sz="1400" b="1" dirty="0">
-                <a:solidFill>
-                  <a:srgbClr val="6E6888"/>
-                </a:solidFill>
-              </a:rPr>
-              <a:t>Thành viên 4</a:t>
-            </a:r>
-            <a:endParaRPr lang="en-US" sz="1400" dirty="0"/>
-          </a:p>
-        </p:txBody>
-      </p:sp>
-      <p:sp>
-        <p:nvSpPr>
-          <p:cNvPr id="28" name="Text 22"/>
-          <p:cNvSpPr txBox="1"/>
-          <p:nvPr/>
-        </p:nvSpPr>
-        <p:spPr>
-          <a:xfrm>
-            <a:off x="9326880" y="2834640"/>
-            <a:ext cx="2103120" cy="777240"/>
-          </a:xfrm>
-          <a:prstGeom prst="rect">
-            <a:avLst/>
-          </a:prstGeom>
-          <a:noFill/>
-          <a:ln/>
-        </p:spPr>
-        <p:txBody>
-          <a:bodyPr wrap="square" lIns="0" tIns="0" rIns="0" bIns="0" rtlCol="0" anchor="t"/>
-          <a:lstStyle/>
-          <a:p>
-            <a:pPr indent="0" marL="0">
-              <a:buNone/>
-            </a:pPr>
-            <a:r>
-              <a:rPr lang="en-US" sz="1900" b="1" dirty="0">
-                <a:solidFill>
-                  <a:schemeClr val="tx2"/>
-                </a:solidFill>
-              </a:rPr>
-              <a:t>Nhắc hạn, thống kê, kiểm thử</a:t>
-            </a:r>
-            <a:endParaRPr lang="en-US" sz="1900" dirty="0"/>
-          </a:p>
-        </p:txBody>
-      </p:sp>
-      <p:sp>
-        <p:nvSpPr>
-          <p:cNvPr id="29" name="Text 23"/>
-          <p:cNvSpPr txBox="1"/>
-          <p:nvPr/>
-        </p:nvSpPr>
-        <p:spPr>
-          <a:xfrm>
-            <a:off x="9326880" y="3657600"/>
-            <a:ext cx="2194560" cy="1828800"/>
-          </a:xfrm>
-          <a:prstGeom prst="rect">
-            <a:avLst/>
-          </a:prstGeom>
-          <a:noFill/>
-          <a:ln/>
-        </p:spPr>
-        <p:txBody>
-          <a:bodyPr wrap="square" lIns="0" tIns="0" rIns="0" bIns="0" rtlCol="0" anchor="t"/>
-          <a:lstStyle/>
-          <a:p>
-            <a:pPr marL="342900" indent="-342900">
-              <a:spcAft>
-                <a:spcPts val="600"/>
-              </a:spcAft>
-              <a:buSzPct val="100000"/>
-              <a:buChar char="•"/>
-            </a:pPr>
-            <a:r>
-              <a:rPr lang="en-US" sz="1400" dirty="0">
-                <a:solidFill>
-                  <a:srgbClr val="4A4560"/>
-                </a:solidFill>
-              </a:rPr>
-              <a:t>Tính chi phí tháng, màn hình thống kê</a:t>
-            </a:r>
-            <a:endParaRPr lang="en-US" sz="1400" dirty="0"/>
-          </a:p>
-          <a:p>
-            <a:pPr marL="342900" indent="-342900">
-              <a:spcAft>
-                <a:spcPts val="600"/>
-              </a:spcAft>
-              <a:buSzPct val="100000"/>
-              <a:buChar char="•"/>
-            </a:pPr>
-            <a:r>
-              <a:rPr lang="en-US" sz="1400" dirty="0">
-                <a:solidFill>
-                  <a:srgbClr val="4A4560"/>
-                </a:solidFill>
-              </a:rPr>
-              <a:t>Nhắc hạn, thông báo cục bộ</a:t>
-            </a:r>
-            <a:endParaRPr lang="en-US" sz="1400" dirty="0"/>
-          </a:p>
-          <a:p>
-            <a:pPr marL="342900" indent="-342900">
-              <a:spcAft>
-                <a:spcPts val="600"/>
-              </a:spcAft>
-              <a:buSzPct val="100000"/>
-              <a:buChar char="•"/>
-            </a:pPr>
-            <a:r>
-              <a:rPr lang="en-US" sz="1400" dirty="0">
-                <a:solidFill>
-                  <a:srgbClr val="4A4560"/>
-                </a:solidFill>
-              </a:rPr>
-              <a:t>Test case, tích hợp Git, dữ liệu demo</a:t>
-            </a:r>
-            <a:endParaRPr lang="en-US" sz="1400" dirty="0"/>
-          </a:p>
-        </p:txBody>
-      </p:sp>
-      <p:sp>
-        <p:nvSpPr>
-          <p:cNvPr id="30" name="Text 24"/>
-          <p:cNvSpPr txBox="1"/>
-          <p:nvPr/>
-        </p:nvSpPr>
-        <p:spPr>
-          <a:xfrm>
-            <a:off x="9326880" y="5669280"/>
-            <a:ext cx="2103120" cy="320040"/>
-          </a:xfrm>
-          <a:prstGeom prst="rect">
-            <a:avLst/>
-          </a:prstGeom>
-          <a:noFill/>
-          <a:ln/>
-        </p:spPr>
-        <p:txBody>
-          <a:bodyPr wrap="square" lIns="0" tIns="0" rIns="0" bIns="0" rtlCol="0" anchor="t"/>
-          <a:lstStyle/>
-          <a:p>
-            <a:pPr indent="0" marL="0">
-              <a:buNone/>
-            </a:pPr>
-            <a:r>
-              <a:rPr lang="en-US" sz="1400" i="1" dirty="0">
-                <a:solidFill>
-                  <a:srgbClr val="6E6888"/>
-                </a:solidFill>
-              </a:rPr>
-              <a:t>Họ tên: ………………</a:t>
-            </a:r>
-            <a:endParaRPr lang="en-US" sz="1400" dirty="0"/>
-          </a:p>
-        </p:txBody>
-      </p:sp>
+              <a:rPr lang="en-US" sz="1300" dirty="0">
+                <a:solidFill>
+                  <a:schemeClr val="bg1"/>
+                </a:solidFill>
+              </a:rPr>
+              <a:t>SQLiteOpenHelper · SharedPreferences</a:t>
+            </a:r>
+            <a:endParaRPr lang="en-US" sz="1500" dirty="0"/>
+          </a:p>
+        </p:txBody>
+      </p:sp>
+      <p:graphicFrame>
+        <p:nvGraphicFramePr>
+          <p:cNvPr id="11" name="Table 0"/>
+          <p:cNvGraphicFramePr>
+            <a:graphicFrameLocks noGrp="1"/>
+          </p:cNvGraphicFramePr>
+          <p:nvPr>
+            <p:extLst>
+              <p:ext uri="{D42A27DB-BD31-4B8C-83A1-F6EECF244321}">
+                <p14:modId xmlns:p14="http://schemas.microsoft.com/office/powerpoint/2010/main" val="1579011935"/>
+              </p:ext>
+            </p:extLst>
+          </p:nvPr>
+        </p:nvGraphicFramePr>
+        <p:xfrm>
+          <a:off x="4343400" y="1371600"/>
+          <a:ext cx="7269480" cy="914400"/>
+        </p:xfrm>
+        <a:graphic>
+          <a:graphicData uri="http://schemas.openxmlformats.org/drawingml/2006/table">
+            <a:tbl>
+              <a:tblPr/>
+              <a:tblGrid>
+                <a:gridCol w="2697480"/>
+                <a:gridCol w="4572000"/>
+              </a:tblGrid>
+              <a:tr h="475488">
+                <a:tc>
+                  <a:txBody>
+                    <a:bodyPr/>
+                    <a:lstStyle/>
+                    <a:p>
+                      <a:pPr indent="0" marL="0">
+                        <a:buNone/>
+                      </a:pPr>
+                      <a:r>
+                        <a:rPr lang="en-US" sz="1300" b="1" dirty="0">
+                          <a:solidFill>
+                            <a:srgbClr val="FFFFFF"/>
+                          </a:solidFill>
+                          <a:latin typeface="Calibri" pitchFamily="34" charset="0"/>
+                          <a:ea typeface="Calibri" pitchFamily="34" charset="-122"/>
+                          <a:cs typeface="Calibri" pitchFamily="34" charset="-120"/>
+                        </a:rPr>
+                        <a:t>Công nghệ</a:t>
+                      </a:r>
+                      <a:endParaRPr lang="en-US" sz="1300" dirty="0">
+                        <a:latin typeface="Calibri" charset="0"/>
+                        <a:ea typeface="Calibri" charset="0"/>
+                        <a:cs typeface="Calibri" charset="0"/>
+                      </a:endParaRPr>
+                    </a:p>
+                  </a:txBody>
+                  <a:tcPr marL="54864" marR="54864" marT="54864" marB="54864" anchor="ctr">
+                    <a:lnL w="9525" cap="flat" cmpd="sng" algn="ctr">
+                      <a:solidFill>
+                        <a:srgbClr val="D9D4EC"/>
+                      </a:solidFill>
+                      <a:prstDash val="solid"/>
+                      <a:round/>
+                      <a:headEnd type="none" w="med" len="med"/>
+                      <a:tailEnd type="none" w="med" len="med"/>
+                    </a:lnL>
+                    <a:lnR w="9525" cap="flat" cmpd="sng" algn="ctr">
+                      <a:solidFill>
+                        <a:srgbClr val="D9D4EC"/>
+                      </a:solidFill>
+                      <a:prstDash val="solid"/>
+                      <a:round/>
+                      <a:headEnd type="none" w="med" len="med"/>
+                      <a:tailEnd type="none" w="med" len="med"/>
+                    </a:lnR>
+                    <a:lnT w="9525" cap="flat" cmpd="sng" algn="ctr">
+                      <a:solidFill>
+                        <a:srgbClr val="D9D4EC"/>
+                      </a:solidFill>
+                      <a:prstDash val="solid"/>
+                      <a:round/>
+                      <a:headEnd type="none" w="med" len="med"/>
+                      <a:tailEnd type="none" w="med" len="med"/>
+                    </a:lnT>
+                    <a:lnB w="9525" cap="flat" cmpd="sng" algn="ctr">
+                      <a:solidFill>
+                        <a:srgbClr val="D9D4EC"/>
+                      </a:solidFill>
+                      <a:prstDash val="solid"/>
+                      <a:round/>
+                      <a:headEnd type="none" w="med" len="med"/>
+                      <a:tailEnd type="none" w="med" len="med"/>
+                    </a:lnB>
+                    <a:solidFill>
+                      <a:srgbClr val="2B1B5A"/>
+                    </a:solidFill>
+                  </a:tcPr>
+                </a:tc>
+                <a:tc>
+                  <a:txBody>
+                    <a:bodyPr/>
+                    <a:lstStyle/>
+                    <a:p>
+                      <a:pPr indent="0" marL="0">
+                        <a:buNone/>
+                      </a:pPr>
+                      <a:r>
+                        <a:rPr lang="en-US" sz="1300" b="1" dirty="0">
+                          <a:solidFill>
+                            <a:srgbClr val="FFFFFF"/>
+                          </a:solidFill>
+                          <a:latin typeface="Calibri" pitchFamily="34" charset="0"/>
+                          <a:ea typeface="Calibri" pitchFamily="34" charset="-122"/>
+                          <a:cs typeface="Calibri" pitchFamily="34" charset="-120"/>
+                        </a:rPr>
+                        <a:t>Lý do lựa chọn</a:t>
+                      </a:r>
+                      <a:endParaRPr lang="en-US" sz="1300" dirty="0">
+                        <a:latin typeface="Calibri" charset="0"/>
+                        <a:ea typeface="Calibri" charset="0"/>
+                        <a:cs typeface="Calibri" charset="0"/>
+                      </a:endParaRPr>
+                    </a:p>
+                  </a:txBody>
+                  <a:tcPr marL="54864" marR="54864" marT="54864" marB="54864" anchor="ctr">
+                    <a:lnL w="9525" cap="flat" cmpd="sng" algn="ctr">
+                      <a:solidFill>
+                        <a:srgbClr val="D9D4EC"/>
+                      </a:solidFill>
+                      <a:prstDash val="solid"/>
+                      <a:round/>
+                      <a:headEnd type="none" w="med" len="med"/>
+                      <a:tailEnd type="none" w="med" len="med"/>
+                    </a:lnL>
+                    <a:lnR w="9525" cap="flat" cmpd="sng" algn="ctr">
+                      <a:solidFill>
+                        <a:srgbClr val="D9D4EC"/>
+                      </a:solidFill>
+                      <a:prstDash val="solid"/>
+                      <a:round/>
+                      <a:headEnd type="none" w="med" len="med"/>
+                      <a:tailEnd type="none" w="med" len="med"/>
+                    </a:lnR>
+                    <a:lnT w="9525" cap="flat" cmpd="sng" algn="ctr">
+                      <a:solidFill>
+                        <a:srgbClr val="D9D4EC"/>
+                      </a:solidFill>
+                      <a:prstDash val="solid"/>
+                      <a:round/>
+                      <a:headEnd type="none" w="med" len="med"/>
+                      <a:tailEnd type="none" w="med" len="med"/>
+                    </a:lnT>
+                    <a:lnB w="9525" cap="flat" cmpd="sng" algn="ctr">
+                      <a:solidFill>
+                        <a:srgbClr val="D9D4EC"/>
+                      </a:solidFill>
+                      <a:prstDash val="solid"/>
+                      <a:round/>
+                      <a:headEnd type="none" w="med" len="med"/>
+                      <a:tailEnd type="none" w="med" len="med"/>
+                    </a:lnB>
+                    <a:solidFill>
+                      <a:srgbClr val="2B1B5A"/>
+                    </a:solidFill>
+                  </a:tcPr>
+                </a:tc>
+              </a:tr>
+              <a:tr h="475488">
+                <a:tc>
+                  <a:txBody>
+                    <a:bodyPr/>
+                    <a:lstStyle/>
+                    <a:p>
+                      <a:pPr indent="0" marL="0">
+                        <a:buNone/>
+                      </a:pPr>
+                      <a:r>
+                        <a:rPr lang="en-US" sz="1300" b="1" dirty="0">
+                          <a:solidFill>
+                            <a:srgbClr val="2B1B5A"/>
+                          </a:solidFill>
+                          <a:latin typeface="Calibri" pitchFamily="34" charset="0"/>
+                          <a:ea typeface="Calibri" pitchFamily="34" charset="-122"/>
+                          <a:cs typeface="Calibri" pitchFamily="34" charset="-120"/>
+                        </a:rPr>
+                        <a:t>Kotlin, Jetpack Compose, Material 3</a:t>
+                      </a:r>
+                      <a:endParaRPr lang="en-US" sz="1300" dirty="0">
+                        <a:latin typeface="Calibri" charset="0"/>
+                        <a:ea typeface="Calibri" charset="0"/>
+                        <a:cs typeface="Calibri" charset="0"/>
+                      </a:endParaRPr>
+                    </a:p>
+                  </a:txBody>
+                  <a:tcPr marL="54864" marR="54864" marT="54864" marB="54864" anchor="ctr">
+                    <a:lnL w="9525" cap="flat" cmpd="sng" algn="ctr">
+                      <a:solidFill>
+                        <a:srgbClr val="D9D4EC"/>
+                      </a:solidFill>
+                      <a:prstDash val="solid"/>
+                      <a:round/>
+                      <a:headEnd type="none" w="med" len="med"/>
+                      <a:tailEnd type="none" w="med" len="med"/>
+                    </a:lnL>
+                    <a:lnR w="9525" cap="flat" cmpd="sng" algn="ctr">
+                      <a:solidFill>
+                        <a:srgbClr val="D9D4EC"/>
+                      </a:solidFill>
+                      <a:prstDash val="solid"/>
+                      <a:round/>
+                      <a:headEnd type="none" w="med" len="med"/>
+                      <a:tailEnd type="none" w="med" len="med"/>
+                    </a:lnR>
+                    <a:lnT w="9525" cap="flat" cmpd="sng" algn="ctr">
+                      <a:solidFill>
+                        <a:srgbClr val="D9D4EC"/>
+                      </a:solidFill>
+                      <a:prstDash val="solid"/>
+                      <a:round/>
+                      <a:headEnd type="none" w="med" len="med"/>
+                      <a:tailEnd type="none" w="med" len="med"/>
+                    </a:lnT>
+                    <a:lnB w="9525" cap="flat" cmpd="sng" algn="ctr">
+                      <a:solidFill>
+                        <a:srgbClr val="D9D4EC"/>
+                      </a:solidFill>
+                      <a:prstDash val="solid"/>
+                      <a:round/>
+                      <a:headEnd type="none" w="med" len="med"/>
+                      <a:tailEnd type="none" w="med" len="med"/>
+                    </a:lnB>
+                    <a:solidFill>
+                      <a:srgbClr val="F3F0FB"/>
+                    </a:solidFill>
+                  </a:tcPr>
+                </a:tc>
+                <a:tc>
+                  <a:txBody>
+                    <a:bodyPr/>
+                    <a:lstStyle/>
+                    <a:p>
+                      <a:pPr indent="0" marL="0">
+                        <a:buNone/>
+                      </a:pPr>
+                      <a:r>
+                        <a:rPr lang="en-US" sz="1300" dirty="0">
+                          <a:solidFill>
+                            <a:srgbClr val="3A3550"/>
+                          </a:solidFill>
+                          <a:latin typeface="Calibri" pitchFamily="34" charset="0"/>
+                          <a:ea typeface="Calibri" pitchFamily="34" charset="-122"/>
+                          <a:cs typeface="Calibri" pitchFamily="34" charset="-120"/>
+                        </a:rPr>
+                        <a:t>Giao diện Android bằng Kotlin, hiển thị theo trạng thái, hỗ trợ sáng/tối</a:t>
+                      </a:r>
+                      <a:endParaRPr lang="en-US" sz="1300" dirty="0">
+                        <a:latin typeface="Calibri" charset="0"/>
+                        <a:ea typeface="Calibri" charset="0"/>
+                        <a:cs typeface="Calibri" charset="0"/>
+                      </a:endParaRPr>
+                    </a:p>
+                  </a:txBody>
+                  <a:tcPr marL="54864" marR="54864" marT="54864" marB="54864" anchor="ctr">
+                    <a:lnL w="9525" cap="flat" cmpd="sng" algn="ctr">
+                      <a:solidFill>
+                        <a:srgbClr val="D9D4EC"/>
+                      </a:solidFill>
+                      <a:prstDash val="solid"/>
+                      <a:round/>
+                      <a:headEnd type="none" w="med" len="med"/>
+                      <a:tailEnd type="none" w="med" len="med"/>
+                    </a:lnL>
+                    <a:lnR w="9525" cap="flat" cmpd="sng" algn="ctr">
+                      <a:solidFill>
+                        <a:srgbClr val="D9D4EC"/>
+                      </a:solidFill>
+                      <a:prstDash val="solid"/>
+                      <a:round/>
+                      <a:headEnd type="none" w="med" len="med"/>
+                      <a:tailEnd type="none" w="med" len="med"/>
+                    </a:lnR>
+                    <a:lnT w="9525" cap="flat" cmpd="sng" algn="ctr">
+                      <a:solidFill>
+                        <a:srgbClr val="D9D4EC"/>
+                      </a:solidFill>
+                      <a:prstDash val="solid"/>
+                      <a:round/>
+                      <a:headEnd type="none" w="med" len="med"/>
+                      <a:tailEnd type="none" w="med" len="med"/>
+                    </a:lnT>
+                    <a:lnB w="9525" cap="flat" cmpd="sng" algn="ctr">
+                      <a:solidFill>
+                        <a:srgbClr val="D9D4EC"/>
+                      </a:solidFill>
+                      <a:prstDash val="solid"/>
+                      <a:round/>
+                      <a:headEnd type="none" w="med" len="med"/>
+                      <a:tailEnd type="none" w="med" len="med"/>
+                    </a:lnB>
+                    <a:solidFill>
+                      <a:srgbClr val="F3F0FB"/>
+                    </a:solidFill>
+                  </a:tcPr>
+                </a:tc>
+              </a:tr>
+              <a:tr h="475488">
+                <a:tc>
+                  <a:txBody>
+                    <a:bodyPr/>
+                    <a:lstStyle/>
+                    <a:p>
+                      <a:pPr indent="0" marL="0">
+                        <a:buNone/>
+                      </a:pPr>
+                      <a:r>
+                        <a:rPr lang="en-US" sz="1300" b="1" dirty="0">
+                          <a:solidFill>
+                            <a:srgbClr val="2B1B5A"/>
+                          </a:solidFill>
+                          <a:latin typeface="Calibri" pitchFamily="34" charset="0"/>
+                          <a:ea typeface="Calibri" pitchFamily="34" charset="-122"/>
+                          <a:cs typeface="Calibri" pitchFamily="34" charset="-120"/>
+                        </a:rPr>
+                        <a:t>ViewModel, StateFlow, Repository</a:t>
+                      </a:r>
+                      <a:endParaRPr lang="en-US" sz="1300" dirty="0">
+                        <a:latin typeface="Calibri" charset="0"/>
+                        <a:ea typeface="Calibri" charset="0"/>
+                        <a:cs typeface="Calibri" charset="0"/>
+                      </a:endParaRPr>
+                    </a:p>
+                  </a:txBody>
+                  <a:tcPr marL="54864" marR="54864" marT="54864" marB="54864" anchor="ctr">
+                    <a:lnL w="9525" cap="flat" cmpd="sng" algn="ctr">
+                      <a:solidFill>
+                        <a:srgbClr val="D9D4EC"/>
+                      </a:solidFill>
+                      <a:prstDash val="solid"/>
+                      <a:round/>
+                      <a:headEnd type="none" w="med" len="med"/>
+                      <a:tailEnd type="none" w="med" len="med"/>
+                    </a:lnL>
+                    <a:lnR w="9525" cap="flat" cmpd="sng" algn="ctr">
+                      <a:solidFill>
+                        <a:srgbClr val="D9D4EC"/>
+                      </a:solidFill>
+                      <a:prstDash val="solid"/>
+                      <a:round/>
+                      <a:headEnd type="none" w="med" len="med"/>
+                      <a:tailEnd type="none" w="med" len="med"/>
+                    </a:lnR>
+                    <a:lnT w="9525" cap="flat" cmpd="sng" algn="ctr">
+                      <a:solidFill>
+                        <a:srgbClr val="D9D4EC"/>
+                      </a:solidFill>
+                      <a:prstDash val="solid"/>
+                      <a:round/>
+                      <a:headEnd type="none" w="med" len="med"/>
+                      <a:tailEnd type="none" w="med" len="med"/>
+                    </a:lnT>
+                    <a:lnB w="9525" cap="flat" cmpd="sng" algn="ctr">
+                      <a:solidFill>
+                        <a:srgbClr val="D9D4EC"/>
+                      </a:solidFill>
+                      <a:prstDash val="solid"/>
+                      <a:round/>
+                      <a:headEnd type="none" w="med" len="med"/>
+                      <a:tailEnd type="none" w="med" len="med"/>
+                    </a:lnB>
+                    <a:solidFill>
+                      <a:srgbClr val="FFFFFF"/>
+                    </a:solidFill>
+                  </a:tcPr>
+                </a:tc>
+                <a:tc>
+                  <a:txBody>
+                    <a:bodyPr/>
+                    <a:lstStyle/>
+                    <a:p>
+                      <a:pPr indent="0" marL="0">
+                        <a:buNone/>
+                      </a:pPr>
+                      <a:r>
+                        <a:rPr lang="en-US" sz="1300" dirty="0">
+                          <a:solidFill>
+                            <a:srgbClr val="3A3550"/>
+                          </a:solidFill>
+                          <a:latin typeface="Calibri" pitchFamily="34" charset="0"/>
+                          <a:ea typeface="Calibri" pitchFamily="34" charset="-122"/>
+                          <a:cs typeface="Calibri" pitchFamily="34" charset="-120"/>
+                        </a:rPr>
+                        <a:t>Tách xử lý màn hình khỏi đọc/ghi dữ liệu; UI theo dõi trạng thái</a:t>
+                      </a:r>
+                      <a:endParaRPr lang="en-US" sz="1300" dirty="0">
+                        <a:latin typeface="Calibri" charset="0"/>
+                        <a:ea typeface="Calibri" charset="0"/>
+                        <a:cs typeface="Calibri" charset="0"/>
+                      </a:endParaRPr>
+                    </a:p>
+                  </a:txBody>
+                  <a:tcPr marL="54864" marR="54864" marT="54864" marB="54864" anchor="ctr">
+                    <a:lnL w="9525" cap="flat" cmpd="sng" algn="ctr">
+                      <a:solidFill>
+                        <a:srgbClr val="D9D4EC"/>
+                      </a:solidFill>
+                      <a:prstDash val="solid"/>
+                      <a:round/>
+                      <a:headEnd type="none" w="med" len="med"/>
+                      <a:tailEnd type="none" w="med" len="med"/>
+                    </a:lnL>
+                    <a:lnR w="9525" cap="flat" cmpd="sng" algn="ctr">
+                      <a:solidFill>
+                        <a:srgbClr val="D9D4EC"/>
+                      </a:solidFill>
+                      <a:prstDash val="solid"/>
+                      <a:round/>
+                      <a:headEnd type="none" w="med" len="med"/>
+                      <a:tailEnd type="none" w="med" len="med"/>
+                    </a:lnR>
+                    <a:lnT w="9525" cap="flat" cmpd="sng" algn="ctr">
+                      <a:solidFill>
+                        <a:srgbClr val="D9D4EC"/>
+                      </a:solidFill>
+                      <a:prstDash val="solid"/>
+                      <a:round/>
+                      <a:headEnd type="none" w="med" len="med"/>
+                      <a:tailEnd type="none" w="med" len="med"/>
+                    </a:lnT>
+                    <a:lnB w="9525" cap="flat" cmpd="sng" algn="ctr">
+                      <a:solidFill>
+                        <a:srgbClr val="D9D4EC"/>
+                      </a:solidFill>
+                      <a:prstDash val="solid"/>
+                      <a:round/>
+                      <a:headEnd type="none" w="med" len="med"/>
+                      <a:tailEnd type="none" w="med" len="med"/>
+                    </a:lnB>
+                    <a:solidFill>
+                      <a:srgbClr val="FFFFFF"/>
+                    </a:solidFill>
+                  </a:tcPr>
+                </a:tc>
+              </a:tr>
+              <a:tr h="475488">
+                <a:tc>
+                  <a:txBody>
+                    <a:bodyPr/>
+                    <a:lstStyle/>
+                    <a:p>
+                      <a:pPr indent="0" marL="0">
+                        <a:buNone/>
+                      </a:pPr>
+                      <a:r>
+                        <a:rPr lang="en-US" sz="1300" b="1" dirty="0">
+                          <a:solidFill>
+                            <a:srgbClr val="2B1B5A"/>
+                          </a:solidFill>
+                          <a:latin typeface="Calibri" pitchFamily="34" charset="0"/>
+                          <a:ea typeface="Calibri" pitchFamily="34" charset="-122"/>
+                          <a:cs typeface="Calibri" pitchFamily="34" charset="-120"/>
+                        </a:rPr>
+                        <a:t>SQLiteOpenHelper</a:t>
+                      </a:r>
+                      <a:endParaRPr lang="en-US" sz="1300" dirty="0">
+                        <a:latin typeface="Calibri" charset="0"/>
+                        <a:ea typeface="Calibri" charset="0"/>
+                        <a:cs typeface="Calibri" charset="0"/>
+                      </a:endParaRPr>
+                    </a:p>
+                  </a:txBody>
+                  <a:tcPr marL="54864" marR="54864" marT="54864" marB="54864" anchor="ctr">
+                    <a:lnL w="9525" cap="flat" cmpd="sng" algn="ctr">
+                      <a:solidFill>
+                        <a:srgbClr val="D9D4EC"/>
+                      </a:solidFill>
+                      <a:prstDash val="solid"/>
+                      <a:round/>
+                      <a:headEnd type="none" w="med" len="med"/>
+                      <a:tailEnd type="none" w="med" len="med"/>
+                    </a:lnL>
+                    <a:lnR w="9525" cap="flat" cmpd="sng" algn="ctr">
+                      <a:solidFill>
+                        <a:srgbClr val="D9D4EC"/>
+                      </a:solidFill>
+                      <a:prstDash val="solid"/>
+                      <a:round/>
+                      <a:headEnd type="none" w="med" len="med"/>
+                      <a:tailEnd type="none" w="med" len="med"/>
+                    </a:lnR>
+                    <a:lnT w="9525" cap="flat" cmpd="sng" algn="ctr">
+                      <a:solidFill>
+                        <a:srgbClr val="D9D4EC"/>
+                      </a:solidFill>
+                      <a:prstDash val="solid"/>
+                      <a:round/>
+                      <a:headEnd type="none" w="med" len="med"/>
+                      <a:tailEnd type="none" w="med" len="med"/>
+                    </a:lnT>
+                    <a:lnB w="9525" cap="flat" cmpd="sng" algn="ctr">
+                      <a:solidFill>
+                        <a:srgbClr val="D9D4EC"/>
+                      </a:solidFill>
+                      <a:prstDash val="solid"/>
+                      <a:round/>
+                      <a:headEnd type="none" w="med" len="med"/>
+                      <a:tailEnd type="none" w="med" len="med"/>
+                    </a:lnB>
+                    <a:solidFill>
+                      <a:srgbClr val="F3F0FB"/>
+                    </a:solidFill>
+                  </a:tcPr>
+                </a:tc>
+                <a:tc>
+                  <a:txBody>
+                    <a:bodyPr/>
+                    <a:lstStyle/>
+                    <a:p>
+                      <a:pPr indent="0" marL="0">
+                        <a:buNone/>
+                      </a:pPr>
+                      <a:r>
+                        <a:rPr lang="en-US" sz="1300" dirty="0">
+                          <a:solidFill>
+                            <a:srgbClr val="3A3550"/>
+                          </a:solidFill>
+                          <a:latin typeface="Calibri" pitchFamily="34" charset="0"/>
+                          <a:ea typeface="Calibri" pitchFamily="34" charset="-122"/>
+                          <a:cs typeface="Calibri" pitchFamily="34" charset="-120"/>
+                        </a:rPr>
+                        <a:t>Lưu dữ liệu quan hệ trên máy, ngoại tuyến, không cần máy chủ</a:t>
+                      </a:r>
+                      <a:endParaRPr lang="en-US" sz="1300" dirty="0">
+                        <a:latin typeface="Calibri" charset="0"/>
+                        <a:ea typeface="Calibri" charset="0"/>
+                        <a:cs typeface="Calibri" charset="0"/>
+                      </a:endParaRPr>
+                    </a:p>
+                  </a:txBody>
+                  <a:tcPr marL="54864" marR="54864" marT="54864" marB="54864" anchor="ctr">
+                    <a:lnL w="9525" cap="flat" cmpd="sng" algn="ctr">
+                      <a:solidFill>
+                        <a:srgbClr val="D9D4EC"/>
+                      </a:solidFill>
+                      <a:prstDash val="solid"/>
+                      <a:round/>
+                      <a:headEnd type="none" w="med" len="med"/>
+                      <a:tailEnd type="none" w="med" len="med"/>
+                    </a:lnL>
+                    <a:lnR w="9525" cap="flat" cmpd="sng" algn="ctr">
+                      <a:solidFill>
+                        <a:srgbClr val="D9D4EC"/>
+                      </a:solidFill>
+                      <a:prstDash val="solid"/>
+                      <a:round/>
+                      <a:headEnd type="none" w="med" len="med"/>
+                      <a:tailEnd type="none" w="med" len="med"/>
+                    </a:lnR>
+                    <a:lnT w="9525" cap="flat" cmpd="sng" algn="ctr">
+                      <a:solidFill>
+                        <a:srgbClr val="D9D4EC"/>
+                      </a:solidFill>
+                      <a:prstDash val="solid"/>
+                      <a:round/>
+                      <a:headEnd type="none" w="med" len="med"/>
+                      <a:tailEnd type="none" w="med" len="med"/>
+                    </a:lnT>
+                    <a:lnB w="9525" cap="flat" cmpd="sng" algn="ctr">
+                      <a:solidFill>
+                        <a:srgbClr val="D9D4EC"/>
+                      </a:solidFill>
+                      <a:prstDash val="solid"/>
+                      <a:round/>
+                      <a:headEnd type="none" w="med" len="med"/>
+                      <a:tailEnd type="none" w="med" len="med"/>
+                    </a:lnB>
+                    <a:solidFill>
+                      <a:srgbClr val="F3F0FB"/>
+                    </a:solidFill>
+                  </a:tcPr>
+                </a:tc>
+              </a:tr>
+              <a:tr h="475488">
+                <a:tc>
+                  <a:txBody>
+                    <a:bodyPr/>
+                    <a:lstStyle/>
+                    <a:p>
+                      <a:pPr indent="0" marL="0">
+                        <a:buNone/>
+                      </a:pPr>
+                      <a:r>
+                        <a:rPr lang="en-US" sz="1300" b="1" dirty="0">
+                          <a:solidFill>
+                            <a:srgbClr val="2B1B5A"/>
+                          </a:solidFill>
+                          <a:latin typeface="Calibri" pitchFamily="34" charset="0"/>
+                          <a:ea typeface="Calibri" pitchFamily="34" charset="-122"/>
+                          <a:cs typeface="Calibri" pitchFamily="34" charset="-120"/>
+                        </a:rPr>
+                        <a:t>SharedPreferences</a:t>
+                      </a:r>
+                      <a:endParaRPr lang="en-US" sz="1300" dirty="0">
+                        <a:latin typeface="Calibri" charset="0"/>
+                        <a:ea typeface="Calibri" charset="0"/>
+                        <a:cs typeface="Calibri" charset="0"/>
+                      </a:endParaRPr>
+                    </a:p>
+                  </a:txBody>
+                  <a:tcPr marL="54864" marR="54864" marT="54864" marB="54864" anchor="ctr">
+                    <a:lnL w="9525" cap="flat" cmpd="sng" algn="ctr">
+                      <a:solidFill>
+                        <a:srgbClr val="D9D4EC"/>
+                      </a:solidFill>
+                      <a:prstDash val="solid"/>
+                      <a:round/>
+                      <a:headEnd type="none" w="med" len="med"/>
+                      <a:tailEnd type="none" w="med" len="med"/>
+                    </a:lnL>
+                    <a:lnR w="9525" cap="flat" cmpd="sng" algn="ctr">
+                      <a:solidFill>
+                        <a:srgbClr val="D9D4EC"/>
+                      </a:solidFill>
+                      <a:prstDash val="solid"/>
+                      <a:round/>
+                      <a:headEnd type="none" w="med" len="med"/>
+                      <a:tailEnd type="none" w="med" len="med"/>
+                    </a:lnR>
+                    <a:lnT w="9525" cap="flat" cmpd="sng" algn="ctr">
+                      <a:solidFill>
+                        <a:srgbClr val="D9D4EC"/>
+                      </a:solidFill>
+                      <a:prstDash val="solid"/>
+                      <a:round/>
+                      <a:headEnd type="none" w="med" len="med"/>
+                      <a:tailEnd type="none" w="med" len="med"/>
+                    </a:lnT>
+                    <a:lnB w="9525" cap="flat" cmpd="sng" algn="ctr">
+                      <a:solidFill>
+                        <a:srgbClr val="D9D4EC"/>
+                      </a:solidFill>
+                      <a:prstDash val="solid"/>
+                      <a:round/>
+                      <a:headEnd type="none" w="med" len="med"/>
+                      <a:tailEnd type="none" w="med" len="med"/>
+                    </a:lnB>
+                    <a:solidFill>
+                      <a:srgbClr val="FFFFFF"/>
+                    </a:solidFill>
+                  </a:tcPr>
+                </a:tc>
+                <a:tc>
+                  <a:txBody>
+                    <a:bodyPr/>
+                    <a:lstStyle/>
+                    <a:p>
+                      <a:pPr indent="0" marL="0">
+                        <a:buNone/>
+                      </a:pPr>
+                      <a:r>
+                        <a:rPr lang="en-US" sz="1300" dirty="0">
+                          <a:solidFill>
+                            <a:srgbClr val="3A3550"/>
+                          </a:solidFill>
+                          <a:latin typeface="Calibri" pitchFamily="34" charset="0"/>
+                          <a:ea typeface="Calibri" pitchFamily="34" charset="-122"/>
+                          <a:cs typeface="Calibri" pitchFamily="34" charset="-120"/>
+                        </a:rPr>
+                        <a:t>Tùy chọn nhỏ: tiền tệ mặc định, bật/tắt nhắc, dấu đã nhắc</a:t>
+                      </a:r>
+                      <a:endParaRPr lang="en-US" sz="1300" dirty="0">
+                        <a:latin typeface="Calibri" charset="0"/>
+                        <a:ea typeface="Calibri" charset="0"/>
+                        <a:cs typeface="Calibri" charset="0"/>
+                      </a:endParaRPr>
+                    </a:p>
+                  </a:txBody>
+                  <a:tcPr marL="54864" marR="54864" marT="54864" marB="54864" anchor="ctr">
+                    <a:lnL w="9525" cap="flat" cmpd="sng" algn="ctr">
+                      <a:solidFill>
+                        <a:srgbClr val="D9D4EC"/>
+                      </a:solidFill>
+                      <a:prstDash val="solid"/>
+                      <a:round/>
+                      <a:headEnd type="none" w="med" len="med"/>
+                      <a:tailEnd type="none" w="med" len="med"/>
+                    </a:lnL>
+                    <a:lnR w="9525" cap="flat" cmpd="sng" algn="ctr">
+                      <a:solidFill>
+                        <a:srgbClr val="D9D4EC"/>
+                      </a:solidFill>
+                      <a:prstDash val="solid"/>
+                      <a:round/>
+                      <a:headEnd type="none" w="med" len="med"/>
+                      <a:tailEnd type="none" w="med" len="med"/>
+                    </a:lnR>
+                    <a:lnT w="9525" cap="flat" cmpd="sng" algn="ctr">
+                      <a:solidFill>
+                        <a:srgbClr val="D9D4EC"/>
+                      </a:solidFill>
+                      <a:prstDash val="solid"/>
+                      <a:round/>
+                      <a:headEnd type="none" w="med" len="med"/>
+                      <a:tailEnd type="none" w="med" len="med"/>
+                    </a:lnT>
+                    <a:lnB w="9525" cap="flat" cmpd="sng" algn="ctr">
+                      <a:solidFill>
+                        <a:srgbClr val="D9D4EC"/>
+                      </a:solidFill>
+                      <a:prstDash val="solid"/>
+                      <a:round/>
+                      <a:headEnd type="none" w="med" len="med"/>
+                      <a:tailEnd type="none" w="med" len="med"/>
+                    </a:lnB>
+                    <a:solidFill>
+                      <a:srgbClr val="FFFFFF"/>
+                    </a:solidFill>
+                  </a:tcPr>
+                </a:tc>
+              </a:tr>
+              <a:tr h="475488">
+                <a:tc>
+                  <a:txBody>
+                    <a:bodyPr/>
+                    <a:lstStyle/>
+                    <a:p>
+                      <a:pPr indent="0" marL="0">
+                        <a:buNone/>
+                      </a:pPr>
+                      <a:r>
+                        <a:rPr lang="en-US" sz="1300" b="1" dirty="0">
+                          <a:solidFill>
+                            <a:srgbClr val="2B1B5A"/>
+                          </a:solidFill>
+                          <a:latin typeface="Calibri" pitchFamily="34" charset="0"/>
+                          <a:ea typeface="Calibri" pitchFamily="34" charset="-122"/>
+                          <a:cs typeface="Calibri" pitchFamily="34" charset="-120"/>
+                        </a:rPr>
+                        <a:t>WorkManager</a:t>
+                      </a:r>
+                      <a:endParaRPr lang="en-US" sz="1300" dirty="0">
+                        <a:latin typeface="Calibri" charset="0"/>
+                        <a:ea typeface="Calibri" charset="0"/>
+                        <a:cs typeface="Calibri" charset="0"/>
+                      </a:endParaRPr>
+                    </a:p>
+                  </a:txBody>
+                  <a:tcPr marL="54864" marR="54864" marT="54864" marB="54864" anchor="ctr">
+                    <a:lnL w="9525" cap="flat" cmpd="sng" algn="ctr">
+                      <a:solidFill>
+                        <a:srgbClr val="D9D4EC"/>
+                      </a:solidFill>
+                      <a:prstDash val="solid"/>
+                      <a:round/>
+                      <a:headEnd type="none" w="med" len="med"/>
+                      <a:tailEnd type="none" w="med" len="med"/>
+                    </a:lnL>
+                    <a:lnR w="9525" cap="flat" cmpd="sng" algn="ctr">
+                      <a:solidFill>
+                        <a:srgbClr val="D9D4EC"/>
+                      </a:solidFill>
+                      <a:prstDash val="solid"/>
+                      <a:round/>
+                      <a:headEnd type="none" w="med" len="med"/>
+                      <a:tailEnd type="none" w="med" len="med"/>
+                    </a:lnR>
+                    <a:lnT w="9525" cap="flat" cmpd="sng" algn="ctr">
+                      <a:solidFill>
+                        <a:srgbClr val="D9D4EC"/>
+                      </a:solidFill>
+                      <a:prstDash val="solid"/>
+                      <a:round/>
+                      <a:headEnd type="none" w="med" len="med"/>
+                      <a:tailEnd type="none" w="med" len="med"/>
+                    </a:lnT>
+                    <a:lnB w="9525" cap="flat" cmpd="sng" algn="ctr">
+                      <a:solidFill>
+                        <a:srgbClr val="D9D4EC"/>
+                      </a:solidFill>
+                      <a:prstDash val="solid"/>
+                      <a:round/>
+                      <a:headEnd type="none" w="med" len="med"/>
+                      <a:tailEnd type="none" w="med" len="med"/>
+                    </a:lnB>
+                    <a:solidFill>
+                      <a:srgbClr val="F3F0FB"/>
+                    </a:solidFill>
+                  </a:tcPr>
+                </a:tc>
+                <a:tc>
+                  <a:txBody>
+                    <a:bodyPr/>
+                    <a:lstStyle/>
+                    <a:p>
+                      <a:pPr indent="0" marL="0">
+                        <a:buNone/>
+                      </a:pPr>
+                      <a:r>
+                        <a:rPr lang="en-US" sz="1300" dirty="0">
+                          <a:solidFill>
+                            <a:srgbClr val="3A3550"/>
+                          </a:solidFill>
+                          <a:latin typeface="Calibri" pitchFamily="34" charset="0"/>
+                          <a:ea typeface="Calibri" pitchFamily="34" charset="-122"/>
+                          <a:cs typeface="Calibri" pitchFamily="34" charset="-120"/>
+                        </a:rPr>
+                        <a:t>Kiểm tra nhắc hạn định kỳ và sau khi lưu gói</a:t>
+                      </a:r>
+                      <a:endParaRPr lang="en-US" sz="1300" dirty="0">
+                        <a:latin typeface="Calibri" charset="0"/>
+                        <a:ea typeface="Calibri" charset="0"/>
+                        <a:cs typeface="Calibri" charset="0"/>
+                      </a:endParaRPr>
+                    </a:p>
+                  </a:txBody>
+                  <a:tcPr marL="54864" marR="54864" marT="54864" marB="54864" anchor="ctr">
+                    <a:lnL w="9525" cap="flat" cmpd="sng" algn="ctr">
+                      <a:solidFill>
+                        <a:srgbClr val="D9D4EC"/>
+                      </a:solidFill>
+                      <a:prstDash val="solid"/>
+                      <a:round/>
+                      <a:headEnd type="none" w="med" len="med"/>
+                      <a:tailEnd type="none" w="med" len="med"/>
+                    </a:lnL>
+                    <a:lnR w="9525" cap="flat" cmpd="sng" algn="ctr">
+                      <a:solidFill>
+                        <a:srgbClr val="D9D4EC"/>
+                      </a:solidFill>
+                      <a:prstDash val="solid"/>
+                      <a:round/>
+                      <a:headEnd type="none" w="med" len="med"/>
+                      <a:tailEnd type="none" w="med" len="med"/>
+                    </a:lnR>
+                    <a:lnT w="9525" cap="flat" cmpd="sng" algn="ctr">
+                      <a:solidFill>
+                        <a:srgbClr val="D9D4EC"/>
+                      </a:solidFill>
+                      <a:prstDash val="solid"/>
+                      <a:round/>
+                      <a:headEnd type="none" w="med" len="med"/>
+                      <a:tailEnd type="none" w="med" len="med"/>
+                    </a:lnT>
+                    <a:lnB w="9525" cap="flat" cmpd="sng" algn="ctr">
+                      <a:solidFill>
+                        <a:srgbClr val="D9D4EC"/>
+                      </a:solidFill>
+                      <a:prstDash val="solid"/>
+                      <a:round/>
+                      <a:headEnd type="none" w="med" len="med"/>
+                      <a:tailEnd type="none" w="med" len="med"/>
+                    </a:lnB>
+                    <a:solidFill>
+                      <a:srgbClr val="F3F0FB"/>
+                    </a:solidFill>
+                  </a:tcPr>
+                </a:tc>
+              </a:tr>
+              <a:tr h="475488">
+                <a:tc>
+                  <a:txBody>
+                    <a:bodyPr/>
+                    <a:lstStyle/>
+                    <a:p>
+                      <a:pPr indent="0" marL="0">
+                        <a:buNone/>
+                      </a:pPr>
+                      <a:r>
+                        <a:rPr lang="en-US" sz="1300" b="1" dirty="0">
+                          <a:solidFill>
+                            <a:srgbClr val="2B1B5A"/>
+                          </a:solidFill>
+                          <a:latin typeface="Calibri" pitchFamily="34" charset="0"/>
+                          <a:ea typeface="Calibri" pitchFamily="34" charset="-122"/>
+                          <a:cs typeface="Calibri" pitchFamily="34" charset="-120"/>
+                        </a:rPr>
+                        <a:t>Compose Canvas</a:t>
+                      </a:r>
+                      <a:endParaRPr lang="en-US" sz="1300" dirty="0">
+                        <a:latin typeface="Calibri" charset="0"/>
+                        <a:ea typeface="Calibri" charset="0"/>
+                        <a:cs typeface="Calibri" charset="0"/>
+                      </a:endParaRPr>
+                    </a:p>
+                  </a:txBody>
+                  <a:tcPr marL="54864" marR="54864" marT="54864" marB="54864" anchor="ctr">
+                    <a:lnL w="9525" cap="flat" cmpd="sng" algn="ctr">
+                      <a:solidFill>
+                        <a:srgbClr val="D9D4EC"/>
+                      </a:solidFill>
+                      <a:prstDash val="solid"/>
+                      <a:round/>
+                      <a:headEnd type="none" w="med" len="med"/>
+                      <a:tailEnd type="none" w="med" len="med"/>
+                    </a:lnL>
+                    <a:lnR w="9525" cap="flat" cmpd="sng" algn="ctr">
+                      <a:solidFill>
+                        <a:srgbClr val="D9D4EC"/>
+                      </a:solidFill>
+                      <a:prstDash val="solid"/>
+                      <a:round/>
+                      <a:headEnd type="none" w="med" len="med"/>
+                      <a:tailEnd type="none" w="med" len="med"/>
+                    </a:lnR>
+                    <a:lnT w="9525" cap="flat" cmpd="sng" algn="ctr">
+                      <a:solidFill>
+                        <a:srgbClr val="D9D4EC"/>
+                      </a:solidFill>
+                      <a:prstDash val="solid"/>
+                      <a:round/>
+                      <a:headEnd type="none" w="med" len="med"/>
+                      <a:tailEnd type="none" w="med" len="med"/>
+                    </a:lnT>
+                    <a:lnB w="9525" cap="flat" cmpd="sng" algn="ctr">
+                      <a:solidFill>
+                        <a:srgbClr val="D9D4EC"/>
+                      </a:solidFill>
+                      <a:prstDash val="solid"/>
+                      <a:round/>
+                      <a:headEnd type="none" w="med" len="med"/>
+                      <a:tailEnd type="none" w="med" len="med"/>
+                    </a:lnB>
+                    <a:solidFill>
+                      <a:srgbClr val="FFFFFF"/>
+                    </a:solidFill>
+                  </a:tcPr>
+                </a:tc>
+                <a:tc>
+                  <a:txBody>
+                    <a:bodyPr/>
+                    <a:lstStyle/>
+                    <a:p>
+                      <a:pPr indent="0" marL="0">
+                        <a:buNone/>
+                      </a:pPr>
+                      <a:r>
+                        <a:rPr lang="en-US" sz="1300" dirty="0">
+                          <a:solidFill>
+                            <a:srgbClr val="3A3550"/>
+                          </a:solidFill>
+                          <a:latin typeface="Calibri" pitchFamily="34" charset="0"/>
+                          <a:ea typeface="Calibri" pitchFamily="34" charset="-122"/>
+                          <a:cs typeface="Calibri" pitchFamily="34" charset="-120"/>
+                        </a:rPr>
+                        <a:t>Vẽ biểu đồ tròn, thanh tỷ trọng, không cần thư viện riêng</a:t>
+                      </a:r>
+                      <a:endParaRPr lang="en-US" sz="1300" dirty="0">
+                        <a:latin typeface="Calibri" charset="0"/>
+                        <a:ea typeface="Calibri" charset="0"/>
+                        <a:cs typeface="Calibri" charset="0"/>
+                      </a:endParaRPr>
+                    </a:p>
+                  </a:txBody>
+                  <a:tcPr marL="54864" marR="54864" marT="54864" marB="54864" anchor="ctr">
+                    <a:lnL w="9525" cap="flat" cmpd="sng" algn="ctr">
+                      <a:solidFill>
+                        <a:srgbClr val="D9D4EC"/>
+                      </a:solidFill>
+                      <a:prstDash val="solid"/>
+                      <a:round/>
+                      <a:headEnd type="none" w="med" len="med"/>
+                      <a:tailEnd type="none" w="med" len="med"/>
+                    </a:lnL>
+                    <a:lnR w="9525" cap="flat" cmpd="sng" algn="ctr">
+                      <a:solidFill>
+                        <a:srgbClr val="D9D4EC"/>
+                      </a:solidFill>
+                      <a:prstDash val="solid"/>
+                      <a:round/>
+                      <a:headEnd type="none" w="med" len="med"/>
+                      <a:tailEnd type="none" w="med" len="med"/>
+                    </a:lnR>
+                    <a:lnT w="9525" cap="flat" cmpd="sng" algn="ctr">
+                      <a:solidFill>
+                        <a:srgbClr val="D9D4EC"/>
+                      </a:solidFill>
+                      <a:prstDash val="solid"/>
+                      <a:round/>
+                      <a:headEnd type="none" w="med" len="med"/>
+                      <a:tailEnd type="none" w="med" len="med"/>
+                    </a:lnT>
+                    <a:lnB w="9525" cap="flat" cmpd="sng" algn="ctr">
+                      <a:solidFill>
+                        <a:srgbClr val="D9D4EC"/>
+                      </a:solidFill>
+                      <a:prstDash val="solid"/>
+                      <a:round/>
+                      <a:headEnd type="none" w="med" len="med"/>
+                      <a:tailEnd type="none" w="med" len="med"/>
+                    </a:lnB>
+                    <a:solidFill>
+                      <a:srgbClr val="FFFFFF"/>
+                    </a:solidFill>
+                  </a:tcPr>
+                </a:tc>
+              </a:tr>
+              <a:tr h="475488">
+                <a:tc>
+                  <a:txBody>
+                    <a:bodyPr/>
+                    <a:lstStyle/>
+                    <a:p>
+                      <a:pPr indent="0" marL="0">
+                        <a:buNone/>
+                      </a:pPr>
+                      <a:r>
+                        <a:rPr lang="en-US" sz="1300" b="1" dirty="0">
+                          <a:solidFill>
+                            <a:srgbClr val="2B1B5A"/>
+                          </a:solidFill>
+                          <a:latin typeface="Calibri" pitchFamily="34" charset="0"/>
+                          <a:ea typeface="Calibri" pitchFamily="34" charset="-122"/>
+                          <a:cs typeface="Calibri" pitchFamily="34" charset="-120"/>
+                        </a:rPr>
+                        <a:t>Android Intent</a:t>
+                      </a:r>
+                      <a:endParaRPr lang="en-US" sz="1300" dirty="0">
+                        <a:latin typeface="Calibri" charset="0"/>
+                        <a:ea typeface="Calibri" charset="0"/>
+                        <a:cs typeface="Calibri" charset="0"/>
+                      </a:endParaRPr>
+                    </a:p>
+                  </a:txBody>
+                  <a:tcPr marL="54864" marR="54864" marT="54864" marB="54864" anchor="ctr">
+                    <a:lnL w="9525" cap="flat" cmpd="sng" algn="ctr">
+                      <a:solidFill>
+                        <a:srgbClr val="D9D4EC"/>
+                      </a:solidFill>
+                      <a:prstDash val="solid"/>
+                      <a:round/>
+                      <a:headEnd type="none" w="med" len="med"/>
+                      <a:tailEnd type="none" w="med" len="med"/>
+                    </a:lnL>
+                    <a:lnR w="9525" cap="flat" cmpd="sng" algn="ctr">
+                      <a:solidFill>
+                        <a:srgbClr val="D9D4EC"/>
+                      </a:solidFill>
+                      <a:prstDash val="solid"/>
+                      <a:round/>
+                      <a:headEnd type="none" w="med" len="med"/>
+                      <a:tailEnd type="none" w="med" len="med"/>
+                    </a:lnR>
+                    <a:lnT w="9525" cap="flat" cmpd="sng" algn="ctr">
+                      <a:solidFill>
+                        <a:srgbClr val="D9D4EC"/>
+                      </a:solidFill>
+                      <a:prstDash val="solid"/>
+                      <a:round/>
+                      <a:headEnd type="none" w="med" len="med"/>
+                      <a:tailEnd type="none" w="med" len="med"/>
+                    </a:lnT>
+                    <a:lnB w="9525" cap="flat" cmpd="sng" algn="ctr">
+                      <a:solidFill>
+                        <a:srgbClr val="D9D4EC"/>
+                      </a:solidFill>
+                      <a:prstDash val="solid"/>
+                      <a:round/>
+                      <a:headEnd type="none" w="med" len="med"/>
+                      <a:tailEnd type="none" w="med" len="med"/>
+                    </a:lnB>
+                    <a:solidFill>
+                      <a:srgbClr val="F3F0FB"/>
+                    </a:solidFill>
+                  </a:tcPr>
+                </a:tc>
+                <a:tc>
+                  <a:txBody>
+                    <a:bodyPr/>
+                    <a:lstStyle/>
+                    <a:p>
+                      <a:pPr indent="0" marL="0">
+                        <a:buNone/>
+                      </a:pPr>
+                      <a:r>
+                        <a:rPr lang="en-US" sz="1300" dirty="0">
+                          <a:solidFill>
+                            <a:srgbClr val="3A3550"/>
+                          </a:solidFill>
+                          <a:latin typeface="Calibri" pitchFamily="34" charset="0"/>
+                          <a:ea typeface="Calibri" pitchFamily="34" charset="-122"/>
+                          <a:cs typeface="Calibri" pitchFamily="34" charset="-120"/>
+                        </a:rPr>
+                        <a:t>Chuyển sang Lịch, mở liên kết, chia sẻ báo cáo</a:t>
+                      </a:r>
+                      <a:endParaRPr lang="en-US" sz="1300" dirty="0">
+                        <a:latin typeface="Calibri" charset="0"/>
+                        <a:ea typeface="Calibri" charset="0"/>
+                        <a:cs typeface="Calibri" charset="0"/>
+                      </a:endParaRPr>
+                    </a:p>
+                  </a:txBody>
+                  <a:tcPr marL="54864" marR="54864" marT="54864" marB="54864" anchor="ctr">
+                    <a:lnL w="9525" cap="flat" cmpd="sng" algn="ctr">
+                      <a:solidFill>
+                        <a:srgbClr val="D9D4EC"/>
+                      </a:solidFill>
+                      <a:prstDash val="solid"/>
+                      <a:round/>
+                      <a:headEnd type="none" w="med" len="med"/>
+                      <a:tailEnd type="none" w="med" len="med"/>
+                    </a:lnL>
+                    <a:lnR w="9525" cap="flat" cmpd="sng" algn="ctr">
+                      <a:solidFill>
+                        <a:srgbClr val="D9D4EC"/>
+                      </a:solidFill>
+                      <a:prstDash val="solid"/>
+                      <a:round/>
+                      <a:headEnd type="none" w="med" len="med"/>
+                      <a:tailEnd type="none" w="med" len="med"/>
+                    </a:lnR>
+                    <a:lnT w="9525" cap="flat" cmpd="sng" algn="ctr">
+                      <a:solidFill>
+                        <a:srgbClr val="D9D4EC"/>
+                      </a:solidFill>
+                      <a:prstDash val="solid"/>
+                      <a:round/>
+                      <a:headEnd type="none" w="med" len="med"/>
+                      <a:tailEnd type="none" w="med" len="med"/>
+                    </a:lnT>
+                    <a:lnB w="9525" cap="flat" cmpd="sng" algn="ctr">
+                      <a:solidFill>
+                        <a:srgbClr val="D9D4EC"/>
+                      </a:solidFill>
+                      <a:prstDash val="solid"/>
+                      <a:round/>
+                      <a:headEnd type="none" w="med" len="med"/>
+                      <a:tailEnd type="none" w="med" len="med"/>
+                    </a:lnB>
+                    <a:solidFill>
+                      <a:srgbClr val="F3F0FB"/>
+                    </a:solidFill>
+                  </a:tcPr>
+                </a:tc>
+              </a:tr>
+              <a:tr h="475488">
+                <a:tc>
+                  <a:txBody>
+                    <a:bodyPr/>
+                    <a:lstStyle/>
+                    <a:p>
+                      <a:pPr indent="0" marL="0">
+                        <a:buNone/>
+                      </a:pPr>
+                      <a:r>
+                        <a:rPr lang="en-US" sz="1300" b="1" dirty="0">
+                          <a:solidFill>
+                            <a:srgbClr val="2B1B5A"/>
+                          </a:solidFill>
+                          <a:latin typeface="Calibri" pitchFamily="34" charset="0"/>
+                          <a:ea typeface="Calibri" pitchFamily="34" charset="-122"/>
+                          <a:cs typeface="Calibri" pitchFamily="34" charset="-120"/>
+                        </a:rPr>
+                        <a:t>JUnit, GitHub</a:t>
+                      </a:r>
+                      <a:endParaRPr lang="en-US" sz="1300" dirty="0">
+                        <a:latin typeface="Calibri" charset="0"/>
+                        <a:ea typeface="Calibri" charset="0"/>
+                        <a:cs typeface="Calibri" charset="0"/>
+                      </a:endParaRPr>
+                    </a:p>
+                  </a:txBody>
+                  <a:tcPr marL="54864" marR="54864" marT="54864" marB="54864" anchor="ctr">
+                    <a:lnL w="9525" cap="flat" cmpd="sng" algn="ctr">
+                      <a:solidFill>
+                        <a:srgbClr val="D9D4EC"/>
+                      </a:solidFill>
+                      <a:prstDash val="solid"/>
+                      <a:round/>
+                      <a:headEnd type="none" w="med" len="med"/>
+                      <a:tailEnd type="none" w="med" len="med"/>
+                    </a:lnL>
+                    <a:lnR w="9525" cap="flat" cmpd="sng" algn="ctr">
+                      <a:solidFill>
+                        <a:srgbClr val="D9D4EC"/>
+                      </a:solidFill>
+                      <a:prstDash val="solid"/>
+                      <a:round/>
+                      <a:headEnd type="none" w="med" len="med"/>
+                      <a:tailEnd type="none" w="med" len="med"/>
+                    </a:lnR>
+                    <a:lnT w="9525" cap="flat" cmpd="sng" algn="ctr">
+                      <a:solidFill>
+                        <a:srgbClr val="D9D4EC"/>
+                      </a:solidFill>
+                      <a:prstDash val="solid"/>
+                      <a:round/>
+                      <a:headEnd type="none" w="med" len="med"/>
+                      <a:tailEnd type="none" w="med" len="med"/>
+                    </a:lnT>
+                    <a:lnB w="9525" cap="flat" cmpd="sng" algn="ctr">
+                      <a:solidFill>
+                        <a:srgbClr val="D9D4EC"/>
+                      </a:solidFill>
+                      <a:prstDash val="solid"/>
+                      <a:round/>
+                      <a:headEnd type="none" w="med" len="med"/>
+                      <a:tailEnd type="none" w="med" len="med"/>
+                    </a:lnB>
+                    <a:solidFill>
+                      <a:srgbClr val="FFFFFF"/>
+                    </a:solidFill>
+                  </a:tcPr>
+                </a:tc>
+                <a:tc>
+                  <a:txBody>
+                    <a:bodyPr/>
+                    <a:lstStyle/>
+                    <a:p>
+                      <a:pPr indent="0" marL="0">
+                        <a:buNone/>
+                      </a:pPr>
+                      <a:r>
+                        <a:rPr lang="en-US" sz="1300" dirty="0">
+                          <a:solidFill>
+                            <a:srgbClr val="3A3550"/>
+                          </a:solidFill>
+                          <a:latin typeface="Calibri" pitchFamily="34" charset="0"/>
+                          <a:ea typeface="Calibri" pitchFamily="34" charset="-122"/>
+                          <a:cs typeface="Calibri" pitchFamily="34" charset="-120"/>
+                        </a:rPr>
+                        <a:t>Kiểm tra logic, quản lý phiên bản mã nguồn</a:t>
+                      </a:r>
+                      <a:endParaRPr lang="en-US" sz="1300" dirty="0">
+                        <a:latin typeface="Calibri" charset="0"/>
+                        <a:ea typeface="Calibri" charset="0"/>
+                        <a:cs typeface="Calibri" charset="0"/>
+                      </a:endParaRPr>
+                    </a:p>
+                  </a:txBody>
+                  <a:tcPr marL="54864" marR="54864" marT="54864" marB="54864" anchor="ctr">
+                    <a:lnL w="9525" cap="flat" cmpd="sng" algn="ctr">
+                      <a:solidFill>
+                        <a:srgbClr val="D9D4EC"/>
+                      </a:solidFill>
+                      <a:prstDash val="solid"/>
+                      <a:round/>
+                      <a:headEnd type="none" w="med" len="med"/>
+                      <a:tailEnd type="none" w="med" len="med"/>
+                    </a:lnL>
+                    <a:lnR w="9525" cap="flat" cmpd="sng" algn="ctr">
+                      <a:solidFill>
+                        <a:srgbClr val="D9D4EC"/>
+                      </a:solidFill>
+                      <a:prstDash val="solid"/>
+                      <a:round/>
+                      <a:headEnd type="none" w="med" len="med"/>
+                      <a:tailEnd type="none" w="med" len="med"/>
+                    </a:lnR>
+                    <a:lnT w="9525" cap="flat" cmpd="sng" algn="ctr">
+                      <a:solidFill>
+                        <a:srgbClr val="D9D4EC"/>
+                      </a:solidFill>
+                      <a:prstDash val="solid"/>
+                      <a:round/>
+                      <a:headEnd type="none" w="med" len="med"/>
+                      <a:tailEnd type="none" w="med" len="med"/>
+                    </a:lnT>
+                    <a:lnB w="9525" cap="flat" cmpd="sng" algn="ctr">
+                      <a:solidFill>
+                        <a:srgbClr val="D9D4EC"/>
+                      </a:solidFill>
+                      <a:prstDash val="solid"/>
+                      <a:round/>
+                      <a:headEnd type="none" w="med" len="med"/>
+                      <a:tailEnd type="none" w="med" len="med"/>
+                    </a:lnB>
+                    <a:solidFill>
+                      <a:srgbClr val="FFFFFF"/>
+                    </a:solidFill>
+                  </a:tcPr>
+                </a:tc>
+              </a:tr>
+            </a:tbl>
+          </a:graphicData>
+        </a:graphic>
+      </p:graphicFrame>
       <p:sp>
         <p:nvSpPr>
           <p:cNvPr id="25" name="Slide Number Placeholder 0"/>
@@ -3660,140 +4391,1597 @@
                   <a:schemeClr val="tx2"/>
                 </a:solidFill>
               </a:rPr>
-              <a:t>Kế hoạch thực hiện 4 tuần</a:t>
+              <a:t>Phân công và tiêu chí nghiệm thu</a:t>
             </a:r>
             <a:endParaRPr lang="en-US" sz="3600" dirty="0"/>
           </a:p>
         </p:txBody>
       </p:sp>
-      <p:sp>
-        <p:nvSpPr>
-          <p:cNvPr id="3" name="Trục thời gian"/>
-          <p:cNvSpPr/>
-          <p:nvPr/>
-        </p:nvSpPr>
-        <p:spPr>
-          <a:xfrm>
-            <a:off x="1097280" y="2148840"/>
-            <a:ext cx="9966960" cy="0"/>
-          </a:xfrm>
-          <a:prstGeom prst="line">
+      <p:graphicFrame>
+        <p:nvGraphicFramePr>
+          <p:cNvPr id="12" name="Table 0"/>
+          <p:cNvGraphicFramePr>
+            <a:graphicFrameLocks noGrp="1"/>
+          </p:cNvGraphicFramePr>
+          <p:nvPr>
+            <p:extLst>
+              <p:ext uri="{D42A27DB-BD31-4B8C-83A1-F6EECF244321}">
+                <p14:modId xmlns:p14="http://schemas.microsoft.com/office/powerpoint/2010/main" val="1579011935"/>
+              </p:ext>
+            </p:extLst>
+          </p:nvPr>
+        </p:nvGraphicFramePr>
+        <p:xfrm>
+          <a:off x="548640" y="1371600"/>
+          <a:ext cx="11064240" cy="914400"/>
+        </p:xfrm>
+        <a:graphic>
+          <a:graphicData uri="http://schemas.openxmlformats.org/drawingml/2006/table">
+            <a:tbl>
+              <a:tblPr/>
+              <a:tblGrid>
+                <a:gridCol w="2377440"/>
+                <a:gridCol w="3291840"/>
+                <a:gridCol w="3566160"/>
+                <a:gridCol w="1828800"/>
+              </a:tblGrid>
+              <a:tr h="457200">
+                <a:tc>
+                  <a:txBody>
+                    <a:bodyPr/>
+                    <a:lstStyle/>
+                    <a:p>
+                      <a:pPr indent="0" marL="0">
+                        <a:buNone/>
+                      </a:pPr>
+                      <a:r>
+                        <a:rPr lang="en-US" sz="1400" b="1" dirty="0">
+                          <a:solidFill>
+                            <a:srgbClr val="FFFFFF"/>
+                          </a:solidFill>
+                          <a:latin typeface="Calibri" pitchFamily="34" charset="0"/>
+                          <a:ea typeface="Calibri" pitchFamily="34" charset="-122"/>
+                          <a:cs typeface="Calibri" pitchFamily="34" charset="-120"/>
+                        </a:rPr>
+                        <a:t>Vai trò</a:t>
+                      </a:r>
+                      <a:endParaRPr lang="en-US" sz="1400" dirty="0">
+                        <a:latin typeface="Calibri" charset="0"/>
+                        <a:ea typeface="Calibri" charset="0"/>
+                        <a:cs typeface="Calibri" charset="0"/>
+                      </a:endParaRPr>
+                    </a:p>
+                  </a:txBody>
+                  <a:tcPr marL="73152" marR="73152" marT="73152" marB="73152" anchor="ctr">
+                    <a:lnL w="9525" cap="flat" cmpd="sng" algn="ctr">
+                      <a:solidFill>
+                        <a:srgbClr val="D9D4EC"/>
+                      </a:solidFill>
+                      <a:prstDash val="solid"/>
+                      <a:round/>
+                      <a:headEnd type="none" w="med" len="med"/>
+                      <a:tailEnd type="none" w="med" len="med"/>
+                    </a:lnL>
+                    <a:lnR w="9525" cap="flat" cmpd="sng" algn="ctr">
+                      <a:solidFill>
+                        <a:srgbClr val="D9D4EC"/>
+                      </a:solidFill>
+                      <a:prstDash val="solid"/>
+                      <a:round/>
+                      <a:headEnd type="none" w="med" len="med"/>
+                      <a:tailEnd type="none" w="med" len="med"/>
+                    </a:lnR>
+                    <a:lnT w="9525" cap="flat" cmpd="sng" algn="ctr">
+                      <a:solidFill>
+                        <a:srgbClr val="D9D4EC"/>
+                      </a:solidFill>
+                      <a:prstDash val="solid"/>
+                      <a:round/>
+                      <a:headEnd type="none" w="med" len="med"/>
+                      <a:tailEnd type="none" w="med" len="med"/>
+                    </a:lnT>
+                    <a:lnB w="9525" cap="flat" cmpd="sng" algn="ctr">
+                      <a:solidFill>
+                        <a:srgbClr val="D9D4EC"/>
+                      </a:solidFill>
+                      <a:prstDash val="solid"/>
+                      <a:round/>
+                      <a:headEnd type="none" w="med" len="med"/>
+                      <a:tailEnd type="none" w="med" len="med"/>
+                    </a:lnB>
+                    <a:solidFill>
+                      <a:srgbClr val="2B1B5A"/>
+                    </a:solidFill>
+                  </a:tcPr>
+                </a:tc>
+                <a:tc>
+                  <a:txBody>
+                    <a:bodyPr/>
+                    <a:lstStyle/>
+                    <a:p>
+                      <a:pPr indent="0" marL="0">
+                        <a:buNone/>
+                      </a:pPr>
+                      <a:r>
+                        <a:rPr lang="en-US" sz="1400" b="1" dirty="0">
+                          <a:solidFill>
+                            <a:srgbClr val="FFFFFF"/>
+                          </a:solidFill>
+                          <a:latin typeface="Calibri" pitchFamily="34" charset="0"/>
+                          <a:ea typeface="Calibri" pitchFamily="34" charset="-122"/>
+                          <a:cs typeface="Calibri" pitchFamily="34" charset="-120"/>
+                        </a:rPr>
+                        <a:t>Đầu ra cần bàn giao</a:t>
+                      </a:r>
+                      <a:endParaRPr lang="en-US" sz="1400" dirty="0">
+                        <a:latin typeface="Calibri" charset="0"/>
+                        <a:ea typeface="Calibri" charset="0"/>
+                        <a:cs typeface="Calibri" charset="0"/>
+                      </a:endParaRPr>
+                    </a:p>
+                  </a:txBody>
+                  <a:tcPr marL="73152" marR="73152" marT="73152" marB="73152" anchor="ctr">
+                    <a:lnL w="9525" cap="flat" cmpd="sng" algn="ctr">
+                      <a:solidFill>
+                        <a:srgbClr val="D9D4EC"/>
+                      </a:solidFill>
+                      <a:prstDash val="solid"/>
+                      <a:round/>
+                      <a:headEnd type="none" w="med" len="med"/>
+                      <a:tailEnd type="none" w="med" len="med"/>
+                    </a:lnL>
+                    <a:lnR w="9525" cap="flat" cmpd="sng" algn="ctr">
+                      <a:solidFill>
+                        <a:srgbClr val="D9D4EC"/>
+                      </a:solidFill>
+                      <a:prstDash val="solid"/>
+                      <a:round/>
+                      <a:headEnd type="none" w="med" len="med"/>
+                      <a:tailEnd type="none" w="med" len="med"/>
+                    </a:lnR>
+                    <a:lnT w="9525" cap="flat" cmpd="sng" algn="ctr">
+                      <a:solidFill>
+                        <a:srgbClr val="D9D4EC"/>
+                      </a:solidFill>
+                      <a:prstDash val="solid"/>
+                      <a:round/>
+                      <a:headEnd type="none" w="med" len="med"/>
+                      <a:tailEnd type="none" w="med" len="med"/>
+                    </a:lnT>
+                    <a:lnB w="9525" cap="flat" cmpd="sng" algn="ctr">
+                      <a:solidFill>
+                        <a:srgbClr val="D9D4EC"/>
+                      </a:solidFill>
+                      <a:prstDash val="solid"/>
+                      <a:round/>
+                      <a:headEnd type="none" w="med" len="med"/>
+                      <a:tailEnd type="none" w="med" len="med"/>
+                    </a:lnB>
+                    <a:solidFill>
+                      <a:srgbClr val="2B1B5A"/>
+                    </a:solidFill>
+                  </a:tcPr>
+                </a:tc>
+                <a:tc>
+                  <a:txBody>
+                    <a:bodyPr/>
+                    <a:lstStyle/>
+                    <a:p>
+                      <a:pPr indent="0" marL="0">
+                        <a:buNone/>
+                      </a:pPr>
+                      <a:r>
+                        <a:rPr lang="en-US" sz="1400" b="1" dirty="0">
+                          <a:solidFill>
+                            <a:srgbClr val="FFFFFF"/>
+                          </a:solidFill>
+                          <a:latin typeface="Calibri" pitchFamily="34" charset="0"/>
+                          <a:ea typeface="Calibri" pitchFamily="34" charset="-122"/>
+                          <a:cs typeface="Calibri" pitchFamily="34" charset="-120"/>
+                        </a:rPr>
+                        <a:t>Tiêu chí nghiệm thu</a:t>
+                      </a:r>
+                      <a:endParaRPr lang="en-US" sz="1400" dirty="0">
+                        <a:latin typeface="Calibri" charset="0"/>
+                        <a:ea typeface="Calibri" charset="0"/>
+                        <a:cs typeface="Calibri" charset="0"/>
+                      </a:endParaRPr>
+                    </a:p>
+                  </a:txBody>
+                  <a:tcPr marL="73152" marR="73152" marT="73152" marB="73152" anchor="ctr">
+                    <a:lnL w="9525" cap="flat" cmpd="sng" algn="ctr">
+                      <a:solidFill>
+                        <a:srgbClr val="D9D4EC"/>
+                      </a:solidFill>
+                      <a:prstDash val="solid"/>
+                      <a:round/>
+                      <a:headEnd type="none" w="med" len="med"/>
+                      <a:tailEnd type="none" w="med" len="med"/>
+                    </a:lnL>
+                    <a:lnR w="9525" cap="flat" cmpd="sng" algn="ctr">
+                      <a:solidFill>
+                        <a:srgbClr val="D9D4EC"/>
+                      </a:solidFill>
+                      <a:prstDash val="solid"/>
+                      <a:round/>
+                      <a:headEnd type="none" w="med" len="med"/>
+                      <a:tailEnd type="none" w="med" len="med"/>
+                    </a:lnR>
+                    <a:lnT w="9525" cap="flat" cmpd="sng" algn="ctr">
+                      <a:solidFill>
+                        <a:srgbClr val="D9D4EC"/>
+                      </a:solidFill>
+                      <a:prstDash val="solid"/>
+                      <a:round/>
+                      <a:headEnd type="none" w="med" len="med"/>
+                      <a:tailEnd type="none" w="med" len="med"/>
+                    </a:lnT>
+                    <a:lnB w="9525" cap="flat" cmpd="sng" algn="ctr">
+                      <a:solidFill>
+                        <a:srgbClr val="D9D4EC"/>
+                      </a:solidFill>
+                      <a:prstDash val="solid"/>
+                      <a:round/>
+                      <a:headEnd type="none" w="med" len="med"/>
+                      <a:tailEnd type="none" w="med" len="med"/>
+                    </a:lnB>
+                    <a:solidFill>
+                      <a:srgbClr val="2B1B5A"/>
+                    </a:solidFill>
+                  </a:tcPr>
+                </a:tc>
+                <a:tc>
+                  <a:txBody>
+                    <a:bodyPr/>
+                    <a:lstStyle/>
+                    <a:p>
+                      <a:pPr indent="0" marL="0">
+                        <a:buNone/>
+                      </a:pPr>
+                      <a:r>
+                        <a:rPr lang="en-US" sz="1400" b="1" dirty="0">
+                          <a:solidFill>
+                            <a:srgbClr val="FFFFFF"/>
+                          </a:solidFill>
+                          <a:latin typeface="Calibri" pitchFamily="34" charset="0"/>
+                          <a:ea typeface="Calibri" pitchFamily="34" charset="-122"/>
+                          <a:cs typeface="Calibri" pitchFamily="34" charset="-120"/>
+                        </a:rPr>
+                        <a:t>Người phụ trách</a:t>
+                      </a:r>
+                      <a:endParaRPr lang="en-US" sz="1400" dirty="0">
+                        <a:latin typeface="Calibri" charset="0"/>
+                        <a:ea typeface="Calibri" charset="0"/>
+                        <a:cs typeface="Calibri" charset="0"/>
+                      </a:endParaRPr>
+                    </a:p>
+                  </a:txBody>
+                  <a:tcPr marL="73152" marR="73152" marT="73152" marB="73152" anchor="ctr">
+                    <a:lnL w="9525" cap="flat" cmpd="sng" algn="ctr">
+                      <a:solidFill>
+                        <a:srgbClr val="D9D4EC"/>
+                      </a:solidFill>
+                      <a:prstDash val="solid"/>
+                      <a:round/>
+                      <a:headEnd type="none" w="med" len="med"/>
+                      <a:tailEnd type="none" w="med" len="med"/>
+                    </a:lnL>
+                    <a:lnR w="9525" cap="flat" cmpd="sng" algn="ctr">
+                      <a:solidFill>
+                        <a:srgbClr val="D9D4EC"/>
+                      </a:solidFill>
+                      <a:prstDash val="solid"/>
+                      <a:round/>
+                      <a:headEnd type="none" w="med" len="med"/>
+                      <a:tailEnd type="none" w="med" len="med"/>
+                    </a:lnR>
+                    <a:lnT w="9525" cap="flat" cmpd="sng" algn="ctr">
+                      <a:solidFill>
+                        <a:srgbClr val="D9D4EC"/>
+                      </a:solidFill>
+                      <a:prstDash val="solid"/>
+                      <a:round/>
+                      <a:headEnd type="none" w="med" len="med"/>
+                      <a:tailEnd type="none" w="med" len="med"/>
+                    </a:lnT>
+                    <a:lnB w="9525" cap="flat" cmpd="sng" algn="ctr">
+                      <a:solidFill>
+                        <a:srgbClr val="D9D4EC"/>
+                      </a:solidFill>
+                      <a:prstDash val="solid"/>
+                      <a:round/>
+                      <a:headEnd type="none" w="med" len="med"/>
+                      <a:tailEnd type="none" w="med" len="med"/>
+                    </a:lnB>
+                    <a:solidFill>
+                      <a:srgbClr val="2B1B5A"/>
+                    </a:solidFill>
+                  </a:tcPr>
+                </a:tc>
+              </a:tr>
+              <a:tr h="960120">
+                <a:tc>
+                  <a:txBody>
+                    <a:bodyPr/>
+                    <a:lstStyle/>
+                    <a:p>
+                      <a:pPr indent="0" marL="0">
+                        <a:buNone/>
+                      </a:pPr>
+                      <a:r>
+                        <a:rPr lang="en-US" sz="1400" b="1" dirty="0">
+                          <a:solidFill>
+                            <a:srgbClr val="2B1B5A"/>
+                          </a:solidFill>
+                          <a:latin typeface="Calibri" pitchFamily="34" charset="0"/>
+                          <a:ea typeface="Calibri" pitchFamily="34" charset="-122"/>
+                          <a:cs typeface="Calibri" pitchFamily="34" charset="-120"/>
+                        </a:rPr>
+                        <a:t>Thành viên 1</a:t>
+                      </a:r>
+                      <a:endParaRPr lang="en-US" sz="1400" dirty="0">
+                        <a:latin typeface="Calibri" charset="0"/>
+                        <a:ea typeface="Calibri" charset="0"/>
+                        <a:cs typeface="Calibri" charset="0"/>
+                      </a:endParaRPr>
+                    </a:p>
+                    <a:p>
+                      <a:pPr indent="0" marL="0">
+                        <a:buNone/>
+                      </a:pPr>
+                      <a:r>
+                        <a:rPr lang="en-US" sz="1400" b="1" dirty="0">
+                          <a:solidFill>
+                            <a:srgbClr val="2B1B5A"/>
+                          </a:solidFill>
+                          <a:latin typeface="Calibri" pitchFamily="34" charset="0"/>
+                          <a:ea typeface="Calibri" pitchFamily="34" charset="-122"/>
+                          <a:cs typeface="Calibri" pitchFamily="34" charset="-120"/>
+                        </a:rPr>
+                        <a:t>Giao diện, tổng quan</a:t>
+                      </a:r>
+                      <a:endParaRPr lang="en-US" sz="1400" dirty="0">
+                        <a:latin typeface="Calibri" charset="0"/>
+                        <a:ea typeface="Calibri" charset="0"/>
+                        <a:cs typeface="Calibri" charset="0"/>
+                      </a:endParaRPr>
+                    </a:p>
+                  </a:txBody>
+                  <a:tcPr marL="73152" marR="73152" marT="73152" marB="73152" anchor="ctr">
+                    <a:lnL w="9525" cap="flat" cmpd="sng" algn="ctr">
+                      <a:solidFill>
+                        <a:srgbClr val="D9D4EC"/>
+                      </a:solidFill>
+                      <a:prstDash val="solid"/>
+                      <a:round/>
+                      <a:headEnd type="none" w="med" len="med"/>
+                      <a:tailEnd type="none" w="med" len="med"/>
+                    </a:lnL>
+                    <a:lnR w="9525" cap="flat" cmpd="sng" algn="ctr">
+                      <a:solidFill>
+                        <a:srgbClr val="D9D4EC"/>
+                      </a:solidFill>
+                      <a:prstDash val="solid"/>
+                      <a:round/>
+                      <a:headEnd type="none" w="med" len="med"/>
+                      <a:tailEnd type="none" w="med" len="med"/>
+                    </a:lnR>
+                    <a:lnT w="9525" cap="flat" cmpd="sng" algn="ctr">
+                      <a:solidFill>
+                        <a:srgbClr val="D9D4EC"/>
+                      </a:solidFill>
+                      <a:prstDash val="solid"/>
+                      <a:round/>
+                      <a:headEnd type="none" w="med" len="med"/>
+                      <a:tailEnd type="none" w="med" len="med"/>
+                    </a:lnT>
+                    <a:lnB w="9525" cap="flat" cmpd="sng" algn="ctr">
+                      <a:solidFill>
+                        <a:srgbClr val="D9D4EC"/>
+                      </a:solidFill>
+                      <a:prstDash val="solid"/>
+                      <a:round/>
+                      <a:headEnd type="none" w="med" len="med"/>
+                      <a:tailEnd type="none" w="med" len="med"/>
+                    </a:lnB>
+                    <a:solidFill>
+                      <a:srgbClr val="F3F0FB"/>
+                    </a:solidFill>
+                  </a:tcPr>
+                </a:tc>
+                <a:tc>
+                  <a:txBody>
+                    <a:bodyPr/>
+                    <a:lstStyle/>
+                    <a:p>
+                      <a:pPr indent="0" marL="0">
+                        <a:buNone/>
+                      </a:pPr>
+                      <a:r>
+                        <a:rPr lang="en-US" sz="1400" dirty="0">
+                          <a:solidFill>
+                            <a:srgbClr val="3A3550"/>
+                          </a:solidFill>
+                          <a:latin typeface="Calibri" pitchFamily="34" charset="0"/>
+                          <a:ea typeface="Calibri" pitchFamily="34" charset="-122"/>
+                          <a:cs typeface="Calibri" pitchFamily="34" charset="-120"/>
+                        </a:rPr>
+                        <a:t>Điều hướng, danh sách, trạng thái tải/trống/lỗi, thẻ tổng quan</a:t>
+                      </a:r>
+                      <a:endParaRPr lang="en-US" sz="1400" dirty="0">
+                        <a:latin typeface="Calibri" charset="0"/>
+                        <a:ea typeface="Calibri" charset="0"/>
+                        <a:cs typeface="Calibri" charset="0"/>
+                      </a:endParaRPr>
+                    </a:p>
+                  </a:txBody>
+                  <a:tcPr marL="73152" marR="73152" marT="73152" marB="73152" anchor="ctr">
+                    <a:lnL w="9525" cap="flat" cmpd="sng" algn="ctr">
+                      <a:solidFill>
+                        <a:srgbClr val="D9D4EC"/>
+                      </a:solidFill>
+                      <a:prstDash val="solid"/>
+                      <a:round/>
+                      <a:headEnd type="none" w="med" len="med"/>
+                      <a:tailEnd type="none" w="med" len="med"/>
+                    </a:lnL>
+                    <a:lnR w="9525" cap="flat" cmpd="sng" algn="ctr">
+                      <a:solidFill>
+                        <a:srgbClr val="D9D4EC"/>
+                      </a:solidFill>
+                      <a:prstDash val="solid"/>
+                      <a:round/>
+                      <a:headEnd type="none" w="med" len="med"/>
+                      <a:tailEnd type="none" w="med" len="med"/>
+                    </a:lnR>
+                    <a:lnT w="9525" cap="flat" cmpd="sng" algn="ctr">
+                      <a:solidFill>
+                        <a:srgbClr val="D9D4EC"/>
+                      </a:solidFill>
+                      <a:prstDash val="solid"/>
+                      <a:round/>
+                      <a:headEnd type="none" w="med" len="med"/>
+                      <a:tailEnd type="none" w="med" len="med"/>
+                    </a:lnT>
+                    <a:lnB w="9525" cap="flat" cmpd="sng" algn="ctr">
+                      <a:solidFill>
+                        <a:srgbClr val="D9D4EC"/>
+                      </a:solidFill>
+                      <a:prstDash val="solid"/>
+                      <a:round/>
+                      <a:headEnd type="none" w="med" len="med"/>
+                      <a:tailEnd type="none" w="med" len="med"/>
+                    </a:lnB>
+                    <a:solidFill>
+                      <a:srgbClr val="F3F0FB"/>
+                    </a:solidFill>
+                  </a:tcPr>
+                </a:tc>
+                <a:tc>
+                  <a:txBody>
+                    <a:bodyPr/>
+                    <a:lstStyle/>
+                    <a:p>
+                      <a:pPr indent="0" marL="0">
+                        <a:buNone/>
+                      </a:pPr>
+                      <a:r>
+                        <a:rPr lang="en-US" sz="1400" dirty="0">
+                          <a:solidFill>
+                            <a:srgbClr val="3A3550"/>
+                          </a:solidFill>
+                          <a:latin typeface="Calibri" pitchFamily="34" charset="0"/>
+                          <a:ea typeface="Calibri" pitchFamily="34" charset="-122"/>
+                          <a:cs typeface="Calibri" pitchFamily="34" charset="-120"/>
+                        </a:rPr>
+                        <a:t>Đi hết luồng chính trên thiết bị; đọc được trên màn hình nhỏ</a:t>
+                      </a:r>
+                      <a:endParaRPr lang="en-US" sz="1400" dirty="0">
+                        <a:latin typeface="Calibri" charset="0"/>
+                        <a:ea typeface="Calibri" charset="0"/>
+                        <a:cs typeface="Calibri" charset="0"/>
+                      </a:endParaRPr>
+                    </a:p>
+                  </a:txBody>
+                  <a:tcPr marL="73152" marR="73152" marT="73152" marB="73152" anchor="ctr">
+                    <a:lnL w="9525" cap="flat" cmpd="sng" algn="ctr">
+                      <a:solidFill>
+                        <a:srgbClr val="D9D4EC"/>
+                      </a:solidFill>
+                      <a:prstDash val="solid"/>
+                      <a:round/>
+                      <a:headEnd type="none" w="med" len="med"/>
+                      <a:tailEnd type="none" w="med" len="med"/>
+                    </a:lnL>
+                    <a:lnR w="9525" cap="flat" cmpd="sng" algn="ctr">
+                      <a:solidFill>
+                        <a:srgbClr val="D9D4EC"/>
+                      </a:solidFill>
+                      <a:prstDash val="solid"/>
+                      <a:round/>
+                      <a:headEnd type="none" w="med" len="med"/>
+                      <a:tailEnd type="none" w="med" len="med"/>
+                    </a:lnR>
+                    <a:lnT w="9525" cap="flat" cmpd="sng" algn="ctr">
+                      <a:solidFill>
+                        <a:srgbClr val="D9D4EC"/>
+                      </a:solidFill>
+                      <a:prstDash val="solid"/>
+                      <a:round/>
+                      <a:headEnd type="none" w="med" len="med"/>
+                      <a:tailEnd type="none" w="med" len="med"/>
+                    </a:lnT>
+                    <a:lnB w="9525" cap="flat" cmpd="sng" algn="ctr">
+                      <a:solidFill>
+                        <a:srgbClr val="D9D4EC"/>
+                      </a:solidFill>
+                      <a:prstDash val="solid"/>
+                      <a:round/>
+                      <a:headEnd type="none" w="med" len="med"/>
+                      <a:tailEnd type="none" w="med" len="med"/>
+                    </a:lnB>
+                    <a:solidFill>
+                      <a:srgbClr val="F3F0FB"/>
+                    </a:solidFill>
+                  </a:tcPr>
+                </a:tc>
+                <a:tc>
+                  <a:txBody>
+                    <a:bodyPr/>
+                    <a:lstStyle/>
+                    <a:p>
+                      <a:pPr indent="0" marL="0">
+                        <a:buNone/>
+                      </a:pPr>
+                      <a:r>
+                        <a:rPr lang="en-US" sz="1400" i="1" dirty="0">
+                          <a:solidFill>
+                            <a:srgbClr val="6E6888"/>
+                          </a:solidFill>
+                          <a:latin typeface="Calibri" pitchFamily="34" charset="0"/>
+                          <a:ea typeface="Calibri" pitchFamily="34" charset="-122"/>
+                          <a:cs typeface="Calibri" pitchFamily="34" charset="-120"/>
+                        </a:rPr>
+                        <a:t>Họ tên: …………</a:t>
+                      </a:r>
+                      <a:endParaRPr lang="en-US" sz="1400" dirty="0">
+                        <a:latin typeface="Calibri" charset="0"/>
+                        <a:ea typeface="Calibri" charset="0"/>
+                        <a:cs typeface="Calibri" charset="0"/>
+                      </a:endParaRPr>
+                    </a:p>
+                    <a:p>
+                      <a:pPr indent="0" marL="0">
+                        <a:buNone/>
+                      </a:pPr>
+                      <a:r>
+                        <a:rPr lang="en-US" sz="1400" i="1" dirty="0">
+                          <a:solidFill>
+                            <a:srgbClr val="6E6888"/>
+                          </a:solidFill>
+                          <a:latin typeface="Calibri" pitchFamily="34" charset="0"/>
+                          <a:ea typeface="Calibri" pitchFamily="34" charset="-122"/>
+                          <a:cs typeface="Calibri" pitchFamily="34" charset="-120"/>
+                        </a:rPr>
+                        <a:t>MSSV: …………</a:t>
+                      </a:r>
+                      <a:endParaRPr lang="en-US" sz="1400" dirty="0">
+                        <a:latin typeface="Calibri" charset="0"/>
+                        <a:ea typeface="Calibri" charset="0"/>
+                        <a:cs typeface="Calibri" charset="0"/>
+                      </a:endParaRPr>
+                    </a:p>
+                  </a:txBody>
+                  <a:tcPr marL="73152" marR="73152" marT="73152" marB="73152" anchor="ctr">
+                    <a:lnL w="9525" cap="flat" cmpd="sng" algn="ctr">
+                      <a:solidFill>
+                        <a:srgbClr val="D9D4EC"/>
+                      </a:solidFill>
+                      <a:prstDash val="solid"/>
+                      <a:round/>
+                      <a:headEnd type="none" w="med" len="med"/>
+                      <a:tailEnd type="none" w="med" len="med"/>
+                    </a:lnL>
+                    <a:lnR w="9525" cap="flat" cmpd="sng" algn="ctr">
+                      <a:solidFill>
+                        <a:srgbClr val="D9D4EC"/>
+                      </a:solidFill>
+                      <a:prstDash val="solid"/>
+                      <a:round/>
+                      <a:headEnd type="none" w="med" len="med"/>
+                      <a:tailEnd type="none" w="med" len="med"/>
+                    </a:lnR>
+                    <a:lnT w="9525" cap="flat" cmpd="sng" algn="ctr">
+                      <a:solidFill>
+                        <a:srgbClr val="D9D4EC"/>
+                      </a:solidFill>
+                      <a:prstDash val="solid"/>
+                      <a:round/>
+                      <a:headEnd type="none" w="med" len="med"/>
+                      <a:tailEnd type="none" w="med" len="med"/>
+                    </a:lnT>
+                    <a:lnB w="9525" cap="flat" cmpd="sng" algn="ctr">
+                      <a:solidFill>
+                        <a:srgbClr val="D9D4EC"/>
+                      </a:solidFill>
+                      <a:prstDash val="solid"/>
+                      <a:round/>
+                      <a:headEnd type="none" w="med" len="med"/>
+                      <a:tailEnd type="none" w="med" len="med"/>
+                    </a:lnB>
+                    <a:solidFill>
+                      <a:srgbClr val="F3F0FB"/>
+                    </a:solidFill>
+                  </a:tcPr>
+                </a:tc>
+              </a:tr>
+              <a:tr h="960120">
+                <a:tc>
+                  <a:txBody>
+                    <a:bodyPr/>
+                    <a:lstStyle/>
+                    <a:p>
+                      <a:pPr indent="0" marL="0">
+                        <a:buNone/>
+                      </a:pPr>
+                      <a:r>
+                        <a:rPr lang="en-US" sz="1400" b="1" dirty="0">
+                          <a:solidFill>
+                            <a:srgbClr val="2B1B5A"/>
+                          </a:solidFill>
+                          <a:latin typeface="Calibri" pitchFamily="34" charset="0"/>
+                          <a:ea typeface="Calibri" pitchFamily="34" charset="-122"/>
+                          <a:cs typeface="Calibri" pitchFamily="34" charset="-120"/>
+                        </a:rPr>
+                        <a:t>Thành viên 2</a:t>
+                      </a:r>
+                      <a:endParaRPr lang="en-US" sz="1400" dirty="0">
+                        <a:latin typeface="Calibri" charset="0"/>
+                        <a:ea typeface="Calibri" charset="0"/>
+                        <a:cs typeface="Calibri" charset="0"/>
+                      </a:endParaRPr>
+                    </a:p>
+                    <a:p>
+                      <a:pPr indent="0" marL="0">
+                        <a:buNone/>
+                      </a:pPr>
+                      <a:r>
+                        <a:rPr lang="en-US" sz="1400" b="1" dirty="0">
+                          <a:solidFill>
+                            <a:srgbClr val="2B1B5A"/>
+                          </a:solidFill>
+                          <a:latin typeface="Calibri" pitchFamily="34" charset="0"/>
+                          <a:ea typeface="Calibri" pitchFamily="34" charset="-122"/>
+                          <a:cs typeface="Calibri" pitchFamily="34" charset="-120"/>
+                        </a:rPr>
+                        <a:t>Quản lý gói</a:t>
+                      </a:r>
+                      <a:endParaRPr lang="en-US" sz="1400" dirty="0">
+                        <a:latin typeface="Calibri" charset="0"/>
+                        <a:ea typeface="Calibri" charset="0"/>
+                        <a:cs typeface="Calibri" charset="0"/>
+                      </a:endParaRPr>
+                    </a:p>
+                  </a:txBody>
+                  <a:tcPr marL="73152" marR="73152" marT="73152" marB="73152" anchor="ctr">
+                    <a:lnL w="9525" cap="flat" cmpd="sng" algn="ctr">
+                      <a:solidFill>
+                        <a:srgbClr val="D9D4EC"/>
+                      </a:solidFill>
+                      <a:prstDash val="solid"/>
+                      <a:round/>
+                      <a:headEnd type="none" w="med" len="med"/>
+                      <a:tailEnd type="none" w="med" len="med"/>
+                    </a:lnL>
+                    <a:lnR w="9525" cap="flat" cmpd="sng" algn="ctr">
+                      <a:solidFill>
+                        <a:srgbClr val="D9D4EC"/>
+                      </a:solidFill>
+                      <a:prstDash val="solid"/>
+                      <a:round/>
+                      <a:headEnd type="none" w="med" len="med"/>
+                      <a:tailEnd type="none" w="med" len="med"/>
+                    </a:lnR>
+                    <a:lnT w="9525" cap="flat" cmpd="sng" algn="ctr">
+                      <a:solidFill>
+                        <a:srgbClr val="D9D4EC"/>
+                      </a:solidFill>
+                      <a:prstDash val="solid"/>
+                      <a:round/>
+                      <a:headEnd type="none" w="med" len="med"/>
+                      <a:tailEnd type="none" w="med" len="med"/>
+                    </a:lnT>
+                    <a:lnB w="9525" cap="flat" cmpd="sng" algn="ctr">
+                      <a:solidFill>
+                        <a:srgbClr val="D9D4EC"/>
+                      </a:solidFill>
+                      <a:prstDash val="solid"/>
+                      <a:round/>
+                      <a:headEnd type="none" w="med" len="med"/>
+                      <a:tailEnd type="none" w="med" len="med"/>
+                    </a:lnB>
+                    <a:solidFill>
+                      <a:srgbClr val="FFFFFF"/>
+                    </a:solidFill>
+                  </a:tcPr>
+                </a:tc>
+                <a:tc>
+                  <a:txBody>
+                    <a:bodyPr/>
+                    <a:lstStyle/>
+                    <a:p>
+                      <a:pPr indent="0" marL="0">
+                        <a:buNone/>
+                      </a:pPr>
+                      <a:r>
+                        <a:rPr lang="en-US" sz="1400" dirty="0">
+                          <a:solidFill>
+                            <a:srgbClr val="3A3550"/>
+                          </a:solidFill>
+                          <a:latin typeface="Calibri" pitchFamily="34" charset="0"/>
+                          <a:ea typeface="Calibri" pitchFamily="34" charset="-122"/>
+                          <a:cs typeface="Calibri" pitchFamily="34" charset="-120"/>
+                        </a:rPr>
+                        <a:t>Form, CRUD, kiểm tra nhập, tìm kiếm/lọc/sắp xếp</a:t>
+                      </a:r>
+                      <a:endParaRPr lang="en-US" sz="1400" dirty="0">
+                        <a:latin typeface="Calibri" charset="0"/>
+                        <a:ea typeface="Calibri" charset="0"/>
+                        <a:cs typeface="Calibri" charset="0"/>
+                      </a:endParaRPr>
+                    </a:p>
+                  </a:txBody>
+                  <a:tcPr marL="73152" marR="73152" marT="73152" marB="73152" anchor="ctr">
+                    <a:lnL w="9525" cap="flat" cmpd="sng" algn="ctr">
+                      <a:solidFill>
+                        <a:srgbClr val="D9D4EC"/>
+                      </a:solidFill>
+                      <a:prstDash val="solid"/>
+                      <a:round/>
+                      <a:headEnd type="none" w="med" len="med"/>
+                      <a:tailEnd type="none" w="med" len="med"/>
+                    </a:lnL>
+                    <a:lnR w="9525" cap="flat" cmpd="sng" algn="ctr">
+                      <a:solidFill>
+                        <a:srgbClr val="D9D4EC"/>
+                      </a:solidFill>
+                      <a:prstDash val="solid"/>
+                      <a:round/>
+                      <a:headEnd type="none" w="med" len="med"/>
+                      <a:tailEnd type="none" w="med" len="med"/>
+                    </a:lnR>
+                    <a:lnT w="9525" cap="flat" cmpd="sng" algn="ctr">
+                      <a:solidFill>
+                        <a:srgbClr val="D9D4EC"/>
+                      </a:solidFill>
+                      <a:prstDash val="solid"/>
+                      <a:round/>
+                      <a:headEnd type="none" w="med" len="med"/>
+                      <a:tailEnd type="none" w="med" len="med"/>
+                    </a:lnT>
+                    <a:lnB w="9525" cap="flat" cmpd="sng" algn="ctr">
+                      <a:solidFill>
+                        <a:srgbClr val="D9D4EC"/>
+                      </a:solidFill>
+                      <a:prstDash val="solid"/>
+                      <a:round/>
+                      <a:headEnd type="none" w="med" len="med"/>
+                      <a:tailEnd type="none" w="med" len="med"/>
+                    </a:lnB>
+                    <a:solidFill>
+                      <a:srgbClr val="FFFFFF"/>
+                    </a:solidFill>
+                  </a:tcPr>
+                </a:tc>
+                <a:tc>
+                  <a:txBody>
+                    <a:bodyPr/>
+                    <a:lstStyle/>
+                    <a:p>
+                      <a:pPr indent="0" marL="0">
+                        <a:buNone/>
+                      </a:pPr>
+                      <a:r>
+                        <a:rPr lang="en-US" sz="1400" dirty="0">
+                          <a:solidFill>
+                            <a:srgbClr val="3A3550"/>
+                          </a:solidFill>
+                          <a:latin typeface="Calibri" pitchFamily="34" charset="0"/>
+                          <a:ea typeface="Calibri" pitchFamily="34" charset="-122"/>
+                          <a:cs typeface="Calibri" pitchFamily="34" charset="-120"/>
+                        </a:rPr>
+                        <a:t>Thêm/sửa/xóa và xử lý dữ liệu sai đúng kỳ vọng</a:t>
+                      </a:r>
+                      <a:endParaRPr lang="en-US" sz="1400" dirty="0">
+                        <a:latin typeface="Calibri" charset="0"/>
+                        <a:ea typeface="Calibri" charset="0"/>
+                        <a:cs typeface="Calibri" charset="0"/>
+                      </a:endParaRPr>
+                    </a:p>
+                  </a:txBody>
+                  <a:tcPr marL="73152" marR="73152" marT="73152" marB="73152" anchor="ctr">
+                    <a:lnL w="9525" cap="flat" cmpd="sng" algn="ctr">
+                      <a:solidFill>
+                        <a:srgbClr val="D9D4EC"/>
+                      </a:solidFill>
+                      <a:prstDash val="solid"/>
+                      <a:round/>
+                      <a:headEnd type="none" w="med" len="med"/>
+                      <a:tailEnd type="none" w="med" len="med"/>
+                    </a:lnL>
+                    <a:lnR w="9525" cap="flat" cmpd="sng" algn="ctr">
+                      <a:solidFill>
+                        <a:srgbClr val="D9D4EC"/>
+                      </a:solidFill>
+                      <a:prstDash val="solid"/>
+                      <a:round/>
+                      <a:headEnd type="none" w="med" len="med"/>
+                      <a:tailEnd type="none" w="med" len="med"/>
+                    </a:lnR>
+                    <a:lnT w="9525" cap="flat" cmpd="sng" algn="ctr">
+                      <a:solidFill>
+                        <a:srgbClr val="D9D4EC"/>
+                      </a:solidFill>
+                      <a:prstDash val="solid"/>
+                      <a:round/>
+                      <a:headEnd type="none" w="med" len="med"/>
+                      <a:tailEnd type="none" w="med" len="med"/>
+                    </a:lnT>
+                    <a:lnB w="9525" cap="flat" cmpd="sng" algn="ctr">
+                      <a:solidFill>
+                        <a:srgbClr val="D9D4EC"/>
+                      </a:solidFill>
+                      <a:prstDash val="solid"/>
+                      <a:round/>
+                      <a:headEnd type="none" w="med" len="med"/>
+                      <a:tailEnd type="none" w="med" len="med"/>
+                    </a:lnB>
+                    <a:solidFill>
+                      <a:srgbClr val="FFFFFF"/>
+                    </a:solidFill>
+                  </a:tcPr>
+                </a:tc>
+                <a:tc>
+                  <a:txBody>
+                    <a:bodyPr/>
+                    <a:lstStyle/>
+                    <a:p>
+                      <a:pPr indent="0" marL="0">
+                        <a:buNone/>
+                      </a:pPr>
+                      <a:r>
+                        <a:rPr lang="en-US" sz="1400" i="1" dirty="0">
+                          <a:solidFill>
+                            <a:srgbClr val="6E6888"/>
+                          </a:solidFill>
+                          <a:latin typeface="Calibri" pitchFamily="34" charset="0"/>
+                          <a:ea typeface="Calibri" pitchFamily="34" charset="-122"/>
+                          <a:cs typeface="Calibri" pitchFamily="34" charset="-120"/>
+                        </a:rPr>
+                        <a:t>Họ tên: …………</a:t>
+                      </a:r>
+                      <a:endParaRPr lang="en-US" sz="1400" dirty="0">
+                        <a:latin typeface="Calibri" charset="0"/>
+                        <a:ea typeface="Calibri" charset="0"/>
+                        <a:cs typeface="Calibri" charset="0"/>
+                      </a:endParaRPr>
+                    </a:p>
+                    <a:p>
+                      <a:pPr indent="0" marL="0">
+                        <a:buNone/>
+                      </a:pPr>
+                      <a:r>
+                        <a:rPr lang="en-US" sz="1400" i="1" dirty="0">
+                          <a:solidFill>
+                            <a:srgbClr val="6E6888"/>
+                          </a:solidFill>
+                          <a:latin typeface="Calibri" pitchFamily="34" charset="0"/>
+                          <a:ea typeface="Calibri" pitchFamily="34" charset="-122"/>
+                          <a:cs typeface="Calibri" pitchFamily="34" charset="-120"/>
+                        </a:rPr>
+                        <a:t>MSSV: …………</a:t>
+                      </a:r>
+                      <a:endParaRPr lang="en-US" sz="1400" dirty="0">
+                        <a:latin typeface="Calibri" charset="0"/>
+                        <a:ea typeface="Calibri" charset="0"/>
+                        <a:cs typeface="Calibri" charset="0"/>
+                      </a:endParaRPr>
+                    </a:p>
+                  </a:txBody>
+                  <a:tcPr marL="73152" marR="73152" marT="73152" marB="73152" anchor="ctr">
+                    <a:lnL w="9525" cap="flat" cmpd="sng" algn="ctr">
+                      <a:solidFill>
+                        <a:srgbClr val="D9D4EC"/>
+                      </a:solidFill>
+                      <a:prstDash val="solid"/>
+                      <a:round/>
+                      <a:headEnd type="none" w="med" len="med"/>
+                      <a:tailEnd type="none" w="med" len="med"/>
+                    </a:lnL>
+                    <a:lnR w="9525" cap="flat" cmpd="sng" algn="ctr">
+                      <a:solidFill>
+                        <a:srgbClr val="D9D4EC"/>
+                      </a:solidFill>
+                      <a:prstDash val="solid"/>
+                      <a:round/>
+                      <a:headEnd type="none" w="med" len="med"/>
+                      <a:tailEnd type="none" w="med" len="med"/>
+                    </a:lnR>
+                    <a:lnT w="9525" cap="flat" cmpd="sng" algn="ctr">
+                      <a:solidFill>
+                        <a:srgbClr val="D9D4EC"/>
+                      </a:solidFill>
+                      <a:prstDash val="solid"/>
+                      <a:round/>
+                      <a:headEnd type="none" w="med" len="med"/>
+                      <a:tailEnd type="none" w="med" len="med"/>
+                    </a:lnT>
+                    <a:lnB w="9525" cap="flat" cmpd="sng" algn="ctr">
+                      <a:solidFill>
+                        <a:srgbClr val="D9D4EC"/>
+                      </a:solidFill>
+                      <a:prstDash val="solid"/>
+                      <a:round/>
+                      <a:headEnd type="none" w="med" len="med"/>
+                      <a:tailEnd type="none" w="med" len="med"/>
+                    </a:lnB>
+                    <a:solidFill>
+                      <a:srgbClr val="FFFFFF"/>
+                    </a:solidFill>
+                  </a:tcPr>
+                </a:tc>
+              </a:tr>
+              <a:tr h="960120">
+                <a:tc>
+                  <a:txBody>
+                    <a:bodyPr/>
+                    <a:lstStyle/>
+                    <a:p>
+                      <a:pPr indent="0" marL="0">
+                        <a:buNone/>
+                      </a:pPr>
+                      <a:r>
+                        <a:rPr lang="en-US" sz="1400" b="1" dirty="0">
+                          <a:solidFill>
+                            <a:srgbClr val="2B1B5A"/>
+                          </a:solidFill>
+                          <a:latin typeface="Calibri" pitchFamily="34" charset="0"/>
+                          <a:ea typeface="Calibri" pitchFamily="34" charset="-122"/>
+                          <a:cs typeface="Calibri" pitchFamily="34" charset="-120"/>
+                        </a:rPr>
+                        <a:t>Thành viên 3</a:t>
+                      </a:r>
+                      <a:endParaRPr lang="en-US" sz="1400" dirty="0">
+                        <a:latin typeface="Calibri" charset="0"/>
+                        <a:ea typeface="Calibri" charset="0"/>
+                        <a:cs typeface="Calibri" charset="0"/>
+                      </a:endParaRPr>
+                    </a:p>
+                    <a:p>
+                      <a:pPr indent="0" marL="0">
+                        <a:buNone/>
+                      </a:pPr>
+                      <a:r>
+                        <a:rPr lang="en-US" sz="1400" b="1" dirty="0">
+                          <a:solidFill>
+                            <a:srgbClr val="2B1B5A"/>
+                          </a:solidFill>
+                          <a:latin typeface="Calibri" pitchFamily="34" charset="0"/>
+                          <a:ea typeface="Calibri" pitchFamily="34" charset="-122"/>
+                          <a:cs typeface="Calibri" pitchFamily="34" charset="-120"/>
+                        </a:rPr>
+                        <a:t>Dữ liệu</a:t>
+                      </a:r>
+                      <a:endParaRPr lang="en-US" sz="1400" dirty="0">
+                        <a:latin typeface="Calibri" charset="0"/>
+                        <a:ea typeface="Calibri" charset="0"/>
+                        <a:cs typeface="Calibri" charset="0"/>
+                      </a:endParaRPr>
+                    </a:p>
+                  </a:txBody>
+                  <a:tcPr marL="73152" marR="73152" marT="73152" marB="73152" anchor="ctr">
+                    <a:lnL w="9525" cap="flat" cmpd="sng" algn="ctr">
+                      <a:solidFill>
+                        <a:srgbClr val="D9D4EC"/>
+                      </a:solidFill>
+                      <a:prstDash val="solid"/>
+                      <a:round/>
+                      <a:headEnd type="none" w="med" len="med"/>
+                      <a:tailEnd type="none" w="med" len="med"/>
+                    </a:lnL>
+                    <a:lnR w="9525" cap="flat" cmpd="sng" algn="ctr">
+                      <a:solidFill>
+                        <a:srgbClr val="D9D4EC"/>
+                      </a:solidFill>
+                      <a:prstDash val="solid"/>
+                      <a:round/>
+                      <a:headEnd type="none" w="med" len="med"/>
+                      <a:tailEnd type="none" w="med" len="med"/>
+                    </a:lnR>
+                    <a:lnT w="9525" cap="flat" cmpd="sng" algn="ctr">
+                      <a:solidFill>
+                        <a:srgbClr val="D9D4EC"/>
+                      </a:solidFill>
+                      <a:prstDash val="solid"/>
+                      <a:round/>
+                      <a:headEnd type="none" w="med" len="med"/>
+                      <a:tailEnd type="none" w="med" len="med"/>
+                    </a:lnT>
+                    <a:lnB w="9525" cap="flat" cmpd="sng" algn="ctr">
+                      <a:solidFill>
+                        <a:srgbClr val="D9D4EC"/>
+                      </a:solidFill>
+                      <a:prstDash val="solid"/>
+                      <a:round/>
+                      <a:headEnd type="none" w="med" len="med"/>
+                      <a:tailEnd type="none" w="med" len="med"/>
+                    </a:lnB>
+                    <a:solidFill>
+                      <a:srgbClr val="F3F0FB"/>
+                    </a:solidFill>
+                  </a:tcPr>
+                </a:tc>
+                <a:tc>
+                  <a:txBody>
+                    <a:bodyPr/>
+                    <a:lstStyle/>
+                    <a:p>
+                      <a:pPr indent="0" marL="0">
+                        <a:buNone/>
+                      </a:pPr>
+                      <a:r>
+                        <a:rPr lang="en-US" sz="1400" dirty="0">
+                          <a:solidFill>
+                            <a:srgbClr val="3A3550"/>
+                          </a:solidFill>
+                          <a:latin typeface="Calibri" pitchFamily="34" charset="0"/>
+                          <a:ea typeface="Calibri" pitchFamily="34" charset="-122"/>
+                          <a:cs typeface="Calibri" pitchFamily="34" charset="-120"/>
+                        </a:rPr>
+                        <a:t>Schema, Repository, tag, cài đặt, xuất CSV</a:t>
+                      </a:r>
+                      <a:endParaRPr lang="en-US" sz="1400" dirty="0">
+                        <a:latin typeface="Calibri" charset="0"/>
+                        <a:ea typeface="Calibri" charset="0"/>
+                        <a:cs typeface="Calibri" charset="0"/>
+                      </a:endParaRPr>
+                    </a:p>
+                  </a:txBody>
+                  <a:tcPr marL="73152" marR="73152" marT="73152" marB="73152" anchor="ctr">
+                    <a:lnL w="9525" cap="flat" cmpd="sng" algn="ctr">
+                      <a:solidFill>
+                        <a:srgbClr val="D9D4EC"/>
+                      </a:solidFill>
+                      <a:prstDash val="solid"/>
+                      <a:round/>
+                      <a:headEnd type="none" w="med" len="med"/>
+                      <a:tailEnd type="none" w="med" len="med"/>
+                    </a:lnL>
+                    <a:lnR w="9525" cap="flat" cmpd="sng" algn="ctr">
+                      <a:solidFill>
+                        <a:srgbClr val="D9D4EC"/>
+                      </a:solidFill>
+                      <a:prstDash val="solid"/>
+                      <a:round/>
+                      <a:headEnd type="none" w="med" len="med"/>
+                      <a:tailEnd type="none" w="med" len="med"/>
+                    </a:lnR>
+                    <a:lnT w="9525" cap="flat" cmpd="sng" algn="ctr">
+                      <a:solidFill>
+                        <a:srgbClr val="D9D4EC"/>
+                      </a:solidFill>
+                      <a:prstDash val="solid"/>
+                      <a:round/>
+                      <a:headEnd type="none" w="med" len="med"/>
+                      <a:tailEnd type="none" w="med" len="med"/>
+                    </a:lnT>
+                    <a:lnB w="9525" cap="flat" cmpd="sng" algn="ctr">
+                      <a:solidFill>
+                        <a:srgbClr val="D9D4EC"/>
+                      </a:solidFill>
+                      <a:prstDash val="solid"/>
+                      <a:round/>
+                      <a:headEnd type="none" w="med" len="med"/>
+                      <a:tailEnd type="none" w="med" len="med"/>
+                    </a:lnB>
+                    <a:solidFill>
+                      <a:srgbClr val="F3F0FB"/>
+                    </a:solidFill>
+                  </a:tcPr>
+                </a:tc>
+                <a:tc>
+                  <a:txBody>
+                    <a:bodyPr/>
+                    <a:lstStyle/>
+                    <a:p>
+                      <a:pPr indent="0" marL="0">
+                        <a:buNone/>
+                      </a:pPr>
+                      <a:r>
+                        <a:rPr lang="en-US" sz="1400" dirty="0">
+                          <a:solidFill>
+                            <a:srgbClr val="3A3550"/>
+                          </a:solidFill>
+                          <a:latin typeface="Calibri" pitchFamily="34" charset="0"/>
+                          <a:ea typeface="Calibri" pitchFamily="34" charset="-122"/>
+                          <a:cs typeface="Calibri" pitchFamily="34" charset="-120"/>
+                        </a:rPr>
+                        <a:t>Dữ liệu còn sau khi mở lại; xóa liên kết tag đúng; CSV đọc được tiếng Việt</a:t>
+                      </a:r>
+                      <a:endParaRPr lang="en-US" sz="1400" dirty="0">
+                        <a:latin typeface="Calibri" charset="0"/>
+                        <a:ea typeface="Calibri" charset="0"/>
+                        <a:cs typeface="Calibri" charset="0"/>
+                      </a:endParaRPr>
+                    </a:p>
+                  </a:txBody>
+                  <a:tcPr marL="73152" marR="73152" marT="73152" marB="73152" anchor="ctr">
+                    <a:lnL w="9525" cap="flat" cmpd="sng" algn="ctr">
+                      <a:solidFill>
+                        <a:srgbClr val="D9D4EC"/>
+                      </a:solidFill>
+                      <a:prstDash val="solid"/>
+                      <a:round/>
+                      <a:headEnd type="none" w="med" len="med"/>
+                      <a:tailEnd type="none" w="med" len="med"/>
+                    </a:lnL>
+                    <a:lnR w="9525" cap="flat" cmpd="sng" algn="ctr">
+                      <a:solidFill>
+                        <a:srgbClr val="D9D4EC"/>
+                      </a:solidFill>
+                      <a:prstDash val="solid"/>
+                      <a:round/>
+                      <a:headEnd type="none" w="med" len="med"/>
+                      <a:tailEnd type="none" w="med" len="med"/>
+                    </a:lnR>
+                    <a:lnT w="9525" cap="flat" cmpd="sng" algn="ctr">
+                      <a:solidFill>
+                        <a:srgbClr val="D9D4EC"/>
+                      </a:solidFill>
+                      <a:prstDash val="solid"/>
+                      <a:round/>
+                      <a:headEnd type="none" w="med" len="med"/>
+                      <a:tailEnd type="none" w="med" len="med"/>
+                    </a:lnT>
+                    <a:lnB w="9525" cap="flat" cmpd="sng" algn="ctr">
+                      <a:solidFill>
+                        <a:srgbClr val="D9D4EC"/>
+                      </a:solidFill>
+                      <a:prstDash val="solid"/>
+                      <a:round/>
+                      <a:headEnd type="none" w="med" len="med"/>
+                      <a:tailEnd type="none" w="med" len="med"/>
+                    </a:lnB>
+                    <a:solidFill>
+                      <a:srgbClr val="F3F0FB"/>
+                    </a:solidFill>
+                  </a:tcPr>
+                </a:tc>
+                <a:tc>
+                  <a:txBody>
+                    <a:bodyPr/>
+                    <a:lstStyle/>
+                    <a:p>
+                      <a:pPr indent="0" marL="0">
+                        <a:buNone/>
+                      </a:pPr>
+                      <a:r>
+                        <a:rPr lang="en-US" sz="1400" i="1" dirty="0">
+                          <a:solidFill>
+                            <a:srgbClr val="6E6888"/>
+                          </a:solidFill>
+                          <a:latin typeface="Calibri" pitchFamily="34" charset="0"/>
+                          <a:ea typeface="Calibri" pitchFamily="34" charset="-122"/>
+                          <a:cs typeface="Calibri" pitchFamily="34" charset="-120"/>
+                        </a:rPr>
+                        <a:t>Họ tên: …………</a:t>
+                      </a:r>
+                      <a:endParaRPr lang="en-US" sz="1400" dirty="0">
+                        <a:latin typeface="Calibri" charset="0"/>
+                        <a:ea typeface="Calibri" charset="0"/>
+                        <a:cs typeface="Calibri" charset="0"/>
+                      </a:endParaRPr>
+                    </a:p>
+                    <a:p>
+                      <a:pPr indent="0" marL="0">
+                        <a:buNone/>
+                      </a:pPr>
+                      <a:r>
+                        <a:rPr lang="en-US" sz="1400" i="1" dirty="0">
+                          <a:solidFill>
+                            <a:srgbClr val="6E6888"/>
+                          </a:solidFill>
+                          <a:latin typeface="Calibri" pitchFamily="34" charset="0"/>
+                          <a:ea typeface="Calibri" pitchFamily="34" charset="-122"/>
+                          <a:cs typeface="Calibri" pitchFamily="34" charset="-120"/>
+                        </a:rPr>
+                        <a:t>MSSV: …………</a:t>
+                      </a:r>
+                      <a:endParaRPr lang="en-US" sz="1400" dirty="0">
+                        <a:latin typeface="Calibri" charset="0"/>
+                        <a:ea typeface="Calibri" charset="0"/>
+                        <a:cs typeface="Calibri" charset="0"/>
+                      </a:endParaRPr>
+                    </a:p>
+                  </a:txBody>
+                  <a:tcPr marL="73152" marR="73152" marT="73152" marB="73152" anchor="ctr">
+                    <a:lnL w="9525" cap="flat" cmpd="sng" algn="ctr">
+                      <a:solidFill>
+                        <a:srgbClr val="D9D4EC"/>
+                      </a:solidFill>
+                      <a:prstDash val="solid"/>
+                      <a:round/>
+                      <a:headEnd type="none" w="med" len="med"/>
+                      <a:tailEnd type="none" w="med" len="med"/>
+                    </a:lnL>
+                    <a:lnR w="9525" cap="flat" cmpd="sng" algn="ctr">
+                      <a:solidFill>
+                        <a:srgbClr val="D9D4EC"/>
+                      </a:solidFill>
+                      <a:prstDash val="solid"/>
+                      <a:round/>
+                      <a:headEnd type="none" w="med" len="med"/>
+                      <a:tailEnd type="none" w="med" len="med"/>
+                    </a:lnR>
+                    <a:lnT w="9525" cap="flat" cmpd="sng" algn="ctr">
+                      <a:solidFill>
+                        <a:srgbClr val="D9D4EC"/>
+                      </a:solidFill>
+                      <a:prstDash val="solid"/>
+                      <a:round/>
+                      <a:headEnd type="none" w="med" len="med"/>
+                      <a:tailEnd type="none" w="med" len="med"/>
+                    </a:lnT>
+                    <a:lnB w="9525" cap="flat" cmpd="sng" algn="ctr">
+                      <a:solidFill>
+                        <a:srgbClr val="D9D4EC"/>
+                      </a:solidFill>
+                      <a:prstDash val="solid"/>
+                      <a:round/>
+                      <a:headEnd type="none" w="med" len="med"/>
+                      <a:tailEnd type="none" w="med" len="med"/>
+                    </a:lnB>
+                    <a:solidFill>
+                      <a:srgbClr val="F3F0FB"/>
+                    </a:solidFill>
+                  </a:tcPr>
+                </a:tc>
+              </a:tr>
+              <a:tr h="960120">
+                <a:tc>
+                  <a:txBody>
+                    <a:bodyPr/>
+                    <a:lstStyle/>
+                    <a:p>
+                      <a:pPr indent="0" marL="0">
+                        <a:buNone/>
+                      </a:pPr>
+                      <a:r>
+                        <a:rPr lang="en-US" sz="1400" b="1" dirty="0">
+                          <a:solidFill>
+                            <a:srgbClr val="2B1B5A"/>
+                          </a:solidFill>
+                          <a:latin typeface="Calibri" pitchFamily="34" charset="0"/>
+                          <a:ea typeface="Calibri" pitchFamily="34" charset="-122"/>
+                          <a:cs typeface="Calibri" pitchFamily="34" charset="-120"/>
+                        </a:rPr>
+                        <a:t>Thành viên 4</a:t>
+                      </a:r>
+                      <a:endParaRPr lang="en-US" sz="1400" dirty="0">
+                        <a:latin typeface="Calibri" charset="0"/>
+                        <a:ea typeface="Calibri" charset="0"/>
+                        <a:cs typeface="Calibri" charset="0"/>
+                      </a:endParaRPr>
+                    </a:p>
+                    <a:p>
+                      <a:pPr indent="0" marL="0">
+                        <a:buNone/>
+                      </a:pPr>
+                      <a:r>
+                        <a:rPr lang="en-US" sz="1400" b="1" dirty="0">
+                          <a:solidFill>
+                            <a:srgbClr val="2B1B5A"/>
+                          </a:solidFill>
+                          <a:latin typeface="Calibri" pitchFamily="34" charset="0"/>
+                          <a:ea typeface="Calibri" pitchFamily="34" charset="-122"/>
+                          <a:cs typeface="Calibri" pitchFamily="34" charset="-120"/>
+                        </a:rPr>
+                        <a:t>Báo cáo, nhắc hạn</a:t>
+                      </a:r>
+                      <a:endParaRPr lang="en-US" sz="1400" dirty="0">
+                        <a:latin typeface="Calibri" charset="0"/>
+                        <a:ea typeface="Calibri" charset="0"/>
+                        <a:cs typeface="Calibri" charset="0"/>
+                      </a:endParaRPr>
+                    </a:p>
+                  </a:txBody>
+                  <a:tcPr marL="73152" marR="73152" marT="73152" marB="73152" anchor="ctr">
+                    <a:lnL w="9525" cap="flat" cmpd="sng" algn="ctr">
+                      <a:solidFill>
+                        <a:srgbClr val="D9D4EC"/>
+                      </a:solidFill>
+                      <a:prstDash val="solid"/>
+                      <a:round/>
+                      <a:headEnd type="none" w="med" len="med"/>
+                      <a:tailEnd type="none" w="med" len="med"/>
+                    </a:lnL>
+                    <a:lnR w="9525" cap="flat" cmpd="sng" algn="ctr">
+                      <a:solidFill>
+                        <a:srgbClr val="D9D4EC"/>
+                      </a:solidFill>
+                      <a:prstDash val="solid"/>
+                      <a:round/>
+                      <a:headEnd type="none" w="med" len="med"/>
+                      <a:tailEnd type="none" w="med" len="med"/>
+                    </a:lnR>
+                    <a:lnT w="9525" cap="flat" cmpd="sng" algn="ctr">
+                      <a:solidFill>
+                        <a:srgbClr val="D9D4EC"/>
+                      </a:solidFill>
+                      <a:prstDash val="solid"/>
+                      <a:round/>
+                      <a:headEnd type="none" w="med" len="med"/>
+                      <a:tailEnd type="none" w="med" len="med"/>
+                    </a:lnT>
+                    <a:lnB w="9525" cap="flat" cmpd="sng" algn="ctr">
+                      <a:solidFill>
+                        <a:srgbClr val="D9D4EC"/>
+                      </a:solidFill>
+                      <a:prstDash val="solid"/>
+                      <a:round/>
+                      <a:headEnd type="none" w="med" len="med"/>
+                      <a:tailEnd type="none" w="med" len="med"/>
+                    </a:lnB>
+                    <a:solidFill>
+                      <a:srgbClr val="FFFFFF"/>
+                    </a:solidFill>
+                  </a:tcPr>
+                </a:tc>
+                <a:tc>
+                  <a:txBody>
+                    <a:bodyPr/>
+                    <a:lstStyle/>
+                    <a:p>
+                      <a:pPr indent="0" marL="0">
+                        <a:buNone/>
+                      </a:pPr>
+                      <a:r>
+                        <a:rPr lang="en-US" sz="1400" dirty="0">
+                          <a:solidFill>
+                            <a:srgbClr val="3A3550"/>
+                          </a:solidFill>
+                          <a:latin typeface="Calibri" pitchFamily="34" charset="0"/>
+                          <a:ea typeface="Calibri" pitchFamily="34" charset="-122"/>
+                          <a:cs typeface="Calibri" pitchFamily="34" charset="-120"/>
+                        </a:rPr>
+                        <a:t>Công thức, biểu đồ, Worker, ca kiểm thử, kịch bản demo</a:t>
+                      </a:r>
+                      <a:endParaRPr lang="en-US" sz="1400" dirty="0">
+                        <a:latin typeface="Calibri" charset="0"/>
+                        <a:ea typeface="Calibri" charset="0"/>
+                        <a:cs typeface="Calibri" charset="0"/>
+                      </a:endParaRPr>
+                    </a:p>
+                  </a:txBody>
+                  <a:tcPr marL="73152" marR="73152" marT="73152" marB="73152" anchor="ctr">
+                    <a:lnL w="9525" cap="flat" cmpd="sng" algn="ctr">
+                      <a:solidFill>
+                        <a:srgbClr val="D9D4EC"/>
+                      </a:solidFill>
+                      <a:prstDash val="solid"/>
+                      <a:round/>
+                      <a:headEnd type="none" w="med" len="med"/>
+                      <a:tailEnd type="none" w="med" len="med"/>
+                    </a:lnL>
+                    <a:lnR w="9525" cap="flat" cmpd="sng" algn="ctr">
+                      <a:solidFill>
+                        <a:srgbClr val="D9D4EC"/>
+                      </a:solidFill>
+                      <a:prstDash val="solid"/>
+                      <a:round/>
+                      <a:headEnd type="none" w="med" len="med"/>
+                      <a:tailEnd type="none" w="med" len="med"/>
+                    </a:lnR>
+                    <a:lnT w="9525" cap="flat" cmpd="sng" algn="ctr">
+                      <a:solidFill>
+                        <a:srgbClr val="D9D4EC"/>
+                      </a:solidFill>
+                      <a:prstDash val="solid"/>
+                      <a:round/>
+                      <a:headEnd type="none" w="med" len="med"/>
+                      <a:tailEnd type="none" w="med" len="med"/>
+                    </a:lnT>
+                    <a:lnB w="9525" cap="flat" cmpd="sng" algn="ctr">
+                      <a:solidFill>
+                        <a:srgbClr val="D9D4EC"/>
+                      </a:solidFill>
+                      <a:prstDash val="solid"/>
+                      <a:round/>
+                      <a:headEnd type="none" w="med" len="med"/>
+                      <a:tailEnd type="none" w="med" len="med"/>
+                    </a:lnB>
+                    <a:solidFill>
+                      <a:srgbClr val="FFFFFF"/>
+                    </a:solidFill>
+                  </a:tcPr>
+                </a:tc>
+                <a:tc>
+                  <a:txBody>
+                    <a:bodyPr/>
+                    <a:lstStyle/>
+                    <a:p>
+                      <a:pPr indent="0" marL="0">
+                        <a:buNone/>
+                      </a:pPr>
+                      <a:r>
+                        <a:rPr lang="en-US" sz="1400" dirty="0">
+                          <a:solidFill>
+                            <a:srgbClr val="3A3550"/>
+                          </a:solidFill>
+                          <a:latin typeface="Calibri" pitchFamily="34" charset="0"/>
+                          <a:ea typeface="Calibri" pitchFamily="34" charset="-122"/>
+                          <a:cs typeface="Calibri" pitchFamily="34" charset="-120"/>
+                        </a:rPr>
+                        <a:t>Tổng tiền đúng theo chu kỳ/tiền tệ; kiểm tra quyền và tình huống nhắc hạn</a:t>
+                      </a:r>
+                      <a:endParaRPr lang="en-US" sz="1400" dirty="0">
+                        <a:latin typeface="Calibri" charset="0"/>
+                        <a:ea typeface="Calibri" charset="0"/>
+                        <a:cs typeface="Calibri" charset="0"/>
+                      </a:endParaRPr>
+                    </a:p>
+                  </a:txBody>
+                  <a:tcPr marL="73152" marR="73152" marT="73152" marB="73152" anchor="ctr">
+                    <a:lnL w="9525" cap="flat" cmpd="sng" algn="ctr">
+                      <a:solidFill>
+                        <a:srgbClr val="D9D4EC"/>
+                      </a:solidFill>
+                      <a:prstDash val="solid"/>
+                      <a:round/>
+                      <a:headEnd type="none" w="med" len="med"/>
+                      <a:tailEnd type="none" w="med" len="med"/>
+                    </a:lnL>
+                    <a:lnR w="9525" cap="flat" cmpd="sng" algn="ctr">
+                      <a:solidFill>
+                        <a:srgbClr val="D9D4EC"/>
+                      </a:solidFill>
+                      <a:prstDash val="solid"/>
+                      <a:round/>
+                      <a:headEnd type="none" w="med" len="med"/>
+                      <a:tailEnd type="none" w="med" len="med"/>
+                    </a:lnR>
+                    <a:lnT w="9525" cap="flat" cmpd="sng" algn="ctr">
+                      <a:solidFill>
+                        <a:srgbClr val="D9D4EC"/>
+                      </a:solidFill>
+                      <a:prstDash val="solid"/>
+                      <a:round/>
+                      <a:headEnd type="none" w="med" len="med"/>
+                      <a:tailEnd type="none" w="med" len="med"/>
+                    </a:lnT>
+                    <a:lnB w="9525" cap="flat" cmpd="sng" algn="ctr">
+                      <a:solidFill>
+                        <a:srgbClr val="D9D4EC"/>
+                      </a:solidFill>
+                      <a:prstDash val="solid"/>
+                      <a:round/>
+                      <a:headEnd type="none" w="med" len="med"/>
+                      <a:tailEnd type="none" w="med" len="med"/>
+                    </a:lnB>
+                    <a:solidFill>
+                      <a:srgbClr val="FFFFFF"/>
+                    </a:solidFill>
+                  </a:tcPr>
+                </a:tc>
+                <a:tc>
+                  <a:txBody>
+                    <a:bodyPr/>
+                    <a:lstStyle/>
+                    <a:p>
+                      <a:pPr indent="0" marL="0">
+                        <a:buNone/>
+                      </a:pPr>
+                      <a:r>
+                        <a:rPr lang="en-US" sz="1400" i="1" dirty="0">
+                          <a:solidFill>
+                            <a:srgbClr val="6E6888"/>
+                          </a:solidFill>
+                          <a:latin typeface="Calibri" pitchFamily="34" charset="0"/>
+                          <a:ea typeface="Calibri" pitchFamily="34" charset="-122"/>
+                          <a:cs typeface="Calibri" pitchFamily="34" charset="-120"/>
+                        </a:rPr>
+                        <a:t>Họ tên: …………</a:t>
+                      </a:r>
+                      <a:endParaRPr lang="en-US" sz="1400" dirty="0">
+                        <a:latin typeface="Calibri" charset="0"/>
+                        <a:ea typeface="Calibri" charset="0"/>
+                        <a:cs typeface="Calibri" charset="0"/>
+                      </a:endParaRPr>
+                    </a:p>
+                    <a:p>
+                      <a:pPr indent="0" marL="0">
+                        <a:buNone/>
+                      </a:pPr>
+                      <a:r>
+                        <a:rPr lang="en-US" sz="1400" i="1" dirty="0">
+                          <a:solidFill>
+                            <a:srgbClr val="6E6888"/>
+                          </a:solidFill>
+                          <a:latin typeface="Calibri" pitchFamily="34" charset="0"/>
+                          <a:ea typeface="Calibri" pitchFamily="34" charset="-122"/>
+                          <a:cs typeface="Calibri" pitchFamily="34" charset="-120"/>
+                        </a:rPr>
+                        <a:t>MSSV: …………</a:t>
+                      </a:r>
+                      <a:endParaRPr lang="en-US" sz="1400" dirty="0">
+                        <a:latin typeface="Calibri" charset="0"/>
+                        <a:ea typeface="Calibri" charset="0"/>
+                        <a:cs typeface="Calibri" charset="0"/>
+                      </a:endParaRPr>
+                    </a:p>
+                  </a:txBody>
+                  <a:tcPr marL="73152" marR="73152" marT="73152" marB="73152" anchor="ctr">
+                    <a:lnL w="9525" cap="flat" cmpd="sng" algn="ctr">
+                      <a:solidFill>
+                        <a:srgbClr val="D9D4EC"/>
+                      </a:solidFill>
+                      <a:prstDash val="solid"/>
+                      <a:round/>
+                      <a:headEnd type="none" w="med" len="med"/>
+                      <a:tailEnd type="none" w="med" len="med"/>
+                    </a:lnL>
+                    <a:lnR w="9525" cap="flat" cmpd="sng" algn="ctr">
+                      <a:solidFill>
+                        <a:srgbClr val="D9D4EC"/>
+                      </a:solidFill>
+                      <a:prstDash val="solid"/>
+                      <a:round/>
+                      <a:headEnd type="none" w="med" len="med"/>
+                      <a:tailEnd type="none" w="med" len="med"/>
+                    </a:lnR>
+                    <a:lnT w="9525" cap="flat" cmpd="sng" algn="ctr">
+                      <a:solidFill>
+                        <a:srgbClr val="D9D4EC"/>
+                      </a:solidFill>
+                      <a:prstDash val="solid"/>
+                      <a:round/>
+                      <a:headEnd type="none" w="med" len="med"/>
+                      <a:tailEnd type="none" w="med" len="med"/>
+                    </a:lnT>
+                    <a:lnB w="9525" cap="flat" cmpd="sng" algn="ctr">
+                      <a:solidFill>
+                        <a:srgbClr val="D9D4EC"/>
+                      </a:solidFill>
+                      <a:prstDash val="solid"/>
+                      <a:round/>
+                      <a:headEnd type="none" w="med" len="med"/>
+                      <a:tailEnd type="none" w="med" len="med"/>
+                    </a:lnB>
+                    <a:solidFill>
+                      <a:srgbClr val="FFFFFF"/>
+                    </a:solidFill>
+                  </a:tcPr>
+                </a:tc>
+              </a:tr>
+            </a:tbl>
+          </a:graphicData>
+        </a:graphic>
+      </p:graphicFrame>
+      <p:sp>
+        <p:nvSpPr>
+          <p:cNvPr id="4" name="Text 1"/>
+          <p:cNvSpPr txBox="1"/>
+          <p:nvPr/>
+        </p:nvSpPr>
+        <p:spPr>
+          <a:xfrm>
+            <a:off x="548640" y="5989320"/>
+            <a:ext cx="10515600" cy="457200"/>
+          </a:xfrm>
+          <a:prstGeom prst="rect">
             <a:avLst/>
           </a:prstGeom>
           <a:noFill/>
-          <a:ln w="38100">
-            <a:solidFill>
-              <a:srgbClr val="CFC8EC"/>
-            </a:solidFill>
-            <a:prstDash val="solid"/>
-          </a:ln>
-        </p:spPr>
-      </p:sp>
-      <p:sp>
-        <p:nvSpPr>
-          <p:cNvPr id="4" name="Tuần 1 mốc"/>
-          <p:cNvSpPr/>
-          <p:nvPr/>
-        </p:nvSpPr>
-        <p:spPr>
-          <a:xfrm>
-            <a:off x="1417320" y="1828800"/>
-            <a:ext cx="640080" cy="640080"/>
-          </a:xfrm>
-          <a:prstGeom prst="ellipse">
-            <a:avLst/>
-          </a:prstGeom>
-          <a:solidFill>
-            <a:schemeClr val="accent1"/>
-          </a:solidFill>
-          <a:ln w="38100">
-            <a:solidFill>
-              <a:srgbClr val="FFFFFF"/>
-            </a:solidFill>
-            <a:prstDash val="solid"/>
-          </a:ln>
-        </p:spPr>
-      </p:sp>
-      <p:sp>
-        <p:nvSpPr>
-          <p:cNvPr id="5" name="Text 3"/>
-          <p:cNvSpPr txBox="1"/>
-          <p:nvPr/>
-        </p:nvSpPr>
-        <p:spPr>
-          <a:xfrm>
-            <a:off x="1417320" y="1828800"/>
-            <a:ext cx="640080" cy="640080"/>
-          </a:xfrm>
-          <a:prstGeom prst="rect">
-            <a:avLst/>
-          </a:prstGeom>
-          <a:noFill/>
-          <a:ln/>
-        </p:spPr>
-        <p:txBody>
-          <a:bodyPr wrap="square" lIns="0" tIns="0" rIns="0" bIns="0" rtlCol="0" anchor="ctr"/>
-          <a:lstStyle/>
-          <a:p>
-            <a:pPr algn="ctr" indent="0" marL="0">
-              <a:buNone/>
-            </a:pPr>
-            <a:r>
-              <a:rPr lang="en-US" sz="2000" b="1" dirty="0">
-                <a:solidFill>
-                  <a:schemeClr val="bg1"/>
-                </a:solidFill>
-              </a:rPr>
-              <a:t>1</a:t>
-            </a:r>
-            <a:endParaRPr lang="en-US" sz="2000" dirty="0"/>
-          </a:p>
-        </p:txBody>
-      </p:sp>
-      <p:sp>
-        <p:nvSpPr>
-          <p:cNvPr id="6" name="Thẻ Tuần 1"/>
-          <p:cNvSpPr/>
-          <p:nvPr/>
-        </p:nvSpPr>
-        <p:spPr>
-          <a:xfrm>
-            <a:off x="548640" y="2834640"/>
-            <a:ext cx="2606040" cy="2743200"/>
-          </a:xfrm>
-          <a:prstGeom prst="roundRect">
-            <a:avLst>
-              <a:gd name="adj" fmla="val 4211"/>
-            </a:avLst>
-          </a:prstGeom>
-          <a:solidFill>
-            <a:schemeClr val="bg2"/>
-          </a:solidFill>
-          <a:ln/>
-          <a:effectLst>
-            <a:outerShdw sx="100000" sy="100000" kx="0" ky="0" algn="bl" rotWithShape="0" blurRad="101600" dist="25400" dir="5400000">
-              <a:srgbClr val="2B1B5A">
-                <a:alpha val="12000"/>
-              </a:srgbClr>
-            </a:outerShdw>
-          </a:effectLst>
-        </p:spPr>
-      </p:sp>
-      <p:sp>
-        <p:nvSpPr>
-          <p:cNvPr id="7" name="Text 5"/>
-          <p:cNvSpPr txBox="1"/>
-          <p:nvPr/>
-        </p:nvSpPr>
-        <p:spPr>
-          <a:xfrm>
-            <a:off x="822960" y="3063240"/>
-            <a:ext cx="2103120" cy="320040"/>
-          </a:xfrm>
-          <a:prstGeom prst="rect">
-            <a:avLst/>
-          </a:prstGeom>
-          <a:noFill/>
           <a:ln/>
         </p:spPr>
         <p:txBody>
@@ -3804,680 +5992,14 @@
               <a:buNone/>
             </a:pPr>
             <a:r>
-              <a:rPr lang="en-US" sz="1400" b="1" dirty="0">
+              <a:rPr lang="en-US" sz="1200" i="1" dirty="0">
                 <a:solidFill>
                   <a:srgbClr val="6E6888"/>
                 </a:solidFill>
               </a:rPr>
-              <a:t>Tuần 1</a:t>
-            </a:r>
-            <a:endParaRPr lang="en-US" sz="1400" dirty="0"/>
-          </a:p>
-        </p:txBody>
-      </p:sp>
-      <p:sp>
-        <p:nvSpPr>
-          <p:cNvPr id="8" name="Text 6"/>
-          <p:cNvSpPr txBox="1"/>
-          <p:nvPr/>
-        </p:nvSpPr>
-        <p:spPr>
-          <a:xfrm>
-            <a:off x="822960" y="3383280"/>
-            <a:ext cx="2103120" cy="777240"/>
-          </a:xfrm>
-          <a:prstGeom prst="rect">
-            <a:avLst/>
-          </a:prstGeom>
-          <a:noFill/>
-          <a:ln/>
-        </p:spPr>
-        <p:txBody>
-          <a:bodyPr wrap="square" lIns="0" tIns="0" rIns="0" bIns="0" rtlCol="0" anchor="t"/>
-          <a:lstStyle/>
-          <a:p>
-            <a:pPr indent="0" marL="0">
-              <a:buNone/>
-            </a:pPr>
-            <a:r>
-              <a:rPr lang="en-US" sz="1900" b="1" dirty="0">
-                <a:solidFill>
-                  <a:schemeClr val="tx2"/>
-                </a:solidFill>
-              </a:rPr>
-              <a:t>Phân tích &amp; thiết kế</a:t>
-            </a:r>
-            <a:endParaRPr lang="en-US" sz="1900" dirty="0"/>
-          </a:p>
-        </p:txBody>
-      </p:sp>
-      <p:sp>
-        <p:nvSpPr>
-          <p:cNvPr id="9" name="Text 7"/>
-          <p:cNvSpPr txBox="1"/>
-          <p:nvPr/>
-        </p:nvSpPr>
-        <p:spPr>
-          <a:xfrm>
-            <a:off x="822960" y="4206240"/>
-            <a:ext cx="2103120" cy="1645920"/>
-          </a:xfrm>
-          <a:prstGeom prst="rect">
-            <a:avLst/>
-          </a:prstGeom>
-          <a:noFill/>
-          <a:ln/>
-        </p:spPr>
-        <p:txBody>
-          <a:bodyPr wrap="square" lIns="0" tIns="0" rIns="0" bIns="0" rtlCol="0" anchor="t"/>
-          <a:lstStyle/>
-          <a:p>
-            <a:pPr indent="0" marL="0">
-              <a:buNone/>
-            </a:pPr>
-            <a:r>
-              <a:rPr lang="en-US" sz="1500" dirty="0">
-                <a:solidFill>
-                  <a:srgbClr val="4A4560"/>
-                </a:solidFill>
-              </a:rPr>
-              <a:t>Chốt yêu cầu, Use Case, wireframe, ERD, tạo repo Git</a:t>
-            </a:r>
-            <a:endParaRPr lang="en-US" sz="1500" dirty="0"/>
-          </a:p>
-        </p:txBody>
-      </p:sp>
-      <p:sp>
-        <p:nvSpPr>
-          <p:cNvPr id="10" name="Tuần 2 mốc"/>
-          <p:cNvSpPr/>
-          <p:nvPr/>
-        </p:nvSpPr>
-        <p:spPr>
-          <a:xfrm>
-            <a:off x="4251960" y="1828800"/>
-            <a:ext cx="640080" cy="640080"/>
-          </a:xfrm>
-          <a:prstGeom prst="ellipse">
-            <a:avLst/>
-          </a:prstGeom>
-          <a:solidFill>
-            <a:schemeClr val="accent2"/>
-          </a:solidFill>
-          <a:ln w="38100">
-            <a:solidFill>
-              <a:srgbClr val="FFFFFF"/>
-            </a:solidFill>
-            <a:prstDash val="solid"/>
-          </a:ln>
-        </p:spPr>
-      </p:sp>
-      <p:sp>
-        <p:nvSpPr>
-          <p:cNvPr id="11" name="Text 9"/>
-          <p:cNvSpPr txBox="1"/>
-          <p:nvPr/>
-        </p:nvSpPr>
-        <p:spPr>
-          <a:xfrm>
-            <a:off x="4251960" y="1828800"/>
-            <a:ext cx="640080" cy="640080"/>
-          </a:xfrm>
-          <a:prstGeom prst="rect">
-            <a:avLst/>
-          </a:prstGeom>
-          <a:noFill/>
-          <a:ln/>
-        </p:spPr>
-        <p:txBody>
-          <a:bodyPr wrap="square" lIns="0" tIns="0" rIns="0" bIns="0" rtlCol="0" anchor="ctr"/>
-          <a:lstStyle/>
-          <a:p>
-            <a:pPr algn="ctr" indent="0" marL="0">
-              <a:buNone/>
-            </a:pPr>
-            <a:r>
-              <a:rPr lang="en-US" sz="2000" b="1" dirty="0">
-                <a:solidFill>
-                  <a:schemeClr val="bg1"/>
-                </a:solidFill>
-              </a:rPr>
-              <a:t>2</a:t>
-            </a:r>
-            <a:endParaRPr lang="en-US" sz="2000" dirty="0"/>
-          </a:p>
-        </p:txBody>
-      </p:sp>
-      <p:sp>
-        <p:nvSpPr>
-          <p:cNvPr id="12" name="Thẻ Tuần 2"/>
-          <p:cNvSpPr/>
-          <p:nvPr/>
-        </p:nvSpPr>
-        <p:spPr>
-          <a:xfrm>
-            <a:off x="3383280" y="2834640"/>
-            <a:ext cx="2606040" cy="2743200"/>
-          </a:xfrm>
-          <a:prstGeom prst="roundRect">
-            <a:avLst>
-              <a:gd name="adj" fmla="val 4211"/>
-            </a:avLst>
-          </a:prstGeom>
-          <a:solidFill>
-            <a:schemeClr val="bg2"/>
-          </a:solidFill>
-          <a:ln/>
-          <a:effectLst>
-            <a:outerShdw sx="100000" sy="100000" kx="0" ky="0" algn="bl" rotWithShape="0" blurRad="101600" dist="25400" dir="5400000">
-              <a:srgbClr val="2B1B5A">
-                <a:alpha val="12000"/>
-              </a:srgbClr>
-            </a:outerShdw>
-          </a:effectLst>
-        </p:spPr>
-      </p:sp>
-      <p:sp>
-        <p:nvSpPr>
-          <p:cNvPr id="13" name="Text 11"/>
-          <p:cNvSpPr txBox="1"/>
-          <p:nvPr/>
-        </p:nvSpPr>
-        <p:spPr>
-          <a:xfrm>
-            <a:off x="3657600" y="3063240"/>
-            <a:ext cx="2103120" cy="320040"/>
-          </a:xfrm>
-          <a:prstGeom prst="rect">
-            <a:avLst/>
-          </a:prstGeom>
-          <a:noFill/>
-          <a:ln/>
-        </p:spPr>
-        <p:txBody>
-          <a:bodyPr wrap="square" lIns="0" tIns="0" rIns="0" bIns="0" rtlCol="0" anchor="t"/>
-          <a:lstStyle/>
-          <a:p>
-            <a:pPr indent="0" marL="0">
-              <a:buNone/>
-            </a:pPr>
-            <a:r>
-              <a:rPr lang="en-US" sz="1400" b="1" dirty="0">
-                <a:solidFill>
-                  <a:srgbClr val="6E6888"/>
-                </a:solidFill>
-              </a:rPr>
-              <a:t>Tuần 2</a:t>
-            </a:r>
-            <a:endParaRPr lang="en-US" sz="1400" dirty="0"/>
-          </a:p>
-        </p:txBody>
-      </p:sp>
-      <p:sp>
-        <p:nvSpPr>
-          <p:cNvPr id="14" name="Text 12"/>
-          <p:cNvSpPr txBox="1"/>
-          <p:nvPr/>
-        </p:nvSpPr>
-        <p:spPr>
-          <a:xfrm>
-            <a:off x="3657600" y="3383280"/>
-            <a:ext cx="2103120" cy="777240"/>
-          </a:xfrm>
-          <a:prstGeom prst="rect">
-            <a:avLst/>
-          </a:prstGeom>
-          <a:noFill/>
-          <a:ln/>
-        </p:spPr>
-        <p:txBody>
-          <a:bodyPr wrap="square" lIns="0" tIns="0" rIns="0" bIns="0" rtlCol="0" anchor="t"/>
-          <a:lstStyle/>
-          <a:p>
-            <a:pPr indent="0" marL="0">
-              <a:buNone/>
-            </a:pPr>
-            <a:r>
-              <a:rPr lang="en-US" sz="1900" b="1" dirty="0">
-                <a:solidFill>
-                  <a:schemeClr val="tx2"/>
-                </a:solidFill>
-              </a:rPr>
-              <a:t>Nền tảng &amp; CRUD</a:t>
-            </a:r>
-            <a:endParaRPr lang="en-US" sz="1900" dirty="0"/>
-          </a:p>
-        </p:txBody>
-      </p:sp>
-      <p:sp>
-        <p:nvSpPr>
-          <p:cNvPr id="15" name="Text 13"/>
-          <p:cNvSpPr txBox="1"/>
-          <p:nvPr/>
-        </p:nvSpPr>
-        <p:spPr>
-          <a:xfrm>
-            <a:off x="3657600" y="4206240"/>
-            <a:ext cx="2103120" cy="1645920"/>
-          </a:xfrm>
-          <a:prstGeom prst="rect">
-            <a:avLst/>
-          </a:prstGeom>
-          <a:noFill/>
-          <a:ln/>
-        </p:spPr>
-        <p:txBody>
-          <a:bodyPr wrap="square" lIns="0" tIns="0" rIns="0" bIns="0" rtlCol="0" anchor="t"/>
-          <a:lstStyle/>
-          <a:p>
-            <a:pPr indent="0" marL="0">
-              <a:buNone/>
-            </a:pPr>
-            <a:r>
-              <a:rPr lang="en-US" sz="1500" dirty="0">
-                <a:solidFill>
-                  <a:srgbClr val="4A4560"/>
-                </a:solidFill>
-              </a:rPr>
-              <a:t>Dựng giao diện Compose, database SQLite, CRUD, dữ liệu mẫu</a:t>
-            </a:r>
-            <a:endParaRPr lang="en-US" sz="1500" dirty="0"/>
-          </a:p>
-        </p:txBody>
-      </p:sp>
-      <p:sp>
-        <p:nvSpPr>
-          <p:cNvPr id="16" name="Tuần 3 mốc"/>
-          <p:cNvSpPr/>
-          <p:nvPr/>
-        </p:nvSpPr>
-        <p:spPr>
-          <a:xfrm>
-            <a:off x="7086600" y="1828800"/>
-            <a:ext cx="640080" cy="640080"/>
-          </a:xfrm>
-          <a:prstGeom prst="ellipse">
-            <a:avLst/>
-          </a:prstGeom>
-          <a:solidFill>
-            <a:schemeClr val="accent3"/>
-          </a:solidFill>
-          <a:ln w="38100">
-            <a:solidFill>
-              <a:srgbClr val="FFFFFF"/>
-            </a:solidFill>
-            <a:prstDash val="solid"/>
-          </a:ln>
-        </p:spPr>
-      </p:sp>
-      <p:sp>
-        <p:nvSpPr>
-          <p:cNvPr id="17" name="Text 15"/>
-          <p:cNvSpPr txBox="1"/>
-          <p:nvPr/>
-        </p:nvSpPr>
-        <p:spPr>
-          <a:xfrm>
-            <a:off x="7086600" y="1828800"/>
-            <a:ext cx="640080" cy="640080"/>
-          </a:xfrm>
-          <a:prstGeom prst="rect">
-            <a:avLst/>
-          </a:prstGeom>
-          <a:noFill/>
-          <a:ln/>
-        </p:spPr>
-        <p:txBody>
-          <a:bodyPr wrap="square" lIns="0" tIns="0" rIns="0" bIns="0" rtlCol="0" anchor="ctr"/>
-          <a:lstStyle/>
-          <a:p>
-            <a:pPr algn="ctr" indent="0" marL="0">
-              <a:buNone/>
-            </a:pPr>
-            <a:r>
-              <a:rPr lang="en-US" sz="2000" b="1" dirty="0">
-                <a:solidFill>
-                  <a:schemeClr val="bg1"/>
-                </a:solidFill>
-              </a:rPr>
-              <a:t>3</a:t>
-            </a:r>
-            <a:endParaRPr lang="en-US" sz="2000" dirty="0"/>
-          </a:p>
-        </p:txBody>
-      </p:sp>
-      <p:sp>
-        <p:nvSpPr>
-          <p:cNvPr id="18" name="Thẻ Tuần 3"/>
-          <p:cNvSpPr/>
-          <p:nvPr/>
-        </p:nvSpPr>
-        <p:spPr>
-          <a:xfrm>
-            <a:off x="6217920" y="2834640"/>
-            <a:ext cx="2606040" cy="2743200"/>
-          </a:xfrm>
-          <a:prstGeom prst="roundRect">
-            <a:avLst>
-              <a:gd name="adj" fmla="val 4211"/>
-            </a:avLst>
-          </a:prstGeom>
-          <a:solidFill>
-            <a:schemeClr val="bg2"/>
-          </a:solidFill>
-          <a:ln/>
-          <a:effectLst>
-            <a:outerShdw sx="100000" sy="100000" kx="0" ky="0" algn="bl" rotWithShape="0" blurRad="101600" dist="25400" dir="5400000">
-              <a:srgbClr val="2B1B5A">
-                <a:alpha val="12000"/>
-              </a:srgbClr>
-            </a:outerShdw>
-          </a:effectLst>
-        </p:spPr>
-      </p:sp>
-      <p:sp>
-        <p:nvSpPr>
-          <p:cNvPr id="19" name="Text 17"/>
-          <p:cNvSpPr txBox="1"/>
-          <p:nvPr/>
-        </p:nvSpPr>
-        <p:spPr>
-          <a:xfrm>
-            <a:off x="6492240" y="3063240"/>
-            <a:ext cx="2103120" cy="320040"/>
-          </a:xfrm>
-          <a:prstGeom prst="rect">
-            <a:avLst/>
-          </a:prstGeom>
-          <a:noFill/>
-          <a:ln/>
-        </p:spPr>
-        <p:txBody>
-          <a:bodyPr wrap="square" lIns="0" tIns="0" rIns="0" bIns="0" rtlCol="0" anchor="t"/>
-          <a:lstStyle/>
-          <a:p>
-            <a:pPr indent="0" marL="0">
-              <a:buNone/>
-            </a:pPr>
-            <a:r>
-              <a:rPr lang="en-US" sz="1400" b="1" dirty="0">
-                <a:solidFill>
-                  <a:srgbClr val="6E6888"/>
-                </a:solidFill>
-              </a:rPr>
-              <a:t>Tuần 3</a:t>
-            </a:r>
-            <a:endParaRPr lang="en-US" sz="1400" dirty="0"/>
-          </a:p>
-        </p:txBody>
-      </p:sp>
-      <p:sp>
-        <p:nvSpPr>
-          <p:cNvPr id="20" name="Text 18"/>
-          <p:cNvSpPr txBox="1"/>
-          <p:nvPr/>
-        </p:nvSpPr>
-        <p:spPr>
-          <a:xfrm>
-            <a:off x="6492240" y="3383280"/>
-            <a:ext cx="2103120" cy="777240"/>
-          </a:xfrm>
-          <a:prstGeom prst="rect">
-            <a:avLst/>
-          </a:prstGeom>
-          <a:noFill/>
-          <a:ln/>
-        </p:spPr>
-        <p:txBody>
-          <a:bodyPr wrap="square" lIns="0" tIns="0" rIns="0" bIns="0" rtlCol="0" anchor="t"/>
-          <a:lstStyle/>
-          <a:p>
-            <a:pPr indent="0" marL="0">
-              <a:buNone/>
-            </a:pPr>
-            <a:r>
-              <a:rPr lang="en-US" sz="1900" b="1" dirty="0">
-                <a:solidFill>
-                  <a:schemeClr val="tx2"/>
-                </a:solidFill>
-              </a:rPr>
-              <a:t>Hoàn thiện tính năng</a:t>
-            </a:r>
-            <a:endParaRPr lang="en-US" sz="1900" dirty="0"/>
-          </a:p>
-        </p:txBody>
-      </p:sp>
-      <p:sp>
-        <p:nvSpPr>
-          <p:cNvPr id="21" name="Text 19"/>
-          <p:cNvSpPr txBox="1"/>
-          <p:nvPr/>
-        </p:nvSpPr>
-        <p:spPr>
-          <a:xfrm>
-            <a:off x="6492240" y="4206240"/>
-            <a:ext cx="2103120" cy="1645920"/>
-          </a:xfrm>
-          <a:prstGeom prst="rect">
-            <a:avLst/>
-          </a:prstGeom>
-          <a:noFill/>
-          <a:ln/>
-        </p:spPr>
-        <p:txBody>
-          <a:bodyPr wrap="square" lIns="0" tIns="0" rIns="0" bIns="0" rtlCol="0" anchor="t"/>
-          <a:lstStyle/>
-          <a:p>
-            <a:pPr indent="0" marL="0">
-              <a:buNone/>
-            </a:pPr>
-            <a:r>
-              <a:rPr lang="en-US" sz="1500" dirty="0">
-                <a:solidFill>
-                  <a:srgbClr val="4A4560"/>
-                </a:solidFill>
-              </a:rPr>
-              <a:t>Dashboard, tìm kiếm/lọc, thống kê, nhắc hạn; tích hợp</a:t>
-            </a:r>
-            <a:endParaRPr lang="en-US" sz="1500" dirty="0"/>
-          </a:p>
-        </p:txBody>
-      </p:sp>
-      <p:sp>
-        <p:nvSpPr>
-          <p:cNvPr id="22" name="Tuần 4 mốc"/>
-          <p:cNvSpPr/>
-          <p:nvPr/>
-        </p:nvSpPr>
-        <p:spPr>
-          <a:xfrm>
-            <a:off x="9921240" y="1828800"/>
-            <a:ext cx="640080" cy="640080"/>
-          </a:xfrm>
-          <a:prstGeom prst="ellipse">
-            <a:avLst/>
-          </a:prstGeom>
-          <a:solidFill>
-            <a:schemeClr val="accent4"/>
-          </a:solidFill>
-          <a:ln w="38100">
-            <a:solidFill>
-              <a:srgbClr val="FFFFFF"/>
-            </a:solidFill>
-            <a:prstDash val="solid"/>
-          </a:ln>
-        </p:spPr>
-      </p:sp>
-      <p:sp>
-        <p:nvSpPr>
-          <p:cNvPr id="23" name="Text 21"/>
-          <p:cNvSpPr txBox="1"/>
-          <p:nvPr/>
-        </p:nvSpPr>
-        <p:spPr>
-          <a:xfrm>
-            <a:off x="9921240" y="1828800"/>
-            <a:ext cx="640080" cy="640080"/>
-          </a:xfrm>
-          <a:prstGeom prst="rect">
-            <a:avLst/>
-          </a:prstGeom>
-          <a:noFill/>
-          <a:ln/>
-        </p:spPr>
-        <p:txBody>
-          <a:bodyPr wrap="square" lIns="0" tIns="0" rIns="0" bIns="0" rtlCol="0" anchor="ctr"/>
-          <a:lstStyle/>
-          <a:p>
-            <a:pPr algn="ctr" indent="0" marL="0">
-              <a:buNone/>
-            </a:pPr>
-            <a:r>
-              <a:rPr lang="en-US" sz="2000" b="1" dirty="0">
-                <a:solidFill>
-                  <a:schemeClr val="bg1"/>
-                </a:solidFill>
-              </a:rPr>
-              <a:t>4</a:t>
-            </a:r>
-            <a:endParaRPr lang="en-US" sz="2000" dirty="0"/>
-          </a:p>
-        </p:txBody>
-      </p:sp>
-      <p:sp>
-        <p:nvSpPr>
-          <p:cNvPr id="24" name="Thẻ Tuần 4"/>
-          <p:cNvSpPr/>
-          <p:nvPr/>
-        </p:nvSpPr>
-        <p:spPr>
-          <a:xfrm>
-            <a:off x="9052560" y="2834640"/>
-            <a:ext cx="2606040" cy="2743200"/>
-          </a:xfrm>
-          <a:prstGeom prst="roundRect">
-            <a:avLst>
-              <a:gd name="adj" fmla="val 4211"/>
-            </a:avLst>
-          </a:prstGeom>
-          <a:solidFill>
-            <a:schemeClr val="bg2"/>
-          </a:solidFill>
-          <a:ln/>
-          <a:effectLst>
-            <a:outerShdw sx="100000" sy="100000" kx="0" ky="0" algn="bl" rotWithShape="0" blurRad="101600" dist="25400" dir="5400000">
-              <a:srgbClr val="2B1B5A">
-                <a:alpha val="12000"/>
-              </a:srgbClr>
-            </a:outerShdw>
-          </a:effectLst>
-        </p:spPr>
-      </p:sp>
-      <p:sp>
-        <p:nvSpPr>
-          <p:cNvPr id="25" name="Text 23"/>
-          <p:cNvSpPr txBox="1"/>
-          <p:nvPr/>
-        </p:nvSpPr>
-        <p:spPr>
-          <a:xfrm>
-            <a:off x="9326880" y="3063240"/>
-            <a:ext cx="2103120" cy="320040"/>
-          </a:xfrm>
-          <a:prstGeom prst="rect">
-            <a:avLst/>
-          </a:prstGeom>
-          <a:noFill/>
-          <a:ln/>
-        </p:spPr>
-        <p:txBody>
-          <a:bodyPr wrap="square" lIns="0" tIns="0" rIns="0" bIns="0" rtlCol="0" anchor="t"/>
-          <a:lstStyle/>
-          <a:p>
-            <a:pPr indent="0" marL="0">
-              <a:buNone/>
-            </a:pPr>
-            <a:r>
-              <a:rPr lang="en-US" sz="1400" b="1" dirty="0">
-                <a:solidFill>
-                  <a:srgbClr val="6E6888"/>
-                </a:solidFill>
-              </a:rPr>
-              <a:t>Tuần 4</a:t>
-            </a:r>
-            <a:endParaRPr lang="en-US" sz="1400" dirty="0"/>
-          </a:p>
-        </p:txBody>
-      </p:sp>
-      <p:sp>
-        <p:nvSpPr>
-          <p:cNvPr id="26" name="Text 24"/>
-          <p:cNvSpPr txBox="1"/>
-          <p:nvPr/>
-        </p:nvSpPr>
-        <p:spPr>
-          <a:xfrm>
-            <a:off x="9326880" y="3383280"/>
-            <a:ext cx="2103120" cy="777240"/>
-          </a:xfrm>
-          <a:prstGeom prst="rect">
-            <a:avLst/>
-          </a:prstGeom>
-          <a:noFill/>
-          <a:ln/>
-        </p:spPr>
-        <p:txBody>
-          <a:bodyPr wrap="square" lIns="0" tIns="0" rIns="0" bIns="0" rtlCol="0" anchor="t"/>
-          <a:lstStyle/>
-          <a:p>
-            <a:pPr indent="0" marL="0">
-              <a:buNone/>
-            </a:pPr>
-            <a:r>
-              <a:rPr lang="en-US" sz="1900" b="1" dirty="0">
-                <a:solidFill>
-                  <a:schemeClr val="tx2"/>
-                </a:solidFill>
-              </a:rPr>
-              <a:t>Kiểm thử &amp; báo cáo</a:t>
-            </a:r>
-            <a:endParaRPr lang="en-US" sz="1900" dirty="0"/>
-          </a:p>
-        </p:txBody>
-      </p:sp>
-      <p:sp>
-        <p:nvSpPr>
-          <p:cNvPr id="27" name="Text 25"/>
-          <p:cNvSpPr txBox="1"/>
-          <p:nvPr/>
-        </p:nvSpPr>
-        <p:spPr>
-          <a:xfrm>
-            <a:off x="9326880" y="4206240"/>
-            <a:ext cx="2103120" cy="1645920"/>
-          </a:xfrm>
-          <a:prstGeom prst="rect">
-            <a:avLst/>
-          </a:prstGeom>
-          <a:noFill/>
-          <a:ln/>
-        </p:spPr>
-        <p:txBody>
-          <a:bodyPr wrap="square" lIns="0" tIns="0" rIns="0" bIns="0" rtlCol="0" anchor="t"/>
-          <a:lstStyle/>
-          <a:p>
-            <a:pPr indent="0" marL="0">
-              <a:buNone/>
-            </a:pPr>
-            <a:r>
-              <a:rPr lang="en-US" sz="1500" dirty="0">
-                <a:solidFill>
-                  <a:srgbClr val="4A4560"/>
-                </a:solidFill>
-              </a:rPr>
-              <a:t>Sửa lỗi, hoàn thiện UI, báo cáo, slide, demo</a:t>
-            </a:r>
-            <a:endParaRPr lang="en-US" sz="1500" dirty="0"/>
+              <a:t>Mã nguồn đã tồn tại; bảng này là trách nhiệm kiểm tra và hoàn thiện hiện tại, chưa gán tác giả cho từng module. Tên/MSSV do nhóm xác nhận.</a:t>
+            </a:r>
+            <a:endParaRPr lang="en-US" sz="1200" dirty="0"/>
           </a:p>
         </p:txBody>
       </p:sp>
@@ -4537,6 +6059,1726 @@
 <file path=ppt/slides/slide12.xml><?xml version="1.0" encoding="utf-8"?>
 <p:sld xmlns:a="http://schemas.openxmlformats.org/drawingml/2006/main" xmlns:r="http://schemas.openxmlformats.org/officeDocument/2006/relationships" xmlns:p="http://schemas.openxmlformats.org/presentationml/2006/main">
   <p:cSld name="Slide 12">
+    <p:spTree>
+      <p:nvGrpSpPr>
+        <p:cNvPr id="1" name=""/>
+        <p:cNvGrpSpPr/>
+        <p:nvPr/>
+      </p:nvGrpSpPr>
+      <p:grpSpPr>
+        <a:xfrm>
+          <a:off x="0" y="0"/>
+          <a:ext cx="0" cy="0"/>
+          <a:chOff x="0" y="0"/>
+          <a:chExt cx="0" cy="0"/>
+        </a:xfrm>
+      </p:grpSpPr>
+      <p:sp>
+        <p:nvSpPr>
+          <p:cNvPr id="2" name="Text 0"/>
+          <p:cNvSpPr/>
+          <p:nvPr>
+            <p:ph idx="100" type="title" hasCustomPrompt="1"/>
+          </p:nvPr>
+        </p:nvSpPr>
+        <p:spPr>
+          <a:xfrm>
+            <a:off x="548640" y="365760"/>
+            <a:ext cx="11064240" cy="777240"/>
+          </a:xfrm>
+          <a:prstGeom prst="rect">
+            <a:avLst/>
+          </a:prstGeom>
+          <a:noFill/>
+          <a:ln/>
+        </p:spPr>
+        <p:txBody>
+          <a:bodyPr wrap="square" lIns="0" tIns="0" rIns="0" bIns="0" rtlCol="0" anchor="ctr"/>
+          <a:lstStyle/>
+          <a:p>
+            <a:pPr indent="0" marL="0">
+              <a:buNone/>
+            </a:pPr>
+            <a:r>
+              <a:rPr lang="en-US" sz="3600" b="1" dirty="0">
+                <a:solidFill>
+                  <a:schemeClr val="tx2"/>
+                </a:solidFill>
+              </a:rPr>
+              <a:t>Kế hoạch thực hiện 4 tuần</a:t>
+            </a:r>
+            <a:endParaRPr lang="en-US" sz="3600" dirty="0"/>
+          </a:p>
+        </p:txBody>
+      </p:sp>
+      <p:sp>
+        <p:nvSpPr>
+          <p:cNvPr id="3" name="Text 1"/>
+          <p:cNvSpPr txBox="1"/>
+          <p:nvPr/>
+        </p:nvSpPr>
+        <p:spPr>
+          <a:xfrm>
+            <a:off x="548640" y="1188720"/>
+            <a:ext cx="5486400" cy="365760"/>
+          </a:xfrm>
+          <a:prstGeom prst="rect">
+            <a:avLst/>
+          </a:prstGeom>
+          <a:noFill/>
+          <a:ln/>
+        </p:spPr>
+        <p:txBody>
+          <a:bodyPr wrap="square" lIns="0" tIns="0" rIns="0" bIns="0" rtlCol="0" anchor="t"/>
+          <a:lstStyle/>
+          <a:p>
+            <a:pPr indent="0" marL="0">
+              <a:buNone/>
+            </a:pPr>
+            <a:r>
+              <a:rPr lang="en-US" sz="1600" i="1" dirty="0">
+                <a:solidFill>
+                  <a:schemeClr val="accent6"/>
+                </a:solidFill>
+              </a:rPr>
+              <a:t>Kế hoạch ban đầu</a:t>
+            </a:r>
+            <a:endParaRPr lang="en-US" sz="1600" dirty="0"/>
+          </a:p>
+        </p:txBody>
+      </p:sp>
+      <p:sp>
+        <p:nvSpPr>
+          <p:cNvPr id="4" name="Trục thời gian"/>
+          <p:cNvSpPr/>
+          <p:nvPr/>
+        </p:nvSpPr>
+        <p:spPr>
+          <a:xfrm>
+            <a:off x="1097280" y="2057400"/>
+            <a:ext cx="9966960" cy="0"/>
+          </a:xfrm>
+          <a:prstGeom prst="line">
+            <a:avLst/>
+          </a:prstGeom>
+          <a:noFill/>
+          <a:ln w="38100">
+            <a:solidFill>
+              <a:srgbClr val="CFC8EC"/>
+            </a:solidFill>
+            <a:prstDash val="solid"/>
+          </a:ln>
+        </p:spPr>
+      </p:sp>
+      <p:sp>
+        <p:nvSpPr>
+          <p:cNvPr id="5" name="Tuần 1 mốc"/>
+          <p:cNvSpPr/>
+          <p:nvPr/>
+        </p:nvSpPr>
+        <p:spPr>
+          <a:xfrm>
+            <a:off x="1417320" y="1737360"/>
+            <a:ext cx="640080" cy="640080"/>
+          </a:xfrm>
+          <a:prstGeom prst="ellipse">
+            <a:avLst/>
+          </a:prstGeom>
+          <a:solidFill>
+            <a:schemeClr val="accent1"/>
+          </a:solidFill>
+          <a:ln w="38100">
+            <a:solidFill>
+              <a:srgbClr val="FFFFFF"/>
+            </a:solidFill>
+            <a:prstDash val="solid"/>
+          </a:ln>
+        </p:spPr>
+      </p:sp>
+      <p:sp>
+        <p:nvSpPr>
+          <p:cNvPr id="6" name="Text 4"/>
+          <p:cNvSpPr txBox="1"/>
+          <p:nvPr/>
+        </p:nvSpPr>
+        <p:spPr>
+          <a:xfrm>
+            <a:off x="1417320" y="1737360"/>
+            <a:ext cx="640080" cy="640080"/>
+          </a:xfrm>
+          <a:prstGeom prst="rect">
+            <a:avLst/>
+          </a:prstGeom>
+          <a:noFill/>
+          <a:ln/>
+        </p:spPr>
+        <p:txBody>
+          <a:bodyPr wrap="square" lIns="0" tIns="0" rIns="0" bIns="0" rtlCol="0" anchor="ctr"/>
+          <a:lstStyle/>
+          <a:p>
+            <a:pPr algn="ctr" indent="0" marL="0">
+              <a:buNone/>
+            </a:pPr>
+            <a:r>
+              <a:rPr lang="en-US" sz="2000" b="1" dirty="0">
+                <a:solidFill>
+                  <a:schemeClr val="bg1"/>
+                </a:solidFill>
+              </a:rPr>
+              <a:t>1</a:t>
+            </a:r>
+            <a:endParaRPr lang="en-US" sz="2000" dirty="0"/>
+          </a:p>
+        </p:txBody>
+      </p:sp>
+      <p:sp>
+        <p:nvSpPr>
+          <p:cNvPr id="7" name="Thẻ Tuần 1"/>
+          <p:cNvSpPr/>
+          <p:nvPr/>
+        </p:nvSpPr>
+        <p:spPr>
+          <a:xfrm>
+            <a:off x="548640" y="2651760"/>
+            <a:ext cx="2606040" cy="2514600"/>
+          </a:xfrm>
+          <a:prstGeom prst="roundRect">
+            <a:avLst>
+              <a:gd name="adj" fmla="val 4364"/>
+            </a:avLst>
+          </a:prstGeom>
+          <a:solidFill>
+            <a:schemeClr val="bg2"/>
+          </a:solidFill>
+          <a:ln/>
+          <a:effectLst>
+            <a:outerShdw sx="100000" sy="100000" kx="0" ky="0" algn="bl" rotWithShape="0" blurRad="101600" dist="25400" dir="5400000">
+              <a:srgbClr val="2B1B5A">
+                <a:alpha val="12000"/>
+              </a:srgbClr>
+            </a:outerShdw>
+          </a:effectLst>
+        </p:spPr>
+      </p:sp>
+      <p:sp>
+        <p:nvSpPr>
+          <p:cNvPr id="8" name="Text 6"/>
+          <p:cNvSpPr txBox="1"/>
+          <p:nvPr/>
+        </p:nvSpPr>
+        <p:spPr>
+          <a:xfrm>
+            <a:off x="822960" y="2834640"/>
+            <a:ext cx="2103120" cy="320040"/>
+          </a:xfrm>
+          <a:prstGeom prst="rect">
+            <a:avLst/>
+          </a:prstGeom>
+          <a:noFill/>
+          <a:ln/>
+        </p:spPr>
+        <p:txBody>
+          <a:bodyPr wrap="square" lIns="0" tIns="0" rIns="0" bIns="0" rtlCol="0" anchor="t"/>
+          <a:lstStyle/>
+          <a:p>
+            <a:pPr indent="0" marL="0">
+              <a:buNone/>
+            </a:pPr>
+            <a:r>
+              <a:rPr lang="en-US" sz="1400" b="1" dirty="0">
+                <a:solidFill>
+                  <a:srgbClr val="6E6888"/>
+                </a:solidFill>
+              </a:rPr>
+              <a:t>Tuần 1</a:t>
+            </a:r>
+            <a:endParaRPr lang="en-US" sz="1400" dirty="0"/>
+          </a:p>
+        </p:txBody>
+      </p:sp>
+      <p:sp>
+        <p:nvSpPr>
+          <p:cNvPr id="9" name="Text 7"/>
+          <p:cNvSpPr txBox="1"/>
+          <p:nvPr/>
+        </p:nvSpPr>
+        <p:spPr>
+          <a:xfrm>
+            <a:off x="822960" y="3154680"/>
+            <a:ext cx="2103120" cy="731520"/>
+          </a:xfrm>
+          <a:prstGeom prst="rect">
+            <a:avLst/>
+          </a:prstGeom>
+          <a:noFill/>
+          <a:ln/>
+        </p:spPr>
+        <p:txBody>
+          <a:bodyPr wrap="square" lIns="0" tIns="0" rIns="0" bIns="0" rtlCol="0" anchor="t"/>
+          <a:lstStyle/>
+          <a:p>
+            <a:pPr indent="0" marL="0">
+              <a:buNone/>
+            </a:pPr>
+            <a:r>
+              <a:rPr lang="en-US" sz="1900" b="1" dirty="0">
+                <a:solidFill>
+                  <a:schemeClr val="tx2"/>
+                </a:solidFill>
+              </a:rPr>
+              <a:t>Phân tích &amp; thiết kế</a:t>
+            </a:r>
+            <a:endParaRPr lang="en-US" sz="1900" dirty="0"/>
+          </a:p>
+        </p:txBody>
+      </p:sp>
+      <p:sp>
+        <p:nvSpPr>
+          <p:cNvPr id="10" name="Text 8"/>
+          <p:cNvSpPr txBox="1"/>
+          <p:nvPr/>
+        </p:nvSpPr>
+        <p:spPr>
+          <a:xfrm>
+            <a:off x="822960" y="3931920"/>
+            <a:ext cx="2103120" cy="1143000"/>
+          </a:xfrm>
+          <a:prstGeom prst="rect">
+            <a:avLst/>
+          </a:prstGeom>
+          <a:noFill/>
+          <a:ln/>
+        </p:spPr>
+        <p:txBody>
+          <a:bodyPr wrap="square" lIns="0" tIns="0" rIns="0" bIns="0" rtlCol="0" anchor="t"/>
+          <a:lstStyle/>
+          <a:p>
+            <a:pPr indent="0" marL="0">
+              <a:buNone/>
+            </a:pPr>
+            <a:r>
+              <a:rPr lang="en-US" sz="1500" dirty="0">
+                <a:solidFill>
+                  <a:srgbClr val="4A4560"/>
+                </a:solidFill>
+              </a:rPr>
+              <a:t>Chốt yêu cầu, Use Case, wireframe, ERD, tạo repo Git</a:t>
+            </a:r>
+            <a:endParaRPr lang="en-US" sz="1500" dirty="0"/>
+          </a:p>
+        </p:txBody>
+      </p:sp>
+      <p:sp>
+        <p:nvSpPr>
+          <p:cNvPr id="11" name="Tuần 2 mốc"/>
+          <p:cNvSpPr/>
+          <p:nvPr/>
+        </p:nvSpPr>
+        <p:spPr>
+          <a:xfrm>
+            <a:off x="4251960" y="1737360"/>
+            <a:ext cx="640080" cy="640080"/>
+          </a:xfrm>
+          <a:prstGeom prst="ellipse">
+            <a:avLst/>
+          </a:prstGeom>
+          <a:solidFill>
+            <a:schemeClr val="accent2"/>
+          </a:solidFill>
+          <a:ln w="38100">
+            <a:solidFill>
+              <a:srgbClr val="FFFFFF"/>
+            </a:solidFill>
+            <a:prstDash val="solid"/>
+          </a:ln>
+        </p:spPr>
+      </p:sp>
+      <p:sp>
+        <p:nvSpPr>
+          <p:cNvPr id="12" name="Text 10"/>
+          <p:cNvSpPr txBox="1"/>
+          <p:nvPr/>
+        </p:nvSpPr>
+        <p:spPr>
+          <a:xfrm>
+            <a:off x="4251960" y="1737360"/>
+            <a:ext cx="640080" cy="640080"/>
+          </a:xfrm>
+          <a:prstGeom prst="rect">
+            <a:avLst/>
+          </a:prstGeom>
+          <a:noFill/>
+          <a:ln/>
+        </p:spPr>
+        <p:txBody>
+          <a:bodyPr wrap="square" lIns="0" tIns="0" rIns="0" bIns="0" rtlCol="0" anchor="ctr"/>
+          <a:lstStyle/>
+          <a:p>
+            <a:pPr algn="ctr" indent="0" marL="0">
+              <a:buNone/>
+            </a:pPr>
+            <a:r>
+              <a:rPr lang="en-US" sz="2000" b="1" dirty="0">
+                <a:solidFill>
+                  <a:schemeClr val="bg1"/>
+                </a:solidFill>
+              </a:rPr>
+              <a:t>2</a:t>
+            </a:r>
+            <a:endParaRPr lang="en-US" sz="2000" dirty="0"/>
+          </a:p>
+        </p:txBody>
+      </p:sp>
+      <p:sp>
+        <p:nvSpPr>
+          <p:cNvPr id="13" name="Thẻ Tuần 2"/>
+          <p:cNvSpPr/>
+          <p:nvPr/>
+        </p:nvSpPr>
+        <p:spPr>
+          <a:xfrm>
+            <a:off x="3383280" y="2651760"/>
+            <a:ext cx="2606040" cy="2514600"/>
+          </a:xfrm>
+          <a:prstGeom prst="roundRect">
+            <a:avLst>
+              <a:gd name="adj" fmla="val 4364"/>
+            </a:avLst>
+          </a:prstGeom>
+          <a:solidFill>
+            <a:schemeClr val="bg2"/>
+          </a:solidFill>
+          <a:ln/>
+          <a:effectLst>
+            <a:outerShdw sx="100000" sy="100000" kx="0" ky="0" algn="bl" rotWithShape="0" blurRad="101600" dist="25400" dir="5400000">
+              <a:srgbClr val="2B1B5A">
+                <a:alpha val="12000"/>
+              </a:srgbClr>
+            </a:outerShdw>
+          </a:effectLst>
+        </p:spPr>
+      </p:sp>
+      <p:sp>
+        <p:nvSpPr>
+          <p:cNvPr id="14" name="Text 12"/>
+          <p:cNvSpPr txBox="1"/>
+          <p:nvPr/>
+        </p:nvSpPr>
+        <p:spPr>
+          <a:xfrm>
+            <a:off x="3657600" y="2834640"/>
+            <a:ext cx="2103120" cy="320040"/>
+          </a:xfrm>
+          <a:prstGeom prst="rect">
+            <a:avLst/>
+          </a:prstGeom>
+          <a:noFill/>
+          <a:ln/>
+        </p:spPr>
+        <p:txBody>
+          <a:bodyPr wrap="square" lIns="0" tIns="0" rIns="0" bIns="0" rtlCol="0" anchor="t"/>
+          <a:lstStyle/>
+          <a:p>
+            <a:pPr indent="0" marL="0">
+              <a:buNone/>
+            </a:pPr>
+            <a:r>
+              <a:rPr lang="en-US" sz="1400" b="1" dirty="0">
+                <a:solidFill>
+                  <a:srgbClr val="6E6888"/>
+                </a:solidFill>
+              </a:rPr>
+              <a:t>Tuần 2</a:t>
+            </a:r>
+            <a:endParaRPr lang="en-US" sz="1400" dirty="0"/>
+          </a:p>
+        </p:txBody>
+      </p:sp>
+      <p:sp>
+        <p:nvSpPr>
+          <p:cNvPr id="15" name="Text 13"/>
+          <p:cNvSpPr txBox="1"/>
+          <p:nvPr/>
+        </p:nvSpPr>
+        <p:spPr>
+          <a:xfrm>
+            <a:off x="3657600" y="3154680"/>
+            <a:ext cx="2103120" cy="731520"/>
+          </a:xfrm>
+          <a:prstGeom prst="rect">
+            <a:avLst/>
+          </a:prstGeom>
+          <a:noFill/>
+          <a:ln/>
+        </p:spPr>
+        <p:txBody>
+          <a:bodyPr wrap="square" lIns="0" tIns="0" rIns="0" bIns="0" rtlCol="0" anchor="t"/>
+          <a:lstStyle/>
+          <a:p>
+            <a:pPr indent="0" marL="0">
+              <a:buNone/>
+            </a:pPr>
+            <a:r>
+              <a:rPr lang="en-US" sz="1900" b="1" dirty="0">
+                <a:solidFill>
+                  <a:schemeClr val="tx2"/>
+                </a:solidFill>
+              </a:rPr>
+              <a:t>Nền tảng &amp; CRUD</a:t>
+            </a:r>
+            <a:endParaRPr lang="en-US" sz="1900" dirty="0"/>
+          </a:p>
+        </p:txBody>
+      </p:sp>
+      <p:sp>
+        <p:nvSpPr>
+          <p:cNvPr id="16" name="Text 14"/>
+          <p:cNvSpPr txBox="1"/>
+          <p:nvPr/>
+        </p:nvSpPr>
+        <p:spPr>
+          <a:xfrm>
+            <a:off x="3657600" y="3931920"/>
+            <a:ext cx="2103120" cy="1143000"/>
+          </a:xfrm>
+          <a:prstGeom prst="rect">
+            <a:avLst/>
+          </a:prstGeom>
+          <a:noFill/>
+          <a:ln/>
+        </p:spPr>
+        <p:txBody>
+          <a:bodyPr wrap="square" lIns="0" tIns="0" rIns="0" bIns="0" rtlCol="0" anchor="t"/>
+          <a:lstStyle/>
+          <a:p>
+            <a:pPr indent="0" marL="0">
+              <a:buNone/>
+            </a:pPr>
+            <a:r>
+              <a:rPr lang="en-US" sz="1500" dirty="0">
+                <a:solidFill>
+                  <a:srgbClr val="4A4560"/>
+                </a:solidFill>
+              </a:rPr>
+              <a:t>Dựng giao diện Compose, database SQLite, CRUD, dữ liệu mẫu</a:t>
+            </a:r>
+            <a:endParaRPr lang="en-US" sz="1500" dirty="0"/>
+          </a:p>
+        </p:txBody>
+      </p:sp>
+      <p:sp>
+        <p:nvSpPr>
+          <p:cNvPr id="17" name="Tuần 3 mốc"/>
+          <p:cNvSpPr/>
+          <p:nvPr/>
+        </p:nvSpPr>
+        <p:spPr>
+          <a:xfrm>
+            <a:off x="7086600" y="1737360"/>
+            <a:ext cx="640080" cy="640080"/>
+          </a:xfrm>
+          <a:prstGeom prst="ellipse">
+            <a:avLst/>
+          </a:prstGeom>
+          <a:solidFill>
+            <a:schemeClr val="accent3"/>
+          </a:solidFill>
+          <a:ln w="38100">
+            <a:solidFill>
+              <a:srgbClr val="FFFFFF"/>
+            </a:solidFill>
+            <a:prstDash val="solid"/>
+          </a:ln>
+        </p:spPr>
+      </p:sp>
+      <p:sp>
+        <p:nvSpPr>
+          <p:cNvPr id="18" name="Text 16"/>
+          <p:cNvSpPr txBox="1"/>
+          <p:nvPr/>
+        </p:nvSpPr>
+        <p:spPr>
+          <a:xfrm>
+            <a:off x="7086600" y="1737360"/>
+            <a:ext cx="640080" cy="640080"/>
+          </a:xfrm>
+          <a:prstGeom prst="rect">
+            <a:avLst/>
+          </a:prstGeom>
+          <a:noFill/>
+          <a:ln/>
+        </p:spPr>
+        <p:txBody>
+          <a:bodyPr wrap="square" lIns="0" tIns="0" rIns="0" bIns="0" rtlCol="0" anchor="ctr"/>
+          <a:lstStyle/>
+          <a:p>
+            <a:pPr algn="ctr" indent="0" marL="0">
+              <a:buNone/>
+            </a:pPr>
+            <a:r>
+              <a:rPr lang="en-US" sz="2000" b="1" dirty="0">
+                <a:solidFill>
+                  <a:schemeClr val="bg1"/>
+                </a:solidFill>
+              </a:rPr>
+              <a:t>3</a:t>
+            </a:r>
+            <a:endParaRPr lang="en-US" sz="2000" dirty="0"/>
+          </a:p>
+        </p:txBody>
+      </p:sp>
+      <p:sp>
+        <p:nvSpPr>
+          <p:cNvPr id="19" name="Thẻ Tuần 3"/>
+          <p:cNvSpPr/>
+          <p:nvPr/>
+        </p:nvSpPr>
+        <p:spPr>
+          <a:xfrm>
+            <a:off x="6217920" y="2651760"/>
+            <a:ext cx="2606040" cy="2514600"/>
+          </a:xfrm>
+          <a:prstGeom prst="roundRect">
+            <a:avLst>
+              <a:gd name="adj" fmla="val 4364"/>
+            </a:avLst>
+          </a:prstGeom>
+          <a:solidFill>
+            <a:schemeClr val="bg2"/>
+          </a:solidFill>
+          <a:ln/>
+          <a:effectLst>
+            <a:outerShdw sx="100000" sy="100000" kx="0" ky="0" algn="bl" rotWithShape="0" blurRad="101600" dist="25400" dir="5400000">
+              <a:srgbClr val="2B1B5A">
+                <a:alpha val="12000"/>
+              </a:srgbClr>
+            </a:outerShdw>
+          </a:effectLst>
+        </p:spPr>
+      </p:sp>
+      <p:sp>
+        <p:nvSpPr>
+          <p:cNvPr id="20" name="Text 18"/>
+          <p:cNvSpPr txBox="1"/>
+          <p:nvPr/>
+        </p:nvSpPr>
+        <p:spPr>
+          <a:xfrm>
+            <a:off x="6492240" y="2834640"/>
+            <a:ext cx="2103120" cy="320040"/>
+          </a:xfrm>
+          <a:prstGeom prst="rect">
+            <a:avLst/>
+          </a:prstGeom>
+          <a:noFill/>
+          <a:ln/>
+        </p:spPr>
+        <p:txBody>
+          <a:bodyPr wrap="square" lIns="0" tIns="0" rIns="0" bIns="0" rtlCol="0" anchor="t"/>
+          <a:lstStyle/>
+          <a:p>
+            <a:pPr indent="0" marL="0">
+              <a:buNone/>
+            </a:pPr>
+            <a:r>
+              <a:rPr lang="en-US" sz="1400" b="1" dirty="0">
+                <a:solidFill>
+                  <a:srgbClr val="6E6888"/>
+                </a:solidFill>
+              </a:rPr>
+              <a:t>Tuần 3</a:t>
+            </a:r>
+            <a:endParaRPr lang="en-US" sz="1400" dirty="0"/>
+          </a:p>
+        </p:txBody>
+      </p:sp>
+      <p:sp>
+        <p:nvSpPr>
+          <p:cNvPr id="21" name="Text 19"/>
+          <p:cNvSpPr txBox="1"/>
+          <p:nvPr/>
+        </p:nvSpPr>
+        <p:spPr>
+          <a:xfrm>
+            <a:off x="6492240" y="3154680"/>
+            <a:ext cx="2103120" cy="731520"/>
+          </a:xfrm>
+          <a:prstGeom prst="rect">
+            <a:avLst/>
+          </a:prstGeom>
+          <a:noFill/>
+          <a:ln/>
+        </p:spPr>
+        <p:txBody>
+          <a:bodyPr wrap="square" lIns="0" tIns="0" rIns="0" bIns="0" rtlCol="0" anchor="t"/>
+          <a:lstStyle/>
+          <a:p>
+            <a:pPr indent="0" marL="0">
+              <a:buNone/>
+            </a:pPr>
+            <a:r>
+              <a:rPr lang="en-US" sz="1900" b="1" dirty="0">
+                <a:solidFill>
+                  <a:schemeClr val="tx2"/>
+                </a:solidFill>
+              </a:rPr>
+              <a:t>Hoàn thiện tính năng</a:t>
+            </a:r>
+            <a:endParaRPr lang="en-US" sz="1900" dirty="0"/>
+          </a:p>
+        </p:txBody>
+      </p:sp>
+      <p:sp>
+        <p:nvSpPr>
+          <p:cNvPr id="22" name="Text 20"/>
+          <p:cNvSpPr txBox="1"/>
+          <p:nvPr/>
+        </p:nvSpPr>
+        <p:spPr>
+          <a:xfrm>
+            <a:off x="6492240" y="3931920"/>
+            <a:ext cx="2103120" cy="1143000"/>
+          </a:xfrm>
+          <a:prstGeom prst="rect">
+            <a:avLst/>
+          </a:prstGeom>
+          <a:noFill/>
+          <a:ln/>
+        </p:spPr>
+        <p:txBody>
+          <a:bodyPr wrap="square" lIns="0" tIns="0" rIns="0" bIns="0" rtlCol="0" anchor="t"/>
+          <a:lstStyle/>
+          <a:p>
+            <a:pPr indent="0" marL="0">
+              <a:buNone/>
+            </a:pPr>
+            <a:r>
+              <a:rPr lang="en-US" sz="1500" dirty="0">
+                <a:solidFill>
+                  <a:srgbClr val="4A4560"/>
+                </a:solidFill>
+              </a:rPr>
+              <a:t>Tổng quan, tìm kiếm/lọc, báo cáo, nhắc hạn; tích hợp</a:t>
+            </a:r>
+            <a:endParaRPr lang="en-US" sz="1500" dirty="0"/>
+          </a:p>
+        </p:txBody>
+      </p:sp>
+      <p:sp>
+        <p:nvSpPr>
+          <p:cNvPr id="23" name="Tuần 4 mốc"/>
+          <p:cNvSpPr/>
+          <p:nvPr/>
+        </p:nvSpPr>
+        <p:spPr>
+          <a:xfrm>
+            <a:off x="9921240" y="1737360"/>
+            <a:ext cx="640080" cy="640080"/>
+          </a:xfrm>
+          <a:prstGeom prst="ellipse">
+            <a:avLst/>
+          </a:prstGeom>
+          <a:solidFill>
+            <a:schemeClr val="accent4"/>
+          </a:solidFill>
+          <a:ln w="38100">
+            <a:solidFill>
+              <a:srgbClr val="FFFFFF"/>
+            </a:solidFill>
+            <a:prstDash val="solid"/>
+          </a:ln>
+        </p:spPr>
+      </p:sp>
+      <p:sp>
+        <p:nvSpPr>
+          <p:cNvPr id="24" name="Text 22"/>
+          <p:cNvSpPr txBox="1"/>
+          <p:nvPr/>
+        </p:nvSpPr>
+        <p:spPr>
+          <a:xfrm>
+            <a:off x="9921240" y="1737360"/>
+            <a:ext cx="640080" cy="640080"/>
+          </a:xfrm>
+          <a:prstGeom prst="rect">
+            <a:avLst/>
+          </a:prstGeom>
+          <a:noFill/>
+          <a:ln/>
+        </p:spPr>
+        <p:txBody>
+          <a:bodyPr wrap="square" lIns="0" tIns="0" rIns="0" bIns="0" rtlCol="0" anchor="ctr"/>
+          <a:lstStyle/>
+          <a:p>
+            <a:pPr algn="ctr" indent="0" marL="0">
+              <a:buNone/>
+            </a:pPr>
+            <a:r>
+              <a:rPr lang="en-US" sz="2000" b="1" dirty="0">
+                <a:solidFill>
+                  <a:schemeClr val="bg1"/>
+                </a:solidFill>
+              </a:rPr>
+              <a:t>4</a:t>
+            </a:r>
+            <a:endParaRPr lang="en-US" sz="2000" dirty="0"/>
+          </a:p>
+        </p:txBody>
+      </p:sp>
+      <p:sp>
+        <p:nvSpPr>
+          <p:cNvPr id="25" name="Thẻ Tuần 4"/>
+          <p:cNvSpPr/>
+          <p:nvPr/>
+        </p:nvSpPr>
+        <p:spPr>
+          <a:xfrm>
+            <a:off x="9052560" y="2651760"/>
+            <a:ext cx="2606040" cy="2514600"/>
+          </a:xfrm>
+          <a:prstGeom prst="roundRect">
+            <a:avLst>
+              <a:gd name="adj" fmla="val 4364"/>
+            </a:avLst>
+          </a:prstGeom>
+          <a:solidFill>
+            <a:schemeClr val="bg2"/>
+          </a:solidFill>
+          <a:ln/>
+          <a:effectLst>
+            <a:outerShdw sx="100000" sy="100000" kx="0" ky="0" algn="bl" rotWithShape="0" blurRad="101600" dist="25400" dir="5400000">
+              <a:srgbClr val="2B1B5A">
+                <a:alpha val="12000"/>
+              </a:srgbClr>
+            </a:outerShdw>
+          </a:effectLst>
+        </p:spPr>
+      </p:sp>
+      <p:sp>
+        <p:nvSpPr>
+          <p:cNvPr id="26" name="Text 24"/>
+          <p:cNvSpPr txBox="1"/>
+          <p:nvPr/>
+        </p:nvSpPr>
+        <p:spPr>
+          <a:xfrm>
+            <a:off x="9326880" y="2834640"/>
+            <a:ext cx="2103120" cy="320040"/>
+          </a:xfrm>
+          <a:prstGeom prst="rect">
+            <a:avLst/>
+          </a:prstGeom>
+          <a:noFill/>
+          <a:ln/>
+        </p:spPr>
+        <p:txBody>
+          <a:bodyPr wrap="square" lIns="0" tIns="0" rIns="0" bIns="0" rtlCol="0" anchor="t"/>
+          <a:lstStyle/>
+          <a:p>
+            <a:pPr indent="0" marL="0">
+              <a:buNone/>
+            </a:pPr>
+            <a:r>
+              <a:rPr lang="en-US" sz="1400" b="1" dirty="0">
+                <a:solidFill>
+                  <a:srgbClr val="6E6888"/>
+                </a:solidFill>
+              </a:rPr>
+              <a:t>Tuần 4</a:t>
+            </a:r>
+            <a:endParaRPr lang="en-US" sz="1400" dirty="0"/>
+          </a:p>
+        </p:txBody>
+      </p:sp>
+      <p:sp>
+        <p:nvSpPr>
+          <p:cNvPr id="27" name="Text 25"/>
+          <p:cNvSpPr txBox="1"/>
+          <p:nvPr/>
+        </p:nvSpPr>
+        <p:spPr>
+          <a:xfrm>
+            <a:off x="9326880" y="3154680"/>
+            <a:ext cx="2103120" cy="731520"/>
+          </a:xfrm>
+          <a:prstGeom prst="rect">
+            <a:avLst/>
+          </a:prstGeom>
+          <a:noFill/>
+          <a:ln/>
+        </p:spPr>
+        <p:txBody>
+          <a:bodyPr wrap="square" lIns="0" tIns="0" rIns="0" bIns="0" rtlCol="0" anchor="t"/>
+          <a:lstStyle/>
+          <a:p>
+            <a:pPr indent="0" marL="0">
+              <a:buNone/>
+            </a:pPr>
+            <a:r>
+              <a:rPr lang="en-US" sz="1900" b="1" dirty="0">
+                <a:solidFill>
+                  <a:schemeClr val="tx2"/>
+                </a:solidFill>
+              </a:rPr>
+              <a:t>Kiểm thử &amp; báo cáo</a:t>
+            </a:r>
+            <a:endParaRPr lang="en-US" sz="1900" dirty="0"/>
+          </a:p>
+        </p:txBody>
+      </p:sp>
+      <p:sp>
+        <p:nvSpPr>
+          <p:cNvPr id="28" name="Text 26"/>
+          <p:cNvSpPr txBox="1"/>
+          <p:nvPr/>
+        </p:nvSpPr>
+        <p:spPr>
+          <a:xfrm>
+            <a:off x="9326880" y="3931920"/>
+            <a:ext cx="2103120" cy="1143000"/>
+          </a:xfrm>
+          <a:prstGeom prst="rect">
+            <a:avLst/>
+          </a:prstGeom>
+          <a:noFill/>
+          <a:ln/>
+        </p:spPr>
+        <p:txBody>
+          <a:bodyPr wrap="square" lIns="0" tIns="0" rIns="0" bIns="0" rtlCol="0" anchor="t"/>
+          <a:lstStyle/>
+          <a:p>
+            <a:pPr indent="0" marL="0">
+              <a:buNone/>
+            </a:pPr>
+            <a:r>
+              <a:rPr lang="en-US" sz="1500" dirty="0">
+                <a:solidFill>
+                  <a:srgbClr val="4A4560"/>
+                </a:solidFill>
+              </a:rPr>
+              <a:t>Chạy thử thiết bị, sửa lỗi, hoàn thiện UI, báo cáo, demo</a:t>
+            </a:r>
+            <a:endParaRPr lang="en-US" sz="1500" dirty="0"/>
+          </a:p>
+        </p:txBody>
+      </p:sp>
+      <p:sp>
+        <p:nvSpPr>
+          <p:cNvPr id="29" name="Hiện trạng"/>
+          <p:cNvSpPr/>
+          <p:nvPr/>
+        </p:nvSpPr>
+        <p:spPr>
+          <a:xfrm>
+            <a:off x="548640" y="5349240"/>
+            <a:ext cx="11018520" cy="868680"/>
+          </a:xfrm>
+          <a:prstGeom prst="roundRect">
+            <a:avLst>
+              <a:gd name="adj" fmla="val 12632"/>
+            </a:avLst>
+          </a:prstGeom>
+          <a:solidFill>
+            <a:schemeClr val="tx2"/>
+          </a:solidFill>
+          <a:ln/>
+          <a:effectLst>
+            <a:outerShdw sx="100000" sy="100000" kx="0" ky="0" algn="bl" rotWithShape="0" blurRad="101600" dist="25400" dir="5400000">
+              <a:srgbClr val="2B1B5A">
+                <a:alpha val="12000"/>
+              </a:srgbClr>
+            </a:outerShdw>
+          </a:effectLst>
+        </p:spPr>
+      </p:sp>
+      <p:sp>
+        <p:nvSpPr>
+          <p:cNvPr id="30" name="Text 28"/>
+          <p:cNvSpPr txBox="1"/>
+          <p:nvPr/>
+        </p:nvSpPr>
+        <p:spPr>
+          <a:xfrm>
+            <a:off x="822960" y="5349240"/>
+            <a:ext cx="10515600" cy="868680"/>
+          </a:xfrm>
+          <a:prstGeom prst="rect">
+            <a:avLst/>
+          </a:prstGeom>
+          <a:noFill/>
+          <a:ln/>
+        </p:spPr>
+        <p:txBody>
+          <a:bodyPr wrap="square" lIns="0" tIns="0" rIns="0" bIns="0" rtlCol="0" anchor="ctr"/>
+          <a:lstStyle/>
+          <a:p>
+            <a:pPr indent="0" marL="0">
+              <a:buNone/>
+            </a:pPr>
+            <a:r>
+              <a:rPr lang="en-US" sz="1500" b="1" dirty="0">
+                <a:solidFill>
+                  <a:srgbClr val="FFD166"/>
+                </a:solidFill>
+              </a:rPr>
+              <a:t>Hiện trạng: </a:t>
+            </a:r>
+            <a:pPr indent="0" marL="0">
+              <a:buNone/>
+            </a:pPr>
+            <a:r>
+              <a:rPr lang="en-US" sz="1500" dirty="0">
+                <a:solidFill>
+                  <a:schemeClr val="bg1"/>
+                </a:solidFill>
+              </a:rPr>
+              <a:t>đã có mã triển khai chức năng cốt lõi và một số mở rộng. Tiếp theo: chạy thử thiết bị, xử lý lỗi, đồng bộ tài liệu, chuẩn bị demo.</a:t>
+            </a:r>
+            <a:endParaRPr lang="en-US" sz="1500" dirty="0"/>
+          </a:p>
+        </p:txBody>
+      </p:sp>
+      <p:sp>
+        <p:nvSpPr>
+          <p:cNvPr id="25" name="Slide Number Placeholder 0"/>
+          <p:cNvSpPr>
+            <a:spLocks noGrp="1"/>
+          </p:cNvSpPr>
+          <p:nvPr>
+            <p:ph type="sldNum" sz="quarter" idx="4294967295"/>
+          </p:nvPr>
+        </p:nvSpPr>
+        <p:spPr>
+          <a:xfrm>
+            <a:off x="11247120" y="6355080"/>
+            <a:ext cx="548640" cy="320040"/>
+          </a:xfrm>
+          <a:prstGeom prst="rect">
+            <a:avLst/>
+          </a:prstGeom>
+          <a:extLst>
+            <a:ext uri="{C572A759-6A51-4108-AA02-DFA0A04FC94B}">
+              <ma14:wrappingTextBoxFlag xmlns:ma14="http://schemas.microsoft.com/office/mac/drawingml/2011/main" val="0"/>
+            </a:ext>
+          </a:extLst>
+        </p:spPr>
+        <p:txBody>
+          <a:bodyPr/>
+          <a:lstStyle>
+            <a:lvl1pPr>
+              <a:defRPr sz="1100">
+                <a:solidFill>
+                  <a:srgbClr val="8E8AA6"/>
+                </a:solidFill>
+              </a:defRPr>
+            </a:lvl1pPr>
+          </a:lstStyle>
+          <a:p>
+            <a:pPr algn="r"/>
+            <a:fld id="{F7021451-1387-4CA6-816F-3879F97B5CBC}" type="slidenum">
+              <a:rPr b="0" lang="en-US"/>
+              <a:t>12</a:t>
+            </a:fld>
+            <a:endParaRPr lang="en-US"/>
+          </a:p>
+        </p:txBody>
+      </p:sp>
+    </p:spTree>
+  </p:cSld>
+  <p:clrMapOvr>
+    <a:masterClrMapping/>
+  </p:clrMapOvr>
+</p:sld>
+</file>
+
+<file path=ppt/slides/slide13.xml><?xml version="1.0" encoding="utf-8"?>
+<p:sld xmlns:a="http://schemas.openxmlformats.org/drawingml/2006/main" xmlns:r="http://schemas.openxmlformats.org/officeDocument/2006/relationships" xmlns:p="http://schemas.openxmlformats.org/presentationml/2006/main">
+  <p:cSld name="Slide 13">
+    <p:spTree>
+      <p:nvGrpSpPr>
+        <p:cNvPr id="1" name=""/>
+        <p:cNvGrpSpPr/>
+        <p:nvPr/>
+      </p:nvGrpSpPr>
+      <p:grpSpPr>
+        <a:xfrm>
+          <a:off x="0" y="0"/>
+          <a:ext cx="0" cy="0"/>
+          <a:chOff x="0" y="0"/>
+          <a:chExt cx="0" cy="0"/>
+        </a:xfrm>
+      </p:grpSpPr>
+      <p:sp>
+        <p:nvSpPr>
+          <p:cNvPr id="2" name="Text 0"/>
+          <p:cNvSpPr/>
+          <p:nvPr>
+            <p:ph idx="100" type="title" hasCustomPrompt="1"/>
+          </p:nvPr>
+        </p:nvSpPr>
+        <p:spPr>
+          <a:xfrm>
+            <a:off x="548640" y="365760"/>
+            <a:ext cx="11064240" cy="777240"/>
+          </a:xfrm>
+          <a:prstGeom prst="rect">
+            <a:avLst/>
+          </a:prstGeom>
+          <a:noFill/>
+          <a:ln/>
+        </p:spPr>
+        <p:txBody>
+          <a:bodyPr wrap="square" lIns="0" tIns="0" rIns="0" bIns="0" rtlCol="0" anchor="ctr"/>
+          <a:lstStyle/>
+          <a:p>
+            <a:pPr indent="0" marL="0">
+              <a:buNone/>
+            </a:pPr>
+            <a:r>
+              <a:rPr lang="en-US" sz="3600" b="1" dirty="0">
+                <a:solidFill>
+                  <a:schemeClr val="tx2"/>
+                </a:solidFill>
+              </a:rPr>
+              <a:t>Công việc còn lại trước nghiệm thu</a:t>
+            </a:r>
+            <a:endParaRPr lang="en-US" sz="3600" dirty="0"/>
+          </a:p>
+        </p:txBody>
+      </p:sp>
+      <p:sp>
+        <p:nvSpPr>
+          <p:cNvPr id="3" name="Việc 1 circle"/>
+          <p:cNvSpPr/>
+          <p:nvPr/>
+        </p:nvSpPr>
+        <p:spPr>
+          <a:xfrm>
+            <a:off x="548640" y="1417320"/>
+            <a:ext cx="566928" cy="566928"/>
+          </a:xfrm>
+          <a:prstGeom prst="ellipse">
+            <a:avLst/>
+          </a:prstGeom>
+          <a:solidFill>
+            <a:schemeClr val="accent1"/>
+          </a:solidFill>
+          <a:ln/>
+        </p:spPr>
+      </p:sp>
+      <p:pic>
+        <p:nvPicPr>
+          <p:cNvPr id="4" name="Việc 1 icon" descr="Việc 1">    </p:cNvPr>
+          <p:cNvPicPr>
+            <a:picLocks noChangeAspect="1"/>
+          </p:cNvPicPr>
+          <p:nvPr/>
+        </p:nvPicPr>
+        <p:blipFill>
+          <a:blip r:embed="rId1"/>
+          <a:stretch>
+            <a:fillRect/>
+          </a:stretch>
+        </p:blipFill>
+        <p:spPr>
+          <a:xfrm>
+            <a:off x="696041" y="1564721"/>
+            <a:ext cx="272125" cy="272125"/>
+          </a:xfrm>
+          <a:prstGeom prst="rect">
+            <a:avLst/>
+          </a:prstGeom>
+        </p:spPr>
+      </p:pic>
+      <p:sp>
+        <p:nvSpPr>
+          <p:cNvPr id="5" name="Text 2"/>
+          <p:cNvSpPr txBox="1"/>
+          <p:nvPr/>
+        </p:nvSpPr>
+        <p:spPr>
+          <a:xfrm>
+            <a:off x="1325880" y="1417320"/>
+            <a:ext cx="4846320" cy="566928"/>
+          </a:xfrm>
+          <a:prstGeom prst="rect">
+            <a:avLst/>
+          </a:prstGeom>
+          <a:noFill/>
+          <a:ln/>
+        </p:spPr>
+        <p:txBody>
+          <a:bodyPr wrap="square" lIns="0" tIns="0" rIns="0" bIns="0" rtlCol="0" anchor="ctr"/>
+          <a:lstStyle/>
+          <a:p>
+            <a:pPr indent="0" marL="0">
+              <a:buNone/>
+            </a:pPr>
+            <a:r>
+              <a:rPr lang="en-US" sz="1600" dirty="0">
+                <a:solidFill>
+                  <a:schemeClr val="tx2"/>
+                </a:solidFill>
+              </a:rPr>
+              <a:t>Chạy thử toàn bộ luồng trên máy thật hoặc máy ảo</a:t>
+            </a:r>
+            <a:endParaRPr lang="en-US" sz="1600" dirty="0"/>
+          </a:p>
+        </p:txBody>
+      </p:sp>
+      <p:sp>
+        <p:nvSpPr>
+          <p:cNvPr id="6" name="Việc 2 circle"/>
+          <p:cNvSpPr/>
+          <p:nvPr/>
+        </p:nvSpPr>
+        <p:spPr>
+          <a:xfrm>
+            <a:off x="548640" y="2350008"/>
+            <a:ext cx="566928" cy="566928"/>
+          </a:xfrm>
+          <a:prstGeom prst="ellipse">
+            <a:avLst/>
+          </a:prstGeom>
+          <a:solidFill>
+            <a:schemeClr val="accent2"/>
+          </a:solidFill>
+          <a:ln/>
+        </p:spPr>
+      </p:sp>
+      <p:pic>
+        <p:nvPicPr>
+          <p:cNvPr id="7" name="Việc 2 icon" descr="Việc 2">    </p:cNvPr>
+          <p:cNvPicPr>
+            <a:picLocks noChangeAspect="1"/>
+          </p:cNvPicPr>
+          <p:nvPr/>
+        </p:nvPicPr>
+        <p:blipFill>
+          <a:blip r:embed="rId2"/>
+          <a:stretch>
+            <a:fillRect/>
+          </a:stretch>
+        </p:blipFill>
+        <p:spPr>
+          <a:xfrm>
+            <a:off x="696041" y="2497409"/>
+            <a:ext cx="272125" cy="272125"/>
+          </a:xfrm>
+          <a:prstGeom prst="rect">
+            <a:avLst/>
+          </a:prstGeom>
+        </p:spPr>
+      </p:pic>
+      <p:sp>
+        <p:nvSpPr>
+          <p:cNvPr id="8" name="Text 4"/>
+          <p:cNvSpPr txBox="1"/>
+          <p:nvPr/>
+        </p:nvSpPr>
+        <p:spPr>
+          <a:xfrm>
+            <a:off x="1325880" y="2350008"/>
+            <a:ext cx="4846320" cy="566928"/>
+          </a:xfrm>
+          <a:prstGeom prst="rect">
+            <a:avLst/>
+          </a:prstGeom>
+          <a:noFill/>
+          <a:ln/>
+        </p:spPr>
+        <p:txBody>
+          <a:bodyPr wrap="square" lIns="0" tIns="0" rIns="0" bIns="0" rtlCol="0" anchor="ctr"/>
+          <a:lstStyle/>
+          <a:p>
+            <a:pPr indent="0" marL="0">
+              <a:buNone/>
+            </a:pPr>
+            <a:r>
+              <a:rPr lang="en-US" sz="1600" dirty="0">
+                <a:solidFill>
+                  <a:schemeClr val="tx2"/>
+                </a:solidFill>
+              </a:rPr>
+              <a:t>Kiểm tra quyền và nhận thông báo; từ chối rồi cấp lại quyền</a:t>
+            </a:r>
+            <a:endParaRPr lang="en-US" sz="1600" dirty="0"/>
+          </a:p>
+        </p:txBody>
+      </p:sp>
+      <p:sp>
+        <p:nvSpPr>
+          <p:cNvPr id="9" name="Việc 3 circle"/>
+          <p:cNvSpPr/>
+          <p:nvPr/>
+        </p:nvSpPr>
+        <p:spPr>
+          <a:xfrm>
+            <a:off x="548640" y="3282696"/>
+            <a:ext cx="566928" cy="566928"/>
+          </a:xfrm>
+          <a:prstGeom prst="ellipse">
+            <a:avLst/>
+          </a:prstGeom>
+          <a:solidFill>
+            <a:schemeClr val="accent3"/>
+          </a:solidFill>
+          <a:ln/>
+        </p:spPr>
+      </p:sp>
+      <p:pic>
+        <p:nvPicPr>
+          <p:cNvPr id="10" name="Việc 3 icon" descr="Việc 3">    </p:cNvPr>
+          <p:cNvPicPr>
+            <a:picLocks noChangeAspect="1"/>
+          </p:cNvPicPr>
+          <p:nvPr/>
+        </p:nvPicPr>
+        <p:blipFill>
+          <a:blip r:embed="rId3"/>
+          <a:stretch>
+            <a:fillRect/>
+          </a:stretch>
+        </p:blipFill>
+        <p:spPr>
+          <a:xfrm>
+            <a:off x="696041" y="3430097"/>
+            <a:ext cx="272125" cy="272125"/>
+          </a:xfrm>
+          <a:prstGeom prst="rect">
+            <a:avLst/>
+          </a:prstGeom>
+        </p:spPr>
+      </p:pic>
+      <p:sp>
+        <p:nvSpPr>
+          <p:cNvPr id="11" name="Text 6"/>
+          <p:cNvSpPr txBox="1"/>
+          <p:nvPr/>
+        </p:nvSpPr>
+        <p:spPr>
+          <a:xfrm>
+            <a:off x="1325880" y="3282696"/>
+            <a:ext cx="4846320" cy="566928"/>
+          </a:xfrm>
+          <a:prstGeom prst="rect">
+            <a:avLst/>
+          </a:prstGeom>
+          <a:noFill/>
+          <a:ln/>
+        </p:spPr>
+        <p:txBody>
+          <a:bodyPr wrap="square" lIns="0" tIns="0" rIns="0" bIns="0" rtlCol="0" anchor="ctr"/>
+          <a:lstStyle/>
+          <a:p>
+            <a:pPr indent="0" marL="0">
+              <a:buNone/>
+            </a:pPr>
+            <a:r>
+              <a:rPr lang="en-US" sz="1600" dirty="0">
+                <a:solidFill>
+                  <a:schemeClr val="tx2"/>
+                </a:solidFill>
+              </a:rPr>
+              <a:t>Kiểm tra Lịch, xuất CSV, chia sẻ, dữ liệu sau khi đóng/mở app</a:t>
+            </a:r>
+            <a:endParaRPr lang="en-US" sz="1600" dirty="0"/>
+          </a:p>
+        </p:txBody>
+      </p:sp>
+      <p:sp>
+        <p:nvSpPr>
+          <p:cNvPr id="12" name="Việc 4 circle"/>
+          <p:cNvSpPr/>
+          <p:nvPr/>
+        </p:nvSpPr>
+        <p:spPr>
+          <a:xfrm>
+            <a:off x="548640" y="4215384"/>
+            <a:ext cx="566928" cy="566928"/>
+          </a:xfrm>
+          <a:prstGeom prst="ellipse">
+            <a:avLst/>
+          </a:prstGeom>
+          <a:solidFill>
+            <a:schemeClr val="accent4"/>
+          </a:solidFill>
+          <a:ln/>
+        </p:spPr>
+      </p:sp>
+      <p:pic>
+        <p:nvPicPr>
+          <p:cNvPr id="13" name="Việc 4 icon" descr="Việc 4">    </p:cNvPr>
+          <p:cNvPicPr>
+            <a:picLocks noChangeAspect="1"/>
+          </p:cNvPicPr>
+          <p:nvPr/>
+        </p:nvPicPr>
+        <p:blipFill>
+          <a:blip r:embed="rId4"/>
+          <a:stretch>
+            <a:fillRect/>
+          </a:stretch>
+        </p:blipFill>
+        <p:spPr>
+          <a:xfrm>
+            <a:off x="696041" y="4362785"/>
+            <a:ext cx="272125" cy="272125"/>
+          </a:xfrm>
+          <a:prstGeom prst="rect">
+            <a:avLst/>
+          </a:prstGeom>
+        </p:spPr>
+      </p:pic>
+      <p:sp>
+        <p:nvSpPr>
+          <p:cNvPr id="14" name="Text 8"/>
+          <p:cNvSpPr txBox="1"/>
+          <p:nvPr/>
+        </p:nvSpPr>
+        <p:spPr>
+          <a:xfrm>
+            <a:off x="1325880" y="4215384"/>
+            <a:ext cx="4846320" cy="566928"/>
+          </a:xfrm>
+          <a:prstGeom prst="rect">
+            <a:avLst/>
+          </a:prstGeom>
+          <a:noFill/>
+          <a:ln/>
+        </p:spPr>
+        <p:txBody>
+          <a:bodyPr wrap="square" lIns="0" tIns="0" rIns="0" bIns="0" rtlCol="0" anchor="ctr"/>
+          <a:lstStyle/>
+          <a:p>
+            <a:pPr indent="0" marL="0">
+              <a:buNone/>
+            </a:pPr>
+            <a:r>
+              <a:rPr lang="en-US" sz="1600" dirty="0">
+                <a:solidFill>
+                  <a:schemeClr val="tx2"/>
+                </a:solidFill>
+              </a:rPr>
+              <a:t>Hoàn thiện tên thành viên và phân công</a:t>
+            </a:r>
+            <a:endParaRPr lang="en-US" sz="1600" dirty="0"/>
+          </a:p>
+        </p:txBody>
+      </p:sp>
+      <p:sp>
+        <p:nvSpPr>
+          <p:cNvPr id="15" name="Việc 5 circle"/>
+          <p:cNvSpPr/>
+          <p:nvPr/>
+        </p:nvSpPr>
+        <p:spPr>
+          <a:xfrm>
+            <a:off x="548640" y="5148072"/>
+            <a:ext cx="566928" cy="566928"/>
+          </a:xfrm>
+          <a:prstGeom prst="ellipse">
+            <a:avLst/>
+          </a:prstGeom>
+          <a:solidFill>
+            <a:schemeClr val="accent5"/>
+          </a:solidFill>
+          <a:ln/>
+        </p:spPr>
+      </p:sp>
+      <p:pic>
+        <p:nvPicPr>
+          <p:cNvPr id="16" name="Việc 5 icon" descr="Việc 5">    </p:cNvPr>
+          <p:cNvPicPr>
+            <a:picLocks noChangeAspect="1"/>
+          </p:cNvPicPr>
+          <p:nvPr/>
+        </p:nvPicPr>
+        <p:blipFill>
+          <a:blip r:embed="rId5"/>
+          <a:stretch>
+            <a:fillRect/>
+          </a:stretch>
+        </p:blipFill>
+        <p:spPr>
+          <a:xfrm>
+            <a:off x="696041" y="5295473"/>
+            <a:ext cx="272125" cy="272125"/>
+          </a:xfrm>
+          <a:prstGeom prst="rect">
+            <a:avLst/>
+          </a:prstGeom>
+        </p:spPr>
+      </p:pic>
+      <p:sp>
+        <p:nvSpPr>
+          <p:cNvPr id="17" name="Text 10"/>
+          <p:cNvSpPr txBox="1"/>
+          <p:nvPr/>
+        </p:nvSpPr>
+        <p:spPr>
+          <a:xfrm>
+            <a:off x="1325880" y="5148072"/>
+            <a:ext cx="4846320" cy="566928"/>
+          </a:xfrm>
+          <a:prstGeom prst="rect">
+            <a:avLst/>
+          </a:prstGeom>
+          <a:noFill/>
+          <a:ln/>
+        </p:spPr>
+        <p:txBody>
+          <a:bodyPr wrap="square" lIns="0" tIns="0" rIns="0" bIns="0" rtlCol="0" anchor="ctr"/>
+          <a:lstStyle/>
+          <a:p>
+            <a:pPr indent="0" marL="0">
+              <a:buNone/>
+            </a:pPr>
+            <a:r>
+              <a:rPr lang="en-US" sz="1600" dirty="0">
+                <a:solidFill>
+                  <a:schemeClr val="tx2"/>
+                </a:solidFill>
+              </a:rPr>
+              <a:t>Ghi kết quả kiểm thử thực tế, chuẩn bị dữ liệu mẫu và kịch bản demo</a:t>
+            </a:r>
+            <a:endParaRPr lang="en-US" sz="1600" dirty="0"/>
+          </a:p>
+        </p:txBody>
+      </p:sp>
+      <p:sp>
+        <p:nvSpPr>
+          <p:cNvPr id="18" name="Giới hạn cần nói rõ"/>
+          <p:cNvSpPr/>
+          <p:nvPr/>
+        </p:nvSpPr>
+        <p:spPr>
+          <a:xfrm>
+            <a:off x="6583680" y="1371600"/>
+            <a:ext cx="4983480" cy="4754880"/>
+          </a:xfrm>
+          <a:prstGeom prst="roundRect">
+            <a:avLst>
+              <a:gd name="adj" fmla="val 2308"/>
+            </a:avLst>
+          </a:prstGeom>
+          <a:solidFill>
+            <a:srgbClr val="FFF6D6"/>
+          </a:solidFill>
+          <a:ln/>
+          <a:effectLst>
+            <a:outerShdw sx="100000" sy="100000" kx="0" ky="0" algn="bl" rotWithShape="0" blurRad="101600" dist="25400" dir="5400000">
+              <a:srgbClr val="2B1B5A">
+                <a:alpha val="12000"/>
+              </a:srgbClr>
+            </a:outerShdw>
+          </a:effectLst>
+        </p:spPr>
+      </p:sp>
+      <p:sp>
+        <p:nvSpPr>
+          <p:cNvPr id="19" name="Text 12"/>
+          <p:cNvSpPr txBox="1"/>
+          <p:nvPr/>
+        </p:nvSpPr>
+        <p:spPr>
+          <a:xfrm>
+            <a:off x="6858000" y="1554480"/>
+            <a:ext cx="4480560" cy="411480"/>
+          </a:xfrm>
+          <a:prstGeom prst="rect">
+            <a:avLst/>
+          </a:prstGeom>
+          <a:noFill/>
+          <a:ln/>
+        </p:spPr>
+        <p:txBody>
+          <a:bodyPr wrap="square" lIns="0" tIns="0" rIns="0" bIns="0" rtlCol="0" anchor="t"/>
+          <a:lstStyle/>
+          <a:p>
+            <a:pPr indent="0" marL="0">
+              <a:buNone/>
+            </a:pPr>
+            <a:r>
+              <a:rPr lang="en-US" sz="1800" b="1" dirty="0">
+                <a:solidFill>
+                  <a:srgbClr val="6B4E00"/>
+                </a:solidFill>
+              </a:rPr>
+              <a:t>Giới hạn cần nói rõ</a:t>
+            </a:r>
+            <a:endParaRPr lang="en-US" sz="1800" dirty="0"/>
+          </a:p>
+        </p:txBody>
+      </p:sp>
+      <p:sp>
+        <p:nvSpPr>
+          <p:cNvPr id="20" name="Text 13"/>
+          <p:cNvSpPr txBox="1"/>
+          <p:nvPr/>
+        </p:nvSpPr>
+        <p:spPr>
+          <a:xfrm>
+            <a:off x="6858000" y="2103120"/>
+            <a:ext cx="4526280" cy="3840480"/>
+          </a:xfrm>
+          <a:prstGeom prst="rect">
+            <a:avLst/>
+          </a:prstGeom>
+          <a:noFill/>
+          <a:ln/>
+        </p:spPr>
+        <p:txBody>
+          <a:bodyPr wrap="square" lIns="0" tIns="0" rIns="0" bIns="0" rtlCol="0" anchor="t"/>
+          <a:lstStyle/>
+          <a:p>
+            <a:pPr marL="342900" indent="-342900">
+              <a:spcAft>
+                <a:spcPts val="1400"/>
+              </a:spcAft>
+              <a:buSzPct val="100000"/>
+              <a:buChar char="•"/>
+            </a:pPr>
+            <a:r>
+              <a:rPr lang="en-US" sz="1700" dirty="0">
+                <a:solidFill>
+                  <a:srgbClr val="5A4300"/>
+                </a:solidFill>
+              </a:rPr>
+              <a:t>Nhắc hạn: kiểm tra định kỳ, không đúng giờ cố định; phụ thuộc quyền thông báo</a:t>
+            </a:r>
+            <a:endParaRPr lang="en-US" sz="1700" dirty="0"/>
+          </a:p>
+          <a:p>
+            <a:pPr marL="342900" indent="-342900">
+              <a:spcAft>
+                <a:spcPts val="1400"/>
+              </a:spcAft>
+              <a:buSzPct val="100000"/>
+              <a:buChar char="•"/>
+            </a:pPr>
+            <a:r>
+              <a:rPr lang="en-US" sz="1700" dirty="0">
+                <a:solidFill>
+                  <a:srgbClr val="5A4300"/>
+                </a:solidFill>
+              </a:rPr>
+              <a:t>Dữ liệu: SQLite trên máy, chưa có tài khoản hay khôi phục bằng file</a:t>
+            </a:r>
+            <a:endParaRPr lang="en-US" sz="1700" dirty="0"/>
+          </a:p>
+          <a:p>
+            <a:pPr marL="342900" indent="-342900">
+              <a:spcAft>
+                <a:spcPts val="1400"/>
+              </a:spcAft>
+              <a:buSzPct val="100000"/>
+              <a:buChar char="•"/>
+            </a:pPr>
+            <a:r>
+              <a:rPr lang="en-US" sz="1700" dirty="0">
+                <a:solidFill>
+                  <a:srgbClr val="5A4300"/>
+                </a:solidFill>
+              </a:rPr>
+              <a:t>Báo cáo: chi phí tương đương theo chu kỳ, không phải lịch sử thanh toán</a:t>
+            </a:r>
+            <a:endParaRPr lang="en-US" sz="1700" dirty="0"/>
+          </a:p>
+          <a:p>
+            <a:pPr marL="342900" indent="-342900">
+              <a:spcAft>
+                <a:spcPts val="1400"/>
+              </a:spcAft>
+              <a:buSzPct val="100000"/>
+              <a:buChar char="•"/>
+            </a:pPr>
+            <a:r>
+              <a:rPr lang="en-US" sz="1700" dirty="0">
+                <a:solidFill>
+                  <a:srgbClr val="5A4300"/>
+                </a:solidFill>
+              </a:rPr>
+              <a:t>Hủy gói: trạng thái trong app không hủy dịch vụ thật</a:t>
+            </a:r>
+            <a:endParaRPr lang="en-US" sz="1700" dirty="0"/>
+          </a:p>
+          <a:p>
+            <a:pPr marL="342900" indent="-342900">
+              <a:spcAft>
+                <a:spcPts val="1400"/>
+              </a:spcAft>
+              <a:buSzPct val="100000"/>
+              <a:buChar char="•"/>
+            </a:pPr>
+            <a:r>
+              <a:rPr lang="en-US" sz="1700" dirty="0">
+                <a:solidFill>
+                  <a:srgbClr val="5A4300"/>
+                </a:solidFill>
+              </a:rPr>
+              <a:t>Gói dùng chung: một người theo dõi, chưa chia tiền</a:t>
+            </a:r>
+            <a:endParaRPr lang="en-US" sz="1700" dirty="0"/>
+          </a:p>
+        </p:txBody>
+      </p:sp>
+      <p:sp>
+        <p:nvSpPr>
+          <p:cNvPr id="25" name="Slide Number Placeholder 0"/>
+          <p:cNvSpPr>
+            <a:spLocks noGrp="1"/>
+          </p:cNvSpPr>
+          <p:nvPr>
+            <p:ph type="sldNum" sz="quarter" idx="4294967295"/>
+          </p:nvPr>
+        </p:nvSpPr>
+        <p:spPr>
+          <a:xfrm>
+            <a:off x="11247120" y="6355080"/>
+            <a:ext cx="548640" cy="320040"/>
+          </a:xfrm>
+          <a:prstGeom prst="rect">
+            <a:avLst/>
+          </a:prstGeom>
+          <a:extLst>
+            <a:ext uri="{C572A759-6A51-4108-AA02-DFA0A04FC94B}">
+              <ma14:wrappingTextBoxFlag xmlns:ma14="http://schemas.microsoft.com/office/mac/drawingml/2011/main" val="0"/>
+            </a:ext>
+          </a:extLst>
+        </p:spPr>
+        <p:txBody>
+          <a:bodyPr/>
+          <a:lstStyle>
+            <a:lvl1pPr>
+              <a:defRPr sz="1100">
+                <a:solidFill>
+                  <a:srgbClr val="8E8AA6"/>
+                </a:solidFill>
+              </a:defRPr>
+            </a:lvl1pPr>
+          </a:lstStyle>
+          <a:p>
+            <a:pPr algn="r"/>
+            <a:fld id="{F7021451-1387-4CA6-816F-3879F97B5CBC}" type="slidenum">
+              <a:rPr b="0" lang="en-US"/>
+              <a:t>13</a:t>
+            </a:fld>
+            <a:endParaRPr lang="en-US"/>
+          </a:p>
+        </p:txBody>
+      </p:sp>
+    </p:spTree>
+  </p:cSld>
+  <p:clrMapOvr>
+    <a:masterClrMapping/>
+  </p:clrMapOvr>
+</p:sld>
+</file>
+
+<file path=ppt/slides/slide14.xml><?xml version="1.0" encoding="utf-8"?>
+<p:sld xmlns:a="http://schemas.openxmlformats.org/drawingml/2006/main" xmlns:r="http://schemas.openxmlformats.org/officeDocument/2006/relationships" xmlns:p="http://schemas.openxmlformats.org/presentationml/2006/main">
+  <p:cSld name="Slide 14">
     <p:spTree>
       <p:nvGrpSpPr>
         <p:cNvPr id="1" name=""/>
@@ -6095,7 +9337,7 @@
       </p:sp>
       <p:sp>
         <p:nvSpPr>
-          <p:cNvPr id="19" name="Thẻ Ra quyết định giữ / hủy"/>
+          <p:cNvPr id="19" name="Thẻ Hỗ trợ quyết định giữ / hủy"/>
           <p:cNvSpPr/>
           <p:nvPr/>
         </p:nvSpPr>
@@ -6124,7 +9366,7 @@
       </p:sp>
       <p:sp>
         <p:nvSpPr>
-          <p:cNvPr id="20" name="Ra quyết định giữ / hủy circle"/>
+          <p:cNvPr id="20" name="Hỗ trợ quyết định giữ / hủy circle"/>
           <p:cNvSpPr/>
           <p:nvPr/>
         </p:nvSpPr>
@@ -6144,7 +9386,7 @@
       </p:sp>
       <p:pic>
         <p:nvPicPr>
-          <p:cNvPr id="21" name="Ra quyết định giữ / hủy icon" descr="Ra quyết định giữ / hủy">    </p:cNvPr>
+          <p:cNvPr id="21" name="Hỗ trợ quyết định giữ / hủy icon" descr="Hỗ trợ quyết định giữ / hủy">    </p:cNvPr>
           <p:cNvPicPr>
             <a:picLocks noChangeAspect="1"/>
           </p:cNvPicPr>
@@ -6196,7 +9438,7 @@
                   <a:schemeClr val="tx2"/>
                 </a:solidFill>
               </a:rPr>
-              <a:t>Ra quyết định giữ / hủy</a:t>
+              <a:t>Hỗ trợ quyết định giữ / hủy</a:t>
             </a:r>
             <a:endParaRPr lang="en-US" sz="2000" dirty="0"/>
           </a:p>
@@ -6232,7 +9474,7 @@
                   <a:srgbClr val="4A4560"/>
                 </a:solidFill>
               </a:rPr>
-              <a:t>Thấy rõ gói nào ít dùng mà tốn tiền để chủ động hủy, tiết kiệm.</a:t>
+              <a:t>Hiển thị chi phí, trạng thái, liên kết quản lý để tự đánh giá. Việc hủy làm tại nhà cung cấp.</a:t>
             </a:r>
             <a:endParaRPr lang="en-US" sz="1500" dirty="0"/>
           </a:p>
@@ -6616,7 +9858,7 @@
       </p:sp>
       <p:sp>
         <p:nvSpPr>
-          <p:cNvPr id="12" name="Gia đình, nhóm bạn circle"/>
+          <p:cNvPr id="12" name="Người đại diện gói dùng chung circle"/>
           <p:cNvSpPr/>
           <p:nvPr/>
         </p:nvSpPr>
@@ -6636,7 +9878,7 @@
       </p:sp>
       <p:pic>
         <p:nvPicPr>
-          <p:cNvPr id="13" name="Gia đình, nhóm bạn icon" descr="Gia đình, nhóm bạn">    </p:cNvPr>
+          <p:cNvPr id="13" name="Người đại diện gói dùng chung icon" descr="Người đại diện gói dùng chung">    </p:cNvPr>
           <p:cNvPicPr>
             <a:picLocks noChangeAspect="1"/>
           </p:cNvPicPr>
@@ -6688,7 +9930,7 @@
                   <a:schemeClr val="tx2"/>
                 </a:solidFill>
               </a:rPr>
-              <a:t>Gia đình, nhóm bạn</a:t>
+              <a:t>Người đại diện gói dùng chung</a:t>
             </a:r>
             <a:endParaRPr lang="en-US" sz="1900" dirty="0"/>
           </a:p>
@@ -6724,7 +9966,7 @@
                   <a:srgbClr val="4A4560"/>
                 </a:solidFill>
               </a:rPr>
-              <a:t>Dùng chung gói, cần nhớ ai trả và khi nào.</a:t>
+              <a:t>Một người ghi lại chi phí, ngày gia hạn gói gia đình/nhóm bạn trên máy mình.</a:t>
             </a:r>
             <a:endParaRPr lang="en-US" sz="1500" dirty="0"/>
           </a:p>
@@ -7068,7 +10310,7 @@
                   <a:srgbClr val="0E5A53"/>
                 </a:solidFill>
               </a:rPr>
-              <a:t>Dashboard và thống kê quy đổi chi phí theo tháng</a:t>
+              <a:t>Tổng quan và báo cáo chi phí ước tính theo chu kỳ</a:t>
             </a:r>
             <a:endParaRPr lang="en-US" sz="1500" dirty="0"/>
           </a:p>
@@ -7379,6 +10621,42 @@
               <a:t>Trạng thái gói, danh sách gói tốn tiền nhất</a:t>
             </a:r>
             <a:endParaRPr lang="en-US" sz="1500" dirty="0"/>
+          </a:p>
+        </p:txBody>
+      </p:sp>
+      <p:sp>
+        <p:nvSpPr>
+          <p:cNvPr id="37" name="Text 28"/>
+          <p:cNvSpPr txBox="1"/>
+          <p:nvPr/>
+        </p:nvSpPr>
+        <p:spPr>
+          <a:xfrm>
+            <a:off x="548640" y="6172200"/>
+            <a:ext cx="10515600" cy="320040"/>
+          </a:xfrm>
+          <a:prstGeom prst="rect">
+            <a:avLst/>
+          </a:prstGeom>
+          <a:noFill/>
+          <a:ln/>
+        </p:spPr>
+        <p:txBody>
+          <a:bodyPr wrap="square" lIns="0" tIns="0" rIns="0" bIns="0" rtlCol="0" anchor="t"/>
+          <a:lstStyle/>
+          <a:p>
+            <a:pPr indent="0" marL="0">
+              <a:buNone/>
+            </a:pPr>
+            <a:r>
+              <a:rPr lang="en-US" sz="1200" i="1" dirty="0">
+                <a:solidFill>
+                  <a:srgbClr val="6E6888"/>
+                </a:solidFill>
+              </a:rPr>
+              <a:t>Phiên bản hiện tại quản lý dữ liệu trên từng thiết bị, chưa hỗ trợ thành viên, phân quyền hoặc chia tiền.</a:t>
+            </a:r>
+            <a:endParaRPr lang="en-US" sz="1200" dirty="0"/>
           </a:p>
         </p:txBody>
       </p:sp>
@@ -7620,7 +10898,7 @@
         <p:spPr>
           <a:xfrm>
             <a:off x="1508760" y="1883664"/>
-            <a:ext cx="2377440" cy="274320"/>
+            <a:ext cx="2468880" cy="274320"/>
           </a:xfrm>
           <a:prstGeom prst="rect">
             <a:avLst/>
@@ -7641,7 +10919,7 @@
                   <a:srgbClr val="6E6888"/>
                 </a:solidFill>
               </a:rPr>
-              <a:t>iPhone · iPad · Mac</a:t>
+              <a:t>subradar.app · hệ sinh thái Apple</a:t>
             </a:r>
             <a:endParaRPr lang="en-US" sz="1200" dirty="0"/>
           </a:p>
@@ -7675,14 +10953,14 @@
               <a:buNone/>
             </a:pPr>
             <a:r>
-              <a:rPr lang="en-US" sz="1600" dirty="0">
+              <a:rPr lang="en-US" sz="1500" dirty="0">
                 <a:solidFill>
                   <a:srgbClr val="0E6E64"/>
                 </a:solidFill>
               </a:rPr>
-              <a:t>+  Báo cáo tuần/tháng/quý/năm, tag, nền tảng</a:t>
-            </a:r>
-            <a:endParaRPr lang="en-US" sz="1600" dirty="0"/>
+              <a:t>+  Quản lý gói, tag, nhắc hạn</a:t>
+            </a:r>
+            <a:endParaRPr lang="en-US" sz="1500" dirty="0"/>
           </a:p>
           <a:p>
             <a:pPr indent="0" marL="0">
@@ -7692,14 +10970,14 @@
               <a:buNone/>
             </a:pPr>
             <a:r>
-              <a:rPr lang="en-US" sz="1600" dirty="0">
+              <a:rPr lang="en-US" sz="1500" dirty="0">
                 <a:solidFill>
                   <a:srgbClr val="0E6E64"/>
                 </a:solidFill>
               </a:rPr>
-              <a:t>+  Nhắc trước hạn, thêm vào lịch, đồng bộ iCloud</a:t>
-            </a:r>
-            <a:endParaRPr lang="en-US" sz="1600" dirty="0"/>
+              <a:t>+  Tích hợp lịch, đồng bộ iCloud</a:t>
+            </a:r>
+            <a:endParaRPr lang="en-US" sz="1500" dirty="0"/>
           </a:p>
           <a:p>
             <a:pPr indent="0" marL="0">
@@ -7709,31 +10987,14 @@
               <a:buNone/>
             </a:pPr>
             <a:r>
-              <a:rPr lang="en-US" sz="1600" dirty="0">
+              <a:rPr lang="en-US" sz="1500" dirty="0">
                 <a:solidFill>
                   <a:srgbClr val="A23B22"/>
                 </a:solidFill>
               </a:rPr>
-              <a:t>−  Không có Android, chỉ có tiếng Anh</a:t>
-            </a:r>
-            <a:endParaRPr lang="en-US" sz="1600" dirty="0"/>
-          </a:p>
-          <a:p>
-            <a:pPr indent="0" marL="0">
-              <a:spcAft>
-                <a:spcPts val="600"/>
-              </a:spcAft>
-              <a:buNone/>
-            </a:pPr>
-            <a:r>
-              <a:rPr lang="en-US" sz="1600" dirty="0">
-                <a:solidFill>
-                  <a:srgbClr val="A23B22"/>
-                </a:solidFill>
-              </a:rPr>
-              <a:t>−  Một số tính năng cần gói Pro</a:t>
-            </a:r>
-            <a:endParaRPr lang="en-US" sz="1600" dirty="0"/>
+              <a:t>−  Tài liệu chính thức mô tả hệ sinh thái Apple; chưa thấy bản Android</a:t>
+            </a:r>
+            <a:endParaRPr lang="en-US" sz="1500" dirty="0"/>
           </a:p>
         </p:txBody>
       </p:sp>
@@ -7867,7 +11128,7 @@
         <p:spPr>
           <a:xfrm>
             <a:off x="5257800" y="1883664"/>
-            <a:ext cx="2377440" cy="274320"/>
+            <a:ext cx="2468880" cy="274320"/>
           </a:xfrm>
           <a:prstGeom prst="rect">
             <a:avLst/>
@@ -7888,7 +11149,7 @@
                   <a:srgbClr val="6E6888"/>
                 </a:solidFill>
               </a:rPr>
-              <a:t>iPhone</a:t>
+              <a:t>Yummygum · App Store</a:t>
             </a:r>
             <a:endParaRPr lang="en-US" sz="1200" dirty="0"/>
           </a:p>
@@ -7922,14 +11183,14 @@
               <a:buNone/>
             </a:pPr>
             <a:r>
-              <a:rPr lang="en-US" sz="1600" dirty="0">
+              <a:rPr lang="en-US" sz="1500" dirty="0">
                 <a:solidFill>
                   <a:srgbClr val="0E6E64"/>
                 </a:solidFill>
               </a:rPr>
-              <a:t>+  Thiết kế đẹp, nhập gói nhanh</a:t>
-            </a:r>
-            <a:endParaRPr lang="en-US" sz="1600" dirty="0"/>
+              <a:t>+  Nhập gói từ danh sách có sẵn hoặc tự tạo</a:t>
+            </a:r>
+            <a:endParaRPr lang="en-US" sz="1500" dirty="0"/>
           </a:p>
           <a:p>
             <a:pPr indent="0" marL="0">
@@ -7939,14 +11200,14 @@
               <a:buNone/>
             </a:pPr>
             <a:r>
-              <a:rPr lang="en-US" sz="1600" dirty="0">
+              <a:rPr lang="en-US" sz="1500" dirty="0">
                 <a:solidFill>
                   <a:srgbClr val="0E6E64"/>
                 </a:solidFill>
               </a:rPr>
-              <a:t>+  Có sẵn biểu tượng nhiều dịch vụ, nhắc trước hạn</a:t>
-            </a:r>
-            <a:endParaRPr lang="en-US" sz="1600" dirty="0"/>
+              <a:t>+  Xem chi phí, nhận nhắc hạn</a:t>
+            </a:r>
+            <a:endParaRPr lang="en-US" sz="1500" dirty="0"/>
           </a:p>
           <a:p>
             <a:pPr indent="0" marL="0">
@@ -7956,14 +11217,14 @@
               <a:buNone/>
             </a:pPr>
             <a:r>
-              <a:rPr lang="en-US" sz="1600" dirty="0">
+              <a:rPr lang="en-US" sz="1500" dirty="0">
                 <a:solidFill>
                   <a:srgbClr val="A23B22"/>
                 </a:solidFill>
               </a:rPr>
-              <a:t>−  Chỉ có trên iPhone</a:t>
-            </a:r>
-            <a:endParaRPr lang="en-US" sz="1600" dirty="0"/>
+              <a:t>−  Thiết kế cho iPhone; mua thêm để mở giới hạn số gói</a:t>
+            </a:r>
+            <a:endParaRPr lang="en-US" sz="1500" dirty="0"/>
           </a:p>
           <a:p>
             <a:pPr indent="0" marL="0">
@@ -7973,14 +11234,14 @@
               <a:buNone/>
             </a:pPr>
             <a:r>
-              <a:rPr lang="en-US" sz="1600" dirty="0">
+              <a:rPr lang="en-US" sz="1500" dirty="0">
                 <a:solidFill>
                   <a:srgbClr val="A23B22"/>
                 </a:solidFill>
               </a:rPr>
-              <a:t>−  Bản miễn phí giới hạn số gói</a:t>
-            </a:r>
-            <a:endParaRPr lang="en-US" sz="1600" dirty="0"/>
+              <a:t>−  Chưa thấy bản Android chính thức</a:t>
+            </a:r>
+            <a:endParaRPr lang="en-US" sz="1500" dirty="0"/>
           </a:p>
         </p:txBody>
       </p:sp>
@@ -8114,7 +11375,7 @@
         <p:spPr>
           <a:xfrm>
             <a:off x="9006840" y="1883664"/>
-            <a:ext cx="2377440" cy="274320"/>
+            <a:ext cx="2468880" cy="274320"/>
           </a:xfrm>
           <a:prstGeom prst="rect">
             <a:avLst/>
@@ -8169,14 +11430,14 @@
               <a:buNone/>
             </a:pPr>
             <a:r>
-              <a:rPr lang="en-US" sz="1600" dirty="0">
+              <a:rPr lang="en-US" sz="1500" dirty="0">
                 <a:solidFill>
                   <a:srgbClr val="0E6E64"/>
                 </a:solidFill>
               </a:rPr>
-              <a:t>+  Tự phát hiện gói đăng ký từ tài khoản ngân hàng</a:t>
-            </a:r>
-            <a:endParaRPr lang="en-US" sz="1600" dirty="0"/>
+              <a:t>+  Tự phát hiện đăng ký khi liên kết tài khoản</a:t>
+            </a:r>
+            <a:endParaRPr lang="en-US" sz="1500" dirty="0"/>
           </a:p>
           <a:p>
             <a:pPr indent="0" marL="0">
@@ -8186,14 +11447,14 @@
               <a:buNone/>
             </a:pPr>
             <a:r>
-              <a:rPr lang="en-US" sz="1600" dirty="0">
+              <a:rPr lang="en-US" sz="1500" dirty="0">
                 <a:solidFill>
                   <a:srgbClr val="0E6E64"/>
                 </a:solidFill>
               </a:rPr>
-              <a:t>+  Hủy gói hộ, quản lý ngân sách</a:t>
-            </a:r>
-            <a:endParaRPr lang="en-US" sz="1600" dirty="0"/>
+              <a:t>+  Có dịch vụ hỗ trợ hủy gói</a:t>
+            </a:r>
+            <a:endParaRPr lang="en-US" sz="1500" dirty="0"/>
           </a:p>
           <a:p>
             <a:pPr indent="0" marL="0">
@@ -8203,14 +11464,14 @@
               <a:buNone/>
             </a:pPr>
             <a:r>
-              <a:rPr lang="en-US" sz="1600" dirty="0">
+              <a:rPr lang="en-US" sz="1500" dirty="0">
                 <a:solidFill>
                   <a:srgbClr val="A23B22"/>
                 </a:solidFill>
               </a:rPr>
-              <a:t>−  Phải liên kết ngân hàng, lo ngại riêng tư</a:t>
-            </a:r>
-            <a:endParaRPr lang="en-US" sz="1600" dirty="0"/>
+              <a:t>−  Chỉ phục vụ người dùng và ngân hàng tại Mỹ</a:t>
+            </a:r>
+            <a:endParaRPr lang="en-US" sz="1500" dirty="0"/>
           </a:p>
           <a:p>
             <a:pPr indent="0" marL="0">
@@ -8220,14 +11481,14 @@
               <a:buNone/>
             </a:pPr>
             <a:r>
-              <a:rPr lang="en-US" sz="1600" dirty="0">
+              <a:rPr lang="en-US" sz="1500" dirty="0">
                 <a:solidFill>
                   <a:srgbClr val="A23B22"/>
                 </a:solidFill>
               </a:rPr>
-              <a:t>−  Hủy gói hộ cần bản Premium trả phí; hướng tới thị trường Mỹ</a:t>
-            </a:r>
-            <a:endParaRPr lang="en-US" sz="1600" dirty="0"/>
+              <a:t>−  Dịch vụ hủy hộ thuộc gói Premium</a:t>
+            </a:r>
+            <a:endParaRPr lang="en-US" sz="1500" dirty="0"/>
           </a:p>
         </p:txBody>
       </p:sp>
@@ -8334,7 +11595,7 @@
                   <a:srgbClr val="FFD166"/>
                 </a:solidFill>
               </a:rPr>
-              <a:t>Hướng đi của SubTrack: </a:t>
+              <a:t>SubTrack: </a:t>
             </a:r>
             <a:pPr indent="0" marL="0">
               <a:buNone/>
@@ -8345,7 +11606,7 @@
                   <a:schemeClr val="bg1"/>
                 </a:solidFill>
               </a:rPr>
-              <a:t>app Android, giao diện tiếng Việt, VND mặc định, nhập tay không cần liên kết ngân hàng, dữ liệu lưu trên máy, miễn phí.</a:t>
+              <a:t>tập trung vào Android, giao diện tiếng Việt, VND mặc định; nhập dữ liệu thủ công, dùng chức năng cốt lõi ngoại tuyến, không cần liên kết ngân hàng.</a:t>
             </a:r>
             <a:endParaRPr lang="en-US" sz="1600" dirty="0"/>
           </a:p>
@@ -9041,7 +12302,7 @@
       </p:sp>
       <p:sp>
         <p:nvSpPr>
-          <p:cNvPr id="23" name="Thẻ Thống kê chi phí"/>
+          <p:cNvPr id="23" name="Thẻ Ước tính chi phí theo chu kỳ"/>
           <p:cNvSpPr/>
           <p:nvPr/>
         </p:nvSpPr>
@@ -9070,7 +12331,7 @@
       </p:sp>
       <p:sp>
         <p:nvSpPr>
-          <p:cNvPr id="24" name="Thống kê chi phí circle"/>
+          <p:cNvPr id="24" name="Ước tính chi phí theo chu kỳ circle"/>
           <p:cNvSpPr/>
           <p:nvPr/>
         </p:nvSpPr>
@@ -9090,7 +12351,7 @@
       </p:sp>
       <p:pic>
         <p:nvPicPr>
-          <p:cNvPr id="25" name="Thống kê chi phí icon" descr="Thống kê chi phí">    </p:cNvPr>
+          <p:cNvPr id="25" name="Ước tính chi phí theo chu kỳ icon" descr="Ước tính chi phí theo chu kỳ">    </p:cNvPr>
           <p:cNvPicPr>
             <a:picLocks noChangeAspect="1"/>
           </p:cNvPicPr>
@@ -9142,7 +12403,7 @@
                   <a:schemeClr val="tx2"/>
                 </a:solidFill>
               </a:rPr>
-              <a:t>Thống kê chi phí</a:t>
+              <a:t>Ước tính chi phí theo chu kỳ</a:t>
             </a:r>
             <a:endParaRPr lang="en-US" sz="1900" dirty="0"/>
           </a:p>
@@ -9178,7 +12439,7 @@
                   <a:srgbClr val="4A4560"/>
                 </a:solidFill>
               </a:rPr>
-              <a:t>Chi phí tuần/tháng/quý/năm, theo danh mục, gói tốn nhất.</a:t>
+              <a:t>Quy đổi về tuần/tháng/quý/năm, theo gói, danh mục; tách VND, USD, EUR.</a:t>
             </a:r>
             <a:endParaRPr lang="en-US" sz="1500" dirty="0"/>
           </a:p>
@@ -9431,7 +12692,7 @@
                   <a:schemeClr val="tx2"/>
                 </a:solidFill>
               </a:rPr>
-              <a:t>Chức năng mở rộng</a:t>
+              <a:t>Chức năng mở rộng và phạm vi</a:t>
             </a:r>
             <a:endParaRPr lang="en-US" sz="3600" dirty="0"/>
           </a:p>
@@ -9445,8 +12706,8 @@
         </p:nvSpPr>
         <p:spPr>
           <a:xfrm>
-            <a:off x="548640" y="1188720"/>
-            <a:ext cx="6400800" cy="365760"/>
+            <a:off x="548640" y="1325880"/>
+            <a:ext cx="5486400" cy="365760"/>
           </a:xfrm>
           <a:prstGeom prst="rect">
             <a:avLst/>
@@ -9462,26 +12723,26 @@
               <a:buNone/>
             </a:pPr>
             <a:r>
-              <a:rPr lang="en-US" sz="1600" i="1" dirty="0">
-                <a:solidFill>
-                  <a:schemeClr val="accent6"/>
-                </a:solidFill>
-              </a:rPr>
-              <a:t>4/5 chức năng mở rộng đã có trong app</a:t>
-            </a:r>
-            <a:endParaRPr lang="en-US" sz="1600" dirty="0"/>
-          </a:p>
-        </p:txBody>
-      </p:sp>
-      <p:sp>
-        <p:nvSpPr>
-          <p:cNvPr id="4" name="Trạng thái gói  ✓ Đã làm circle"/>
+              <a:rPr lang="en-US" sz="1400" b="1" spc="200" kern="0" dirty="0">
+                <a:solidFill>
+                  <a:schemeClr val="accent1"/>
+                </a:solidFill>
+              </a:rPr>
+              <a:t>ĐÃ CÓ MÃ TRIỂN KHAI</a:t>
+            </a:r>
+            <a:endParaRPr lang="en-US" sz="1400" dirty="0"/>
+          </a:p>
+        </p:txBody>
+      </p:sp>
+      <p:sp>
+        <p:nvSpPr>
+          <p:cNvPr id="4" name="Trạng thái gói circle"/>
           <p:cNvSpPr/>
           <p:nvPr/>
         </p:nvSpPr>
         <p:spPr>
           <a:xfrm>
-            <a:off x="548640" y="1737360"/>
+            <a:off x="548640" y="1828800"/>
             <a:ext cx="640080" cy="640080"/>
           </a:xfrm>
           <a:prstGeom prst="ellipse">
@@ -9495,7 +12756,7 @@
       </p:sp>
       <p:pic>
         <p:nvPicPr>
-          <p:cNvPr id="5" name="Trạng thái gói  ✓ Đã làm icon" descr="Trạng thái gói  ✓ Đã làm">    </p:cNvPr>
+          <p:cNvPr id="5" name="Trạng thái gói icon" descr="Trạng thái gói">    </p:cNvPr>
           <p:cNvPicPr>
             <a:picLocks noChangeAspect="1"/>
           </p:cNvPicPr>
@@ -9509,7 +12770,7 @@
         </p:blipFill>
         <p:spPr>
           <a:xfrm>
-            <a:off x="715061" y="1903781"/>
+            <a:off x="715061" y="1995221"/>
             <a:ext cx="307238" cy="307238"/>
           </a:xfrm>
           <a:prstGeom prst="rect">
@@ -9525,8 +12786,8 @@
         </p:nvSpPr>
         <p:spPr>
           <a:xfrm>
-            <a:off x="1371600" y="1700784"/>
-            <a:ext cx="5120640" cy="365760"/>
+            <a:off x="1371600" y="1792224"/>
+            <a:ext cx="4846320" cy="365760"/>
           </a:xfrm>
           <a:prstGeom prst="rect">
             <a:avLst/>
@@ -9547,7 +12808,7 @@
                   <a:schemeClr val="tx2"/>
                 </a:solidFill>
               </a:rPr>
-              <a:t>Trạng thái gói  ✓ Đã làm</a:t>
+              <a:t>Trạng thái gói</a:t>
             </a:r>
             <a:endParaRPr lang="en-US" sz="1800" dirty="0"/>
           </a:p>
@@ -9561,8 +12822,8 @@
         </p:nvSpPr>
         <p:spPr>
           <a:xfrm>
-            <a:off x="1371600" y="2066544"/>
-            <a:ext cx="5120640" cy="365760"/>
+            <a:off x="1371600" y="2157984"/>
+            <a:ext cx="4846320" cy="365760"/>
           </a:xfrm>
           <a:prstGeom prst="rect">
             <a:avLst/>
@@ -9591,13 +12852,13 @@
       </p:sp>
       <p:sp>
         <p:nvSpPr>
-          <p:cNvPr id="8" name="Biểu đồ chi phí  ✓ Đã làm circle"/>
+          <p:cNvPr id="8" name="Biểu đồ chi phí circle"/>
           <p:cNvSpPr/>
           <p:nvPr/>
         </p:nvSpPr>
         <p:spPr>
           <a:xfrm>
-            <a:off x="548640" y="2633472"/>
+            <a:off x="548640" y="2880360"/>
             <a:ext cx="640080" cy="640080"/>
           </a:xfrm>
           <a:prstGeom prst="ellipse">
@@ -9611,7 +12872,7 @@
       </p:sp>
       <p:pic>
         <p:nvPicPr>
-          <p:cNvPr id="9" name="Biểu đồ chi phí  ✓ Đã làm icon" descr="Biểu đồ chi phí  ✓ Đã làm">    </p:cNvPr>
+          <p:cNvPr id="9" name="Biểu đồ chi phí icon" descr="Biểu đồ chi phí">    </p:cNvPr>
           <p:cNvPicPr>
             <a:picLocks noChangeAspect="1"/>
           </p:cNvPicPr>
@@ -9625,7 +12886,7 @@
         </p:blipFill>
         <p:spPr>
           <a:xfrm>
-            <a:off x="715061" y="2799893"/>
+            <a:off x="715061" y="3046781"/>
             <a:ext cx="307238" cy="307238"/>
           </a:xfrm>
           <a:prstGeom prst="rect">
@@ -9641,8 +12902,8 @@
         </p:nvSpPr>
         <p:spPr>
           <a:xfrm>
-            <a:off x="1371600" y="2596896"/>
-            <a:ext cx="5120640" cy="365760"/>
+            <a:off x="1371600" y="2843784"/>
+            <a:ext cx="4846320" cy="365760"/>
           </a:xfrm>
           <a:prstGeom prst="rect">
             <a:avLst/>
@@ -9663,7 +12924,7 @@
                   <a:schemeClr val="tx2"/>
                 </a:solidFill>
               </a:rPr>
-              <a:t>Biểu đồ chi phí  ✓ Đã làm</a:t>
+              <a:t>Biểu đồ chi phí</a:t>
             </a:r>
             <a:endParaRPr lang="en-US" sz="1800" dirty="0"/>
           </a:p>
@@ -9677,8 +12938,8 @@
         </p:nvSpPr>
         <p:spPr>
           <a:xfrm>
-            <a:off x="1371600" y="2962656"/>
-            <a:ext cx="5120640" cy="365760"/>
+            <a:off x="1371600" y="3209544"/>
+            <a:ext cx="4846320" cy="365760"/>
           </a:xfrm>
           <a:prstGeom prst="rect">
             <a:avLst/>
@@ -9699,7 +12960,7 @@
                   <a:srgbClr val="4A4560"/>
                 </a:solidFill>
               </a:rPr>
-              <a:t>Biểu đồ tròn theo gói, thanh theo danh mục</a:t>
+              <a:t>Biểu đồ tròn theo gói, thanh tỷ trọng theo danh mục</a:t>
             </a:r>
             <a:endParaRPr lang="en-US" sz="1500" dirty="0"/>
           </a:p>
@@ -9707,13 +12968,13 @@
       </p:sp>
       <p:sp>
         <p:nvSpPr>
-          <p:cNvPr id="12" name="Tùy chọn thời gian nhắc  ✓ Đã làm circle"/>
+          <p:cNvPr id="12" name="Tùy chọn thời gian nhắc circle"/>
           <p:cNvSpPr/>
           <p:nvPr/>
         </p:nvSpPr>
         <p:spPr>
           <a:xfrm>
-            <a:off x="548640" y="3529584"/>
+            <a:off x="548640" y="3931920"/>
             <a:ext cx="640080" cy="640080"/>
           </a:xfrm>
           <a:prstGeom prst="ellipse">
@@ -9727,7 +12988,7 @@
       </p:sp>
       <p:pic>
         <p:nvPicPr>
-          <p:cNvPr id="13" name="Tùy chọn thời gian nhắc  ✓ Đã làm icon" descr="Tùy chọn thời gian nhắc  ✓ Đã làm">    </p:cNvPr>
+          <p:cNvPr id="13" name="Tùy chọn thời gian nhắc icon" descr="Tùy chọn thời gian nhắc">    </p:cNvPr>
           <p:cNvPicPr>
             <a:picLocks noChangeAspect="1"/>
           </p:cNvPicPr>
@@ -9741,7 +13002,7 @@
         </p:blipFill>
         <p:spPr>
           <a:xfrm>
-            <a:off x="715061" y="3696005"/>
+            <a:off x="715061" y="4098341"/>
             <a:ext cx="307238" cy="307238"/>
           </a:xfrm>
           <a:prstGeom prst="rect">
@@ -9757,8 +13018,8 @@
         </p:nvSpPr>
         <p:spPr>
           <a:xfrm>
-            <a:off x="1371600" y="3493008"/>
-            <a:ext cx="5120640" cy="365760"/>
+            <a:off x="1371600" y="3895344"/>
+            <a:ext cx="4846320" cy="365760"/>
           </a:xfrm>
           <a:prstGeom prst="rect">
             <a:avLst/>
@@ -9779,7 +13040,7 @@
                   <a:schemeClr val="tx2"/>
                 </a:solidFill>
               </a:rPr>
-              <a:t>Tùy chọn thời gian nhắc  ✓ Đã làm</a:t>
+              <a:t>Tùy chọn thời gian nhắc</a:t>
             </a:r>
             <a:endParaRPr lang="en-US" sz="1800" dirty="0"/>
           </a:p>
@@ -9793,8 +13054,8 @@
         </p:nvSpPr>
         <p:spPr>
           <a:xfrm>
-            <a:off x="1371600" y="3858768"/>
-            <a:ext cx="5120640" cy="365760"/>
+            <a:off x="1371600" y="4261104"/>
+            <a:ext cx="4846320" cy="365760"/>
           </a:xfrm>
           <a:prstGeom prst="rect">
             <a:avLst/>
@@ -9815,7 +13076,7 @@
                   <a:srgbClr val="4A4560"/>
                 </a:solidFill>
               </a:rPr>
-              <a:t>Đúng ngày hoặc trước 1, 3, 7, 30 ngày</a:t>
+              <a:t>Không nhắc, đúng ngày, trước 1/3/7/30 ngày</a:t>
             </a:r>
             <a:endParaRPr lang="en-US" sz="1500" dirty="0"/>
           </a:p>
@@ -9823,13 +13084,13 @@
       </p:sp>
       <p:sp>
         <p:nvSpPr>
-          <p:cNvPr id="16" name="Xuất CSV, chia sẻ báo cáo  ✓ Đã làm circle"/>
+          <p:cNvPr id="16" name="Xuất CSV, chia sẻ báo cáo circle"/>
           <p:cNvSpPr/>
           <p:nvPr/>
         </p:nvSpPr>
         <p:spPr>
           <a:xfrm>
-            <a:off x="548640" y="4425696"/>
+            <a:off x="548640" y="4983480"/>
             <a:ext cx="640080" cy="640080"/>
           </a:xfrm>
           <a:prstGeom prst="ellipse">
@@ -9843,7 +13104,7 @@
       </p:sp>
       <p:pic>
         <p:nvPicPr>
-          <p:cNvPr id="17" name="Xuất CSV, chia sẻ báo cáo  ✓ Đã làm icon" descr="Xuất CSV, chia sẻ báo cáo  ✓ Đã làm">    </p:cNvPr>
+          <p:cNvPr id="17" name="Xuất CSV, chia sẻ báo cáo icon" descr="Xuất CSV, chia sẻ báo cáo">    </p:cNvPr>
           <p:cNvPicPr>
             <a:picLocks noChangeAspect="1"/>
           </p:cNvPicPr>
@@ -9857,7 +13118,7 @@
         </p:blipFill>
         <p:spPr>
           <a:xfrm>
-            <a:off x="715061" y="4592117"/>
+            <a:off x="715061" y="5149901"/>
             <a:ext cx="307238" cy="307238"/>
           </a:xfrm>
           <a:prstGeom prst="rect">
@@ -9873,8 +13134,8 @@
         </p:nvSpPr>
         <p:spPr>
           <a:xfrm>
-            <a:off x="1371600" y="4389120"/>
-            <a:ext cx="5120640" cy="365760"/>
+            <a:off x="1371600" y="4946904"/>
+            <a:ext cx="4846320" cy="365760"/>
           </a:xfrm>
           <a:prstGeom prst="rect">
             <a:avLst/>
@@ -9895,7 +13156,7 @@
                   <a:schemeClr val="tx2"/>
                 </a:solidFill>
               </a:rPr>
-              <a:t>Xuất CSV, chia sẻ báo cáo  ✓ Đã làm</a:t>
+              <a:t>Xuất CSV, chia sẻ báo cáo</a:t>
             </a:r>
             <a:endParaRPr lang="en-US" sz="1800" dirty="0"/>
           </a:p>
@@ -9909,8 +13170,8 @@
         </p:nvSpPr>
         <p:spPr>
           <a:xfrm>
-            <a:off x="1371600" y="4754880"/>
-            <a:ext cx="5120640" cy="365760"/>
+            <a:off x="1371600" y="5312664"/>
+            <a:ext cx="4846320" cy="365760"/>
           </a:xfrm>
           <a:prstGeom prst="rect">
             <a:avLst/>
@@ -9931,7 +13192,7 @@
                   <a:srgbClr val="4A4560"/>
                 </a:solidFill>
               </a:rPr>
-              <a:t>Sao lưu danh sách, gửi báo cáo chi phí</a:t>
+              <a:t>Lưu bản danh sách bên ngoài; chưa nhập lại CSV</a:t>
             </a:r>
             <a:endParaRPr lang="en-US" sz="1500" dirty="0"/>
           </a:p>
@@ -9939,138 +13200,22 @@
       </p:sp>
       <p:sp>
         <p:nvSpPr>
-          <p:cNvPr id="20" name="Đăng nhập, đồng bộ đám mây circle"/>
+          <p:cNvPr id="20" name="Phạm vi Hướng phát triển"/>
           <p:cNvSpPr/>
           <p:nvPr/>
         </p:nvSpPr>
         <p:spPr>
           <a:xfrm>
-            <a:off x="548640" y="5321808"/>
-            <a:ext cx="640080" cy="640080"/>
-          </a:xfrm>
-          <a:prstGeom prst="ellipse">
-            <a:avLst/>
-          </a:prstGeom>
-          <a:solidFill>
-            <a:schemeClr val="accent1"/>
-          </a:solidFill>
-          <a:ln/>
-        </p:spPr>
-      </p:sp>
-      <p:pic>
-        <p:nvPicPr>
-          <p:cNvPr id="21" name="Đăng nhập, đồng bộ đám mây icon" descr="Đăng nhập, đồng bộ đám mây">    </p:cNvPr>
-          <p:cNvPicPr>
-            <a:picLocks noChangeAspect="1"/>
-          </p:cNvPicPr>
-          <p:nvPr/>
-        </p:nvPicPr>
-        <p:blipFill>
-          <a:blip r:embed="rId5"/>
-          <a:stretch>
-            <a:fillRect/>
-          </a:stretch>
-        </p:blipFill>
-        <p:spPr>
-          <a:xfrm>
-            <a:off x="715061" y="5488229"/>
-            <a:ext cx="307238" cy="307238"/>
-          </a:xfrm>
-          <a:prstGeom prst="rect">
-            <a:avLst/>
-          </a:prstGeom>
-        </p:spPr>
-      </p:pic>
-      <p:sp>
-        <p:nvSpPr>
-          <p:cNvPr id="22" name="Text 15"/>
-          <p:cNvSpPr txBox="1"/>
-          <p:nvPr/>
-        </p:nvSpPr>
-        <p:spPr>
-          <a:xfrm>
-            <a:off x="1371600" y="5285232"/>
-            <a:ext cx="5120640" cy="365760"/>
-          </a:xfrm>
-          <a:prstGeom prst="rect">
-            <a:avLst/>
-          </a:prstGeom>
-          <a:noFill/>
-          <a:ln/>
-        </p:spPr>
-        <p:txBody>
-          <a:bodyPr wrap="square" lIns="0" tIns="0" rIns="0" bIns="0" rtlCol="0" anchor="t"/>
-          <a:lstStyle/>
-          <a:p>
-            <a:pPr indent="0" marL="0">
-              <a:buNone/>
-            </a:pPr>
-            <a:r>
-              <a:rPr lang="en-US" sz="1800" b="1" dirty="0">
-                <a:solidFill>
-                  <a:schemeClr val="tx2"/>
-                </a:solidFill>
-              </a:rPr>
-              <a:t>Đăng nhập, đồng bộ đám mây</a:t>
-            </a:r>
-            <a:endParaRPr lang="en-US" sz="1800" dirty="0"/>
-          </a:p>
-        </p:txBody>
-      </p:sp>
-      <p:sp>
-        <p:nvSpPr>
-          <p:cNvPr id="23" name="Text 16"/>
-          <p:cNvSpPr txBox="1"/>
-          <p:nvPr/>
-        </p:nvSpPr>
-        <p:spPr>
-          <a:xfrm>
-            <a:off x="1371600" y="5650992"/>
-            <a:ext cx="5120640" cy="365760"/>
-          </a:xfrm>
-          <a:prstGeom prst="rect">
-            <a:avLst/>
-          </a:prstGeom>
-          <a:noFill/>
-          <a:ln/>
-        </p:spPr>
-        <p:txBody>
-          <a:bodyPr wrap="square" lIns="0" tIns="0" rIns="0" bIns="0" rtlCol="0" anchor="t"/>
-          <a:lstStyle/>
-          <a:p>
-            <a:pPr indent="0" marL="0">
-              <a:buNone/>
-            </a:pPr>
-            <a:r>
-              <a:rPr lang="en-US" sz="1500" dirty="0">
-                <a:solidFill>
-                  <a:srgbClr val="4A4560"/>
-                </a:solidFill>
-              </a:rPr>
-              <a:t>Chưa làm – cần Firebase</a:t>
-            </a:r>
-            <a:endParaRPr lang="en-US" sz="1500" dirty="0"/>
-          </a:p>
-        </p:txBody>
-      </p:sp>
-      <p:sp>
-        <p:nvSpPr>
-          <p:cNvPr id="24" name="Ngoài phạm vi"/>
-          <p:cNvSpPr/>
-          <p:nvPr/>
-        </p:nvSpPr>
-        <p:spPr>
-          <a:xfrm>
-            <a:off x="7040880" y="1737360"/>
-            <a:ext cx="4526280" cy="4343400"/>
+            <a:off x="6583680" y="1325880"/>
+            <a:ext cx="4983480" cy="1417320"/>
           </a:xfrm>
           <a:prstGeom prst="roundRect">
             <a:avLst>
-              <a:gd name="adj" fmla="val 2526"/>
+              <a:gd name="adj" fmla="val 7742"/>
             </a:avLst>
           </a:prstGeom>
           <a:solidFill>
-            <a:srgbClr val="FFEDE7"/>
+            <a:srgbClr val="EDE9FB"/>
           </a:solidFill>
           <a:ln/>
           <a:effectLst>
@@ -10084,58 +13229,115 @@
       </p:sp>
       <p:sp>
         <p:nvSpPr>
-          <p:cNvPr id="25" name="Ngoài phạm vi circle"/>
+          <p:cNvPr id="21" name="Text 15"/>
+          <p:cNvSpPr txBox="1"/>
+          <p:nvPr/>
+        </p:nvSpPr>
+        <p:spPr>
+          <a:xfrm>
+            <a:off x="6812280" y="1490472"/>
+            <a:ext cx="4572000" cy="365760"/>
+          </a:xfrm>
+          <a:prstGeom prst="rect">
+            <a:avLst/>
+          </a:prstGeom>
+          <a:noFill/>
+          <a:ln/>
+        </p:spPr>
+        <p:txBody>
+          <a:bodyPr wrap="square" lIns="0" tIns="0" rIns="0" bIns="0" rtlCol="0" anchor="t"/>
+          <a:lstStyle/>
+          <a:p>
+            <a:pPr indent="0" marL="0">
+              <a:buNone/>
+            </a:pPr>
+            <a:r>
+              <a:rPr lang="en-US" sz="1700" b="1" dirty="0">
+                <a:solidFill>
+                  <a:srgbClr val="3D2C78"/>
+                </a:solidFill>
+              </a:rPr>
+              <a:t>Hướng phát triển</a:t>
+            </a:r>
+            <a:endParaRPr lang="en-US" sz="1700" dirty="0"/>
+          </a:p>
+        </p:txBody>
+      </p:sp>
+      <p:sp>
+        <p:nvSpPr>
+          <p:cNvPr id="22" name="Text 16"/>
+          <p:cNvSpPr txBox="1"/>
+          <p:nvPr/>
+        </p:nvSpPr>
+        <p:spPr>
+          <a:xfrm>
+            <a:off x="6812280" y="1892808"/>
+            <a:ext cx="4572000" cy="731520"/>
+          </a:xfrm>
+          <a:prstGeom prst="rect">
+            <a:avLst/>
+          </a:prstGeom>
+          <a:noFill/>
+          <a:ln/>
+        </p:spPr>
+        <p:txBody>
+          <a:bodyPr wrap="square" lIns="0" tIns="0" rIns="0" bIns="0" rtlCol="0" anchor="t"/>
+          <a:lstStyle/>
+          <a:p>
+            <a:pPr indent="0" marL="0">
+              <a:buNone/>
+            </a:pPr>
+            <a:r>
+              <a:rPr lang="en-US" sz="1500" dirty="0">
+                <a:solidFill>
+                  <a:srgbClr val="3D2C78"/>
+                </a:solidFill>
+              </a:rPr>
+              <a:t>Tài khoản và đồng bộ đa thiết bị (có thể xem xét Firebase)</a:t>
+            </a:r>
+            <a:endParaRPr lang="en-US" sz="1500" dirty="0"/>
+          </a:p>
+        </p:txBody>
+      </p:sp>
+      <p:sp>
+        <p:nvSpPr>
+          <p:cNvPr id="23" name="Phạm vi Chưa có ở phiên bản hiện tại"/>
           <p:cNvSpPr/>
           <p:nvPr/>
         </p:nvSpPr>
         <p:spPr>
           <a:xfrm>
-            <a:off x="7315200" y="1965960"/>
-            <a:ext cx="548640" cy="548640"/>
-          </a:xfrm>
-          <a:prstGeom prst="ellipse">
-            <a:avLst/>
+            <a:off x="6583680" y="2926080"/>
+            <a:ext cx="4983480" cy="1417320"/>
+          </a:xfrm>
+          <a:prstGeom prst="roundRect">
+            <a:avLst>
+              <a:gd name="adj" fmla="val 7742"/>
+            </a:avLst>
           </a:prstGeom>
           <a:solidFill>
-            <a:schemeClr val="accent2"/>
+            <a:srgbClr val="FFF6D6"/>
           </a:solidFill>
           <a:ln/>
-        </p:spPr>
-      </p:sp>
-      <p:pic>
-        <p:nvPicPr>
-          <p:cNvPr id="26" name="Ngoài phạm vi icon" descr="Ngoài phạm vi">    </p:cNvPr>
-          <p:cNvPicPr>
-            <a:picLocks noChangeAspect="1"/>
-          </p:cNvPicPr>
-          <p:nvPr/>
-        </p:nvPicPr>
-        <p:blipFill>
-          <a:blip r:embed="rId6"/>
-          <a:stretch>
-            <a:fillRect/>
-          </a:stretch>
-        </p:blipFill>
-        <p:spPr>
-          <a:xfrm>
-            <a:off x="7457846" y="2108606"/>
-            <a:ext cx="263347" cy="263347"/>
-          </a:xfrm>
-          <a:prstGeom prst="rect">
-            <a:avLst/>
-          </a:prstGeom>
-        </p:spPr>
-      </p:pic>
-      <p:sp>
-        <p:nvSpPr>
-          <p:cNvPr id="27" name="Text 19"/>
+          <a:effectLst>
+            <a:outerShdw sx="100000" sy="100000" kx="0" ky="0" algn="bl" rotWithShape="0" blurRad="101600" dist="25400" dir="5400000">
+              <a:srgbClr val="2B1B5A">
+                <a:alpha val="12000"/>
+              </a:srgbClr>
+            </a:outerShdw>
+          </a:effectLst>
+        </p:spPr>
+      </p:sp>
+      <p:sp>
+        <p:nvSpPr>
+          <p:cNvPr id="24" name="Text 18"/>
           <p:cNvSpPr txBox="1"/>
           <p:nvPr/>
         </p:nvSpPr>
         <p:spPr>
           <a:xfrm>
-            <a:off x="8001000" y="1965960"/>
-            <a:ext cx="3383280" cy="548640"/>
+            <a:off x="6812280" y="3090672"/>
+            <a:ext cx="4572000" cy="365760"/>
           </a:xfrm>
           <a:prstGeom prst="rect">
             <a:avLst/>
@@ -10144,34 +13346,135 @@
           <a:ln/>
         </p:spPr>
         <p:txBody>
-          <a:bodyPr wrap="square" lIns="0" tIns="0" rIns="0" bIns="0" rtlCol="0" anchor="ctr"/>
+          <a:bodyPr wrap="square" lIns="0" tIns="0" rIns="0" bIns="0" rtlCol="0" anchor="t"/>
           <a:lstStyle/>
           <a:p>
             <a:pPr indent="0" marL="0">
               <a:buNone/>
             </a:pPr>
             <a:r>
-              <a:rPr lang="en-US" sz="1800" b="1" dirty="0">
+              <a:rPr lang="en-US" sz="1700" b="1" dirty="0">
+                <a:solidFill>
+                  <a:srgbClr val="6B4E00"/>
+                </a:solidFill>
+              </a:rPr>
+              <a:t>Chưa có ở phiên bản hiện tại</a:t>
+            </a:r>
+            <a:endParaRPr lang="en-US" sz="1700" dirty="0"/>
+          </a:p>
+        </p:txBody>
+      </p:sp>
+      <p:sp>
+        <p:nvSpPr>
+          <p:cNvPr id="25" name="Text 19"/>
+          <p:cNvSpPr txBox="1"/>
+          <p:nvPr/>
+        </p:nvSpPr>
+        <p:spPr>
+          <a:xfrm>
+            <a:off x="6812280" y="3493008"/>
+            <a:ext cx="4572000" cy="731520"/>
+          </a:xfrm>
+          <a:prstGeom prst="rect">
+            <a:avLst/>
+          </a:prstGeom>
+          <a:noFill/>
+          <a:ln/>
+        </p:spPr>
+        <p:txBody>
+          <a:bodyPr wrap="square" lIns="0" tIns="0" rIns="0" bIns="0" rtlCol="0" anchor="t"/>
+          <a:lstStyle/>
+          <a:p>
+            <a:pPr indent="0" marL="0">
+              <a:buNone/>
+            </a:pPr>
+            <a:r>
+              <a:rPr lang="en-US" sz="1500" dirty="0">
+                <a:solidFill>
+                  <a:srgbClr val="6B4E00"/>
+                </a:solidFill>
+              </a:rPr>
+              <a:t>Nhập lại dữ liệu, quy đổi tỷ giá, tự tạo nền tảng, quản lý thành viên và chia tiền</a:t>
+            </a:r>
+            <a:endParaRPr lang="en-US" sz="1500" dirty="0"/>
+          </a:p>
+        </p:txBody>
+      </p:sp>
+      <p:sp>
+        <p:nvSpPr>
+          <p:cNvPr id="26" name="Phạm vi Ngoài phạm vi môn học"/>
+          <p:cNvSpPr/>
+          <p:nvPr/>
+        </p:nvSpPr>
+        <p:spPr>
+          <a:xfrm>
+            <a:off x="6583680" y="4526280"/>
+            <a:ext cx="4983480" cy="1417320"/>
+          </a:xfrm>
+          <a:prstGeom prst="roundRect">
+            <a:avLst>
+              <a:gd name="adj" fmla="val 7742"/>
+            </a:avLst>
+          </a:prstGeom>
+          <a:solidFill>
+            <a:srgbClr val="FFEDE7"/>
+          </a:solidFill>
+          <a:ln/>
+          <a:effectLst>
+            <a:outerShdw sx="100000" sy="100000" kx="0" ky="0" algn="bl" rotWithShape="0" blurRad="101600" dist="25400" dir="5400000">
+              <a:srgbClr val="2B1B5A">
+                <a:alpha val="12000"/>
+              </a:srgbClr>
+            </a:outerShdw>
+          </a:effectLst>
+        </p:spPr>
+      </p:sp>
+      <p:sp>
+        <p:nvSpPr>
+          <p:cNvPr id="27" name="Text 21"/>
+          <p:cNvSpPr txBox="1"/>
+          <p:nvPr/>
+        </p:nvSpPr>
+        <p:spPr>
+          <a:xfrm>
+            <a:off x="6812280" y="4690872"/>
+            <a:ext cx="4572000" cy="365760"/>
+          </a:xfrm>
+          <a:prstGeom prst="rect">
+            <a:avLst/>
+          </a:prstGeom>
+          <a:noFill/>
+          <a:ln/>
+        </p:spPr>
+        <p:txBody>
+          <a:bodyPr wrap="square" lIns="0" tIns="0" rIns="0" bIns="0" rtlCol="0" anchor="t"/>
+          <a:lstStyle/>
+          <a:p>
+            <a:pPr indent="0" marL="0">
+              <a:buNone/>
+            </a:pPr>
+            <a:r>
+              <a:rPr lang="en-US" sz="1700" b="1" dirty="0">
                 <a:solidFill>
                   <a:srgbClr val="7A2E1C"/>
                 </a:solidFill>
               </a:rPr>
-              <a:t>Không làm trong phạm vi môn học</a:t>
-            </a:r>
-            <a:endParaRPr lang="en-US" sz="1800" dirty="0"/>
-          </a:p>
-        </p:txBody>
-      </p:sp>
-      <p:sp>
-        <p:nvSpPr>
-          <p:cNvPr id="28" name="Text 20"/>
+              <a:t>Ngoài phạm vi môn học</a:t>
+            </a:r>
+            <a:endParaRPr lang="en-US" sz="1700" dirty="0"/>
+          </a:p>
+        </p:txBody>
+      </p:sp>
+      <p:sp>
+        <p:nvSpPr>
+          <p:cNvPr id="28" name="Text 22"/>
           <p:cNvSpPr txBox="1"/>
           <p:nvPr/>
         </p:nvSpPr>
         <p:spPr>
           <a:xfrm>
-            <a:off x="7315200" y="2743200"/>
-            <a:ext cx="4023360" cy="3108960"/>
+            <a:off x="6812280" y="5093208"/>
+            <a:ext cx="4572000" cy="731520"/>
           </a:xfrm>
           <a:prstGeom prst="rect">
             <a:avLst/>
@@ -10183,71 +13486,16 @@
           <a:bodyPr wrap="square" lIns="0" tIns="0" rIns="0" bIns="0" rtlCol="0" anchor="t"/>
           <a:lstStyle/>
           <a:p>
-            <a:pPr marL="342900" indent="-342900">
-              <a:spcAft>
-                <a:spcPts val="1000"/>
-              </a:spcAft>
-              <a:buSzPct val="100000"/>
-              <a:buChar char="•"/>
+            <a:pPr indent="0" marL="0">
+              <a:buNone/>
             </a:pPr>
             <a:r>
               <a:rPr lang="en-US" sz="1500" dirty="0">
                 <a:solidFill>
-                  <a:srgbClr val="5A2A1F"/>
-                </a:solidFill>
-              </a:rPr>
-              <a:t>Thanh toán thật, lưu thông tin thẻ ngân hàng</a:t>
-            </a:r>
-            <a:endParaRPr lang="en-US" sz="1500" dirty="0"/>
-          </a:p>
-          <a:p>
-            <a:pPr marL="342900" indent="-342900">
-              <a:spcAft>
-                <a:spcPts val="1000"/>
-              </a:spcAft>
-              <a:buSzPct val="100000"/>
-              <a:buChar char="•"/>
-            </a:pPr>
-            <a:r>
-              <a:rPr lang="en-US" sz="1500" dirty="0">
-                <a:solidFill>
-                  <a:srgbClr val="5A2A1F"/>
-                </a:solidFill>
-              </a:rPr>
-              <a:t>Tự đọc giao dịch ngân hàng hoặc email</a:t>
-            </a:r>
-            <a:endParaRPr lang="en-US" sz="1500" dirty="0"/>
-          </a:p>
-          <a:p>
-            <a:pPr marL="342900" indent="-342900">
-              <a:spcAft>
-                <a:spcPts val="1000"/>
-              </a:spcAft>
-              <a:buSzPct val="100000"/>
-              <a:buChar char="•"/>
-            </a:pPr>
-            <a:r>
-              <a:rPr lang="en-US" sz="1500" dirty="0">
-                <a:solidFill>
-                  <a:srgbClr val="5A2A1F"/>
-                </a:solidFill>
-              </a:rPr>
-              <a:t>AI, đồng bộ đa thiết bị, hệ thống quản trị phức tạp</a:t>
-            </a:r>
-            <a:endParaRPr lang="en-US" sz="1500" dirty="0"/>
-          </a:p>
-          <a:p>
-            <a:pPr marL="342900" indent="-342900">
-              <a:buSzPct val="100000"/>
-              <a:buChar char="•"/>
-            </a:pPr>
-            <a:r>
-              <a:rPr lang="en-US" sz="1500" dirty="0">
-                <a:solidFill>
-                  <a:srgbClr val="5A2A1F"/>
-                </a:solidFill>
-              </a:rPr>
-              <a:t>Phụ thuộc API bên thứ ba cho chức năng cốt lõi</a:t>
+                  <a:srgbClr val="7A2E1C"/>
+                </a:solidFill>
+              </a:rPr>
+              <a:t>Thanh toán thật, lưu thẻ, tự đọc ngân hàng/email, tự hủy gói tại nhà cung cấp</a:t>
             </a:r>
             <a:endParaRPr lang="en-US" sz="1500" dirty="0"/>
           </a:p>
@@ -10355,7 +13603,7 @@
                   <a:schemeClr val="tx2"/>
                 </a:solidFill>
               </a:rPr>
-              <a:t>Sơ đồ Use Case</a:t>
+              <a:t>Use Case – Quản lý gói và báo cáo</a:t>
             </a:r>
             <a:endParaRPr lang="en-US" sz="3600" dirty="0"/>
           </a:p>
@@ -10363,7 +13611,7 @@
       </p:sp>
       <p:pic>
         <p:nvPicPr>
-          <p:cNvPr id="3" name="Sơ đồ Use Case" descr="Sơ đồ Use Case tổng quát của SubTrack">    </p:cNvPr>
+          <p:cNvPr id="3" name="Sơ đồ Use Case phần quản lý gói và báo cáo" descr="Sơ đồ Use Case phần quản lý gói và báo cáo">    </p:cNvPr>
           <p:cNvPicPr>
             <a:picLocks noChangeAspect="1"/>
           </p:cNvPicPr>
@@ -10377,8 +13625,8 @@
         </p:blipFill>
         <p:spPr>
           <a:xfrm>
-            <a:off x="548640" y="1280160"/>
-            <a:ext cx="6949440" cy="5184648"/>
+            <a:off x="1463040" y="1188720"/>
+            <a:ext cx="9262872" cy="4937760"/>
           </a:xfrm>
           <a:prstGeom prst="rect">
             <a:avLst/>
@@ -10387,43 +13635,14 @@
       </p:pic>
       <p:sp>
         <p:nvSpPr>
-          <p:cNvPr id="4" name="Số liệu tác nhân"/>
-          <p:cNvSpPr/>
-          <p:nvPr/>
-        </p:nvSpPr>
-        <p:spPr>
-          <a:xfrm>
-            <a:off x="7863840" y="1371600"/>
-            <a:ext cx="3749040" cy="1280160"/>
-          </a:xfrm>
-          <a:prstGeom prst="roundRect">
-            <a:avLst>
-              <a:gd name="adj" fmla="val 8571"/>
-            </a:avLst>
-          </a:prstGeom>
-          <a:solidFill>
-            <a:schemeClr val="bg2"/>
-          </a:solidFill>
-          <a:ln/>
-          <a:effectLst>
-            <a:outerShdw sx="100000" sy="100000" kx="0" ky="0" algn="bl" rotWithShape="0" blurRad="101600" dist="25400" dir="5400000">
-              <a:srgbClr val="2B1B5A">
-                <a:alpha val="12000"/>
-              </a:srgbClr>
-            </a:outerShdw>
-          </a:effectLst>
-        </p:spPr>
-      </p:sp>
-      <p:sp>
-        <p:nvSpPr>
-          <p:cNvPr id="5" name="Text 2"/>
+          <p:cNvPr id="4" name="Text 1"/>
           <p:cNvSpPr txBox="1"/>
           <p:nvPr/>
         </p:nvSpPr>
         <p:spPr>
           <a:xfrm>
-            <a:off x="8092440" y="1371600"/>
-            <a:ext cx="822960" cy="1280160"/>
+            <a:off x="548640" y="6217920"/>
+            <a:ext cx="10424160" cy="365760"/>
           </a:xfrm>
           <a:prstGeom prst="rect">
             <a:avLst/>
@@ -10432,412 +13651,21 @@
           <a:ln/>
         </p:spPr>
         <p:txBody>
-          <a:bodyPr wrap="square" lIns="0" tIns="0" rIns="0" bIns="0" rtlCol="0" anchor="ctr"/>
+          <a:bodyPr wrap="square" lIns="0" tIns="0" rIns="0" bIns="0" rtlCol="0" anchor="t"/>
           <a:lstStyle/>
           <a:p>
             <a:pPr indent="0" marL="0">
               <a:buNone/>
             </a:pPr>
             <a:r>
-              <a:rPr lang="en-US" sz="4400" b="1" dirty="0">
-                <a:solidFill>
-                  <a:schemeClr val="accent1"/>
-                </a:solidFill>
-                <a:latin typeface="Cambria" pitchFamily="34" charset="0"/>
-                <a:ea typeface="Cambria" pitchFamily="34" charset="-122"/>
-                <a:cs typeface="Cambria" pitchFamily="34" charset="-120"/>
-              </a:rPr>
-              <a:t>3</a:t>
-            </a:r>
-            <a:endParaRPr lang="en-US" sz="4400" dirty="0"/>
-          </a:p>
-        </p:txBody>
-      </p:sp>
-      <p:sp>
-        <p:nvSpPr>
-          <p:cNvPr id="6" name="Text 3"/>
-          <p:cNvSpPr txBox="1"/>
-          <p:nvPr/>
-        </p:nvSpPr>
-        <p:spPr>
-          <a:xfrm>
-            <a:off x="8961120" y="1554480"/>
-            <a:ext cx="2514600" cy="365760"/>
-          </a:xfrm>
-          <a:prstGeom prst="rect">
-            <a:avLst/>
-          </a:prstGeom>
-          <a:noFill/>
-          <a:ln/>
-        </p:spPr>
-        <p:txBody>
-          <a:bodyPr wrap="square" lIns="0" tIns="0" rIns="0" bIns="0" rtlCol="0" anchor="t"/>
-          <a:lstStyle/>
-          <a:p>
-            <a:pPr indent="0" marL="0">
-              <a:buNone/>
-            </a:pPr>
-            <a:r>
-              <a:rPr lang="en-US" sz="1800" b="1" dirty="0">
-                <a:solidFill>
-                  <a:schemeClr val="tx2"/>
-                </a:solidFill>
-              </a:rPr>
-              <a:t>tác nhân</a:t>
-            </a:r>
-            <a:endParaRPr lang="en-US" sz="1800" dirty="0"/>
-          </a:p>
-        </p:txBody>
-      </p:sp>
-      <p:sp>
-        <p:nvSpPr>
-          <p:cNvPr id="7" name="Text 4"/>
-          <p:cNvSpPr txBox="1"/>
-          <p:nvPr/>
-        </p:nvSpPr>
-        <p:spPr>
-          <a:xfrm>
-            <a:off x="8961120" y="1920240"/>
-            <a:ext cx="2514600" cy="640080"/>
-          </a:xfrm>
-          <a:prstGeom prst="rect">
-            <a:avLst/>
-          </a:prstGeom>
-          <a:noFill/>
-          <a:ln/>
-        </p:spPr>
-        <p:txBody>
-          <a:bodyPr wrap="square" lIns="0" tIns="0" rIns="0" bIns="0" rtlCol="0" anchor="t"/>
-          <a:lstStyle/>
-          <a:p>
-            <a:pPr indent="0" marL="0">
-              <a:buNone/>
-            </a:pPr>
-            <a:r>
-              <a:rPr lang="en-US" sz="1400" dirty="0">
-                <a:solidFill>
-                  <a:srgbClr val="4A4560"/>
-                </a:solidFill>
-              </a:rPr>
-              <a:t>Người dùng, Hệ thống thông báo, Ứng dụng Lịch</a:t>
-            </a:r>
-            <a:endParaRPr lang="en-US" sz="1400" dirty="0"/>
-          </a:p>
-        </p:txBody>
-      </p:sp>
-      <p:sp>
-        <p:nvSpPr>
-          <p:cNvPr id="8" name="Số liệu use case đã làm"/>
-          <p:cNvSpPr/>
-          <p:nvPr/>
-        </p:nvSpPr>
-        <p:spPr>
-          <a:xfrm>
-            <a:off x="7863840" y="2834640"/>
-            <a:ext cx="3749040" cy="1280160"/>
-          </a:xfrm>
-          <a:prstGeom prst="roundRect">
-            <a:avLst>
-              <a:gd name="adj" fmla="val 8571"/>
-            </a:avLst>
-          </a:prstGeom>
-          <a:solidFill>
-            <a:schemeClr val="bg2"/>
-          </a:solidFill>
-          <a:ln/>
-          <a:effectLst>
-            <a:outerShdw sx="100000" sy="100000" kx="0" ky="0" algn="bl" rotWithShape="0" blurRad="101600" dist="25400" dir="5400000">
-              <a:srgbClr val="2B1B5A">
-                <a:alpha val="12000"/>
-              </a:srgbClr>
-            </a:outerShdw>
-          </a:effectLst>
-        </p:spPr>
-      </p:sp>
-      <p:sp>
-        <p:nvSpPr>
-          <p:cNvPr id="9" name="Text 6"/>
-          <p:cNvSpPr txBox="1"/>
-          <p:nvPr/>
-        </p:nvSpPr>
-        <p:spPr>
-          <a:xfrm>
-            <a:off x="8092440" y="2834640"/>
-            <a:ext cx="822960" cy="1280160"/>
-          </a:xfrm>
-          <a:prstGeom prst="rect">
-            <a:avLst/>
-          </a:prstGeom>
-          <a:noFill/>
-          <a:ln/>
-        </p:spPr>
-        <p:txBody>
-          <a:bodyPr wrap="square" lIns="0" tIns="0" rIns="0" bIns="0" rtlCol="0" anchor="ctr"/>
-          <a:lstStyle/>
-          <a:p>
-            <a:pPr indent="0" marL="0">
-              <a:buNone/>
-            </a:pPr>
-            <a:r>
-              <a:rPr lang="en-US" sz="4400" b="1" dirty="0">
-                <a:solidFill>
-                  <a:schemeClr val="accent1"/>
-                </a:solidFill>
-                <a:latin typeface="Cambria" pitchFamily="34" charset="0"/>
-                <a:ea typeface="Cambria" pitchFamily="34" charset="-122"/>
-                <a:cs typeface="Cambria" pitchFamily="34" charset="-120"/>
-              </a:rPr>
-              <a:t>14</a:t>
-            </a:r>
-            <a:endParaRPr lang="en-US" sz="4400" dirty="0"/>
-          </a:p>
-        </p:txBody>
-      </p:sp>
-      <p:sp>
-        <p:nvSpPr>
-          <p:cNvPr id="10" name="Text 7"/>
-          <p:cNvSpPr txBox="1"/>
-          <p:nvPr/>
-        </p:nvSpPr>
-        <p:spPr>
-          <a:xfrm>
-            <a:off x="8961120" y="3017520"/>
-            <a:ext cx="2514600" cy="365760"/>
-          </a:xfrm>
-          <a:prstGeom prst="rect">
-            <a:avLst/>
-          </a:prstGeom>
-          <a:noFill/>
-          <a:ln/>
-        </p:spPr>
-        <p:txBody>
-          <a:bodyPr wrap="square" lIns="0" tIns="0" rIns="0" bIns="0" rtlCol="0" anchor="t"/>
-          <a:lstStyle/>
-          <a:p>
-            <a:pPr indent="0" marL="0">
-              <a:buNone/>
-            </a:pPr>
-            <a:r>
-              <a:rPr lang="en-US" sz="1800" b="1" dirty="0">
-                <a:solidFill>
-                  <a:schemeClr val="tx2"/>
-                </a:solidFill>
-              </a:rPr>
-              <a:t>use case đã làm</a:t>
-            </a:r>
-            <a:endParaRPr lang="en-US" sz="1800" dirty="0"/>
-          </a:p>
-        </p:txBody>
-      </p:sp>
-      <p:sp>
-        <p:nvSpPr>
-          <p:cNvPr id="11" name="Text 8"/>
-          <p:cNvSpPr txBox="1"/>
-          <p:nvPr/>
-        </p:nvSpPr>
-        <p:spPr>
-          <a:xfrm>
-            <a:off x="8961120" y="3383280"/>
-            <a:ext cx="2514600" cy="640080"/>
-          </a:xfrm>
-          <a:prstGeom prst="rect">
-            <a:avLst/>
-          </a:prstGeom>
-          <a:noFill/>
-          <a:ln/>
-        </p:spPr>
-        <p:txBody>
-          <a:bodyPr wrap="square" lIns="0" tIns="0" rIns="0" bIns="0" rtlCol="0" anchor="t"/>
-          <a:lstStyle/>
-          <a:p>
-            <a:pPr indent="0" marL="0">
-              <a:buNone/>
-            </a:pPr>
-            <a:r>
-              <a:rPr lang="en-US" sz="1400" dirty="0">
-                <a:solidFill>
-                  <a:srgbClr val="4A4560"/>
-                </a:solidFill>
-              </a:rPr>
-              <a:t>CRUD, tổng quan, tìm kiếm, báo cáo, tag, nhắc hạn, CSV</a:t>
-            </a:r>
-            <a:endParaRPr lang="en-US" sz="1400" dirty="0"/>
-          </a:p>
-        </p:txBody>
-      </p:sp>
-      <p:sp>
-        <p:nvSpPr>
-          <p:cNvPr id="12" name="Số liệu hướng phát triển"/>
-          <p:cNvSpPr/>
-          <p:nvPr/>
-        </p:nvSpPr>
-        <p:spPr>
-          <a:xfrm>
-            <a:off x="7863840" y="4297680"/>
-            <a:ext cx="3749040" cy="1280160"/>
-          </a:xfrm>
-          <a:prstGeom prst="roundRect">
-            <a:avLst>
-              <a:gd name="adj" fmla="val 8571"/>
-            </a:avLst>
-          </a:prstGeom>
-          <a:solidFill>
-            <a:schemeClr val="bg2"/>
-          </a:solidFill>
-          <a:ln/>
-          <a:effectLst>
-            <a:outerShdw sx="100000" sy="100000" kx="0" ky="0" algn="bl" rotWithShape="0" blurRad="101600" dist="25400" dir="5400000">
-              <a:srgbClr val="2B1B5A">
-                <a:alpha val="12000"/>
-              </a:srgbClr>
-            </a:outerShdw>
-          </a:effectLst>
-        </p:spPr>
-      </p:sp>
-      <p:sp>
-        <p:nvSpPr>
-          <p:cNvPr id="13" name="Text 10"/>
-          <p:cNvSpPr txBox="1"/>
-          <p:nvPr/>
-        </p:nvSpPr>
-        <p:spPr>
-          <a:xfrm>
-            <a:off x="8092440" y="4297680"/>
-            <a:ext cx="822960" cy="1280160"/>
-          </a:xfrm>
-          <a:prstGeom prst="rect">
-            <a:avLst/>
-          </a:prstGeom>
-          <a:noFill/>
-          <a:ln/>
-        </p:spPr>
-        <p:txBody>
-          <a:bodyPr wrap="square" lIns="0" tIns="0" rIns="0" bIns="0" rtlCol="0" anchor="ctr"/>
-          <a:lstStyle/>
-          <a:p>
-            <a:pPr indent="0" marL="0">
-              <a:buNone/>
-            </a:pPr>
-            <a:r>
-              <a:rPr lang="en-US" sz="4400" b="1" dirty="0">
-                <a:solidFill>
-                  <a:schemeClr val="accent1"/>
-                </a:solidFill>
-                <a:latin typeface="Cambria" pitchFamily="34" charset="0"/>
-                <a:ea typeface="Cambria" pitchFamily="34" charset="-122"/>
-                <a:cs typeface="Cambria" pitchFamily="34" charset="-120"/>
-              </a:rPr>
-              <a:t>1</a:t>
-            </a:r>
-            <a:endParaRPr lang="en-US" sz="4400" dirty="0"/>
-          </a:p>
-        </p:txBody>
-      </p:sp>
-      <p:sp>
-        <p:nvSpPr>
-          <p:cNvPr id="14" name="Text 11"/>
-          <p:cNvSpPr txBox="1"/>
-          <p:nvPr/>
-        </p:nvSpPr>
-        <p:spPr>
-          <a:xfrm>
-            <a:off x="8961120" y="4480560"/>
-            <a:ext cx="2514600" cy="365760"/>
-          </a:xfrm>
-          <a:prstGeom prst="rect">
-            <a:avLst/>
-          </a:prstGeom>
-          <a:noFill/>
-          <a:ln/>
-        </p:spPr>
-        <p:txBody>
-          <a:bodyPr wrap="square" lIns="0" tIns="0" rIns="0" bIns="0" rtlCol="0" anchor="t"/>
-          <a:lstStyle/>
-          <a:p>
-            <a:pPr indent="0" marL="0">
-              <a:buNone/>
-            </a:pPr>
-            <a:r>
-              <a:rPr lang="en-US" sz="1800" b="1" dirty="0">
-                <a:solidFill>
-                  <a:schemeClr val="tx2"/>
-                </a:solidFill>
-              </a:rPr>
-              <a:t>hướng phát triển</a:t>
-            </a:r>
-            <a:endParaRPr lang="en-US" sz="1800" dirty="0"/>
-          </a:p>
-        </p:txBody>
-      </p:sp>
-      <p:sp>
-        <p:nvSpPr>
-          <p:cNvPr id="15" name="Text 12"/>
-          <p:cNvSpPr txBox="1"/>
-          <p:nvPr/>
-        </p:nvSpPr>
-        <p:spPr>
-          <a:xfrm>
-            <a:off x="8961120" y="4846320"/>
-            <a:ext cx="2514600" cy="640080"/>
-          </a:xfrm>
-          <a:prstGeom prst="rect">
-            <a:avLst/>
-          </a:prstGeom>
-          <a:noFill/>
-          <a:ln/>
-        </p:spPr>
-        <p:txBody>
-          <a:bodyPr wrap="square" lIns="0" tIns="0" rIns="0" bIns="0" rtlCol="0" anchor="t"/>
-          <a:lstStyle/>
-          <a:p>
-            <a:pPr indent="0" marL="0">
-              <a:buNone/>
-            </a:pPr>
-            <a:r>
-              <a:rPr lang="en-US" sz="1400" dirty="0">
-                <a:solidFill>
-                  <a:srgbClr val="4A4560"/>
-                </a:solidFill>
-              </a:rPr>
-              <a:t>Đăng nhập, đồng bộ đám mây</a:t>
-            </a:r>
-            <a:endParaRPr lang="en-US" sz="1400" dirty="0"/>
-          </a:p>
-        </p:txBody>
-      </p:sp>
-      <p:sp>
-        <p:nvSpPr>
-          <p:cNvPr id="16" name="Text 13"/>
-          <p:cNvSpPr txBox="1"/>
-          <p:nvPr/>
-        </p:nvSpPr>
-        <p:spPr>
-          <a:xfrm>
-            <a:off x="7863840" y="5852160"/>
-            <a:ext cx="3749040" cy="365760"/>
-          </a:xfrm>
-          <a:prstGeom prst="rect">
-            <a:avLst/>
-          </a:prstGeom>
-          <a:noFill/>
-          <a:ln/>
-        </p:spPr>
-        <p:txBody>
-          <a:bodyPr wrap="square" lIns="0" tIns="0" rIns="0" bIns="0" rtlCol="0" anchor="t"/>
-          <a:lstStyle/>
-          <a:p>
-            <a:pPr indent="0" marL="0">
-              <a:buNone/>
-            </a:pPr>
-            <a:r>
-              <a:rPr lang="en-US" sz="1300" i="1" dirty="0">
+              <a:rPr lang="en-US" sz="1200" i="1" dirty="0">
                 <a:solidFill>
                   <a:srgbClr val="6E6888"/>
                 </a:solidFill>
               </a:rPr>
-              <a:t>Đặc tả chi tiết: file UseCase_SubTrack.docx</a:t>
-            </a:r>
-            <a:endParaRPr lang="en-US" sz="1300" dirty="0"/>
+              <a:t>UC01–UC07 cùng UC12 (kiểm tra dữ liệu, include khi thêm và khi lưu chỉnh sửa) và UC13 (đổi trạng thái, extend UC03). Đặc tả chi tiết: UseCase_SubTrack.docx.</a:t>
+            </a:r>
+            <a:endParaRPr lang="en-US" sz="1200" dirty="0"/>
           </a:p>
         </p:txBody>
       </p:sp>
@@ -10943,123 +13771,15 @@
                   <a:schemeClr val="tx2"/>
                 </a:solidFill>
               </a:rPr>
-              <a:t>Công nghệ sử dụng</a:t>
+              <a:t>Use Case – Nhắc hạn và tích hợp</a:t>
             </a:r>
             <a:endParaRPr lang="en-US" sz="3600" dirty="0"/>
-          </a:p>
-        </p:txBody>
-      </p:sp>
-      <p:sp>
-        <p:nvSpPr>
-          <p:cNvPr id="3" name="Text 1"/>
-          <p:cNvSpPr txBox="1"/>
-          <p:nvPr/>
-        </p:nvSpPr>
-        <p:spPr>
-          <a:xfrm>
-            <a:off x="548640" y="1371600"/>
-            <a:ext cx="4114800" cy="365760"/>
-          </a:xfrm>
-          <a:prstGeom prst="rect">
-            <a:avLst/>
-          </a:prstGeom>
-          <a:noFill/>
-          <a:ln/>
-        </p:spPr>
-        <p:txBody>
-          <a:bodyPr wrap="square" lIns="0" tIns="0" rIns="0" bIns="0" rtlCol="0" anchor="t"/>
-          <a:lstStyle/>
-          <a:p>
-            <a:pPr indent="0" marL="0">
-              <a:buNone/>
-            </a:pPr>
-            <a:r>
-              <a:rPr lang="en-US" sz="1400" b="1" spc="200" kern="0" dirty="0">
-                <a:solidFill>
-                  <a:schemeClr val="accent1"/>
-                </a:solidFill>
-              </a:rPr>
-              <a:t>KIẾN TRÚC</a:t>
-            </a:r>
-            <a:endParaRPr lang="en-US" sz="1400" dirty="0"/>
-          </a:p>
-        </p:txBody>
-      </p:sp>
-      <p:sp>
-        <p:nvSpPr>
-          <p:cNvPr id="4" name="Tầng Giao diện (Compose)"/>
-          <p:cNvSpPr/>
-          <p:nvPr/>
-        </p:nvSpPr>
-        <p:spPr>
-          <a:xfrm>
-            <a:off x="548640" y="1828800"/>
-            <a:ext cx="4206240" cy="1005840"/>
-          </a:xfrm>
-          <a:prstGeom prst="roundRect">
-            <a:avLst>
-              <a:gd name="adj" fmla="val 10909"/>
-            </a:avLst>
-          </a:prstGeom>
-          <a:solidFill>
-            <a:schemeClr val="accent1"/>
-          </a:solidFill>
-          <a:ln/>
-        </p:spPr>
-      </p:sp>
-      <p:sp>
-        <p:nvSpPr>
-          <p:cNvPr id="5" name="Text 3"/>
-          <p:cNvSpPr txBox="1"/>
-          <p:nvPr/>
-        </p:nvSpPr>
-        <p:spPr>
-          <a:xfrm>
-            <a:off x="777240" y="1828800"/>
-            <a:ext cx="3749040" cy="1005840"/>
-          </a:xfrm>
-          <a:prstGeom prst="rect">
-            <a:avLst/>
-          </a:prstGeom>
-          <a:noFill/>
-          <a:ln/>
-        </p:spPr>
-        <p:txBody>
-          <a:bodyPr wrap="square" lIns="0" tIns="0" rIns="0" bIns="0" rtlCol="0" anchor="ctr"/>
-          <a:lstStyle/>
-          <a:p>
-            <a:pPr indent="0" marL="0">
-              <a:buNone/>
-            </a:pPr>
-            <a:r>
-              <a:rPr lang="en-US" sz="1800" b="1" dirty="0">
-                <a:solidFill>
-                  <a:schemeClr val="bg1"/>
-                </a:solidFill>
-              </a:rPr>
-              <a:t>Giao diện (Compose)</a:t>
-            </a:r>
-            <a:endParaRPr lang="en-US" sz="1500" dirty="0"/>
-          </a:p>
-          <a:p>
-            <a:pPr indent="0" marL="0">
-              <a:buNone/>
-            </a:pPr>
-            <a:r>
-              <a:rPr lang="en-US" sz="1400" dirty="0">
-                <a:solidFill>
-                  <a:schemeClr val="bg1"/>
-                </a:solidFill>
-              </a:rPr>
-              <a:t>Màn hình, Navigation Compose</a:t>
-            </a:r>
-            <a:endParaRPr lang="en-US" sz="1500" dirty="0"/>
           </a:p>
         </p:txBody>
       </p:sp>
       <p:pic>
         <p:nvPicPr>
-          <p:cNvPr id="6" name="Mũi tên tầng 0" descr="gọi xuống">    </p:cNvPr>
+          <p:cNvPr id="3" name="Sơ đồ Use Case phần nhắc hạn và tích hợp" descr="Sơ đồ Use Case phần nhắc hạn và tích hợp">    </p:cNvPr>
           <p:cNvPicPr>
             <a:picLocks noChangeAspect="1"/>
           </p:cNvPicPr>
@@ -11073,8 +13793,8 @@
         </p:blipFill>
         <p:spPr>
           <a:xfrm>
-            <a:off x="2468880" y="2880360"/>
-            <a:ext cx="365760" cy="365760"/>
+            <a:off x="1463040" y="1188720"/>
+            <a:ext cx="9262872" cy="4937760"/>
           </a:xfrm>
           <a:prstGeom prst="rect">
             <a:avLst/>
@@ -11083,36 +13803,14 @@
       </p:pic>
       <p:sp>
         <p:nvSpPr>
-          <p:cNvPr id="7" name="Tầng ViewModel · Repository"/>
-          <p:cNvSpPr/>
-          <p:nvPr/>
-        </p:nvSpPr>
-        <p:spPr>
-          <a:xfrm>
-            <a:off x="548640" y="3291840"/>
-            <a:ext cx="4206240" cy="1005840"/>
-          </a:xfrm>
-          <a:prstGeom prst="roundRect">
-            <a:avLst>
-              <a:gd name="adj" fmla="val 10909"/>
-            </a:avLst>
-          </a:prstGeom>
-          <a:solidFill>
-            <a:schemeClr val="accent6"/>
-          </a:solidFill>
-          <a:ln/>
-        </p:spPr>
-      </p:sp>
-      <p:sp>
-        <p:nvSpPr>
-          <p:cNvPr id="8" name="Text 5"/>
+          <p:cNvPr id="4" name="Text 1"/>
           <p:cNvSpPr txBox="1"/>
           <p:nvPr/>
         </p:nvSpPr>
         <p:spPr>
           <a:xfrm>
-            <a:off x="777240" y="3291840"/>
-            <a:ext cx="3749040" cy="1005840"/>
+            <a:off x="548640" y="6217920"/>
+            <a:ext cx="10424160" cy="365760"/>
           </a:xfrm>
           <a:prstGeom prst="rect">
             <a:avLst/>
@@ -11121,1001 +13819,21 @@
           <a:ln/>
         </p:spPr>
         <p:txBody>
-          <a:bodyPr wrap="square" lIns="0" tIns="0" rIns="0" bIns="0" rtlCol="0" anchor="ctr"/>
+          <a:bodyPr wrap="square" lIns="0" tIns="0" rIns="0" bIns="0" rtlCol="0" anchor="t"/>
           <a:lstStyle/>
           <a:p>
             <a:pPr indent="0" marL="0">
               <a:buNone/>
             </a:pPr>
             <a:r>
-              <a:rPr lang="en-US" sz="1800" b="1" dirty="0">
-                <a:solidFill>
-                  <a:schemeClr val="bg1"/>
-                </a:solidFill>
-              </a:rPr>
-              <a:t>ViewModel · Repository</a:t>
-            </a:r>
-            <a:endParaRPr lang="en-US" sz="1500" dirty="0"/>
-          </a:p>
-          <a:p>
-            <a:pPr indent="0" marL="0">
-              <a:buNone/>
-            </a:pPr>
-            <a:r>
-              <a:rPr lang="en-US" sz="1400" dirty="0">
-                <a:solidFill>
-                  <a:schemeClr val="bg1"/>
-                </a:solidFill>
-              </a:rPr>
-              <a:t>StateFlow, tách UI khỏi dữ liệu</a:t>
-            </a:r>
-            <a:endParaRPr lang="en-US" sz="1500" dirty="0"/>
-          </a:p>
-        </p:txBody>
-      </p:sp>
-      <p:pic>
-        <p:nvPicPr>
-          <p:cNvPr id="9" name="Mũi tên tầng 1" descr="gọi xuống">    </p:cNvPr>
-          <p:cNvPicPr>
-            <a:picLocks noChangeAspect="1"/>
-          </p:cNvPicPr>
-          <p:nvPr/>
-        </p:nvPicPr>
-        <p:blipFill>
-          <a:blip r:embed="rId2"/>
-          <a:stretch>
-            <a:fillRect/>
-          </a:stretch>
-        </p:blipFill>
-        <p:spPr>
-          <a:xfrm>
-            <a:off x="2468880" y="4343400"/>
-            <a:ext cx="365760" cy="365760"/>
-          </a:xfrm>
-          <a:prstGeom prst="rect">
-            <a:avLst/>
-          </a:prstGeom>
-        </p:spPr>
-      </p:pic>
-      <p:sp>
-        <p:nvSpPr>
-          <p:cNvPr id="10" name="Tầng SQLite trên máy"/>
-          <p:cNvSpPr/>
-          <p:nvPr/>
-        </p:nvSpPr>
-        <p:spPr>
-          <a:xfrm>
-            <a:off x="548640" y="4754880"/>
-            <a:ext cx="4206240" cy="1005840"/>
-          </a:xfrm>
-          <a:prstGeom prst="roundRect">
-            <a:avLst>
-              <a:gd name="adj" fmla="val 10909"/>
-            </a:avLst>
-          </a:prstGeom>
-          <a:solidFill>
-            <a:schemeClr val="accent2"/>
-          </a:solidFill>
-          <a:ln/>
-        </p:spPr>
-      </p:sp>
-      <p:sp>
-        <p:nvSpPr>
-          <p:cNvPr id="11" name="Text 7"/>
-          <p:cNvSpPr txBox="1"/>
-          <p:nvPr/>
-        </p:nvSpPr>
-        <p:spPr>
-          <a:xfrm>
-            <a:off x="777240" y="4754880"/>
-            <a:ext cx="3749040" cy="1005840"/>
-          </a:xfrm>
-          <a:prstGeom prst="rect">
-            <a:avLst/>
-          </a:prstGeom>
-          <a:noFill/>
-          <a:ln/>
-        </p:spPr>
-        <p:txBody>
-          <a:bodyPr wrap="square" lIns="0" tIns="0" rIns="0" bIns="0" rtlCol="0" anchor="ctr"/>
-          <a:lstStyle/>
-          <a:p>
-            <a:pPr indent="0" marL="0">
-              <a:buNone/>
-            </a:pPr>
-            <a:r>
-              <a:rPr lang="en-US" sz="1800" b="1" dirty="0">
-                <a:solidFill>
-                  <a:schemeClr val="bg1"/>
-                </a:solidFill>
-              </a:rPr>
-              <a:t>SQLite trên máy</a:t>
-            </a:r>
-            <a:endParaRPr lang="en-US" sz="1500" dirty="0"/>
-          </a:p>
-          <a:p>
-            <a:pPr indent="0" marL="0">
-              <a:buNone/>
-            </a:pPr>
-            <a:r>
-              <a:rPr lang="en-US" sz="1400" dirty="0">
-                <a:solidFill>
-                  <a:schemeClr val="bg1"/>
-                </a:solidFill>
-              </a:rPr>
-              <a:t>SQLiteOpenHelper · SharedPreferences</a:t>
-            </a:r>
-            <a:endParaRPr lang="en-US" sz="1500" dirty="0"/>
-          </a:p>
-        </p:txBody>
-      </p:sp>
-      <p:sp>
-        <p:nvSpPr>
-          <p:cNvPr id="12" name="Thẻ Kotlin, Jetpack Compose"/>
-          <p:cNvSpPr/>
-          <p:nvPr/>
-        </p:nvSpPr>
-        <p:spPr>
-          <a:xfrm>
-            <a:off x="5303520" y="1371600"/>
-            <a:ext cx="3017520" cy="1417320"/>
-          </a:xfrm>
-          <a:prstGeom prst="roundRect">
-            <a:avLst>
-              <a:gd name="adj" fmla="val 7742"/>
-            </a:avLst>
-          </a:prstGeom>
-          <a:solidFill>
-            <a:schemeClr val="bg2"/>
-          </a:solidFill>
-          <a:ln/>
-          <a:effectLst>
-            <a:outerShdw sx="100000" sy="100000" kx="0" ky="0" algn="bl" rotWithShape="0" blurRad="101600" dist="25400" dir="5400000">
-              <a:srgbClr val="2B1B5A">
-                <a:alpha val="12000"/>
-              </a:srgbClr>
-            </a:outerShdw>
-          </a:effectLst>
-        </p:spPr>
-      </p:sp>
-      <p:sp>
-        <p:nvSpPr>
-          <p:cNvPr id="13" name="Kotlin, Jetpack Compose circle"/>
-          <p:cNvSpPr/>
-          <p:nvPr/>
-        </p:nvSpPr>
-        <p:spPr>
-          <a:xfrm>
-            <a:off x="5486400" y="1572768"/>
-            <a:ext cx="502920" cy="502920"/>
-          </a:xfrm>
-          <a:prstGeom prst="ellipse">
-            <a:avLst/>
-          </a:prstGeom>
-          <a:solidFill>
-            <a:schemeClr val="accent1"/>
-          </a:solidFill>
-          <a:ln/>
-        </p:spPr>
-      </p:sp>
-      <p:pic>
-        <p:nvPicPr>
-          <p:cNvPr id="14" name="Kotlin, Jetpack Compose icon" descr="Kotlin, Jetpack Compose">    </p:cNvPr>
-          <p:cNvPicPr>
-            <a:picLocks noChangeAspect="1"/>
-          </p:cNvPicPr>
-          <p:nvPr/>
-        </p:nvPicPr>
-        <p:blipFill>
-          <a:blip r:embed="rId3"/>
-          <a:stretch>
-            <a:fillRect/>
-          </a:stretch>
-        </p:blipFill>
-        <p:spPr>
-          <a:xfrm>
-            <a:off x="5617159" y="1703527"/>
-            <a:ext cx="241402" cy="241402"/>
-          </a:xfrm>
-          <a:prstGeom prst="rect">
-            <a:avLst/>
-          </a:prstGeom>
-        </p:spPr>
-      </p:pic>
-      <p:sp>
-        <p:nvSpPr>
-          <p:cNvPr id="15" name="Text 10"/>
-          <p:cNvSpPr txBox="1"/>
-          <p:nvPr/>
-        </p:nvSpPr>
-        <p:spPr>
-          <a:xfrm>
-            <a:off x="6126480" y="1554480"/>
-            <a:ext cx="2103120" cy="548640"/>
-          </a:xfrm>
-          <a:prstGeom prst="rect">
-            <a:avLst/>
-          </a:prstGeom>
-          <a:noFill/>
-          <a:ln/>
-        </p:spPr>
-        <p:txBody>
-          <a:bodyPr wrap="square" lIns="0" tIns="0" rIns="0" bIns="0" rtlCol="0" anchor="ctr"/>
-          <a:lstStyle/>
-          <a:p>
-            <a:pPr indent="0" marL="0">
-              <a:buNone/>
-            </a:pPr>
-            <a:r>
-              <a:rPr lang="en-US" sz="1500" b="1" dirty="0">
-                <a:solidFill>
-                  <a:schemeClr val="tx2"/>
-                </a:solidFill>
-              </a:rPr>
-              <a:t>Kotlin, Jetpack Compose</a:t>
-            </a:r>
-            <a:endParaRPr lang="en-US" sz="1500" dirty="0"/>
-          </a:p>
-        </p:txBody>
-      </p:sp>
-      <p:sp>
-        <p:nvSpPr>
-          <p:cNvPr id="16" name="Text 11"/>
-          <p:cNvSpPr txBox="1"/>
-          <p:nvPr/>
-        </p:nvSpPr>
-        <p:spPr>
-          <a:xfrm>
-            <a:off x="5486400" y="2148840"/>
-            <a:ext cx="2697480" cy="594360"/>
-          </a:xfrm>
-          <a:prstGeom prst="rect">
-            <a:avLst/>
-          </a:prstGeom>
-          <a:noFill/>
-          <a:ln/>
-        </p:spPr>
-        <p:txBody>
-          <a:bodyPr wrap="square" lIns="0" tIns="0" rIns="0" bIns="0" rtlCol="0" anchor="t"/>
-          <a:lstStyle/>
-          <a:p>
-            <a:pPr indent="0" marL="0">
-              <a:buNone/>
-            </a:pPr>
-            <a:r>
-              <a:rPr lang="en-US" sz="1400" dirty="0">
-                <a:solidFill>
-                  <a:srgbClr val="4A4560"/>
-                </a:solidFill>
-              </a:rPr>
-              <a:t>Android native, Material 3, sáng/tối</a:t>
-            </a:r>
-            <a:endParaRPr lang="en-US" sz="1400" dirty="0"/>
-          </a:p>
-        </p:txBody>
-      </p:sp>
-      <p:sp>
-        <p:nvSpPr>
-          <p:cNvPr id="17" name="Thẻ SQLite"/>
-          <p:cNvSpPr/>
-          <p:nvPr/>
-        </p:nvSpPr>
-        <p:spPr>
-          <a:xfrm>
-            <a:off x="8503920" y="1371600"/>
-            <a:ext cx="3017520" cy="1417320"/>
-          </a:xfrm>
-          <a:prstGeom prst="roundRect">
-            <a:avLst>
-              <a:gd name="adj" fmla="val 7742"/>
-            </a:avLst>
-          </a:prstGeom>
-          <a:solidFill>
-            <a:schemeClr val="bg2"/>
-          </a:solidFill>
-          <a:ln/>
-          <a:effectLst>
-            <a:outerShdw sx="100000" sy="100000" kx="0" ky="0" algn="bl" rotWithShape="0" blurRad="101600" dist="25400" dir="5400000">
-              <a:srgbClr val="2B1B5A">
-                <a:alpha val="12000"/>
-              </a:srgbClr>
-            </a:outerShdw>
-          </a:effectLst>
-        </p:spPr>
-      </p:sp>
-      <p:sp>
-        <p:nvSpPr>
-          <p:cNvPr id="18" name="SQLite circle"/>
-          <p:cNvSpPr/>
-          <p:nvPr/>
-        </p:nvSpPr>
-        <p:spPr>
-          <a:xfrm>
-            <a:off x="8686800" y="1572768"/>
-            <a:ext cx="502920" cy="502920"/>
-          </a:xfrm>
-          <a:prstGeom prst="ellipse">
-            <a:avLst/>
-          </a:prstGeom>
-          <a:solidFill>
-            <a:schemeClr val="accent2"/>
-          </a:solidFill>
-          <a:ln/>
-        </p:spPr>
-      </p:sp>
-      <p:pic>
-        <p:nvPicPr>
-          <p:cNvPr id="19" name="SQLite icon" descr="SQLite">    </p:cNvPr>
-          <p:cNvPicPr>
-            <a:picLocks noChangeAspect="1"/>
-          </p:cNvPicPr>
-          <p:nvPr/>
-        </p:nvPicPr>
-        <p:blipFill>
-          <a:blip r:embed="rId4"/>
-          <a:stretch>
-            <a:fillRect/>
-          </a:stretch>
-        </p:blipFill>
-        <p:spPr>
-          <a:xfrm>
-            <a:off x="8817559" y="1703527"/>
-            <a:ext cx="241402" cy="241402"/>
-          </a:xfrm>
-          <a:prstGeom prst="rect">
-            <a:avLst/>
-          </a:prstGeom>
-        </p:spPr>
-      </p:pic>
-      <p:sp>
-        <p:nvSpPr>
-          <p:cNvPr id="20" name="Text 14"/>
-          <p:cNvSpPr txBox="1"/>
-          <p:nvPr/>
-        </p:nvSpPr>
-        <p:spPr>
-          <a:xfrm>
-            <a:off x="9326880" y="1554480"/>
-            <a:ext cx="2103120" cy="548640"/>
-          </a:xfrm>
-          <a:prstGeom prst="rect">
-            <a:avLst/>
-          </a:prstGeom>
-          <a:noFill/>
-          <a:ln/>
-        </p:spPr>
-        <p:txBody>
-          <a:bodyPr wrap="square" lIns="0" tIns="0" rIns="0" bIns="0" rtlCol="0" anchor="ctr"/>
-          <a:lstStyle/>
-          <a:p>
-            <a:pPr indent="0" marL="0">
-              <a:buNone/>
-            </a:pPr>
-            <a:r>
-              <a:rPr lang="en-US" sz="1500" b="1" dirty="0">
-                <a:solidFill>
-                  <a:schemeClr val="tx2"/>
-                </a:solidFill>
-              </a:rPr>
-              <a:t>SQLite</a:t>
-            </a:r>
-            <a:endParaRPr lang="en-US" sz="1500" dirty="0"/>
-          </a:p>
-        </p:txBody>
-      </p:sp>
-      <p:sp>
-        <p:nvSpPr>
-          <p:cNvPr id="21" name="Text 15"/>
-          <p:cNvSpPr txBox="1"/>
-          <p:nvPr/>
-        </p:nvSpPr>
-        <p:spPr>
-          <a:xfrm>
-            <a:off x="8686800" y="2148840"/>
-            <a:ext cx="2697480" cy="594360"/>
-          </a:xfrm>
-          <a:prstGeom prst="rect">
-            <a:avLst/>
-          </a:prstGeom>
-          <a:noFill/>
-          <a:ln/>
-        </p:spPr>
-        <p:txBody>
-          <a:bodyPr wrap="square" lIns="0" tIns="0" rIns="0" bIns="0" rtlCol="0" anchor="t"/>
-          <a:lstStyle/>
-          <a:p>
-            <a:pPr indent="0" marL="0">
-              <a:buNone/>
-            </a:pPr>
-            <a:r>
-              <a:rPr lang="en-US" sz="1400" dirty="0">
-                <a:solidFill>
-                  <a:srgbClr val="4A4560"/>
-                </a:solidFill>
-              </a:rPr>
-              <a:t>Lưu offline trên máy, không cần server</a:t>
-            </a:r>
-            <a:endParaRPr lang="en-US" sz="1400" dirty="0"/>
-          </a:p>
-        </p:txBody>
-      </p:sp>
-      <p:sp>
-        <p:nvSpPr>
-          <p:cNvPr id="22" name="Thẻ ViewModel, StateFlow"/>
-          <p:cNvSpPr/>
-          <p:nvPr/>
-        </p:nvSpPr>
-        <p:spPr>
-          <a:xfrm>
-            <a:off x="5303520" y="2971800"/>
-            <a:ext cx="3017520" cy="1417320"/>
-          </a:xfrm>
-          <a:prstGeom prst="roundRect">
-            <a:avLst>
-              <a:gd name="adj" fmla="val 7742"/>
-            </a:avLst>
-          </a:prstGeom>
-          <a:solidFill>
-            <a:schemeClr val="bg2"/>
-          </a:solidFill>
-          <a:ln/>
-          <a:effectLst>
-            <a:outerShdw sx="100000" sy="100000" kx="0" ky="0" algn="bl" rotWithShape="0" blurRad="101600" dist="25400" dir="5400000">
-              <a:srgbClr val="2B1B5A">
-                <a:alpha val="12000"/>
-              </a:srgbClr>
-            </a:outerShdw>
-          </a:effectLst>
-        </p:spPr>
-      </p:sp>
-      <p:sp>
-        <p:nvSpPr>
-          <p:cNvPr id="23" name="ViewModel, StateFlow circle"/>
-          <p:cNvSpPr/>
-          <p:nvPr/>
-        </p:nvSpPr>
-        <p:spPr>
-          <a:xfrm>
-            <a:off x="5486400" y="3172968"/>
-            <a:ext cx="502920" cy="502920"/>
-          </a:xfrm>
-          <a:prstGeom prst="ellipse">
-            <a:avLst/>
-          </a:prstGeom>
-          <a:solidFill>
-            <a:schemeClr val="accent3"/>
-          </a:solidFill>
-          <a:ln/>
-        </p:spPr>
-      </p:sp>
-      <p:pic>
-        <p:nvPicPr>
-          <p:cNvPr id="24" name="ViewModel, StateFlow icon" descr="ViewModel, StateFlow">    </p:cNvPr>
-          <p:cNvPicPr>
-            <a:picLocks noChangeAspect="1"/>
-          </p:cNvPicPr>
-          <p:nvPr/>
-        </p:nvPicPr>
-        <p:blipFill>
-          <a:blip r:embed="rId5"/>
-          <a:stretch>
-            <a:fillRect/>
-          </a:stretch>
-        </p:blipFill>
-        <p:spPr>
-          <a:xfrm>
-            <a:off x="5617159" y="3303727"/>
-            <a:ext cx="241402" cy="241402"/>
-          </a:xfrm>
-          <a:prstGeom prst="rect">
-            <a:avLst/>
-          </a:prstGeom>
-        </p:spPr>
-      </p:pic>
-      <p:sp>
-        <p:nvSpPr>
-          <p:cNvPr id="25" name="Text 18"/>
-          <p:cNvSpPr txBox="1"/>
-          <p:nvPr/>
-        </p:nvSpPr>
-        <p:spPr>
-          <a:xfrm>
-            <a:off x="6126480" y="3154680"/>
-            <a:ext cx="2103120" cy="548640"/>
-          </a:xfrm>
-          <a:prstGeom prst="rect">
-            <a:avLst/>
-          </a:prstGeom>
-          <a:noFill/>
-          <a:ln/>
-        </p:spPr>
-        <p:txBody>
-          <a:bodyPr wrap="square" lIns="0" tIns="0" rIns="0" bIns="0" rtlCol="0" anchor="ctr"/>
-          <a:lstStyle/>
-          <a:p>
-            <a:pPr indent="0" marL="0">
-              <a:buNone/>
-            </a:pPr>
-            <a:r>
-              <a:rPr lang="en-US" sz="1500" b="1" dirty="0">
-                <a:solidFill>
-                  <a:schemeClr val="tx2"/>
-                </a:solidFill>
-              </a:rPr>
-              <a:t>ViewModel, StateFlow</a:t>
-            </a:r>
-            <a:endParaRPr lang="en-US" sz="1500" dirty="0"/>
-          </a:p>
-        </p:txBody>
-      </p:sp>
-      <p:sp>
-        <p:nvSpPr>
-          <p:cNvPr id="26" name="Text 19"/>
-          <p:cNvSpPr txBox="1"/>
-          <p:nvPr/>
-        </p:nvSpPr>
-        <p:spPr>
-          <a:xfrm>
-            <a:off x="5486400" y="3749040"/>
-            <a:ext cx="2697480" cy="594360"/>
-          </a:xfrm>
-          <a:prstGeom prst="rect">
-            <a:avLst/>
-          </a:prstGeom>
-          <a:noFill/>
-          <a:ln/>
-        </p:spPr>
-        <p:txBody>
-          <a:bodyPr wrap="square" lIns="0" tIns="0" rIns="0" bIns="0" rtlCol="0" anchor="t"/>
-          <a:lstStyle/>
-          <a:p>
-            <a:pPr indent="0" marL="0">
-              <a:buNone/>
-            </a:pPr>
-            <a:r>
-              <a:rPr lang="en-US" sz="1400" dirty="0">
-                <a:solidFill>
-                  <a:srgbClr val="4A4560"/>
-                </a:solidFill>
-              </a:rPr>
-              <a:t>Quản lý trạng thái, Repository pattern</a:t>
-            </a:r>
-            <a:endParaRPr lang="en-US" sz="1400" dirty="0"/>
-          </a:p>
-        </p:txBody>
-      </p:sp>
-      <p:sp>
-        <p:nvSpPr>
-          <p:cNvPr id="27" name="Thẻ WorkManager"/>
-          <p:cNvSpPr/>
-          <p:nvPr/>
-        </p:nvSpPr>
-        <p:spPr>
-          <a:xfrm>
-            <a:off x="8503920" y="2971800"/>
-            <a:ext cx="3017520" cy="1417320"/>
-          </a:xfrm>
-          <a:prstGeom prst="roundRect">
-            <a:avLst>
-              <a:gd name="adj" fmla="val 7742"/>
-            </a:avLst>
-          </a:prstGeom>
-          <a:solidFill>
-            <a:schemeClr val="bg2"/>
-          </a:solidFill>
-          <a:ln/>
-          <a:effectLst>
-            <a:outerShdw sx="100000" sy="100000" kx="0" ky="0" algn="bl" rotWithShape="0" blurRad="101600" dist="25400" dir="5400000">
-              <a:srgbClr val="2B1B5A">
-                <a:alpha val="12000"/>
-              </a:srgbClr>
-            </a:outerShdw>
-          </a:effectLst>
-        </p:spPr>
-      </p:sp>
-      <p:sp>
-        <p:nvSpPr>
-          <p:cNvPr id="28" name="WorkManager circle"/>
-          <p:cNvSpPr/>
-          <p:nvPr/>
-        </p:nvSpPr>
-        <p:spPr>
-          <a:xfrm>
-            <a:off x="8686800" y="3172968"/>
-            <a:ext cx="502920" cy="502920"/>
-          </a:xfrm>
-          <a:prstGeom prst="ellipse">
-            <a:avLst/>
-          </a:prstGeom>
-          <a:solidFill>
-            <a:schemeClr val="accent4"/>
-          </a:solidFill>
-          <a:ln/>
-        </p:spPr>
-      </p:sp>
-      <p:pic>
-        <p:nvPicPr>
-          <p:cNvPr id="29" name="WorkManager icon" descr="WorkManager">    </p:cNvPr>
-          <p:cNvPicPr>
-            <a:picLocks noChangeAspect="1"/>
-          </p:cNvPicPr>
-          <p:nvPr/>
-        </p:nvPicPr>
-        <p:blipFill>
-          <a:blip r:embed="rId6"/>
-          <a:stretch>
-            <a:fillRect/>
-          </a:stretch>
-        </p:blipFill>
-        <p:spPr>
-          <a:xfrm>
-            <a:off x="8817559" y="3303727"/>
-            <a:ext cx="241402" cy="241402"/>
-          </a:xfrm>
-          <a:prstGeom prst="rect">
-            <a:avLst/>
-          </a:prstGeom>
-        </p:spPr>
-      </p:pic>
-      <p:sp>
-        <p:nvSpPr>
-          <p:cNvPr id="30" name="Text 22"/>
-          <p:cNvSpPr txBox="1"/>
-          <p:nvPr/>
-        </p:nvSpPr>
-        <p:spPr>
-          <a:xfrm>
-            <a:off x="9326880" y="3154680"/>
-            <a:ext cx="2103120" cy="548640"/>
-          </a:xfrm>
-          <a:prstGeom prst="rect">
-            <a:avLst/>
-          </a:prstGeom>
-          <a:noFill/>
-          <a:ln/>
-        </p:spPr>
-        <p:txBody>
-          <a:bodyPr wrap="square" lIns="0" tIns="0" rIns="0" bIns="0" rtlCol="0" anchor="ctr"/>
-          <a:lstStyle/>
-          <a:p>
-            <a:pPr indent="0" marL="0">
-              <a:buNone/>
-            </a:pPr>
-            <a:r>
-              <a:rPr lang="en-US" sz="1500" b="1" dirty="0">
-                <a:solidFill>
-                  <a:schemeClr val="tx2"/>
-                </a:solidFill>
-              </a:rPr>
-              <a:t>WorkManager</a:t>
-            </a:r>
-            <a:endParaRPr lang="en-US" sz="1500" dirty="0"/>
-          </a:p>
-        </p:txBody>
-      </p:sp>
-      <p:sp>
-        <p:nvSpPr>
-          <p:cNvPr id="31" name="Text 23"/>
-          <p:cNvSpPr txBox="1"/>
-          <p:nvPr/>
-        </p:nvSpPr>
-        <p:spPr>
-          <a:xfrm>
-            <a:off x="8686800" y="3749040"/>
-            <a:ext cx="2697480" cy="594360"/>
-          </a:xfrm>
-          <a:prstGeom prst="rect">
-            <a:avLst/>
-          </a:prstGeom>
-          <a:noFill/>
-          <a:ln/>
-        </p:spPr>
-        <p:txBody>
-          <a:bodyPr wrap="square" lIns="0" tIns="0" rIns="0" bIns="0" rtlCol="0" anchor="t"/>
-          <a:lstStyle/>
-          <a:p>
-            <a:pPr indent="0" marL="0">
-              <a:buNone/>
-            </a:pPr>
-            <a:r>
-              <a:rPr lang="en-US" sz="1400" dirty="0">
-                <a:solidFill>
-                  <a:srgbClr val="4A4560"/>
-                </a:solidFill>
-              </a:rPr>
-              <a:t>Kiểm tra hằng ngày, thông báo nhắc hạn</a:t>
-            </a:r>
-            <a:endParaRPr lang="en-US" sz="1400" dirty="0"/>
-          </a:p>
-        </p:txBody>
-      </p:sp>
-      <p:sp>
-        <p:nvSpPr>
-          <p:cNvPr id="32" name="Thẻ Compose Canvas"/>
-          <p:cNvSpPr/>
-          <p:nvPr/>
-        </p:nvSpPr>
-        <p:spPr>
-          <a:xfrm>
-            <a:off x="5303520" y="4572000"/>
-            <a:ext cx="3017520" cy="1417320"/>
-          </a:xfrm>
-          <a:prstGeom prst="roundRect">
-            <a:avLst>
-              <a:gd name="adj" fmla="val 7742"/>
-            </a:avLst>
-          </a:prstGeom>
-          <a:solidFill>
-            <a:schemeClr val="bg2"/>
-          </a:solidFill>
-          <a:ln/>
-          <a:effectLst>
-            <a:outerShdw sx="100000" sy="100000" kx="0" ky="0" algn="bl" rotWithShape="0" blurRad="101600" dist="25400" dir="5400000">
-              <a:srgbClr val="2B1B5A">
-                <a:alpha val="12000"/>
-              </a:srgbClr>
-            </a:outerShdw>
-          </a:effectLst>
-        </p:spPr>
-      </p:sp>
-      <p:sp>
-        <p:nvSpPr>
-          <p:cNvPr id="33" name="Compose Canvas circle"/>
-          <p:cNvSpPr/>
-          <p:nvPr/>
-        </p:nvSpPr>
-        <p:spPr>
-          <a:xfrm>
-            <a:off x="5486400" y="4773168"/>
-            <a:ext cx="502920" cy="502920"/>
-          </a:xfrm>
-          <a:prstGeom prst="ellipse">
-            <a:avLst/>
-          </a:prstGeom>
-          <a:solidFill>
-            <a:schemeClr val="accent5"/>
-          </a:solidFill>
-          <a:ln/>
-        </p:spPr>
-      </p:sp>
-      <p:pic>
-        <p:nvPicPr>
-          <p:cNvPr id="34" name="Compose Canvas icon" descr="Compose Canvas">    </p:cNvPr>
-          <p:cNvPicPr>
-            <a:picLocks noChangeAspect="1"/>
-          </p:cNvPicPr>
-          <p:nvPr/>
-        </p:nvPicPr>
-        <p:blipFill>
-          <a:blip r:embed="rId7"/>
-          <a:stretch>
-            <a:fillRect/>
-          </a:stretch>
-        </p:blipFill>
-        <p:spPr>
-          <a:xfrm>
-            <a:off x="5617159" y="4903927"/>
-            <a:ext cx="241402" cy="241402"/>
-          </a:xfrm>
-          <a:prstGeom prst="rect">
-            <a:avLst/>
-          </a:prstGeom>
-        </p:spPr>
-      </p:pic>
-      <p:sp>
-        <p:nvSpPr>
-          <p:cNvPr id="35" name="Text 26"/>
-          <p:cNvSpPr txBox="1"/>
-          <p:nvPr/>
-        </p:nvSpPr>
-        <p:spPr>
-          <a:xfrm>
-            <a:off x="6126480" y="4754880"/>
-            <a:ext cx="2103120" cy="548640"/>
-          </a:xfrm>
-          <a:prstGeom prst="rect">
-            <a:avLst/>
-          </a:prstGeom>
-          <a:noFill/>
-          <a:ln/>
-        </p:spPr>
-        <p:txBody>
-          <a:bodyPr wrap="square" lIns="0" tIns="0" rIns="0" bIns="0" rtlCol="0" anchor="ctr"/>
-          <a:lstStyle/>
-          <a:p>
-            <a:pPr indent="0" marL="0">
-              <a:buNone/>
-            </a:pPr>
-            <a:r>
-              <a:rPr lang="en-US" sz="1500" b="1" dirty="0">
-                <a:solidFill>
-                  <a:schemeClr val="tx2"/>
-                </a:solidFill>
-              </a:rPr>
-              <a:t>Compose Canvas</a:t>
-            </a:r>
-            <a:endParaRPr lang="en-US" sz="1500" dirty="0"/>
-          </a:p>
-        </p:txBody>
-      </p:sp>
-      <p:sp>
-        <p:nvSpPr>
-          <p:cNvPr id="36" name="Text 27"/>
-          <p:cNvSpPr txBox="1"/>
-          <p:nvPr/>
-        </p:nvSpPr>
-        <p:spPr>
-          <a:xfrm>
-            <a:off x="5486400" y="5349240"/>
-            <a:ext cx="2697480" cy="594360"/>
-          </a:xfrm>
-          <a:prstGeom prst="rect">
-            <a:avLst/>
-          </a:prstGeom>
-          <a:noFill/>
-          <a:ln/>
-        </p:spPr>
-        <p:txBody>
-          <a:bodyPr wrap="square" lIns="0" tIns="0" rIns="0" bIns="0" rtlCol="0" anchor="t"/>
-          <a:lstStyle/>
-          <a:p>
-            <a:pPr indent="0" marL="0">
-              <a:buNone/>
-            </a:pPr>
-            <a:r>
-              <a:rPr lang="en-US" sz="1400" dirty="0">
-                <a:solidFill>
-                  <a:srgbClr val="4A4560"/>
-                </a:solidFill>
-              </a:rPr>
-              <a:t>Tự vẽ biểu đồ tròn, không cần thư viện</a:t>
-            </a:r>
-            <a:endParaRPr lang="en-US" sz="1400" dirty="0"/>
-          </a:p>
-        </p:txBody>
-      </p:sp>
-      <p:sp>
-        <p:nvSpPr>
-          <p:cNvPr id="37" name="Thẻ Gradle, JUnit, GitHub"/>
-          <p:cNvSpPr/>
-          <p:nvPr/>
-        </p:nvSpPr>
-        <p:spPr>
-          <a:xfrm>
-            <a:off x="8503920" y="4572000"/>
-            <a:ext cx="3017520" cy="1417320"/>
-          </a:xfrm>
-          <a:prstGeom prst="roundRect">
-            <a:avLst>
-              <a:gd name="adj" fmla="val 7742"/>
-            </a:avLst>
-          </a:prstGeom>
-          <a:solidFill>
-            <a:schemeClr val="bg2"/>
-          </a:solidFill>
-          <a:ln/>
-          <a:effectLst>
-            <a:outerShdw sx="100000" sy="100000" kx="0" ky="0" algn="bl" rotWithShape="0" blurRad="101600" dist="25400" dir="5400000">
-              <a:srgbClr val="2B1B5A">
-                <a:alpha val="12000"/>
-              </a:srgbClr>
-            </a:outerShdw>
-          </a:effectLst>
-        </p:spPr>
-      </p:sp>
-      <p:sp>
-        <p:nvSpPr>
-          <p:cNvPr id="38" name="Gradle, JUnit, GitHub circle"/>
-          <p:cNvSpPr/>
-          <p:nvPr/>
-        </p:nvSpPr>
-        <p:spPr>
-          <a:xfrm>
-            <a:off x="8686800" y="4773168"/>
-            <a:ext cx="502920" cy="502920"/>
-          </a:xfrm>
-          <a:prstGeom prst="ellipse">
-            <a:avLst/>
-          </a:prstGeom>
-          <a:solidFill>
-            <a:schemeClr val="accent6"/>
-          </a:solidFill>
-          <a:ln/>
-        </p:spPr>
-      </p:sp>
-      <p:pic>
-        <p:nvPicPr>
-          <p:cNvPr id="39" name="Gradle, JUnit, GitHub icon" descr="Gradle, JUnit, GitHub">    </p:cNvPr>
-          <p:cNvPicPr>
-            <a:picLocks noChangeAspect="1"/>
-          </p:cNvPicPr>
-          <p:nvPr/>
-        </p:nvPicPr>
-        <p:blipFill>
-          <a:blip r:embed="rId8"/>
-          <a:stretch>
-            <a:fillRect/>
-          </a:stretch>
-        </p:blipFill>
-        <p:spPr>
-          <a:xfrm>
-            <a:off x="8817559" y="4903927"/>
-            <a:ext cx="241402" cy="241402"/>
-          </a:xfrm>
-          <a:prstGeom prst="rect">
-            <a:avLst/>
-          </a:prstGeom>
-        </p:spPr>
-      </p:pic>
-      <p:sp>
-        <p:nvSpPr>
-          <p:cNvPr id="40" name="Text 30"/>
-          <p:cNvSpPr txBox="1"/>
-          <p:nvPr/>
-        </p:nvSpPr>
-        <p:spPr>
-          <a:xfrm>
-            <a:off x="9326880" y="4754880"/>
-            <a:ext cx="2103120" cy="548640"/>
-          </a:xfrm>
-          <a:prstGeom prst="rect">
-            <a:avLst/>
-          </a:prstGeom>
-          <a:noFill/>
-          <a:ln/>
-        </p:spPr>
-        <p:txBody>
-          <a:bodyPr wrap="square" lIns="0" tIns="0" rIns="0" bIns="0" rtlCol="0" anchor="ctr"/>
-          <a:lstStyle/>
-          <a:p>
-            <a:pPr indent="0" marL="0">
-              <a:buNone/>
-            </a:pPr>
-            <a:r>
-              <a:rPr lang="en-US" sz="1500" b="1" dirty="0">
-                <a:solidFill>
-                  <a:schemeClr val="tx2"/>
-                </a:solidFill>
-              </a:rPr>
-              <a:t>Gradle, JUnit, GitHub</a:t>
-            </a:r>
-            <a:endParaRPr lang="en-US" sz="1500" dirty="0"/>
-          </a:p>
-        </p:txBody>
-      </p:sp>
-      <p:sp>
-        <p:nvSpPr>
-          <p:cNvPr id="41" name="Text 31"/>
-          <p:cNvSpPr txBox="1"/>
-          <p:nvPr/>
-        </p:nvSpPr>
-        <p:spPr>
-          <a:xfrm>
-            <a:off x="8686800" y="5349240"/>
-            <a:ext cx="2697480" cy="594360"/>
-          </a:xfrm>
-          <a:prstGeom prst="rect">
-            <a:avLst/>
-          </a:prstGeom>
-          <a:noFill/>
-          <a:ln/>
-        </p:spPr>
-        <p:txBody>
-          <a:bodyPr wrap="square" lIns="0" tIns="0" rIns="0" bIns="0" rtlCol="0" anchor="t"/>
-          <a:lstStyle/>
-          <a:p>
-            <a:pPr indent="0" marL="0">
-              <a:buNone/>
-            </a:pPr>
-            <a:r>
-              <a:rPr lang="en-US" sz="1400" dirty="0">
-                <a:solidFill>
-                  <a:srgbClr val="4A4560"/>
-                </a:solidFill>
-              </a:rPr>
-              <a:t>AGP 9.3, unit test, quản lý mã nguồn</a:t>
-            </a:r>
-            <a:endParaRPr lang="en-US" sz="1400" dirty="0"/>
+              <a:rPr lang="en-US" sz="1200" i="1" dirty="0">
+                <a:solidFill>
+                  <a:srgbClr val="6E6888"/>
+                </a:solidFill>
+              </a:rPr>
+              <a:t>UC08 chỉ lưu cấu hình nhắc; UC14 do tác vụ kiểm tra của SubTrack kích hoạt. UC15 (đăng nhập, đồng bộ) là hướng phát triển. Đặc tả chi tiết: UseCase_SubTrack.docx.</a:t>
+            </a:r>
+            <a:endParaRPr lang="en-US" sz="1200" dirty="0"/>
           </a:p>
         </p:txBody>
       </p:sp>
